--- a/static/ppts/G6_Sci_T2_Separating_Mixtures.pptx
+++ b/static/ppts/G6_Sci_T2_Separating_Mixtures.pptx
@@ -9,11 +9,9 @@
     <p:sldId id="257" r:id="rId3"/>
     <p:sldId id="258" r:id="rId4"/>
     <p:sldId id="259" r:id="rId5"/>
-    <p:sldId id="260" r:id="rId6"/>
-    <p:sldId id="261" r:id="rId7"/>
   </p:sldIdLst>
   <p:notesMasterIdLst>
-    <p:notesMasterId r:id="rId8"/>
+    <p:notesMasterId r:id="rId6"/>
   </p:notesMasterIdLst>
   <p:sldSz cx="9144000" cy="5143500"/>
   <p:notesSz cx="5143500" cy="9144000"/>
@@ -813,182 +811,6 @@
 </p:notes>
 </file>
 
-<file path=ppt/notesSlides/notesSlide5.xml><?xml version="1.0" encoding="utf-8"?>
-<p:notes xmlns:a="http://schemas.openxmlformats.org/drawingml/2006/main" xmlns:r="http://schemas.openxmlformats.org/officeDocument/2006/relationships" xmlns:p="http://schemas.openxmlformats.org/presentationml/2006/main">
-  <p:cSld>
-    <p:spTree>
-      <p:nvGrpSpPr>
-        <p:cNvPr id="1" name=""/>
-        <p:cNvGrpSpPr/>
-        <p:nvPr/>
-      </p:nvGrpSpPr>
-      <p:grpSpPr>
-        <a:xfrm>
-          <a:off x="0" y="0"/>
-          <a:ext cx="0" cy="0"/>
-          <a:chOff x="0" y="0"/>
-          <a:chExt cx="0" cy="0"/>
-        </a:xfrm>
-      </p:grpSpPr>
-      <p:sp>
-        <p:nvSpPr>
-          <p:cNvPr id="2" name="Slide Image Placeholder 1"/>
-          <p:cNvSpPr>
-            <a:spLocks noGrp="1" noRot="1" noChangeAspect="1"/>
-          </p:cNvSpPr>
-          <p:nvPr>
-            <p:ph type="sldImg"/>
-          </p:nvPr>
-        </p:nvSpPr>
-        <p:spPr/>
-      </p:sp>
-      <p:sp>
-        <p:nvSpPr>
-          <p:cNvPr id="3" name="Notes Placeholder 2"/>
-          <p:cNvSpPr>
-            <a:spLocks noGrp="1"/>
-          </p:cNvSpPr>
-          <p:nvPr>
-            <p:ph type="body" idx="1"/>
-          </p:nvPr>
-        </p:nvSpPr>
-        <p:spPr/>
-        <p:txBody>
-          <a:bodyPr/>
-          <a:lstStyle/>
-          <a:p>
-            <a:r>
-              <a:rPr lang="en-US" dirty="0"/>
-              <a:t/>
-            </a:r>
-            <a:endParaRPr lang="en-US" dirty="0"/>
-          </a:p>
-        </p:txBody>
-      </p:sp>
-      <p:sp>
-        <p:nvSpPr>
-          <p:cNvPr id="4" name="Slide Number Placeholder 3"/>
-          <p:cNvSpPr>
-            <a:spLocks noGrp="1"/>
-          </p:cNvSpPr>
-          <p:nvPr>
-            <p:ph type="sldNum" sz="quarter" idx="10"/>
-          </p:nvPr>
-        </p:nvSpPr>
-        <p:spPr/>
-        <p:txBody>
-          <a:bodyPr/>
-          <a:lstStyle/>
-          <a:p>
-            <a:fld id="{F7021451-1387-4CA6-816F-3879F97B5CBC}" type="slidenum">
-              <a:rPr lang="en-US"/>
-              <a:t>5</a:t>
-            </a:fld>
-            <a:endParaRPr lang="en-US"/>
-          </a:p>
-        </p:txBody>
-      </p:sp>
-    </p:spTree>
-    <p:extLst>
-      <p:ext uri="{BB962C8B-B14F-4D97-AF65-F5344CB8AC3E}">
-        <p14:creationId xmlns:p14="http://schemas.microsoft.com/office/powerpoint/2010/main" val="1024086991"/>
-      </p:ext>
-    </p:extLst>
-  </p:cSld>
-  <p:clrMapOvr>
-    <a:masterClrMapping/>
-  </p:clrMapOvr>
-</p:notes>
-</file>
-
-<file path=ppt/notesSlides/notesSlide6.xml><?xml version="1.0" encoding="utf-8"?>
-<p:notes xmlns:a="http://schemas.openxmlformats.org/drawingml/2006/main" xmlns:r="http://schemas.openxmlformats.org/officeDocument/2006/relationships" xmlns:p="http://schemas.openxmlformats.org/presentationml/2006/main">
-  <p:cSld>
-    <p:spTree>
-      <p:nvGrpSpPr>
-        <p:cNvPr id="1" name=""/>
-        <p:cNvGrpSpPr/>
-        <p:nvPr/>
-      </p:nvGrpSpPr>
-      <p:grpSpPr>
-        <a:xfrm>
-          <a:off x="0" y="0"/>
-          <a:ext cx="0" cy="0"/>
-          <a:chOff x="0" y="0"/>
-          <a:chExt cx="0" cy="0"/>
-        </a:xfrm>
-      </p:grpSpPr>
-      <p:sp>
-        <p:nvSpPr>
-          <p:cNvPr id="2" name="Slide Image Placeholder 1"/>
-          <p:cNvSpPr>
-            <a:spLocks noGrp="1" noRot="1" noChangeAspect="1"/>
-          </p:cNvSpPr>
-          <p:nvPr>
-            <p:ph type="sldImg"/>
-          </p:nvPr>
-        </p:nvSpPr>
-        <p:spPr/>
-      </p:sp>
-      <p:sp>
-        <p:nvSpPr>
-          <p:cNvPr id="3" name="Notes Placeholder 2"/>
-          <p:cNvSpPr>
-            <a:spLocks noGrp="1"/>
-          </p:cNvSpPr>
-          <p:nvPr>
-            <p:ph type="body" idx="1"/>
-          </p:nvPr>
-        </p:nvSpPr>
-        <p:spPr/>
-        <p:txBody>
-          <a:bodyPr/>
-          <a:lstStyle/>
-          <a:p>
-            <a:r>
-              <a:rPr lang="en-US" dirty="0"/>
-              <a:t/>
-            </a:r>
-            <a:endParaRPr lang="en-US" dirty="0"/>
-          </a:p>
-        </p:txBody>
-      </p:sp>
-      <p:sp>
-        <p:nvSpPr>
-          <p:cNvPr id="4" name="Slide Number Placeholder 3"/>
-          <p:cNvSpPr>
-            <a:spLocks noGrp="1"/>
-          </p:cNvSpPr>
-          <p:nvPr>
-            <p:ph type="sldNum" sz="quarter" idx="10"/>
-          </p:nvPr>
-        </p:nvSpPr>
-        <p:spPr/>
-        <p:txBody>
-          <a:bodyPr/>
-          <a:lstStyle/>
-          <a:p>
-            <a:fld id="{F7021451-1387-4CA6-816F-3879F97B5CBC}" type="slidenum">
-              <a:rPr lang="en-US"/>
-              <a:t>6</a:t>
-            </a:fld>
-            <a:endParaRPr lang="en-US"/>
-          </a:p>
-        </p:txBody>
-      </p:sp>
-    </p:spTree>
-    <p:extLst>
-      <p:ext uri="{BB962C8B-B14F-4D97-AF65-F5344CB8AC3E}">
-        <p14:creationId xmlns:p14="http://schemas.microsoft.com/office/powerpoint/2010/main" val="1024086991"/>
-      </p:ext>
-    </p:extLst>
-  </p:cSld>
-  <p:clrMapOvr>
-    <a:masterClrMapping/>
-  </p:clrMapOvr>
-</p:notes>
-</file>
-
 <file path=ppt/slideLayouts/slideLayout1.xml><?xml version="1.0" encoding="utf-8"?>
 <p:sldLayout xmlns:a="http://schemas.openxmlformats.org/drawingml/2006/main" xmlns:r="http://schemas.openxmlformats.org/officeDocument/2006/relationships" xmlns:p="http://schemas.openxmlformats.org/presentationml/2006/main" preserve="1">
   <p:cSld name="DEFAULT">
@@ -1302,7 +1124,7 @@
     <p:bg>
       <p:bgPr>
         <a:solidFill>
-          <a:srgbClr val="7C3AED"/>
+          <a:srgbClr val="1B2A4A"/>
         </a:solidFill>
       </p:bgPr>
     </p:bg>
@@ -1322,14 +1144,34 @@
       </p:grpSpPr>
       <p:sp>
         <p:nvSpPr>
-          <p:cNvPr id="2" name="Text 0"/>
+          <p:cNvPr id="2" name="Shape 0"/>
           <p:cNvSpPr/>
           <p:nvPr/>
         </p:nvSpPr>
         <p:spPr>
           <a:xfrm>
-            <a:off x="731520" y="1371600"/>
-            <a:ext cx="7680960" cy="1371600"/>
+            <a:off x="0" y="0"/>
+            <a:ext cx="109728" cy="5143500"/>
+          </a:xfrm>
+          <a:prstGeom prst="rect">
+            <a:avLst/>
+          </a:prstGeom>
+          <a:solidFill>
+            <a:srgbClr val="2A9D8F"/>
+          </a:solidFill>
+          <a:ln/>
+        </p:spPr>
+      </p:sp>
+      <p:sp>
+        <p:nvSpPr>
+          <p:cNvPr id="3" name="Text 1"/>
+          <p:cNvSpPr/>
+          <p:nvPr/>
+        </p:nvSpPr>
+        <p:spPr>
+          <a:xfrm>
+            <a:off x="731520" y="1280160"/>
+            <a:ext cx="7772400" cy="1371600"/>
           </a:xfrm>
           <a:prstGeom prst="rect">
             <a:avLst/>
@@ -1345,30 +1187,69 @@
               <a:buNone/>
             </a:pPr>
             <a:r>
-              <a:rPr lang="en-US" sz="4000" b="1" dirty="0">
+              <a:rPr lang="en-US" sz="3600" b="1" dirty="0">
                 <a:solidFill>
                   <a:srgbClr val="FFFFFF"/>
+                </a:solidFill>
+                <a:latin typeface="Georgia" pitchFamily="34" charset="0"/>
+                <a:ea typeface="Georgia" pitchFamily="34" charset="-122"/>
+                <a:cs typeface="Georgia" pitchFamily="34" charset="-120"/>
+              </a:rPr>
+              <a:t>Separating Mixtures</a:t>
+            </a:r>
+            <a:endParaRPr lang="en-US" sz="3600" dirty="0"/>
+          </a:p>
+        </p:txBody>
+      </p:sp>
+      <p:sp>
+        <p:nvSpPr>
+          <p:cNvPr id="4" name="Text 2"/>
+          <p:cNvSpPr/>
+          <p:nvPr/>
+        </p:nvSpPr>
+        <p:spPr>
+          <a:xfrm>
+            <a:off x="731520" y="2743200"/>
+            <a:ext cx="7772400" cy="548640"/>
+          </a:xfrm>
+          <a:prstGeom prst="rect">
+            <a:avLst/>
+          </a:prstGeom>
+          <a:noFill/>
+          <a:ln/>
+        </p:spPr>
+        <p:txBody>
+          <a:bodyPr wrap="square" rtlCol="0" anchor="ctr"/>
+          <a:lstStyle/>
+          <a:p>
+            <a:pPr indent="0" marL="0">
+              <a:buNone/>
+            </a:pPr>
+            <a:r>
+              <a:rPr lang="en-US" sz="1600" dirty="0">
+                <a:solidFill>
+                  <a:srgbClr val="9B9690"/>
                 </a:solidFill>
                 <a:latin typeface="Calibri" pitchFamily="34" charset="0"/>
                 <a:ea typeface="Calibri" pitchFamily="34" charset="-122"/>
                 <a:cs typeface="Calibri" pitchFamily="34" charset="-120"/>
               </a:rPr>
-              <a:t>Separating Mixtures</a:t>
-            </a:r>
-            <a:endParaRPr lang="en-US" sz="4000" dirty="0"/>
-          </a:p>
-        </p:txBody>
-      </p:sp>
-      <p:sp>
-        <p:nvSpPr>
-          <p:cNvPr id="3" name="Text 1"/>
+              <a:t>G6 Science · Chemistry</a:t>
+            </a:r>
+            <a:endParaRPr lang="en-US" sz="1600" dirty="0"/>
+          </a:p>
+        </p:txBody>
+      </p:sp>
+      <p:sp>
+        <p:nvSpPr>
+          <p:cNvPr id="5" name="Text 3"/>
           <p:cNvSpPr/>
           <p:nvPr/>
         </p:nvSpPr>
         <p:spPr>
           <a:xfrm>
-            <a:off x="731520" y="2926080"/>
-            <a:ext cx="7680960" cy="548640"/>
+            <a:off x="731520" y="4389120"/>
+            <a:ext cx="7772400" cy="457200"/>
           </a:xfrm>
           <a:prstGeom prst="rect">
             <a:avLst/>
@@ -1384,17 +1265,17 @@
               <a:buNone/>
             </a:pPr>
             <a:r>
-              <a:rPr lang="en-US" sz="1600" i="1" dirty="0">
-                <a:solidFill>
-                  <a:srgbClr val="FFFFFF"/>
+              <a:rPr lang="en-US" sz="1000" dirty="0">
+                <a:solidFill>
+                  <a:srgbClr val="6B6660"/>
                 </a:solidFill>
                 <a:latin typeface="Calibri" pitchFamily="34" charset="0"/>
                 <a:ea typeface="Calibri" pitchFamily="34" charset="-122"/>
                 <a:cs typeface="Calibri" pitchFamily="34" charset="-120"/>
               </a:rPr>
-              <a:t>Grade 6 Science · Mr Zocchi</a:t>
-            </a:r>
-            <a:endParaRPr lang="en-US" sz="1600" dirty="0"/>
+              <a:t>Mr Zocchi · mrzocchi.com</a:t>
+            </a:r>
+            <a:endParaRPr lang="en-US" sz="1000" dirty="0"/>
           </a:p>
         </p:txBody>
       </p:sp>
@@ -1409,6 +1290,13 @@
 <file path=ppt/slides/slide2.xml><?xml version="1.0" encoding="utf-8"?>
 <p:sld xmlns:a="http://schemas.openxmlformats.org/drawingml/2006/main" xmlns:r="http://schemas.openxmlformats.org/officeDocument/2006/relationships" xmlns:p="http://schemas.openxmlformats.org/presentationml/2006/main">
   <p:cSld name="Slide 2">
+    <p:bg>
+      <p:bgPr>
+        <a:solidFill>
+          <a:srgbClr val="FFFFFF"/>
+        </a:solidFill>
+      </p:bgPr>
+    </p:bg>
     <p:spTree>
       <p:nvGrpSpPr>
         <p:cNvPr id="1" name=""/>
@@ -1432,13 +1320,13 @@
         <p:spPr>
           <a:xfrm>
             <a:off x="0" y="0"/>
-            <a:ext cx="9144000" cy="548640"/>
-          </a:xfrm>
-          <a:prstGeom prst="rect">
-            <a:avLst/>
-          </a:prstGeom>
-          <a:solidFill>
-            <a:srgbClr val="7C3AED"/>
+            <a:ext cx="9144000" cy="54864"/>
+          </a:xfrm>
+          <a:prstGeom prst="rect">
+            <a:avLst/>
+          </a:prstGeom>
+          <a:solidFill>
+            <a:srgbClr val="2A9D8F"/>
           </a:solidFill>
           <a:ln/>
         </p:spPr>
@@ -1451,8 +1339,8 @@
         </p:nvSpPr>
         <p:spPr>
           <a:xfrm>
-            <a:off x="457200" y="45720"/>
-            <a:ext cx="8229600" cy="457200"/>
+            <a:off x="548640" y="274320"/>
+            <a:ext cx="8046720" cy="640080"/>
           </a:xfrm>
           <a:prstGeom prst="rect">
             <a:avLst/>
@@ -1461,125 +1349,207 @@
           <a:ln/>
         </p:spPr>
         <p:txBody>
-          <a:bodyPr wrap="square" rtlCol="0" anchor="ctr"/>
+          <a:bodyPr wrap="square" lIns="0" tIns="0" rIns="0" bIns="0" rtlCol="0" anchor="ctr"/>
           <a:lstStyle/>
           <a:p>
             <a:pPr indent="0" marL="0">
               <a:buNone/>
             </a:pPr>
             <a:r>
-              <a:rPr lang="en-US" sz="1800" b="1" dirty="0">
-                <a:solidFill>
-                  <a:srgbClr val="FFFFFF"/>
+              <a:rPr lang="en-US" sz="2600" b="1" dirty="0">
+                <a:solidFill>
+                  <a:srgbClr val="1B2A4A"/>
+                </a:solidFill>
+                <a:latin typeface="Georgia" pitchFamily="34" charset="0"/>
+                <a:ea typeface="Georgia" pitchFamily="34" charset="-122"/>
+                <a:cs typeface="Georgia" pitchFamily="34" charset="-120"/>
+              </a:rPr>
+              <a:t>Separation Techniques</a:t>
+            </a:r>
+            <a:endParaRPr lang="en-US" sz="2600" dirty="0"/>
+          </a:p>
+        </p:txBody>
+      </p:sp>
+      <p:sp>
+        <p:nvSpPr>
+          <p:cNvPr id="4" name="Text 2"/>
+          <p:cNvSpPr/>
+          <p:nvPr/>
+        </p:nvSpPr>
+        <p:spPr>
+          <a:xfrm>
+            <a:off x="548640" y="1097280"/>
+            <a:ext cx="8046720" cy="3474720"/>
+          </a:xfrm>
+          <a:prstGeom prst="rect">
+            <a:avLst/>
+          </a:prstGeom>
+          <a:noFill/>
+          <a:ln/>
+        </p:spPr>
+        <p:txBody>
+          <a:bodyPr wrap="square" rtlCol="0" anchor="t"/>
+          <a:lstStyle/>
+          <a:p>
+            <a:pPr marL="342900" indent="-342900">
+              <a:spcAft>
+                <a:spcPts val="800"/>
+              </a:spcAft>
+              <a:buSzPct val="100000"/>
+              <a:buChar char="•"/>
+            </a:pPr>
+            <a:r>
+              <a:rPr lang="en-US" sz="1500" dirty="0">
+                <a:solidFill>
+                  <a:srgbClr val="3D3A36"/>
                 </a:solidFill>
                 <a:latin typeface="Calibri" pitchFamily="34" charset="0"/>
                 <a:ea typeface="Calibri" pitchFamily="34" charset="-122"/>
                 <a:cs typeface="Calibri" pitchFamily="34" charset="-120"/>
               </a:rPr>
-              <a:t>Filtration</a:t>
-            </a:r>
-            <a:endParaRPr lang="en-US" sz="1800" dirty="0"/>
-          </a:p>
-        </p:txBody>
-      </p:sp>
-      <p:sp>
-        <p:nvSpPr>
-          <p:cNvPr id="4" name="Text 2"/>
-          <p:cNvSpPr/>
-          <p:nvPr/>
-        </p:nvSpPr>
-        <p:spPr>
-          <a:xfrm>
-            <a:off x="731520" y="1097280"/>
-            <a:ext cx="7680960" cy="3200400"/>
-          </a:xfrm>
-          <a:prstGeom prst="rect">
-            <a:avLst/>
-          </a:prstGeom>
-          <a:noFill/>
-          <a:ln/>
-        </p:spPr>
-        <p:txBody>
-          <a:bodyPr wrap="square" rtlCol="0" anchor="ctr"/>
-          <a:lstStyle/>
-          <a:p>
-            <a:pPr indent="0" marL="0">
-              <a:buNone/>
-            </a:pPr>
-            <a:r>
-              <a:rPr lang="en-US" sz="1600" dirty="0">
-                <a:solidFill>
-                  <a:srgbClr val="363636"/>
+              <a:t>FILTRATION — separates insoluble solids from liquids (e.g., sand from water)</a:t>
+            </a:r>
+            <a:endParaRPr lang="en-US" sz="1500" dirty="0"/>
+          </a:p>
+          <a:p>
+            <a:pPr marL="342900" indent="-342900">
+              <a:spcAft>
+                <a:spcPts val="800"/>
+              </a:spcAft>
+              <a:buSzPct val="100000"/>
+              <a:buChar char="•"/>
+            </a:pPr>
+            <a:r>
+              <a:rPr lang="en-US" sz="1500" dirty="0">
+                <a:solidFill>
+                  <a:srgbClr val="3D3A36"/>
                 </a:solidFill>
                 <a:latin typeface="Calibri" pitchFamily="34" charset="0"/>
                 <a:ea typeface="Calibri" pitchFamily="34" charset="-122"/>
                 <a:cs typeface="Calibri" pitchFamily="34" charset="-120"/>
               </a:rPr>
-              <a:t>Content for: Filtration</a:t>
-            </a:r>
-            <a:endParaRPr lang="en-US" sz="1600" dirty="0"/>
-          </a:p>
-          <a:p>
-            <a:pPr indent="0" marL="0">
-              <a:buNone/>
-            </a:pPr>
-            <a:endParaRPr lang="en-US" sz="1600" dirty="0"/>
-          </a:p>
-          <a:p>
-            <a:pPr indent="0" marL="0">
-              <a:buNone/>
-            </a:pPr>
-            <a:r>
-              <a:rPr lang="en-US" sz="1600" dirty="0">
-                <a:solidFill>
-                  <a:srgbClr val="363636"/>
+              <a:t>EVAPORATION — heats solution so liquid evaporates, solid remains (e.g., salt)</a:t>
+            </a:r>
+            <a:endParaRPr lang="en-US" sz="1500" dirty="0"/>
+          </a:p>
+          <a:p>
+            <a:pPr marL="342900" indent="-342900">
+              <a:spcAft>
+                <a:spcPts val="800"/>
+              </a:spcAft>
+              <a:buSzPct val="100000"/>
+              <a:buChar char="•"/>
+            </a:pPr>
+            <a:r>
+              <a:rPr lang="en-US" sz="1500" dirty="0">
+                <a:solidFill>
+                  <a:srgbClr val="3D3A36"/>
                 </a:solidFill>
                 <a:latin typeface="Calibri" pitchFamily="34" charset="0"/>
                 <a:ea typeface="Calibri" pitchFamily="34" charset="-122"/>
                 <a:cs typeface="Calibri" pitchFamily="34" charset="-120"/>
               </a:rPr>
-              <a:t>Key points will be covered in class.</a:t>
-            </a:r>
-            <a:endParaRPr lang="en-US" sz="1600" dirty="0"/>
-          </a:p>
-        </p:txBody>
-      </p:sp>
-      <p:sp>
-        <p:nvSpPr>
-          <p:cNvPr id="5" name="Text 3"/>
-          <p:cNvSpPr/>
-          <p:nvPr/>
-        </p:nvSpPr>
-        <p:spPr>
-          <a:xfrm>
-            <a:off x="7772400" y="4663440"/>
-            <a:ext cx="1097280" cy="365760"/>
-          </a:xfrm>
-          <a:prstGeom prst="rect">
-            <a:avLst/>
-          </a:prstGeom>
-          <a:noFill/>
-          <a:ln/>
-        </p:spPr>
-        <p:txBody>
-          <a:bodyPr wrap="square" rtlCol="0" anchor="ctr"/>
-          <a:lstStyle/>
-          <a:p>
-            <a:pPr algn="r" indent="0" marL="0">
-              <a:buNone/>
-            </a:pPr>
-            <a:r>
-              <a:rPr lang="en-US" sz="1000" dirty="0">
-                <a:solidFill>
-                  <a:srgbClr val="999999"/>
+              <a:t>DISTILLATION — collects the evaporated liquid (pure water from salt water)</a:t>
+            </a:r>
+            <a:endParaRPr lang="en-US" sz="1500" dirty="0"/>
+          </a:p>
+          <a:p>
+            <a:pPr marL="342900" indent="-342900">
+              <a:spcAft>
+                <a:spcPts val="800"/>
+              </a:spcAft>
+              <a:buSzPct val="100000"/>
+              <a:buChar char="•"/>
+            </a:pPr>
+            <a:r>
+              <a:rPr lang="en-US" sz="1500" dirty="0">
+                <a:solidFill>
+                  <a:srgbClr val="3D3A36"/>
                 </a:solidFill>
                 <a:latin typeface="Calibri" pitchFamily="34" charset="0"/>
                 <a:ea typeface="Calibri" pitchFamily="34" charset="-122"/>
                 <a:cs typeface="Calibri" pitchFamily="34" charset="-120"/>
               </a:rPr>
-              <a:t>2 / 6</a:t>
-            </a:r>
-            <a:endParaRPr lang="en-US" sz="1000" dirty="0"/>
+              <a:t>CHROMATOGRAPHY — separates colours/substances in a mixture (e.g., ink)</a:t>
+            </a:r>
+            <a:endParaRPr lang="en-US" sz="1500" dirty="0"/>
+          </a:p>
+          <a:p>
+            <a:pPr marL="342900" indent="-342900">
+              <a:spcAft>
+                <a:spcPts val="800"/>
+              </a:spcAft>
+              <a:buSzPct val="100000"/>
+              <a:buChar char="•"/>
+            </a:pPr>
+            <a:r>
+              <a:rPr lang="en-US" sz="1500" dirty="0">
+                <a:solidFill>
+                  <a:srgbClr val="3D3A36"/>
+                </a:solidFill>
+                <a:latin typeface="Calibri" pitchFamily="34" charset="0"/>
+                <a:ea typeface="Calibri" pitchFamily="34" charset="-122"/>
+                <a:cs typeface="Calibri" pitchFamily="34" charset="-120"/>
+              </a:rPr>
+              <a:t>MAGNETISM — separates magnetic materials (e.g., iron from sand)</a:t>
+            </a:r>
+            <a:endParaRPr lang="en-US" sz="1500" dirty="0"/>
+          </a:p>
+        </p:txBody>
+      </p:sp>
+      <p:sp>
+        <p:nvSpPr>
+          <p:cNvPr id="5" name="Shape 3"/>
+          <p:cNvSpPr/>
+          <p:nvPr/>
+        </p:nvSpPr>
+        <p:spPr>
+          <a:xfrm>
+            <a:off x="548640" y="4754880"/>
+            <a:ext cx="8046720" cy="9144"/>
+          </a:xfrm>
+          <a:prstGeom prst="rect">
+            <a:avLst/>
+          </a:prstGeom>
+          <a:solidFill>
+            <a:srgbClr val="F3F1EE"/>
+          </a:solidFill>
+          <a:ln/>
+        </p:spPr>
+      </p:sp>
+      <p:sp>
+        <p:nvSpPr>
+          <p:cNvPr id="6" name="Text 4"/>
+          <p:cNvSpPr/>
+          <p:nvPr/>
+        </p:nvSpPr>
+        <p:spPr>
+          <a:xfrm>
+            <a:off x="548640" y="4800600"/>
+            <a:ext cx="3657600" cy="274320"/>
+          </a:xfrm>
+          <a:prstGeom prst="rect">
+            <a:avLst/>
+          </a:prstGeom>
+          <a:noFill/>
+          <a:ln/>
+        </p:spPr>
+        <p:txBody>
+          <a:bodyPr wrap="square" rtlCol="0" anchor="ctr"/>
+          <a:lstStyle/>
+          <a:p>
+            <a:pPr indent="0" marL="0">
+              <a:buNone/>
+            </a:pPr>
+            <a:r>
+              <a:rPr lang="en-US" sz="800" dirty="0">
+                <a:solidFill>
+                  <a:srgbClr val="9B9690"/>
+                </a:solidFill>
+              </a:rPr>
+              <a:t>mrzocchi.com</a:t>
+            </a:r>
+            <a:endParaRPr lang="en-US" sz="800" dirty="0"/>
           </a:p>
         </p:txBody>
       </p:sp>
@@ -1594,6 +1564,13 @@
 <file path=ppt/slides/slide3.xml><?xml version="1.0" encoding="utf-8"?>
 <p:sld xmlns:a="http://schemas.openxmlformats.org/drawingml/2006/main" xmlns:r="http://schemas.openxmlformats.org/officeDocument/2006/relationships" xmlns:p="http://schemas.openxmlformats.org/presentationml/2006/main">
   <p:cSld name="Slide 3">
+    <p:bg>
+      <p:bgPr>
+        <a:solidFill>
+          <a:srgbClr val="FFFFFF"/>
+        </a:solidFill>
+      </p:bgPr>
+    </p:bg>
     <p:spTree>
       <p:nvGrpSpPr>
         <p:cNvPr id="1" name=""/>
@@ -1617,13 +1594,13 @@
         <p:spPr>
           <a:xfrm>
             <a:off x="0" y="0"/>
-            <a:ext cx="9144000" cy="548640"/>
-          </a:xfrm>
-          <a:prstGeom prst="rect">
-            <a:avLst/>
-          </a:prstGeom>
-          <a:solidFill>
-            <a:srgbClr val="7C3AED"/>
+            <a:ext cx="9144000" cy="54864"/>
+          </a:xfrm>
+          <a:prstGeom prst="rect">
+            <a:avLst/>
+          </a:prstGeom>
+          <a:solidFill>
+            <a:srgbClr val="2A9D8F"/>
           </a:solidFill>
           <a:ln/>
         </p:spPr>
@@ -1636,8 +1613,8 @@
         </p:nvSpPr>
         <p:spPr>
           <a:xfrm>
-            <a:off x="457200" y="45720"/>
-            <a:ext cx="8229600" cy="457200"/>
+            <a:off x="548640" y="274320"/>
+            <a:ext cx="8046720" cy="640080"/>
           </a:xfrm>
           <a:prstGeom prst="rect">
             <a:avLst/>
@@ -1646,6 +1623,72 @@
           <a:ln/>
         </p:spPr>
         <p:txBody>
+          <a:bodyPr wrap="square" lIns="0" tIns="0" rIns="0" bIns="0" rtlCol="0" anchor="ctr"/>
+          <a:lstStyle/>
+          <a:p>
+            <a:pPr indent="0" marL="0">
+              <a:buNone/>
+            </a:pPr>
+            <a:r>
+              <a:rPr lang="en-US" sz="2600" b="1" dirty="0">
+                <a:solidFill>
+                  <a:srgbClr val="1B2A4A"/>
+                </a:solidFill>
+                <a:latin typeface="Georgia" pitchFamily="34" charset="0"/>
+                <a:ea typeface="Georgia" pitchFamily="34" charset="-122"/>
+                <a:cs typeface="Georgia" pitchFamily="34" charset="-120"/>
+              </a:rPr>
+              <a:t>Choosing a Method</a:t>
+            </a:r>
+            <a:endParaRPr lang="en-US" sz="2600" dirty="0"/>
+          </a:p>
+        </p:txBody>
+      </p:sp>
+      <p:sp>
+        <p:nvSpPr>
+          <p:cNvPr id="4" name="Shape 2"/>
+          <p:cNvSpPr/>
+          <p:nvPr/>
+        </p:nvSpPr>
+        <p:spPr>
+          <a:xfrm>
+            <a:off x="457200" y="1097280"/>
+            <a:ext cx="3840480" cy="3474720"/>
+          </a:xfrm>
+          <a:prstGeom prst="rect">
+            <a:avLst/>
+          </a:prstGeom>
+          <a:solidFill>
+            <a:srgbClr val="F3F1EE"/>
+          </a:solidFill>
+          <a:ln/>
+          <a:effectLst>
+            <a:outerShdw sx="100000" sy="100000" kx="0" ky="0" algn="bl" rotWithShape="0" blurRad="50800" dist="25400" dir="8100000">
+              <a:srgbClr val="000000">
+                <a:alpha val="10000"/>
+              </a:srgbClr>
+            </a:outerShdw>
+          </a:effectLst>
+        </p:spPr>
+      </p:sp>
+      <p:sp>
+        <p:nvSpPr>
+          <p:cNvPr id="5" name="Text 3"/>
+          <p:cNvSpPr/>
+          <p:nvPr/>
+        </p:nvSpPr>
+        <p:spPr>
+          <a:xfrm>
+            <a:off x="640080" y="1234440"/>
+            <a:ext cx="3474720" cy="411480"/>
+          </a:xfrm>
+          <a:prstGeom prst="rect">
+            <a:avLst/>
+          </a:prstGeom>
+          <a:noFill/>
+          <a:ln/>
+        </p:spPr>
+        <p:txBody>
           <a:bodyPr wrap="square" rtlCol="0" anchor="ctr"/>
           <a:lstStyle/>
           <a:p>
@@ -1653,118 +1696,331 @@
               <a:buNone/>
             </a:pPr>
             <a:r>
-              <a:rPr lang="en-US" sz="1800" b="1" dirty="0">
-                <a:solidFill>
-                  <a:srgbClr val="FFFFFF"/>
+              <a:rPr lang="en-US" sz="1600" b="1" dirty="0">
+                <a:solidFill>
+                  <a:srgbClr val="1B2A4A"/>
+                </a:solidFill>
+                <a:latin typeface="Georgia" pitchFamily="34" charset="0"/>
+                <a:ea typeface="Georgia" pitchFamily="34" charset="-122"/>
+                <a:cs typeface="Georgia" pitchFamily="34" charset="-120"/>
+              </a:rPr>
+              <a:t>For Insoluble Solids</a:t>
+            </a:r>
+            <a:endParaRPr lang="en-US" sz="1600" dirty="0"/>
+          </a:p>
+        </p:txBody>
+      </p:sp>
+      <p:sp>
+        <p:nvSpPr>
+          <p:cNvPr id="6" name="Text 4"/>
+          <p:cNvSpPr/>
+          <p:nvPr/>
+        </p:nvSpPr>
+        <p:spPr>
+          <a:xfrm>
+            <a:off x="640080" y="1737360"/>
+            <a:ext cx="3474720" cy="2651760"/>
+          </a:xfrm>
+          <a:prstGeom prst="rect">
+            <a:avLst/>
+          </a:prstGeom>
+          <a:noFill/>
+          <a:ln/>
+        </p:spPr>
+        <p:txBody>
+          <a:bodyPr wrap="square" rtlCol="0" anchor="t"/>
+          <a:lstStyle/>
+          <a:p>
+            <a:pPr marL="342900" indent="-342900">
+              <a:spcAft>
+                <a:spcPts val="600"/>
+              </a:spcAft>
+              <a:buSzPct val="100000"/>
+              <a:buChar char="•"/>
+            </a:pPr>
+            <a:r>
+              <a:rPr lang="en-US" sz="1300" dirty="0">
+                <a:solidFill>
+                  <a:srgbClr val="3D3A36"/>
                 </a:solidFill>
                 <a:latin typeface="Calibri" pitchFamily="34" charset="0"/>
                 <a:ea typeface="Calibri" pitchFamily="34" charset="-122"/>
                 <a:cs typeface="Calibri" pitchFamily="34" charset="-120"/>
               </a:rPr>
-              <a:t>Evaporation</a:t>
-            </a:r>
-            <a:endParaRPr lang="en-US" sz="1800" dirty="0"/>
-          </a:p>
-        </p:txBody>
-      </p:sp>
-      <p:sp>
-        <p:nvSpPr>
-          <p:cNvPr id="4" name="Text 2"/>
-          <p:cNvSpPr/>
-          <p:nvPr/>
-        </p:nvSpPr>
-        <p:spPr>
-          <a:xfrm>
-            <a:off x="731520" y="1097280"/>
-            <a:ext cx="7680960" cy="3200400"/>
-          </a:xfrm>
-          <a:prstGeom prst="rect">
-            <a:avLst/>
-          </a:prstGeom>
-          <a:noFill/>
-          <a:ln/>
-        </p:spPr>
-        <p:txBody>
-          <a:bodyPr wrap="square" rtlCol="0" anchor="ctr"/>
-          <a:lstStyle/>
-          <a:p>
-            <a:pPr indent="0" marL="0">
-              <a:buNone/>
-            </a:pPr>
-            <a:r>
-              <a:rPr lang="en-US" sz="1600" dirty="0">
-                <a:solidFill>
-                  <a:srgbClr val="363636"/>
+              <a:t>Filtration: solid stays in filter paper</a:t>
+            </a:r>
+            <a:endParaRPr lang="en-US" sz="1300" dirty="0"/>
+          </a:p>
+          <a:p>
+            <a:pPr marL="342900" indent="-342900">
+              <a:spcAft>
+                <a:spcPts val="600"/>
+              </a:spcAft>
+              <a:buSzPct val="100000"/>
+              <a:buChar char="•"/>
+            </a:pPr>
+            <a:r>
+              <a:rPr lang="en-US" sz="1300" dirty="0">
+                <a:solidFill>
+                  <a:srgbClr val="3D3A36"/>
                 </a:solidFill>
                 <a:latin typeface="Calibri" pitchFamily="34" charset="0"/>
                 <a:ea typeface="Calibri" pitchFamily="34" charset="-122"/>
                 <a:cs typeface="Calibri" pitchFamily="34" charset="-120"/>
               </a:rPr>
-              <a:t>Content for: Evaporation</a:t>
-            </a:r>
-            <a:endParaRPr lang="en-US" sz="1600" dirty="0"/>
-          </a:p>
-          <a:p>
-            <a:pPr indent="0" marL="0">
-              <a:buNone/>
-            </a:pPr>
-            <a:endParaRPr lang="en-US" sz="1600" dirty="0"/>
-          </a:p>
-          <a:p>
-            <a:pPr indent="0" marL="0">
-              <a:buNone/>
-            </a:pPr>
-            <a:r>
-              <a:rPr lang="en-US" sz="1600" dirty="0">
-                <a:solidFill>
-                  <a:srgbClr val="363636"/>
+              <a:t>Sieving: separates by particle size</a:t>
+            </a:r>
+            <a:endParaRPr lang="en-US" sz="1300" dirty="0"/>
+          </a:p>
+          <a:p>
+            <a:pPr marL="342900" indent="-342900">
+              <a:spcAft>
+                <a:spcPts val="600"/>
+              </a:spcAft>
+              <a:buSzPct val="100000"/>
+              <a:buChar char="•"/>
+            </a:pPr>
+            <a:r>
+              <a:rPr lang="en-US" sz="1300" dirty="0">
+                <a:solidFill>
+                  <a:srgbClr val="3D3A36"/>
                 </a:solidFill>
                 <a:latin typeface="Calibri" pitchFamily="34" charset="0"/>
                 <a:ea typeface="Calibri" pitchFamily="34" charset="-122"/>
                 <a:cs typeface="Calibri" pitchFamily="34" charset="-120"/>
               </a:rPr>
-              <a:t>Key points will be covered in class.</a:t>
-            </a:r>
-            <a:endParaRPr lang="en-US" sz="1600" dirty="0"/>
-          </a:p>
-        </p:txBody>
-      </p:sp>
-      <p:sp>
-        <p:nvSpPr>
-          <p:cNvPr id="5" name="Text 3"/>
-          <p:cNvSpPr/>
-          <p:nvPr/>
-        </p:nvSpPr>
-        <p:spPr>
-          <a:xfrm>
-            <a:off x="7772400" y="4663440"/>
-            <a:ext cx="1097280" cy="365760"/>
-          </a:xfrm>
-          <a:prstGeom prst="rect">
-            <a:avLst/>
-          </a:prstGeom>
-          <a:noFill/>
-          <a:ln/>
-        </p:spPr>
-        <p:txBody>
-          <a:bodyPr wrap="square" rtlCol="0" anchor="ctr"/>
-          <a:lstStyle/>
-          <a:p>
-            <a:pPr algn="r" indent="0" marL="0">
-              <a:buNone/>
-            </a:pPr>
-            <a:r>
-              <a:rPr lang="en-US" sz="1000" dirty="0">
-                <a:solidFill>
-                  <a:srgbClr val="999999"/>
+              <a:t>Magnetism: if one part is magnetic</a:t>
+            </a:r>
+            <a:endParaRPr lang="en-US" sz="1300" dirty="0"/>
+          </a:p>
+          <a:p>
+            <a:pPr marL="342900" indent="-342900">
+              <a:spcAft>
+                <a:spcPts val="600"/>
+              </a:spcAft>
+              <a:buSzPct val="100000"/>
+              <a:buChar char="•"/>
+            </a:pPr>
+            <a:r>
+              <a:rPr lang="en-US" sz="1300" dirty="0">
+                <a:solidFill>
+                  <a:srgbClr val="3D3A36"/>
                 </a:solidFill>
                 <a:latin typeface="Calibri" pitchFamily="34" charset="0"/>
                 <a:ea typeface="Calibri" pitchFamily="34" charset="-122"/>
                 <a:cs typeface="Calibri" pitchFamily="34" charset="-120"/>
               </a:rPr>
-              <a:t>3 / 6</a:t>
-            </a:r>
-            <a:endParaRPr lang="en-US" sz="1000" dirty="0"/>
+              <a:t>Decanting: pouring off liquid carefully</a:t>
+            </a:r>
+            <a:endParaRPr lang="en-US" sz="1300" dirty="0"/>
+          </a:p>
+        </p:txBody>
+      </p:sp>
+      <p:sp>
+        <p:nvSpPr>
+          <p:cNvPr id="7" name="Shape 5"/>
+          <p:cNvSpPr/>
+          <p:nvPr/>
+        </p:nvSpPr>
+        <p:spPr>
+          <a:xfrm>
+            <a:off x="4846320" y="1097280"/>
+            <a:ext cx="3840480" cy="3474720"/>
+          </a:xfrm>
+          <a:prstGeom prst="rect">
+            <a:avLst/>
+          </a:prstGeom>
+          <a:solidFill>
+            <a:srgbClr val="F3F1EE"/>
+          </a:solidFill>
+          <a:ln/>
+          <a:effectLst>
+            <a:outerShdw sx="100000" sy="100000" kx="0" ky="0" algn="bl" rotWithShape="0" blurRad="50800" dist="25400" dir="8100000">
+              <a:srgbClr val="000000">
+                <a:alpha val="10000"/>
+              </a:srgbClr>
+            </a:outerShdw>
+          </a:effectLst>
+        </p:spPr>
+      </p:sp>
+      <p:sp>
+        <p:nvSpPr>
+          <p:cNvPr id="8" name="Text 6"/>
+          <p:cNvSpPr/>
+          <p:nvPr/>
+        </p:nvSpPr>
+        <p:spPr>
+          <a:xfrm>
+            <a:off x="5029200" y="1234440"/>
+            <a:ext cx="3474720" cy="411480"/>
+          </a:xfrm>
+          <a:prstGeom prst="rect">
+            <a:avLst/>
+          </a:prstGeom>
+          <a:noFill/>
+          <a:ln/>
+        </p:spPr>
+        <p:txBody>
+          <a:bodyPr wrap="square" rtlCol="0" anchor="ctr"/>
+          <a:lstStyle/>
+          <a:p>
+            <a:pPr indent="0" marL="0">
+              <a:buNone/>
+            </a:pPr>
+            <a:r>
+              <a:rPr lang="en-US" sz="1600" b="1" dirty="0">
+                <a:solidFill>
+                  <a:srgbClr val="1B2A4A"/>
+                </a:solidFill>
+                <a:latin typeface="Georgia" pitchFamily="34" charset="0"/>
+                <a:ea typeface="Georgia" pitchFamily="34" charset="-122"/>
+                <a:cs typeface="Georgia" pitchFamily="34" charset="-120"/>
+              </a:rPr>
+              <a:t>For Dissolved Solids</a:t>
+            </a:r>
+            <a:endParaRPr lang="en-US" sz="1600" dirty="0"/>
+          </a:p>
+        </p:txBody>
+      </p:sp>
+      <p:sp>
+        <p:nvSpPr>
+          <p:cNvPr id="9" name="Text 7"/>
+          <p:cNvSpPr/>
+          <p:nvPr/>
+        </p:nvSpPr>
+        <p:spPr>
+          <a:xfrm>
+            <a:off x="5029200" y="1737360"/>
+            <a:ext cx="3474720" cy="2651760"/>
+          </a:xfrm>
+          <a:prstGeom prst="rect">
+            <a:avLst/>
+          </a:prstGeom>
+          <a:noFill/>
+          <a:ln/>
+        </p:spPr>
+        <p:txBody>
+          <a:bodyPr wrap="square" rtlCol="0" anchor="t"/>
+          <a:lstStyle/>
+          <a:p>
+            <a:pPr marL="342900" indent="-342900">
+              <a:spcAft>
+                <a:spcPts val="600"/>
+              </a:spcAft>
+              <a:buSzPct val="100000"/>
+              <a:buChar char="•"/>
+            </a:pPr>
+            <a:r>
+              <a:rPr lang="en-US" sz="1300" dirty="0">
+                <a:solidFill>
+                  <a:srgbClr val="3D3A36"/>
+                </a:solidFill>
+                <a:latin typeface="Calibri" pitchFamily="34" charset="0"/>
+                <a:ea typeface="Calibri" pitchFamily="34" charset="-122"/>
+                <a:cs typeface="Calibri" pitchFamily="34" charset="-120"/>
+              </a:rPr>
+              <a:t>Evaporation: get the solid back</a:t>
+            </a:r>
+            <a:endParaRPr lang="en-US" sz="1300" dirty="0"/>
+          </a:p>
+          <a:p>
+            <a:pPr marL="342900" indent="-342900">
+              <a:spcAft>
+                <a:spcPts val="600"/>
+              </a:spcAft>
+              <a:buSzPct val="100000"/>
+              <a:buChar char="•"/>
+            </a:pPr>
+            <a:r>
+              <a:rPr lang="en-US" sz="1300" dirty="0">
+                <a:solidFill>
+                  <a:srgbClr val="3D3A36"/>
+                </a:solidFill>
+                <a:latin typeface="Calibri" pitchFamily="34" charset="0"/>
+                <a:ea typeface="Calibri" pitchFamily="34" charset="-122"/>
+                <a:cs typeface="Calibri" pitchFamily="34" charset="-120"/>
+              </a:rPr>
+              <a:t>Distillation: get the liquid back</a:t>
+            </a:r>
+            <a:endParaRPr lang="en-US" sz="1300" dirty="0"/>
+          </a:p>
+          <a:p>
+            <a:pPr marL="342900" indent="-342900">
+              <a:spcAft>
+                <a:spcPts val="600"/>
+              </a:spcAft>
+              <a:buSzPct val="100000"/>
+              <a:buChar char="•"/>
+            </a:pPr>
+            <a:r>
+              <a:rPr lang="en-US" sz="1300" dirty="0">
+                <a:solidFill>
+                  <a:srgbClr val="3D3A36"/>
+                </a:solidFill>
+                <a:latin typeface="Calibri" pitchFamily="34" charset="0"/>
+                <a:ea typeface="Calibri" pitchFamily="34" charset="-122"/>
+                <a:cs typeface="Calibri" pitchFamily="34" charset="-120"/>
+              </a:rPr>
+              <a:t>Chromatography: separate dissolved colours</a:t>
+            </a:r>
+            <a:endParaRPr lang="en-US" sz="1300" dirty="0"/>
+          </a:p>
+          <a:p>
+            <a:pPr marL="342900" indent="-342900">
+              <a:spcAft>
+                <a:spcPts val="600"/>
+              </a:spcAft>
+              <a:buSzPct val="100000"/>
+              <a:buChar char="•"/>
+            </a:pPr>
+            <a:r>
+              <a:rPr lang="en-US" sz="1300" dirty="0">
+                <a:solidFill>
+                  <a:srgbClr val="3D3A36"/>
+                </a:solidFill>
+                <a:latin typeface="Calibri" pitchFamily="34" charset="0"/>
+                <a:ea typeface="Calibri" pitchFamily="34" charset="-122"/>
+                <a:cs typeface="Calibri" pitchFamily="34" charset="-120"/>
+              </a:rPr>
+              <a:t>Crystallisation: slow evaporation for crystals</a:t>
+            </a:r>
+            <a:endParaRPr lang="en-US" sz="1300" dirty="0"/>
+          </a:p>
+        </p:txBody>
+      </p:sp>
+      <p:sp>
+        <p:nvSpPr>
+          <p:cNvPr id="10" name="Text 8"/>
+          <p:cNvSpPr/>
+          <p:nvPr/>
+        </p:nvSpPr>
+        <p:spPr>
+          <a:xfrm>
+            <a:off x="548640" y="4800600"/>
+            <a:ext cx="3657600" cy="274320"/>
+          </a:xfrm>
+          <a:prstGeom prst="rect">
+            <a:avLst/>
+          </a:prstGeom>
+          <a:noFill/>
+          <a:ln/>
+        </p:spPr>
+        <p:txBody>
+          <a:bodyPr wrap="square" rtlCol="0" anchor="ctr"/>
+          <a:lstStyle/>
+          <a:p>
+            <a:pPr indent="0" marL="0">
+              <a:buNone/>
+            </a:pPr>
+            <a:r>
+              <a:rPr lang="en-US" sz="800" dirty="0">
+                <a:solidFill>
+                  <a:srgbClr val="9B9690"/>
+                </a:solidFill>
+              </a:rPr>
+              <a:t>mrzocchi.com</a:t>
+            </a:r>
+            <a:endParaRPr lang="en-US" sz="800" dirty="0"/>
           </a:p>
         </p:txBody>
       </p:sp>
@@ -1779,6 +2035,13 @@
 <file path=ppt/slides/slide4.xml><?xml version="1.0" encoding="utf-8"?>
 <p:sld xmlns:a="http://schemas.openxmlformats.org/drawingml/2006/main" xmlns:r="http://schemas.openxmlformats.org/officeDocument/2006/relationships" xmlns:p="http://schemas.openxmlformats.org/presentationml/2006/main">
   <p:cSld name="Slide 4">
+    <p:bg>
+      <p:bgPr>
+        <a:solidFill>
+          <a:srgbClr val="1B2A4A"/>
+        </a:solidFill>
+      </p:bgPr>
+    </p:bg>
     <p:spTree>
       <p:nvGrpSpPr>
         <p:cNvPr id="1" name=""/>
@@ -1802,13 +2065,13 @@
         <p:spPr>
           <a:xfrm>
             <a:off x="0" y="0"/>
-            <a:ext cx="9144000" cy="548640"/>
-          </a:xfrm>
-          <a:prstGeom prst="rect">
-            <a:avLst/>
-          </a:prstGeom>
-          <a:solidFill>
-            <a:srgbClr val="7C3AED"/>
+            <a:ext cx="9144000" cy="54864"/>
+          </a:xfrm>
+          <a:prstGeom prst="rect">
+            <a:avLst/>
+          </a:prstGeom>
+          <a:solidFill>
+            <a:srgbClr val="2A9D8F"/>
           </a:solidFill>
           <a:ln/>
         </p:spPr>
@@ -1821,8 +2084,8 @@
         </p:nvSpPr>
         <p:spPr>
           <a:xfrm>
-            <a:off x="457200" y="45720"/>
-            <a:ext cx="8229600" cy="457200"/>
+            <a:off x="548640" y="457200"/>
+            <a:ext cx="8046720" cy="640080"/>
           </a:xfrm>
           <a:prstGeom prst="rect">
             <a:avLst/>
@@ -1838,77 +2101,121 @@
               <a:buNone/>
             </a:pPr>
             <a:r>
-              <a:rPr lang="en-US" sz="1800" b="1" dirty="0">
+              <a:rPr lang="en-US" sz="2800" b="1" dirty="0">
                 <a:solidFill>
                   <a:srgbClr val="FFFFFF"/>
+                </a:solidFill>
+                <a:latin typeface="Georgia" pitchFamily="34" charset="0"/>
+                <a:ea typeface="Georgia" pitchFamily="34" charset="-122"/>
+                <a:cs typeface="Georgia" pitchFamily="34" charset="-120"/>
+              </a:rPr>
+              <a:t>Key Takeaways</a:t>
+            </a:r>
+            <a:endParaRPr lang="en-US" sz="2800" dirty="0"/>
+          </a:p>
+        </p:txBody>
+      </p:sp>
+      <p:sp>
+        <p:nvSpPr>
+          <p:cNvPr id="4" name="Text 2"/>
+          <p:cNvSpPr/>
+          <p:nvPr/>
+        </p:nvSpPr>
+        <p:spPr>
+          <a:xfrm>
+            <a:off x="731520" y="1371600"/>
+            <a:ext cx="7680960" cy="3200400"/>
+          </a:xfrm>
+          <a:prstGeom prst="rect">
+            <a:avLst/>
+          </a:prstGeom>
+          <a:noFill/>
+          <a:ln/>
+        </p:spPr>
+        <p:txBody>
+          <a:bodyPr wrap="square" rtlCol="0" anchor="t"/>
+          <a:lstStyle/>
+          <a:p>
+            <a:pPr marL="342900" indent="-342900">
+              <a:spcAft>
+                <a:spcPts val="1000"/>
+              </a:spcAft>
+              <a:buSzPct val="100000"/>
+              <a:buChar char="•"/>
+            </a:pPr>
+            <a:r>
+              <a:rPr lang="en-US" sz="1600" dirty="0">
+                <a:solidFill>
+                  <a:srgbClr val="CADCFC"/>
                 </a:solidFill>
                 <a:latin typeface="Calibri" pitchFamily="34" charset="0"/>
                 <a:ea typeface="Calibri" pitchFamily="34" charset="-122"/>
                 <a:cs typeface="Calibri" pitchFamily="34" charset="-120"/>
               </a:rPr>
-              <a:t>Distillation</a:t>
-            </a:r>
-            <a:endParaRPr lang="en-US" sz="1800" dirty="0"/>
-          </a:p>
-        </p:txBody>
-      </p:sp>
-      <p:sp>
-        <p:nvSpPr>
-          <p:cNvPr id="4" name="Text 2"/>
-          <p:cNvSpPr/>
-          <p:nvPr/>
-        </p:nvSpPr>
-        <p:spPr>
-          <a:xfrm>
-            <a:off x="731520" y="1097280"/>
-            <a:ext cx="7680960" cy="3200400"/>
-          </a:xfrm>
-          <a:prstGeom prst="rect">
-            <a:avLst/>
-          </a:prstGeom>
-          <a:noFill/>
-          <a:ln/>
-        </p:spPr>
-        <p:txBody>
-          <a:bodyPr wrap="square" rtlCol="0" anchor="ctr"/>
-          <a:lstStyle/>
-          <a:p>
-            <a:pPr indent="0" marL="0">
-              <a:buNone/>
+              <a:t>Choose separation method based on the properties of the mixture</a:t>
+            </a:r>
+            <a:endParaRPr lang="en-US" sz="1600" dirty="0"/>
+          </a:p>
+          <a:p>
+            <a:pPr marL="342900" indent="-342900">
+              <a:spcAft>
+                <a:spcPts val="1000"/>
+              </a:spcAft>
+              <a:buSzPct val="100000"/>
+              <a:buChar char="•"/>
             </a:pPr>
             <a:r>
               <a:rPr lang="en-US" sz="1600" dirty="0">
                 <a:solidFill>
-                  <a:srgbClr val="363636"/>
+                  <a:srgbClr val="CADCFC"/>
                 </a:solidFill>
                 <a:latin typeface="Calibri" pitchFamily="34" charset="0"/>
                 <a:ea typeface="Calibri" pitchFamily="34" charset="-122"/>
                 <a:cs typeface="Calibri" pitchFamily="34" charset="-120"/>
               </a:rPr>
-              <a:t>Content for: Distillation</a:t>
+              <a:t>Filtration = insoluble solids, Evaporation = dissolved solids</a:t>
             </a:r>
             <a:endParaRPr lang="en-US" sz="1600" dirty="0"/>
           </a:p>
           <a:p>
-            <a:pPr indent="0" marL="0">
-              <a:buNone/>
-            </a:pPr>
-            <a:endParaRPr lang="en-US" sz="1600" dirty="0"/>
-          </a:p>
-          <a:p>
-            <a:pPr indent="0" marL="0">
-              <a:buNone/>
+            <a:pPr marL="342900" indent="-342900">
+              <a:spcAft>
+                <a:spcPts val="1000"/>
+              </a:spcAft>
+              <a:buSzPct val="100000"/>
+              <a:buChar char="•"/>
             </a:pPr>
             <a:r>
               <a:rPr lang="en-US" sz="1600" dirty="0">
                 <a:solidFill>
-                  <a:srgbClr val="363636"/>
+                  <a:srgbClr val="CADCFC"/>
                 </a:solidFill>
                 <a:latin typeface="Calibri" pitchFamily="34" charset="0"/>
                 <a:ea typeface="Calibri" pitchFamily="34" charset="-122"/>
                 <a:cs typeface="Calibri" pitchFamily="34" charset="-120"/>
               </a:rPr>
-              <a:t>Key points will be covered in class.</a:t>
+              <a:t>Distillation collects BOTH the solid and liquid</a:t>
+            </a:r>
+            <a:endParaRPr lang="en-US" sz="1600" dirty="0"/>
+          </a:p>
+          <a:p>
+            <a:pPr marL="342900" indent="-342900">
+              <a:spcAft>
+                <a:spcPts val="1000"/>
+              </a:spcAft>
+              <a:buSzPct val="100000"/>
+              <a:buChar char="•"/>
+            </a:pPr>
+            <a:r>
+              <a:rPr lang="en-US" sz="1600" dirty="0">
+                <a:solidFill>
+                  <a:srgbClr val="CADCFC"/>
+                </a:solidFill>
+                <a:latin typeface="Calibri" pitchFamily="34" charset="0"/>
+                <a:ea typeface="Calibri" pitchFamily="34" charset="-122"/>
+                <a:cs typeface="Calibri" pitchFamily="34" charset="-120"/>
+              </a:rPr>
+              <a:t>Chromatography shows how many substances are in a mixture</a:t>
             </a:r>
             <a:endParaRPr lang="en-US" sz="1600" dirty="0"/>
           </a:p>
@@ -1922,8 +2229,8 @@
         </p:nvSpPr>
         <p:spPr>
           <a:xfrm>
-            <a:off x="7772400" y="4663440"/>
-            <a:ext cx="1097280" cy="365760"/>
+            <a:off x="548640" y="4572000"/>
+            <a:ext cx="3657600" cy="274320"/>
           </a:xfrm>
           <a:prstGeom prst="rect">
             <a:avLst/>
@@ -1935,389 +2242,16 @@
           <a:bodyPr wrap="square" rtlCol="0" anchor="ctr"/>
           <a:lstStyle/>
           <a:p>
-            <a:pPr algn="r" indent="0" marL="0">
-              <a:buNone/>
-            </a:pPr>
-            <a:r>
-              <a:rPr lang="en-US" sz="1000" dirty="0">
-                <a:solidFill>
-                  <a:srgbClr val="999999"/>
-                </a:solidFill>
-                <a:latin typeface="Calibri" pitchFamily="34" charset="0"/>
-                <a:ea typeface="Calibri" pitchFamily="34" charset="-122"/>
-                <a:cs typeface="Calibri" pitchFamily="34" charset="-120"/>
-              </a:rPr>
-              <a:t>4 / 6</a:t>
-            </a:r>
-            <a:endParaRPr lang="en-US" sz="1000" dirty="0"/>
-          </a:p>
-        </p:txBody>
-      </p:sp>
-    </p:spTree>
-  </p:cSld>
-  <p:clrMapOvr>
-    <a:masterClrMapping/>
-  </p:clrMapOvr>
-</p:sld>
-</file>
-
-<file path=ppt/slides/slide5.xml><?xml version="1.0" encoding="utf-8"?>
-<p:sld xmlns:a="http://schemas.openxmlformats.org/drawingml/2006/main" xmlns:r="http://schemas.openxmlformats.org/officeDocument/2006/relationships" xmlns:p="http://schemas.openxmlformats.org/presentationml/2006/main">
-  <p:cSld name="Slide 5">
-    <p:spTree>
-      <p:nvGrpSpPr>
-        <p:cNvPr id="1" name=""/>
-        <p:cNvGrpSpPr/>
-        <p:nvPr/>
-      </p:nvGrpSpPr>
-      <p:grpSpPr>
-        <a:xfrm>
-          <a:off x="0" y="0"/>
-          <a:ext cx="0" cy="0"/>
-          <a:chOff x="0" y="0"/>
-          <a:chExt cx="0" cy="0"/>
-        </a:xfrm>
-      </p:grpSpPr>
-      <p:sp>
-        <p:nvSpPr>
-          <p:cNvPr id="2" name="Shape 0"/>
-          <p:cNvSpPr/>
-          <p:nvPr/>
-        </p:nvSpPr>
-        <p:spPr>
-          <a:xfrm>
-            <a:off x="0" y="0"/>
-            <a:ext cx="9144000" cy="548640"/>
-          </a:xfrm>
-          <a:prstGeom prst="rect">
-            <a:avLst/>
-          </a:prstGeom>
-          <a:solidFill>
-            <a:srgbClr val="7C3AED"/>
-          </a:solidFill>
-          <a:ln/>
-        </p:spPr>
-      </p:sp>
-      <p:sp>
-        <p:nvSpPr>
-          <p:cNvPr id="3" name="Text 1"/>
-          <p:cNvSpPr/>
-          <p:nvPr/>
-        </p:nvSpPr>
-        <p:spPr>
-          <a:xfrm>
-            <a:off x="457200" y="45720"/>
-            <a:ext cx="8229600" cy="457200"/>
-          </a:xfrm>
-          <a:prstGeom prst="rect">
-            <a:avLst/>
-          </a:prstGeom>
-          <a:noFill/>
-          <a:ln/>
-        </p:spPr>
-        <p:txBody>
-          <a:bodyPr wrap="square" rtlCol="0" anchor="ctr"/>
-          <a:lstStyle/>
-          <a:p>
             <a:pPr indent="0" marL="0">
               <a:buNone/>
             </a:pPr>
             <a:r>
-              <a:rPr lang="en-US" sz="1800" b="1" dirty="0">
-                <a:solidFill>
-                  <a:srgbClr val="FFFFFF"/>
-                </a:solidFill>
-                <a:latin typeface="Calibri" pitchFamily="34" charset="0"/>
-                <a:ea typeface="Calibri" pitchFamily="34" charset="-122"/>
-                <a:cs typeface="Calibri" pitchFamily="34" charset="-120"/>
-              </a:rPr>
-              <a:t>Chromatography</a:t>
-            </a:r>
-            <a:endParaRPr lang="en-US" sz="1800" dirty="0"/>
-          </a:p>
-        </p:txBody>
-      </p:sp>
-      <p:sp>
-        <p:nvSpPr>
-          <p:cNvPr id="4" name="Text 2"/>
-          <p:cNvSpPr/>
-          <p:nvPr/>
-        </p:nvSpPr>
-        <p:spPr>
-          <a:xfrm>
-            <a:off x="731520" y="1097280"/>
-            <a:ext cx="7680960" cy="3200400"/>
-          </a:xfrm>
-          <a:prstGeom prst="rect">
-            <a:avLst/>
-          </a:prstGeom>
-          <a:noFill/>
-          <a:ln/>
-        </p:spPr>
-        <p:txBody>
-          <a:bodyPr wrap="square" rtlCol="0" anchor="ctr"/>
-          <a:lstStyle/>
-          <a:p>
-            <a:pPr indent="0" marL="0">
-              <a:buNone/>
-            </a:pPr>
-            <a:r>
-              <a:rPr lang="en-US" sz="1600" dirty="0">
-                <a:solidFill>
-                  <a:srgbClr val="363636"/>
-                </a:solidFill>
-                <a:latin typeface="Calibri" pitchFamily="34" charset="0"/>
-                <a:ea typeface="Calibri" pitchFamily="34" charset="-122"/>
-                <a:cs typeface="Calibri" pitchFamily="34" charset="-120"/>
-              </a:rPr>
-              <a:t>Content for: Chromatography</a:t>
-            </a:r>
-            <a:endParaRPr lang="en-US" sz="1600" dirty="0"/>
-          </a:p>
-          <a:p>
-            <a:pPr indent="0" marL="0">
-              <a:buNone/>
-            </a:pPr>
-            <a:endParaRPr lang="en-US" sz="1600" dirty="0"/>
-          </a:p>
-          <a:p>
-            <a:pPr indent="0" marL="0">
-              <a:buNone/>
-            </a:pPr>
-            <a:r>
-              <a:rPr lang="en-US" sz="1600" dirty="0">
-                <a:solidFill>
-                  <a:srgbClr val="363636"/>
-                </a:solidFill>
-                <a:latin typeface="Calibri" pitchFamily="34" charset="0"/>
-                <a:ea typeface="Calibri" pitchFamily="34" charset="-122"/>
-                <a:cs typeface="Calibri" pitchFamily="34" charset="-120"/>
-              </a:rPr>
-              <a:t>Key points will be covered in class.</a:t>
-            </a:r>
-            <a:endParaRPr lang="en-US" sz="1600" dirty="0"/>
-          </a:p>
-        </p:txBody>
-      </p:sp>
-      <p:sp>
-        <p:nvSpPr>
-          <p:cNvPr id="5" name="Text 3"/>
-          <p:cNvSpPr/>
-          <p:nvPr/>
-        </p:nvSpPr>
-        <p:spPr>
-          <a:xfrm>
-            <a:off x="7772400" y="4663440"/>
-            <a:ext cx="1097280" cy="365760"/>
-          </a:xfrm>
-          <a:prstGeom prst="rect">
-            <a:avLst/>
-          </a:prstGeom>
-          <a:noFill/>
-          <a:ln/>
-        </p:spPr>
-        <p:txBody>
-          <a:bodyPr wrap="square" rtlCol="0" anchor="ctr"/>
-          <a:lstStyle/>
-          <a:p>
-            <a:pPr algn="r" indent="0" marL="0">
-              <a:buNone/>
-            </a:pPr>
-            <a:r>
               <a:rPr lang="en-US" sz="1000" dirty="0">
                 <a:solidFill>
-                  <a:srgbClr val="999999"/>
-                </a:solidFill>
-                <a:latin typeface="Calibri" pitchFamily="34" charset="0"/>
-                <a:ea typeface="Calibri" pitchFamily="34" charset="-122"/>
-                <a:cs typeface="Calibri" pitchFamily="34" charset="-120"/>
-              </a:rPr>
-              <a:t>5 / 6</a:t>
-            </a:r>
-            <a:endParaRPr lang="en-US" sz="1000" dirty="0"/>
-          </a:p>
-        </p:txBody>
-      </p:sp>
-    </p:spTree>
-  </p:cSld>
-  <p:clrMapOvr>
-    <a:masterClrMapping/>
-  </p:clrMapOvr>
-</p:sld>
-</file>
-
-<file path=ppt/slides/slide6.xml><?xml version="1.0" encoding="utf-8"?>
-<p:sld xmlns:a="http://schemas.openxmlformats.org/drawingml/2006/main" xmlns:r="http://schemas.openxmlformats.org/officeDocument/2006/relationships" xmlns:p="http://schemas.openxmlformats.org/presentationml/2006/main">
-  <p:cSld name="Slide 6">
-    <p:spTree>
-      <p:nvGrpSpPr>
-        <p:cNvPr id="1" name=""/>
-        <p:cNvGrpSpPr/>
-        <p:nvPr/>
-      </p:nvGrpSpPr>
-      <p:grpSpPr>
-        <a:xfrm>
-          <a:off x="0" y="0"/>
-          <a:ext cx="0" cy="0"/>
-          <a:chOff x="0" y="0"/>
-          <a:chExt cx="0" cy="0"/>
-        </a:xfrm>
-      </p:grpSpPr>
-      <p:sp>
-        <p:nvSpPr>
-          <p:cNvPr id="2" name="Shape 0"/>
-          <p:cNvSpPr/>
-          <p:nvPr/>
-        </p:nvSpPr>
-        <p:spPr>
-          <a:xfrm>
-            <a:off x="0" y="0"/>
-            <a:ext cx="9144000" cy="548640"/>
-          </a:xfrm>
-          <a:prstGeom prst="rect">
-            <a:avLst/>
-          </a:prstGeom>
-          <a:solidFill>
-            <a:srgbClr val="7C3AED"/>
-          </a:solidFill>
-          <a:ln/>
-        </p:spPr>
-      </p:sp>
-      <p:sp>
-        <p:nvSpPr>
-          <p:cNvPr id="3" name="Text 1"/>
-          <p:cNvSpPr/>
-          <p:nvPr/>
-        </p:nvSpPr>
-        <p:spPr>
-          <a:xfrm>
-            <a:off x="457200" y="45720"/>
-            <a:ext cx="8229600" cy="457200"/>
-          </a:xfrm>
-          <a:prstGeom prst="rect">
-            <a:avLst/>
-          </a:prstGeom>
-          <a:noFill/>
-          <a:ln/>
-        </p:spPr>
-        <p:txBody>
-          <a:bodyPr wrap="square" rtlCol="0" anchor="ctr"/>
-          <a:lstStyle/>
-          <a:p>
-            <a:pPr indent="0" marL="0">
-              <a:buNone/>
-            </a:pPr>
-            <a:r>
-              <a:rPr lang="en-US" sz="1800" b="1" dirty="0">
-                <a:solidFill>
-                  <a:srgbClr val="FFFFFF"/>
-                </a:solidFill>
-                <a:latin typeface="Calibri" pitchFamily="34" charset="0"/>
-                <a:ea typeface="Calibri" pitchFamily="34" charset="-122"/>
-                <a:cs typeface="Calibri" pitchFamily="34" charset="-120"/>
-              </a:rPr>
-              <a:t>Choosing the right method</a:t>
-            </a:r>
-            <a:endParaRPr lang="en-US" sz="1800" dirty="0"/>
-          </a:p>
-        </p:txBody>
-      </p:sp>
-      <p:sp>
-        <p:nvSpPr>
-          <p:cNvPr id="4" name="Text 2"/>
-          <p:cNvSpPr/>
-          <p:nvPr/>
-        </p:nvSpPr>
-        <p:spPr>
-          <a:xfrm>
-            <a:off x="731520" y="1097280"/>
-            <a:ext cx="7680960" cy="3200400"/>
-          </a:xfrm>
-          <a:prstGeom prst="rect">
-            <a:avLst/>
-          </a:prstGeom>
-          <a:noFill/>
-          <a:ln/>
-        </p:spPr>
-        <p:txBody>
-          <a:bodyPr wrap="square" rtlCol="0" anchor="ctr"/>
-          <a:lstStyle/>
-          <a:p>
-            <a:pPr indent="0" marL="0">
-              <a:buNone/>
-            </a:pPr>
-            <a:r>
-              <a:rPr lang="en-US" sz="1600" dirty="0">
-                <a:solidFill>
-                  <a:srgbClr val="363636"/>
-                </a:solidFill>
-                <a:latin typeface="Calibri" pitchFamily="34" charset="0"/>
-                <a:ea typeface="Calibri" pitchFamily="34" charset="-122"/>
-                <a:cs typeface="Calibri" pitchFamily="34" charset="-120"/>
-              </a:rPr>
-              <a:t>Content for: Choosing the right method</a:t>
-            </a:r>
-            <a:endParaRPr lang="en-US" sz="1600" dirty="0"/>
-          </a:p>
-          <a:p>
-            <a:pPr indent="0" marL="0">
-              <a:buNone/>
-            </a:pPr>
-            <a:endParaRPr lang="en-US" sz="1600" dirty="0"/>
-          </a:p>
-          <a:p>
-            <a:pPr indent="0" marL="0">
-              <a:buNone/>
-            </a:pPr>
-            <a:r>
-              <a:rPr lang="en-US" sz="1600" dirty="0">
-                <a:solidFill>
-                  <a:srgbClr val="363636"/>
-                </a:solidFill>
-                <a:latin typeface="Calibri" pitchFamily="34" charset="0"/>
-                <a:ea typeface="Calibri" pitchFamily="34" charset="-122"/>
-                <a:cs typeface="Calibri" pitchFamily="34" charset="-120"/>
-              </a:rPr>
-              <a:t>Key points will be covered in class.</a:t>
-            </a:r>
-            <a:endParaRPr lang="en-US" sz="1600" dirty="0"/>
-          </a:p>
-        </p:txBody>
-      </p:sp>
-      <p:sp>
-        <p:nvSpPr>
-          <p:cNvPr id="5" name="Text 3"/>
-          <p:cNvSpPr/>
-          <p:nvPr/>
-        </p:nvSpPr>
-        <p:spPr>
-          <a:xfrm>
-            <a:off x="7772400" y="4663440"/>
-            <a:ext cx="1097280" cy="365760"/>
-          </a:xfrm>
-          <a:prstGeom prst="rect">
-            <a:avLst/>
-          </a:prstGeom>
-          <a:noFill/>
-          <a:ln/>
-        </p:spPr>
-        <p:txBody>
-          <a:bodyPr wrap="square" rtlCol="0" anchor="ctr"/>
-          <a:lstStyle/>
-          <a:p>
-            <a:pPr algn="r" indent="0" marL="0">
-              <a:buNone/>
-            </a:pPr>
-            <a:r>
-              <a:rPr lang="en-US" sz="1000" dirty="0">
-                <a:solidFill>
-                  <a:srgbClr val="999999"/>
-                </a:solidFill>
-                <a:latin typeface="Calibri" pitchFamily="34" charset="0"/>
-                <a:ea typeface="Calibri" pitchFamily="34" charset="-122"/>
-                <a:cs typeface="Calibri" pitchFamily="34" charset="-120"/>
-              </a:rPr>
-              <a:t>6 / 6</a:t>
+                  <a:srgbClr val="6B6660"/>
+                </a:solidFill>
+              </a:rPr>
+              <a:t>mrzocchi.com</a:t>
             </a:r>
             <a:endParaRPr lang="en-US" sz="1000" dirty="0"/>
           </a:p>

--- a/static/ppts/G6_Sci_T2_Separating_Mixtures.pptx
+++ b/static/ppts/G6_Sci_T2_Separating_Mixtures.pptx
@@ -9,9 +9,10 @@
     <p:sldId id="257" r:id="rId3"/>
     <p:sldId id="258" r:id="rId4"/>
     <p:sldId id="259" r:id="rId5"/>
+    <p:sldId id="260" r:id="rId6"/>
   </p:sldIdLst>
   <p:notesMasterIdLst>
-    <p:notesMasterId r:id="rId6"/>
+    <p:notesMasterId r:id="rId7"/>
   </p:notesMasterIdLst>
   <p:sldSz cx="9144000" cy="5143500"/>
   <p:notesSz cx="5143500" cy="9144000"/>
@@ -811,6 +812,94 @@
 </p:notes>
 </file>
 
+<file path=ppt/notesSlides/notesSlide5.xml><?xml version="1.0" encoding="utf-8"?>
+<p:notes xmlns:a="http://schemas.openxmlformats.org/drawingml/2006/main" xmlns:r="http://schemas.openxmlformats.org/officeDocument/2006/relationships" xmlns:p="http://schemas.openxmlformats.org/presentationml/2006/main">
+  <p:cSld>
+    <p:spTree>
+      <p:nvGrpSpPr>
+        <p:cNvPr id="1" name=""/>
+        <p:cNvGrpSpPr/>
+        <p:nvPr/>
+      </p:nvGrpSpPr>
+      <p:grpSpPr>
+        <a:xfrm>
+          <a:off x="0" y="0"/>
+          <a:ext cx="0" cy="0"/>
+          <a:chOff x="0" y="0"/>
+          <a:chExt cx="0" cy="0"/>
+        </a:xfrm>
+      </p:grpSpPr>
+      <p:sp>
+        <p:nvSpPr>
+          <p:cNvPr id="2" name="Slide Image Placeholder 1"/>
+          <p:cNvSpPr>
+            <a:spLocks noGrp="1" noRot="1" noChangeAspect="1"/>
+          </p:cNvSpPr>
+          <p:nvPr>
+            <p:ph type="sldImg"/>
+          </p:nvPr>
+        </p:nvSpPr>
+        <p:spPr/>
+      </p:sp>
+      <p:sp>
+        <p:nvSpPr>
+          <p:cNvPr id="3" name="Notes Placeholder 2"/>
+          <p:cNvSpPr>
+            <a:spLocks noGrp="1"/>
+          </p:cNvSpPr>
+          <p:nvPr>
+            <p:ph type="body" idx="1"/>
+          </p:nvPr>
+        </p:nvSpPr>
+        <p:spPr/>
+        <p:txBody>
+          <a:bodyPr/>
+          <a:lstStyle/>
+          <a:p>
+            <a:r>
+              <a:rPr lang="en-US" dirty="0"/>
+              <a:t/>
+            </a:r>
+            <a:endParaRPr lang="en-US" dirty="0"/>
+          </a:p>
+        </p:txBody>
+      </p:sp>
+      <p:sp>
+        <p:nvSpPr>
+          <p:cNvPr id="4" name="Slide Number Placeholder 3"/>
+          <p:cNvSpPr>
+            <a:spLocks noGrp="1"/>
+          </p:cNvSpPr>
+          <p:nvPr>
+            <p:ph type="sldNum" sz="quarter" idx="10"/>
+          </p:nvPr>
+        </p:nvSpPr>
+        <p:spPr/>
+        <p:txBody>
+          <a:bodyPr/>
+          <a:lstStyle/>
+          <a:p>
+            <a:fld id="{F7021451-1387-4CA6-816F-3879F97B5CBC}" type="slidenum">
+              <a:rPr lang="en-US"/>
+              <a:t>5</a:t>
+            </a:fld>
+            <a:endParaRPr lang="en-US"/>
+          </a:p>
+        </p:txBody>
+      </p:sp>
+    </p:spTree>
+    <p:extLst>
+      <p:ext uri="{BB962C8B-B14F-4D97-AF65-F5344CB8AC3E}">
+        <p14:creationId xmlns:p14="http://schemas.microsoft.com/office/powerpoint/2010/main" val="1024086991"/>
+      </p:ext>
+    </p:extLst>
+  </p:cSld>
+  <p:clrMapOvr>
+    <a:masterClrMapping/>
+  </p:clrMapOvr>
+</p:notes>
+</file>
+
 <file path=ppt/slideLayouts/slideLayout1.xml><?xml version="1.0" encoding="utf-8"?>
 <p:sldLayout xmlns:a="http://schemas.openxmlformats.org/drawingml/2006/main" xmlns:r="http://schemas.openxmlformats.org/officeDocument/2006/relationships" xmlns:p="http://schemas.openxmlformats.org/presentationml/2006/main" preserve="1">
   <p:cSld name="DEFAULT">
@@ -1170,7 +1259,7 @@
         </p:nvSpPr>
         <p:spPr>
           <a:xfrm>
-            <a:off x="731520" y="1280160"/>
+            <a:off x="731520" y="1097280"/>
             <a:ext cx="7772400" cy="1371600"/>
           </a:xfrm>
           <a:prstGeom prst="rect">
@@ -1187,7 +1276,7 @@
               <a:buNone/>
             </a:pPr>
             <a:r>
-              <a:rPr lang="en-US" sz="3600" b="1" dirty="0">
+              <a:rPr lang="en-US" sz="4000" b="1" dirty="0">
                 <a:solidFill>
                   <a:srgbClr val="FFFFFF"/>
                 </a:solidFill>
@@ -1197,7 +1286,7 @@
               </a:rPr>
               <a:t>Separating Mixtures</a:t>
             </a:r>
-            <a:endParaRPr lang="en-US" sz="3600" dirty="0"/>
+            <a:endParaRPr lang="en-US" sz="4000" dirty="0"/>
           </a:p>
         </p:txBody>
       </p:sp>
@@ -1209,7 +1298,7 @@
         </p:nvSpPr>
         <p:spPr>
           <a:xfrm>
-            <a:off x="731520" y="2743200"/>
+            <a:off x="731520" y="2560320"/>
             <a:ext cx="7772400" cy="548640"/>
           </a:xfrm>
           <a:prstGeom prst="rect">
@@ -1228,13 +1317,13 @@
             <a:r>
               <a:rPr lang="en-US" sz="1600" dirty="0">
                 <a:solidFill>
-                  <a:srgbClr val="9B9690"/>
+                  <a:srgbClr val="E9C46A"/>
                 </a:solidFill>
                 <a:latin typeface="Calibri" pitchFamily="34" charset="0"/>
                 <a:ea typeface="Calibri" pitchFamily="34" charset="-122"/>
                 <a:cs typeface="Calibri" pitchFamily="34" charset="-120"/>
               </a:rPr>
-              <a:t>G6 Science · Chemistry</a:t>
+              <a:t>Grade 6 Science · Mr Zocchi</a:t>
             </a:r>
             <a:endParaRPr lang="en-US" sz="1600" dirty="0"/>
           </a:p>
@@ -1242,14 +1331,36 @@
       </p:sp>
       <p:sp>
         <p:nvSpPr>
-          <p:cNvPr id="5" name="Text 3"/>
-          <p:cNvSpPr/>
-          <p:nvPr/>
-        </p:nvSpPr>
-        <p:spPr>
-          <a:xfrm>
-            <a:off x="731520" y="4389120"/>
-            <a:ext cx="7772400" cy="457200"/>
+          <p:cNvPr id="5" name="Shape 3"/>
+          <p:cNvSpPr/>
+          <p:nvPr/>
+        </p:nvSpPr>
+        <p:spPr>
+          <a:xfrm>
+            <a:off x="731520" y="3474720"/>
+            <a:ext cx="2011680" cy="411480"/>
+          </a:xfrm>
+          <a:prstGeom prst="roundRect">
+            <a:avLst>
+              <a:gd name="adj" fmla="val 17778"/>
+            </a:avLst>
+          </a:prstGeom>
+          <a:solidFill>
+            <a:srgbClr val="2A9D8F"/>
+          </a:solidFill>
+          <a:ln/>
+        </p:spPr>
+      </p:sp>
+      <p:sp>
+        <p:nvSpPr>
+          <p:cNvPr id="6" name="Text 4"/>
+          <p:cNvSpPr/>
+          <p:nvPr/>
+        </p:nvSpPr>
+        <p:spPr>
+          <a:xfrm>
+            <a:off x="731520" y="3474720"/>
+            <a:ext cx="2011680" cy="411480"/>
           </a:xfrm>
           <a:prstGeom prst="rect">
             <a:avLst/>
@@ -1261,21 +1372,21 @@
           <a:bodyPr wrap="square" rtlCol="0" anchor="ctr"/>
           <a:lstStyle/>
           <a:p>
-            <a:pPr indent="0" marL="0">
+            <a:pPr algn="ctr" indent="0" marL="0">
               <a:buNone/>
             </a:pPr>
             <a:r>
-              <a:rPr lang="en-US" sz="1000" dirty="0">
-                <a:solidFill>
-                  <a:srgbClr val="6B6660"/>
+              <a:rPr lang="en-US" sz="1200" b="1" dirty="0">
+                <a:solidFill>
+                  <a:srgbClr val="FFFFFF"/>
                 </a:solidFill>
                 <a:latin typeface="Calibri" pitchFamily="34" charset="0"/>
                 <a:ea typeface="Calibri" pitchFamily="34" charset="-122"/>
                 <a:cs typeface="Calibri" pitchFamily="34" charset="-120"/>
               </a:rPr>
-              <a:t>Mr Zocchi · mrzocchi.com</a:t>
-            </a:r>
-            <a:endParaRPr lang="en-US" sz="1000" dirty="0"/>
+              <a:t>Term 2 · Chemistry</a:t>
+            </a:r>
+            <a:endParaRPr lang="en-US" sz="1200" dirty="0"/>
           </a:p>
         </p:txBody>
       </p:sp>
@@ -1293,7 +1404,7 @@
     <p:bg>
       <p:bgPr>
         <a:solidFill>
-          <a:srgbClr val="FFFFFF"/>
+          <a:srgbClr val="FAF8F5"/>
         </a:solidFill>
       </p:bgPr>
     </p:bg>
@@ -1339,8 +1450,8 @@
         </p:nvSpPr>
         <p:spPr>
           <a:xfrm>
-            <a:off x="548640" y="274320"/>
-            <a:ext cx="8046720" cy="640080"/>
+            <a:off x="7772400" y="4709160"/>
+            <a:ext cx="1097280" cy="320040"/>
           </a:xfrm>
           <a:prstGeom prst="rect">
             <a:avLst/>
@@ -1349,7 +1460,46 @@
           <a:ln/>
         </p:spPr>
         <p:txBody>
-          <a:bodyPr wrap="square" lIns="0" tIns="0" rIns="0" bIns="0" rtlCol="0" anchor="ctr"/>
+          <a:bodyPr wrap="square" rtlCol="0" anchor="ctr"/>
+          <a:lstStyle/>
+          <a:p>
+            <a:pPr algn="r" indent="0" marL="0">
+              <a:buNone/>
+            </a:pPr>
+            <a:r>
+              <a:rPr lang="en-US" sz="900" dirty="0">
+                <a:solidFill>
+                  <a:srgbClr val="6B6660"/>
+                </a:solidFill>
+                <a:latin typeface="Calibri" pitchFamily="34" charset="0"/>
+                <a:ea typeface="Calibri" pitchFamily="34" charset="-122"/>
+                <a:cs typeface="Calibri" pitchFamily="34" charset="-120"/>
+              </a:rPr>
+              <a:t>2 / 5</a:t>
+            </a:r>
+            <a:endParaRPr lang="en-US" sz="900" dirty="0"/>
+          </a:p>
+        </p:txBody>
+      </p:sp>
+      <p:sp>
+        <p:nvSpPr>
+          <p:cNvPr id="4" name="Text 2"/>
+          <p:cNvSpPr/>
+          <p:nvPr/>
+        </p:nvSpPr>
+        <p:spPr>
+          <a:xfrm>
+            <a:off x="457200" y="274320"/>
+            <a:ext cx="8229600" cy="640080"/>
+          </a:xfrm>
+          <a:prstGeom prst="rect">
+            <a:avLst/>
+          </a:prstGeom>
+          <a:noFill/>
+          <a:ln/>
+        </p:spPr>
+        <p:txBody>
+          <a:bodyPr wrap="square" rtlCol="0" anchor="ctr"/>
           <a:lstStyle/>
           <a:p>
             <a:pPr indent="0" marL="0">
@@ -1372,14 +1522,66 @@
       </p:sp>
       <p:sp>
         <p:nvSpPr>
-          <p:cNvPr id="4" name="Text 2"/>
-          <p:cNvSpPr/>
-          <p:nvPr/>
-        </p:nvSpPr>
-        <p:spPr>
-          <a:xfrm>
-            <a:off x="548640" y="1097280"/>
-            <a:ext cx="8046720" cy="3474720"/>
+          <p:cNvPr id="5" name="Shape 3"/>
+          <p:cNvSpPr/>
+          <p:nvPr/>
+        </p:nvSpPr>
+        <p:spPr>
+          <a:xfrm>
+            <a:off x="457200" y="1188720"/>
+            <a:ext cx="2560320" cy="1828800"/>
+          </a:xfrm>
+          <a:prstGeom prst="rect">
+            <a:avLst/>
+          </a:prstGeom>
+          <a:solidFill>
+            <a:srgbClr val="FFFFFF"/>
+          </a:solidFill>
+          <a:ln w="12700">
+            <a:solidFill>
+              <a:srgbClr val="E5E2DC"/>
+            </a:solidFill>
+            <a:prstDash val="solid"/>
+          </a:ln>
+          <a:effectLst>
+            <a:outerShdw sx="100000" sy="100000" kx="0" ky="0" algn="bl" rotWithShape="0" blurRad="50800" dist="25400" dir="8100000">
+              <a:srgbClr val="000000">
+                <a:alpha val="10000"/>
+              </a:srgbClr>
+            </a:outerShdw>
+          </a:effectLst>
+        </p:spPr>
+      </p:sp>
+      <p:sp>
+        <p:nvSpPr>
+          <p:cNvPr id="6" name="Shape 4"/>
+          <p:cNvSpPr/>
+          <p:nvPr/>
+        </p:nvSpPr>
+        <p:spPr>
+          <a:xfrm>
+            <a:off x="457200" y="1188720"/>
+            <a:ext cx="2560320" cy="54864"/>
+          </a:xfrm>
+          <a:prstGeom prst="rect">
+            <a:avLst/>
+          </a:prstGeom>
+          <a:solidFill>
+            <a:srgbClr val="2A9D8F"/>
+          </a:solidFill>
+          <a:ln/>
+        </p:spPr>
+      </p:sp>
+      <p:sp>
+        <p:nvSpPr>
+          <p:cNvPr id="7" name="Text 5"/>
+          <p:cNvSpPr/>
+          <p:nvPr/>
+        </p:nvSpPr>
+        <p:spPr>
+          <a:xfrm>
+            <a:off x="594360" y="1325880"/>
+            <a:ext cx="2286000" cy="365760"/>
           </a:xfrm>
           <a:prstGeom prst="rect">
             <a:avLst/>
@@ -1388,39 +1590,53 @@
           <a:ln/>
         </p:spPr>
         <p:txBody>
-          <a:bodyPr wrap="square" rtlCol="0" anchor="t"/>
-          <a:lstStyle/>
-          <a:p>
-            <a:pPr marL="342900" indent="-342900">
-              <a:spcAft>
-                <a:spcPts val="800"/>
-              </a:spcAft>
-              <a:buSzPct val="100000"/>
-              <a:buChar char="•"/>
-            </a:pPr>
-            <a:r>
-              <a:rPr lang="en-US" sz="1500" dirty="0">
-                <a:solidFill>
-                  <a:srgbClr val="3D3A36"/>
+          <a:bodyPr wrap="square" rtlCol="0" anchor="ctr"/>
+          <a:lstStyle/>
+          <a:p>
+            <a:pPr indent="0" marL="0">
+              <a:buNone/>
+            </a:pPr>
+            <a:r>
+              <a:rPr lang="en-US" sz="1400" b="1" dirty="0">
+                <a:solidFill>
+                  <a:srgbClr val="1B2A4A"/>
                 </a:solidFill>
                 <a:latin typeface="Calibri" pitchFamily="34" charset="0"/>
                 <a:ea typeface="Calibri" pitchFamily="34" charset="-122"/>
                 <a:cs typeface="Calibri" pitchFamily="34" charset="-120"/>
               </a:rPr>
-              <a:t>FILTRATION — separates insoluble solids from liquids (e.g., sand from water)</a:t>
-            </a:r>
-            <a:endParaRPr lang="en-US" sz="1500" dirty="0"/>
-          </a:p>
-          <a:p>
-            <a:pPr marL="342900" indent="-342900">
-              <a:spcAft>
-                <a:spcPts val="800"/>
-              </a:spcAft>
-              <a:buSzPct val="100000"/>
-              <a:buChar char="•"/>
-            </a:pPr>
-            <a:r>
-              <a:rPr lang="en-US" sz="1500" dirty="0">
+              <a:t>Filtration</a:t>
+            </a:r>
+            <a:endParaRPr lang="en-US" sz="1400" dirty="0"/>
+          </a:p>
+        </p:txBody>
+      </p:sp>
+      <p:sp>
+        <p:nvSpPr>
+          <p:cNvPr id="8" name="Text 6"/>
+          <p:cNvSpPr/>
+          <p:nvPr/>
+        </p:nvSpPr>
+        <p:spPr>
+          <a:xfrm>
+            <a:off x="594360" y="1737360"/>
+            <a:ext cx="2286000" cy="1097280"/>
+          </a:xfrm>
+          <a:prstGeom prst="rect">
+            <a:avLst/>
+          </a:prstGeom>
+          <a:noFill/>
+          <a:ln/>
+        </p:spPr>
+        <p:txBody>
+          <a:bodyPr wrap="square" rtlCol="0" anchor="t"/>
+          <a:lstStyle/>
+          <a:p>
+            <a:pPr indent="0" marL="0">
+              <a:buNone/>
+            </a:pPr>
+            <a:r>
+              <a:rPr lang="en-US" sz="1100" dirty="0">
                 <a:solidFill>
                   <a:srgbClr val="3D3A36"/>
                 </a:solidFill>
@@ -1428,41 +1644,129 @@
                 <a:ea typeface="Calibri" pitchFamily="34" charset="-122"/>
                 <a:cs typeface="Calibri" pitchFamily="34" charset="-120"/>
               </a:rPr>
-              <a:t>EVAPORATION — heats solution so liquid evaporates, solid remains (e.g., salt)</a:t>
-            </a:r>
-            <a:endParaRPr lang="en-US" sz="1500" dirty="0"/>
-          </a:p>
-          <a:p>
-            <a:pPr marL="342900" indent="-342900">
-              <a:spcAft>
-                <a:spcPts val="800"/>
-              </a:spcAft>
-              <a:buSzPct val="100000"/>
-              <a:buChar char="•"/>
-            </a:pPr>
-            <a:r>
-              <a:rPr lang="en-US" sz="1500" dirty="0">
-                <a:solidFill>
-                  <a:srgbClr val="3D3A36"/>
+              <a:t>Separates an insoluble solid from a liquid. The mixture is poured through filter paper in a funnel. Solid stays in paper (residue), liquid passes through (filtrate). Example: sand from water.</a:t>
+            </a:r>
+            <a:endParaRPr lang="en-US" sz="1100" dirty="0"/>
+          </a:p>
+        </p:txBody>
+      </p:sp>
+      <p:sp>
+        <p:nvSpPr>
+          <p:cNvPr id="9" name="Shape 7"/>
+          <p:cNvSpPr/>
+          <p:nvPr/>
+        </p:nvSpPr>
+        <p:spPr>
+          <a:xfrm>
+            <a:off x="3291840" y="1188720"/>
+            <a:ext cx="2560320" cy="1828800"/>
+          </a:xfrm>
+          <a:prstGeom prst="rect">
+            <a:avLst/>
+          </a:prstGeom>
+          <a:solidFill>
+            <a:srgbClr val="FFFFFF"/>
+          </a:solidFill>
+          <a:ln w="12700">
+            <a:solidFill>
+              <a:srgbClr val="E5E2DC"/>
+            </a:solidFill>
+            <a:prstDash val="solid"/>
+          </a:ln>
+          <a:effectLst>
+            <a:outerShdw sx="100000" sy="100000" kx="0" ky="0" algn="bl" rotWithShape="0" blurRad="50800" dist="25400" dir="8100000">
+              <a:srgbClr val="000000">
+                <a:alpha val="10000"/>
+              </a:srgbClr>
+            </a:outerShdw>
+          </a:effectLst>
+        </p:spPr>
+      </p:sp>
+      <p:sp>
+        <p:nvSpPr>
+          <p:cNvPr id="10" name="Shape 8"/>
+          <p:cNvSpPr/>
+          <p:nvPr/>
+        </p:nvSpPr>
+        <p:spPr>
+          <a:xfrm>
+            <a:off x="3291840" y="1188720"/>
+            <a:ext cx="2560320" cy="54864"/>
+          </a:xfrm>
+          <a:prstGeom prst="rect">
+            <a:avLst/>
+          </a:prstGeom>
+          <a:solidFill>
+            <a:srgbClr val="2A9D8F"/>
+          </a:solidFill>
+          <a:ln/>
+        </p:spPr>
+      </p:sp>
+      <p:sp>
+        <p:nvSpPr>
+          <p:cNvPr id="11" name="Text 9"/>
+          <p:cNvSpPr/>
+          <p:nvPr/>
+        </p:nvSpPr>
+        <p:spPr>
+          <a:xfrm>
+            <a:off x="3429000" y="1325880"/>
+            <a:ext cx="2286000" cy="365760"/>
+          </a:xfrm>
+          <a:prstGeom prst="rect">
+            <a:avLst/>
+          </a:prstGeom>
+          <a:noFill/>
+          <a:ln/>
+        </p:spPr>
+        <p:txBody>
+          <a:bodyPr wrap="square" rtlCol="0" anchor="ctr"/>
+          <a:lstStyle/>
+          <a:p>
+            <a:pPr indent="0" marL="0">
+              <a:buNone/>
+            </a:pPr>
+            <a:r>
+              <a:rPr lang="en-US" sz="1400" b="1" dirty="0">
+                <a:solidFill>
+                  <a:srgbClr val="1B2A4A"/>
                 </a:solidFill>
                 <a:latin typeface="Calibri" pitchFamily="34" charset="0"/>
                 <a:ea typeface="Calibri" pitchFamily="34" charset="-122"/>
                 <a:cs typeface="Calibri" pitchFamily="34" charset="-120"/>
               </a:rPr>
-              <a:t>DISTILLATION — collects the evaporated liquid (pure water from salt water)</a:t>
-            </a:r>
-            <a:endParaRPr lang="en-US" sz="1500" dirty="0"/>
-          </a:p>
-          <a:p>
-            <a:pPr marL="342900" indent="-342900">
-              <a:spcAft>
-                <a:spcPts val="800"/>
-              </a:spcAft>
-              <a:buSzPct val="100000"/>
-              <a:buChar char="•"/>
-            </a:pPr>
-            <a:r>
-              <a:rPr lang="en-US" sz="1500" dirty="0">
+              <a:t>Evaporation</a:t>
+            </a:r>
+            <a:endParaRPr lang="en-US" sz="1400" dirty="0"/>
+          </a:p>
+        </p:txBody>
+      </p:sp>
+      <p:sp>
+        <p:nvSpPr>
+          <p:cNvPr id="12" name="Text 10"/>
+          <p:cNvSpPr/>
+          <p:nvPr/>
+        </p:nvSpPr>
+        <p:spPr>
+          <a:xfrm>
+            <a:off x="3429000" y="1737360"/>
+            <a:ext cx="2286000" cy="1097280"/>
+          </a:xfrm>
+          <a:prstGeom prst="rect">
+            <a:avLst/>
+          </a:prstGeom>
+          <a:noFill/>
+          <a:ln/>
+        </p:spPr>
+        <p:txBody>
+          <a:bodyPr wrap="square" rtlCol="0" anchor="t"/>
+          <a:lstStyle/>
+          <a:p>
+            <a:pPr indent="0" marL="0">
+              <a:buNone/>
+            </a:pPr>
+            <a:r>
+              <a:rPr lang="en-US" sz="1100" dirty="0">
                 <a:solidFill>
                   <a:srgbClr val="3D3A36"/>
                 </a:solidFill>
@@ -1470,63 +1774,113 @@
                 <a:ea typeface="Calibri" pitchFamily="34" charset="-122"/>
                 <a:cs typeface="Calibri" pitchFamily="34" charset="-120"/>
               </a:rPr>
-              <a:t>CHROMATOGRAPHY — separates colours/substances in a mixture (e.g., ink)</a:t>
-            </a:r>
-            <a:endParaRPr lang="en-US" sz="1500" dirty="0"/>
-          </a:p>
-          <a:p>
-            <a:pPr marL="342900" indent="-342900">
-              <a:spcAft>
-                <a:spcPts val="800"/>
-              </a:spcAft>
-              <a:buSzPct val="100000"/>
-              <a:buChar char="•"/>
-            </a:pPr>
-            <a:r>
-              <a:rPr lang="en-US" sz="1500" dirty="0">
-                <a:solidFill>
-                  <a:srgbClr val="3D3A36"/>
+              <a:t>Separates a dissolved solid from a solution. Heat the solution — water evaporates, solid crystals remain. Example: getting salt from salt water.</a:t>
+            </a:r>
+            <a:endParaRPr lang="en-US" sz="1100" dirty="0"/>
+          </a:p>
+        </p:txBody>
+      </p:sp>
+      <p:sp>
+        <p:nvSpPr>
+          <p:cNvPr id="13" name="Shape 11"/>
+          <p:cNvSpPr/>
+          <p:nvPr/>
+        </p:nvSpPr>
+        <p:spPr>
+          <a:xfrm>
+            <a:off x="6126480" y="1188720"/>
+            <a:ext cx="2560320" cy="1828800"/>
+          </a:xfrm>
+          <a:prstGeom prst="rect">
+            <a:avLst/>
+          </a:prstGeom>
+          <a:solidFill>
+            <a:srgbClr val="FFFFFF"/>
+          </a:solidFill>
+          <a:ln w="12700">
+            <a:solidFill>
+              <a:srgbClr val="E5E2DC"/>
+            </a:solidFill>
+            <a:prstDash val="solid"/>
+          </a:ln>
+          <a:effectLst>
+            <a:outerShdw sx="100000" sy="100000" kx="0" ky="0" algn="bl" rotWithShape="0" blurRad="50800" dist="25400" dir="8100000">
+              <a:srgbClr val="000000">
+                <a:alpha val="10000"/>
+              </a:srgbClr>
+            </a:outerShdw>
+          </a:effectLst>
+        </p:spPr>
+      </p:sp>
+      <p:sp>
+        <p:nvSpPr>
+          <p:cNvPr id="14" name="Shape 12"/>
+          <p:cNvSpPr/>
+          <p:nvPr/>
+        </p:nvSpPr>
+        <p:spPr>
+          <a:xfrm>
+            <a:off x="6126480" y="1188720"/>
+            <a:ext cx="2560320" cy="54864"/>
+          </a:xfrm>
+          <a:prstGeom prst="rect">
+            <a:avLst/>
+          </a:prstGeom>
+          <a:solidFill>
+            <a:srgbClr val="2A9D8F"/>
+          </a:solidFill>
+          <a:ln/>
+        </p:spPr>
+      </p:sp>
+      <p:sp>
+        <p:nvSpPr>
+          <p:cNvPr id="15" name="Text 13"/>
+          <p:cNvSpPr/>
+          <p:nvPr/>
+        </p:nvSpPr>
+        <p:spPr>
+          <a:xfrm>
+            <a:off x="6263640" y="1325880"/>
+            <a:ext cx="2286000" cy="365760"/>
+          </a:xfrm>
+          <a:prstGeom prst="rect">
+            <a:avLst/>
+          </a:prstGeom>
+          <a:noFill/>
+          <a:ln/>
+        </p:spPr>
+        <p:txBody>
+          <a:bodyPr wrap="square" rtlCol="0" anchor="ctr"/>
+          <a:lstStyle/>
+          <a:p>
+            <a:pPr indent="0" marL="0">
+              <a:buNone/>
+            </a:pPr>
+            <a:r>
+              <a:rPr lang="en-US" sz="1400" b="1" dirty="0">
+                <a:solidFill>
+                  <a:srgbClr val="1B2A4A"/>
                 </a:solidFill>
                 <a:latin typeface="Calibri" pitchFamily="34" charset="0"/>
                 <a:ea typeface="Calibri" pitchFamily="34" charset="-122"/>
                 <a:cs typeface="Calibri" pitchFamily="34" charset="-120"/>
               </a:rPr>
-              <a:t>MAGNETISM — separates magnetic materials (e.g., iron from sand)</a:t>
-            </a:r>
-            <a:endParaRPr lang="en-US" sz="1500" dirty="0"/>
-          </a:p>
-        </p:txBody>
-      </p:sp>
-      <p:sp>
-        <p:nvSpPr>
-          <p:cNvPr id="5" name="Shape 3"/>
-          <p:cNvSpPr/>
-          <p:nvPr/>
-        </p:nvSpPr>
-        <p:spPr>
-          <a:xfrm>
-            <a:off x="548640" y="4754880"/>
-            <a:ext cx="8046720" cy="9144"/>
-          </a:xfrm>
-          <a:prstGeom prst="rect">
-            <a:avLst/>
-          </a:prstGeom>
-          <a:solidFill>
-            <a:srgbClr val="F3F1EE"/>
-          </a:solidFill>
-          <a:ln/>
-        </p:spPr>
-      </p:sp>
-      <p:sp>
-        <p:nvSpPr>
-          <p:cNvPr id="6" name="Text 4"/>
-          <p:cNvSpPr/>
-          <p:nvPr/>
-        </p:nvSpPr>
-        <p:spPr>
-          <a:xfrm>
-            <a:off x="548640" y="4800600"/>
-            <a:ext cx="3657600" cy="274320"/>
+              <a:t>Distillation</a:t>
+            </a:r>
+            <a:endParaRPr lang="en-US" sz="1400" dirty="0"/>
+          </a:p>
+        </p:txBody>
+      </p:sp>
+      <p:sp>
+        <p:nvSpPr>
+          <p:cNvPr id="16" name="Text 14"/>
+          <p:cNvSpPr/>
+          <p:nvPr/>
+        </p:nvSpPr>
+        <p:spPr>
+          <a:xfrm>
+            <a:off x="6263640" y="1737360"/>
+            <a:ext cx="2286000" cy="1097280"/>
           </a:xfrm>
           <a:prstGeom prst="rect">
             <a:avLst/>
@@ -1535,21 +1889,24 @@
           <a:ln/>
         </p:spPr>
         <p:txBody>
-          <a:bodyPr wrap="square" rtlCol="0" anchor="ctr"/>
+          <a:bodyPr wrap="square" rtlCol="0" anchor="t"/>
           <a:lstStyle/>
           <a:p>
             <a:pPr indent="0" marL="0">
               <a:buNone/>
             </a:pPr>
             <a:r>
-              <a:rPr lang="en-US" sz="800" dirty="0">
-                <a:solidFill>
-                  <a:srgbClr val="9B9690"/>
-                </a:solidFill>
-              </a:rPr>
-              <a:t>mrzocchi.com</a:t>
-            </a:r>
-            <a:endParaRPr lang="en-US" sz="800" dirty="0"/>
+              <a:rPr lang="en-US" sz="1100" dirty="0">
+                <a:solidFill>
+                  <a:srgbClr val="3D3A36"/>
+                </a:solidFill>
+                <a:latin typeface="Calibri" pitchFamily="34" charset="0"/>
+                <a:ea typeface="Calibri" pitchFamily="34" charset="-122"/>
+                <a:cs typeface="Calibri" pitchFamily="34" charset="-120"/>
+              </a:rPr>
+              <a:t>Separates a liquid from a solution. Heat to boil — steam rises, passes through a condenser, cools back to liquid. Collects the pure solvent. Example: pure water from salt water.</a:t>
+            </a:r>
+            <a:endParaRPr lang="en-US" sz="1100" dirty="0"/>
           </a:p>
         </p:txBody>
       </p:sp>
@@ -1567,7 +1924,7 @@
     <p:bg>
       <p:bgPr>
         <a:solidFill>
-          <a:srgbClr val="FFFFFF"/>
+          <a:srgbClr val="FAF8F5"/>
         </a:solidFill>
       </p:bgPr>
     </p:bg>
@@ -1613,8 +1970,8 @@
         </p:nvSpPr>
         <p:spPr>
           <a:xfrm>
-            <a:off x="548640" y="274320"/>
-            <a:ext cx="8046720" cy="640080"/>
+            <a:off x="7772400" y="4709160"/>
+            <a:ext cx="1097280" cy="320040"/>
           </a:xfrm>
           <a:prstGeom prst="rect">
             <a:avLst/>
@@ -1623,7 +1980,46 @@
           <a:ln/>
         </p:spPr>
         <p:txBody>
-          <a:bodyPr wrap="square" lIns="0" tIns="0" rIns="0" bIns="0" rtlCol="0" anchor="ctr"/>
+          <a:bodyPr wrap="square" rtlCol="0" anchor="ctr"/>
+          <a:lstStyle/>
+          <a:p>
+            <a:pPr algn="r" indent="0" marL="0">
+              <a:buNone/>
+            </a:pPr>
+            <a:r>
+              <a:rPr lang="en-US" sz="900" dirty="0">
+                <a:solidFill>
+                  <a:srgbClr val="6B6660"/>
+                </a:solidFill>
+                <a:latin typeface="Calibri" pitchFamily="34" charset="0"/>
+                <a:ea typeface="Calibri" pitchFamily="34" charset="-122"/>
+                <a:cs typeface="Calibri" pitchFamily="34" charset="-120"/>
+              </a:rPr>
+              <a:t>3 / 5</a:t>
+            </a:r>
+            <a:endParaRPr lang="en-US" sz="900" dirty="0"/>
+          </a:p>
+        </p:txBody>
+      </p:sp>
+      <p:sp>
+        <p:nvSpPr>
+          <p:cNvPr id="4" name="Text 2"/>
+          <p:cNvSpPr/>
+          <p:nvPr/>
+        </p:nvSpPr>
+        <p:spPr>
+          <a:xfrm>
+            <a:off x="457200" y="274320"/>
+            <a:ext cx="8229600" cy="640080"/>
+          </a:xfrm>
+          <a:prstGeom prst="rect">
+            <a:avLst/>
+          </a:prstGeom>
+          <a:noFill/>
+          <a:ln/>
+        </p:spPr>
+        <p:txBody>
+          <a:bodyPr wrap="square" rtlCol="0" anchor="ctr"/>
           <a:lstStyle/>
           <a:p>
             <a:pPr indent="0" marL="0">
@@ -1638,7 +2034,7 @@
                 <a:ea typeface="Georgia" pitchFamily="34" charset="-122"/>
                 <a:cs typeface="Georgia" pitchFamily="34" charset="-120"/>
               </a:rPr>
-              <a:t>Choosing a Method</a:t>
+              <a:t>More Techniques</a:t>
             </a:r>
             <a:endParaRPr lang="en-US" sz="2600" dirty="0"/>
           </a:p>
@@ -1646,22 +2042,27 @@
       </p:sp>
       <p:sp>
         <p:nvSpPr>
-          <p:cNvPr id="4" name="Shape 2"/>
-          <p:cNvSpPr/>
-          <p:nvPr/>
-        </p:nvSpPr>
-        <p:spPr>
-          <a:xfrm>
-            <a:off x="457200" y="1097280"/>
-            <a:ext cx="3840480" cy="3474720"/>
-          </a:xfrm>
-          <a:prstGeom prst="rect">
-            <a:avLst/>
-          </a:prstGeom>
-          <a:solidFill>
-            <a:srgbClr val="F3F1EE"/>
-          </a:solidFill>
-          <a:ln/>
+          <p:cNvPr id="5" name="Shape 3"/>
+          <p:cNvSpPr/>
+          <p:nvPr/>
+        </p:nvSpPr>
+        <p:spPr>
+          <a:xfrm>
+            <a:off x="457200" y="1188720"/>
+            <a:ext cx="2560320" cy="1828800"/>
+          </a:xfrm>
+          <a:prstGeom prst="rect">
+            <a:avLst/>
+          </a:prstGeom>
+          <a:solidFill>
+            <a:srgbClr val="FFFFFF"/>
+          </a:solidFill>
+          <a:ln w="12700">
+            <a:solidFill>
+              <a:srgbClr val="E5E2DC"/>
+            </a:solidFill>
+            <a:prstDash val="solid"/>
+          </a:ln>
           <a:effectLst>
             <a:outerShdw sx="100000" sy="100000" kx="0" ky="0" algn="bl" rotWithShape="0" blurRad="50800" dist="25400" dir="8100000">
               <a:srgbClr val="000000">
@@ -1673,14 +2074,34 @@
       </p:sp>
       <p:sp>
         <p:nvSpPr>
-          <p:cNvPr id="5" name="Text 3"/>
-          <p:cNvSpPr/>
-          <p:nvPr/>
-        </p:nvSpPr>
-        <p:spPr>
-          <a:xfrm>
-            <a:off x="640080" y="1234440"/>
-            <a:ext cx="3474720" cy="411480"/>
+          <p:cNvPr id="6" name="Shape 4"/>
+          <p:cNvSpPr/>
+          <p:nvPr/>
+        </p:nvSpPr>
+        <p:spPr>
+          <a:xfrm>
+            <a:off x="457200" y="1188720"/>
+            <a:ext cx="2560320" cy="54864"/>
+          </a:xfrm>
+          <a:prstGeom prst="rect">
+            <a:avLst/>
+          </a:prstGeom>
+          <a:solidFill>
+            <a:srgbClr val="2A9D8F"/>
+          </a:solidFill>
+          <a:ln/>
+        </p:spPr>
+      </p:sp>
+      <p:sp>
+        <p:nvSpPr>
+          <p:cNvPr id="7" name="Text 5"/>
+          <p:cNvSpPr/>
+          <p:nvPr/>
+        </p:nvSpPr>
+        <p:spPr>
+          <a:xfrm>
+            <a:off x="594360" y="1325880"/>
+            <a:ext cx="2286000" cy="365760"/>
           </a:xfrm>
           <a:prstGeom prst="rect">
             <a:avLst/>
@@ -1696,71 +2117,46 @@
               <a:buNone/>
             </a:pPr>
             <a:r>
-              <a:rPr lang="en-US" sz="1600" b="1" dirty="0">
+              <a:rPr lang="en-US" sz="1400" b="1" dirty="0">
                 <a:solidFill>
                   <a:srgbClr val="1B2A4A"/>
-                </a:solidFill>
-                <a:latin typeface="Georgia" pitchFamily="34" charset="0"/>
-                <a:ea typeface="Georgia" pitchFamily="34" charset="-122"/>
-                <a:cs typeface="Georgia" pitchFamily="34" charset="-120"/>
-              </a:rPr>
-              <a:t>For Insoluble Solids</a:t>
-            </a:r>
-            <a:endParaRPr lang="en-US" sz="1600" dirty="0"/>
-          </a:p>
-        </p:txBody>
-      </p:sp>
-      <p:sp>
-        <p:nvSpPr>
-          <p:cNvPr id="6" name="Text 4"/>
-          <p:cNvSpPr/>
-          <p:nvPr/>
-        </p:nvSpPr>
-        <p:spPr>
-          <a:xfrm>
-            <a:off x="640080" y="1737360"/>
-            <a:ext cx="3474720" cy="2651760"/>
-          </a:xfrm>
-          <a:prstGeom prst="rect">
-            <a:avLst/>
-          </a:prstGeom>
-          <a:noFill/>
-          <a:ln/>
-        </p:spPr>
-        <p:txBody>
-          <a:bodyPr wrap="square" rtlCol="0" anchor="t"/>
-          <a:lstStyle/>
-          <a:p>
-            <a:pPr marL="342900" indent="-342900">
-              <a:spcAft>
-                <a:spcPts val="600"/>
-              </a:spcAft>
-              <a:buSzPct val="100000"/>
-              <a:buChar char="•"/>
-            </a:pPr>
-            <a:r>
-              <a:rPr lang="en-US" sz="1300" dirty="0">
-                <a:solidFill>
-                  <a:srgbClr val="3D3A36"/>
                 </a:solidFill>
                 <a:latin typeface="Calibri" pitchFamily="34" charset="0"/>
                 <a:ea typeface="Calibri" pitchFamily="34" charset="-122"/>
                 <a:cs typeface="Calibri" pitchFamily="34" charset="-120"/>
               </a:rPr>
-              <a:t>Filtration: solid stays in filter paper</a:t>
-            </a:r>
-            <a:endParaRPr lang="en-US" sz="1300" dirty="0"/>
-          </a:p>
-          <a:p>
-            <a:pPr marL="342900" indent="-342900">
-              <a:spcAft>
-                <a:spcPts val="600"/>
-              </a:spcAft>
-              <a:buSzPct val="100000"/>
-              <a:buChar char="•"/>
-            </a:pPr>
-            <a:r>
-              <a:rPr lang="en-US" sz="1300" dirty="0">
+              <a:t>Chromatography</a:t>
+            </a:r>
+            <a:endParaRPr lang="en-US" sz="1400" dirty="0"/>
+          </a:p>
+        </p:txBody>
+      </p:sp>
+      <p:sp>
+        <p:nvSpPr>
+          <p:cNvPr id="8" name="Text 6"/>
+          <p:cNvSpPr/>
+          <p:nvPr/>
+        </p:nvSpPr>
+        <p:spPr>
+          <a:xfrm>
+            <a:off x="594360" y="1737360"/>
+            <a:ext cx="2286000" cy="1097280"/>
+          </a:xfrm>
+          <a:prstGeom prst="rect">
+            <a:avLst/>
+          </a:prstGeom>
+          <a:noFill/>
+          <a:ln/>
+        </p:spPr>
+        <p:txBody>
+          <a:bodyPr wrap="square" rtlCol="0" anchor="t"/>
+          <a:lstStyle/>
+          <a:p>
+            <a:pPr indent="0" marL="0">
+              <a:buNone/>
+            </a:pPr>
+            <a:r>
+              <a:rPr lang="en-US" sz="1100" dirty="0">
                 <a:solidFill>
                   <a:srgbClr val="3D3A36"/>
                 </a:solidFill>
@@ -1768,72 +2164,35 @@
                 <a:ea typeface="Calibri" pitchFamily="34" charset="-122"/>
                 <a:cs typeface="Calibri" pitchFamily="34" charset="-120"/>
               </a:rPr>
-              <a:t>Sieving: separates by particle size</a:t>
-            </a:r>
-            <a:endParaRPr lang="en-US" sz="1300" dirty="0"/>
-          </a:p>
-          <a:p>
-            <a:pPr marL="342900" indent="-342900">
-              <a:spcAft>
-                <a:spcPts val="600"/>
-              </a:spcAft>
-              <a:buSzPct val="100000"/>
-              <a:buChar char="•"/>
-            </a:pPr>
-            <a:r>
-              <a:rPr lang="en-US" sz="1300" dirty="0">
-                <a:solidFill>
-                  <a:srgbClr val="3D3A36"/>
-                </a:solidFill>
-                <a:latin typeface="Calibri" pitchFamily="34" charset="0"/>
-                <a:ea typeface="Calibri" pitchFamily="34" charset="-122"/>
-                <a:cs typeface="Calibri" pitchFamily="34" charset="-120"/>
-              </a:rPr>
-              <a:t>Magnetism: if one part is magnetic</a:t>
-            </a:r>
-            <a:endParaRPr lang="en-US" sz="1300" dirty="0"/>
-          </a:p>
-          <a:p>
-            <a:pPr marL="342900" indent="-342900">
-              <a:spcAft>
-                <a:spcPts val="600"/>
-              </a:spcAft>
-              <a:buSzPct val="100000"/>
-              <a:buChar char="•"/>
-            </a:pPr>
-            <a:r>
-              <a:rPr lang="en-US" sz="1300" dirty="0">
-                <a:solidFill>
-                  <a:srgbClr val="3D3A36"/>
-                </a:solidFill>
-                <a:latin typeface="Calibri" pitchFamily="34" charset="0"/>
-                <a:ea typeface="Calibri" pitchFamily="34" charset="-122"/>
-                <a:cs typeface="Calibri" pitchFamily="34" charset="-120"/>
-              </a:rPr>
-              <a:t>Decanting: pouring off liquid carefully</a:t>
-            </a:r>
-            <a:endParaRPr lang="en-US" sz="1300" dirty="0"/>
-          </a:p>
-        </p:txBody>
-      </p:sp>
-      <p:sp>
-        <p:nvSpPr>
-          <p:cNvPr id="7" name="Shape 5"/>
-          <p:cNvSpPr/>
-          <p:nvPr/>
-        </p:nvSpPr>
-        <p:spPr>
-          <a:xfrm>
-            <a:off x="4846320" y="1097280"/>
-            <a:ext cx="3840480" cy="3474720"/>
-          </a:xfrm>
-          <a:prstGeom prst="rect">
-            <a:avLst/>
-          </a:prstGeom>
-          <a:solidFill>
-            <a:srgbClr val="F3F1EE"/>
-          </a:solidFill>
-          <a:ln/>
+              <a:t>Separates mixtures of colours/dyes. A spot of mixture is placed on paper. Solvent travels up the paper carrying different substances at different speeds. Example: separating ink colours.</a:t>
+            </a:r>
+            <a:endParaRPr lang="en-US" sz="1100" dirty="0"/>
+          </a:p>
+        </p:txBody>
+      </p:sp>
+      <p:sp>
+        <p:nvSpPr>
+          <p:cNvPr id="9" name="Shape 7"/>
+          <p:cNvSpPr/>
+          <p:nvPr/>
+        </p:nvSpPr>
+        <p:spPr>
+          <a:xfrm>
+            <a:off x="3291840" y="1188720"/>
+            <a:ext cx="2560320" cy="1828800"/>
+          </a:xfrm>
+          <a:prstGeom prst="rect">
+            <a:avLst/>
+          </a:prstGeom>
+          <a:solidFill>
+            <a:srgbClr val="FFFFFF"/>
+          </a:solidFill>
+          <a:ln w="12700">
+            <a:solidFill>
+              <a:srgbClr val="E5E2DC"/>
+            </a:solidFill>
+            <a:prstDash val="solid"/>
+          </a:ln>
           <a:effectLst>
             <a:outerShdw sx="100000" sy="100000" kx="0" ky="0" algn="bl" rotWithShape="0" blurRad="50800" dist="25400" dir="8100000">
               <a:srgbClr val="000000">
@@ -1845,14 +2204,34 @@
       </p:sp>
       <p:sp>
         <p:nvSpPr>
-          <p:cNvPr id="8" name="Text 6"/>
-          <p:cNvSpPr/>
-          <p:nvPr/>
-        </p:nvSpPr>
-        <p:spPr>
-          <a:xfrm>
-            <a:off x="5029200" y="1234440"/>
-            <a:ext cx="3474720" cy="411480"/>
+          <p:cNvPr id="10" name="Shape 8"/>
+          <p:cNvSpPr/>
+          <p:nvPr/>
+        </p:nvSpPr>
+        <p:spPr>
+          <a:xfrm>
+            <a:off x="3291840" y="1188720"/>
+            <a:ext cx="2560320" cy="54864"/>
+          </a:xfrm>
+          <a:prstGeom prst="rect">
+            <a:avLst/>
+          </a:prstGeom>
+          <a:solidFill>
+            <a:srgbClr val="2A9D8F"/>
+          </a:solidFill>
+          <a:ln/>
+        </p:spPr>
+      </p:sp>
+      <p:sp>
+        <p:nvSpPr>
+          <p:cNvPr id="11" name="Text 9"/>
+          <p:cNvSpPr/>
+          <p:nvPr/>
+        </p:nvSpPr>
+        <p:spPr>
+          <a:xfrm>
+            <a:off x="3429000" y="1325880"/>
+            <a:ext cx="2286000" cy="365760"/>
           </a:xfrm>
           <a:prstGeom prst="rect">
             <a:avLst/>
@@ -1868,71 +2247,46 @@
               <a:buNone/>
             </a:pPr>
             <a:r>
-              <a:rPr lang="en-US" sz="1600" b="1" dirty="0">
+              <a:rPr lang="en-US" sz="1400" b="1" dirty="0">
                 <a:solidFill>
                   <a:srgbClr val="1B2A4A"/>
-                </a:solidFill>
-                <a:latin typeface="Georgia" pitchFamily="34" charset="0"/>
-                <a:ea typeface="Georgia" pitchFamily="34" charset="-122"/>
-                <a:cs typeface="Georgia" pitchFamily="34" charset="-120"/>
-              </a:rPr>
-              <a:t>For Dissolved Solids</a:t>
-            </a:r>
-            <a:endParaRPr lang="en-US" sz="1600" dirty="0"/>
-          </a:p>
-        </p:txBody>
-      </p:sp>
-      <p:sp>
-        <p:nvSpPr>
-          <p:cNvPr id="9" name="Text 7"/>
-          <p:cNvSpPr/>
-          <p:nvPr/>
-        </p:nvSpPr>
-        <p:spPr>
-          <a:xfrm>
-            <a:off x="5029200" y="1737360"/>
-            <a:ext cx="3474720" cy="2651760"/>
-          </a:xfrm>
-          <a:prstGeom prst="rect">
-            <a:avLst/>
-          </a:prstGeom>
-          <a:noFill/>
-          <a:ln/>
-        </p:spPr>
-        <p:txBody>
-          <a:bodyPr wrap="square" rtlCol="0" anchor="t"/>
-          <a:lstStyle/>
-          <a:p>
-            <a:pPr marL="342900" indent="-342900">
-              <a:spcAft>
-                <a:spcPts val="600"/>
-              </a:spcAft>
-              <a:buSzPct val="100000"/>
-              <a:buChar char="•"/>
-            </a:pPr>
-            <a:r>
-              <a:rPr lang="en-US" sz="1300" dirty="0">
-                <a:solidFill>
-                  <a:srgbClr val="3D3A36"/>
                 </a:solidFill>
                 <a:latin typeface="Calibri" pitchFamily="34" charset="0"/>
                 <a:ea typeface="Calibri" pitchFamily="34" charset="-122"/>
                 <a:cs typeface="Calibri" pitchFamily="34" charset="-120"/>
               </a:rPr>
-              <a:t>Evaporation: get the solid back</a:t>
-            </a:r>
-            <a:endParaRPr lang="en-US" sz="1300" dirty="0"/>
-          </a:p>
-          <a:p>
-            <a:pPr marL="342900" indent="-342900">
-              <a:spcAft>
-                <a:spcPts val="600"/>
-              </a:spcAft>
-              <a:buSzPct val="100000"/>
-              <a:buChar char="•"/>
-            </a:pPr>
-            <a:r>
-              <a:rPr lang="en-US" sz="1300" dirty="0">
+              <a:t>Magnetic Separation</a:t>
+            </a:r>
+            <a:endParaRPr lang="en-US" sz="1400" dirty="0"/>
+          </a:p>
+        </p:txBody>
+      </p:sp>
+      <p:sp>
+        <p:nvSpPr>
+          <p:cNvPr id="12" name="Text 10"/>
+          <p:cNvSpPr/>
+          <p:nvPr/>
+        </p:nvSpPr>
+        <p:spPr>
+          <a:xfrm>
+            <a:off x="3429000" y="1737360"/>
+            <a:ext cx="2286000" cy="1097280"/>
+          </a:xfrm>
+          <a:prstGeom prst="rect">
+            <a:avLst/>
+          </a:prstGeom>
+          <a:noFill/>
+          <a:ln/>
+        </p:spPr>
+        <p:txBody>
+          <a:bodyPr wrap="square" rtlCol="0" anchor="t"/>
+          <a:lstStyle/>
+          <a:p>
+            <a:pPr indent="0" marL="0">
+              <a:buNone/>
+            </a:pPr>
+            <a:r>
+              <a:rPr lang="en-US" sz="1100" dirty="0">
                 <a:solidFill>
                   <a:srgbClr val="3D3A36"/>
                 </a:solidFill>
@@ -1940,41 +2294,129 @@
                 <a:ea typeface="Calibri" pitchFamily="34" charset="-122"/>
                 <a:cs typeface="Calibri" pitchFamily="34" charset="-120"/>
               </a:rPr>
-              <a:t>Distillation: get the liquid back</a:t>
-            </a:r>
-            <a:endParaRPr lang="en-US" sz="1300" dirty="0"/>
-          </a:p>
-          <a:p>
-            <a:pPr marL="342900" indent="-342900">
-              <a:spcAft>
-                <a:spcPts val="600"/>
-              </a:spcAft>
-              <a:buSzPct val="100000"/>
-              <a:buChar char="•"/>
-            </a:pPr>
-            <a:r>
-              <a:rPr lang="en-US" sz="1300" dirty="0">
-                <a:solidFill>
-                  <a:srgbClr val="3D3A36"/>
+              <a:t>Separates magnetic materials from non-magnetic. Use a magnet to attract iron or steel. Example: iron filings from sand.</a:t>
+            </a:r>
+            <a:endParaRPr lang="en-US" sz="1100" dirty="0"/>
+          </a:p>
+        </p:txBody>
+      </p:sp>
+      <p:sp>
+        <p:nvSpPr>
+          <p:cNvPr id="13" name="Shape 11"/>
+          <p:cNvSpPr/>
+          <p:nvPr/>
+        </p:nvSpPr>
+        <p:spPr>
+          <a:xfrm>
+            <a:off x="6126480" y="1188720"/>
+            <a:ext cx="2560320" cy="1828800"/>
+          </a:xfrm>
+          <a:prstGeom prst="rect">
+            <a:avLst/>
+          </a:prstGeom>
+          <a:solidFill>
+            <a:srgbClr val="FFFFFF"/>
+          </a:solidFill>
+          <a:ln w="12700">
+            <a:solidFill>
+              <a:srgbClr val="E5E2DC"/>
+            </a:solidFill>
+            <a:prstDash val="solid"/>
+          </a:ln>
+          <a:effectLst>
+            <a:outerShdw sx="100000" sy="100000" kx="0" ky="0" algn="bl" rotWithShape="0" blurRad="50800" dist="25400" dir="8100000">
+              <a:srgbClr val="000000">
+                <a:alpha val="10000"/>
+              </a:srgbClr>
+            </a:outerShdw>
+          </a:effectLst>
+        </p:spPr>
+      </p:sp>
+      <p:sp>
+        <p:nvSpPr>
+          <p:cNvPr id="14" name="Shape 12"/>
+          <p:cNvSpPr/>
+          <p:nvPr/>
+        </p:nvSpPr>
+        <p:spPr>
+          <a:xfrm>
+            <a:off x="6126480" y="1188720"/>
+            <a:ext cx="2560320" cy="54864"/>
+          </a:xfrm>
+          <a:prstGeom prst="rect">
+            <a:avLst/>
+          </a:prstGeom>
+          <a:solidFill>
+            <a:srgbClr val="2A9D8F"/>
+          </a:solidFill>
+          <a:ln/>
+        </p:spPr>
+      </p:sp>
+      <p:sp>
+        <p:nvSpPr>
+          <p:cNvPr id="15" name="Text 13"/>
+          <p:cNvSpPr/>
+          <p:nvPr/>
+        </p:nvSpPr>
+        <p:spPr>
+          <a:xfrm>
+            <a:off x="6263640" y="1325880"/>
+            <a:ext cx="2286000" cy="365760"/>
+          </a:xfrm>
+          <a:prstGeom prst="rect">
+            <a:avLst/>
+          </a:prstGeom>
+          <a:noFill/>
+          <a:ln/>
+        </p:spPr>
+        <p:txBody>
+          <a:bodyPr wrap="square" rtlCol="0" anchor="ctr"/>
+          <a:lstStyle/>
+          <a:p>
+            <a:pPr indent="0" marL="0">
+              <a:buNone/>
+            </a:pPr>
+            <a:r>
+              <a:rPr lang="en-US" sz="1400" b="1" dirty="0">
+                <a:solidFill>
+                  <a:srgbClr val="1B2A4A"/>
                 </a:solidFill>
                 <a:latin typeface="Calibri" pitchFamily="34" charset="0"/>
                 <a:ea typeface="Calibri" pitchFamily="34" charset="-122"/>
                 <a:cs typeface="Calibri" pitchFamily="34" charset="-120"/>
               </a:rPr>
-              <a:t>Chromatography: separate dissolved colours</a:t>
-            </a:r>
-            <a:endParaRPr lang="en-US" sz="1300" dirty="0"/>
-          </a:p>
-          <a:p>
-            <a:pPr marL="342900" indent="-342900">
-              <a:spcAft>
-                <a:spcPts val="600"/>
-              </a:spcAft>
-              <a:buSzPct val="100000"/>
-              <a:buChar char="•"/>
-            </a:pPr>
-            <a:r>
-              <a:rPr lang="en-US" sz="1300" dirty="0">
+              <a:t>Sieving</a:t>
+            </a:r>
+            <a:endParaRPr lang="en-US" sz="1400" dirty="0"/>
+          </a:p>
+        </p:txBody>
+      </p:sp>
+      <p:sp>
+        <p:nvSpPr>
+          <p:cNvPr id="16" name="Text 14"/>
+          <p:cNvSpPr/>
+          <p:nvPr/>
+        </p:nvSpPr>
+        <p:spPr>
+          <a:xfrm>
+            <a:off x="6263640" y="1737360"/>
+            <a:ext cx="2286000" cy="1097280"/>
+          </a:xfrm>
+          <a:prstGeom prst="rect">
+            <a:avLst/>
+          </a:prstGeom>
+          <a:noFill/>
+          <a:ln/>
+        </p:spPr>
+        <p:txBody>
+          <a:bodyPr wrap="square" rtlCol="0" anchor="t"/>
+          <a:lstStyle/>
+          <a:p>
+            <a:pPr indent="0" marL="0">
+              <a:buNone/>
+            </a:pPr>
+            <a:r>
+              <a:rPr lang="en-US" sz="1100" dirty="0">
                 <a:solidFill>
                   <a:srgbClr val="3D3A36"/>
                 </a:solidFill>
@@ -1982,45 +2424,9 @@
                 <a:ea typeface="Calibri" pitchFamily="34" charset="-122"/>
                 <a:cs typeface="Calibri" pitchFamily="34" charset="-120"/>
               </a:rPr>
-              <a:t>Crystallisation: slow evaporation for crystals</a:t>
-            </a:r>
-            <a:endParaRPr lang="en-US" sz="1300" dirty="0"/>
-          </a:p>
-        </p:txBody>
-      </p:sp>
-      <p:sp>
-        <p:nvSpPr>
-          <p:cNvPr id="10" name="Text 8"/>
-          <p:cNvSpPr/>
-          <p:nvPr/>
-        </p:nvSpPr>
-        <p:spPr>
-          <a:xfrm>
-            <a:off x="548640" y="4800600"/>
-            <a:ext cx="3657600" cy="274320"/>
-          </a:xfrm>
-          <a:prstGeom prst="rect">
-            <a:avLst/>
-          </a:prstGeom>
-          <a:noFill/>
-          <a:ln/>
-        </p:spPr>
-        <p:txBody>
-          <a:bodyPr wrap="square" rtlCol="0" anchor="ctr"/>
-          <a:lstStyle/>
-          <a:p>
-            <a:pPr indent="0" marL="0">
-              <a:buNone/>
-            </a:pPr>
-            <a:r>
-              <a:rPr lang="en-US" sz="800" dirty="0">
-                <a:solidFill>
-                  <a:srgbClr val="9B9690"/>
-                </a:solidFill>
-              </a:rPr>
-              <a:t>mrzocchi.com</a:t>
-            </a:r>
-            <a:endParaRPr lang="en-US" sz="800" dirty="0"/>
+              <a:t>Separates solids of different sizes. Smaller particles pass through the mesh, larger ones stay. Example: separating gravel from sand.</a:t>
+            </a:r>
+            <a:endParaRPr lang="en-US" sz="1100" dirty="0"/>
           </a:p>
         </p:txBody>
       </p:sp>
@@ -2035,6 +2441,487 @@
 <file path=ppt/slides/slide4.xml><?xml version="1.0" encoding="utf-8"?>
 <p:sld xmlns:a="http://schemas.openxmlformats.org/drawingml/2006/main" xmlns:r="http://schemas.openxmlformats.org/officeDocument/2006/relationships" xmlns:p="http://schemas.openxmlformats.org/presentationml/2006/main">
   <p:cSld name="Slide 4">
+    <p:bg>
+      <p:bgPr>
+        <a:solidFill>
+          <a:srgbClr val="FAF8F5"/>
+        </a:solidFill>
+      </p:bgPr>
+    </p:bg>
+    <p:spTree>
+      <p:nvGrpSpPr>
+        <p:cNvPr id="1" name=""/>
+        <p:cNvGrpSpPr/>
+        <p:nvPr/>
+      </p:nvGrpSpPr>
+      <p:grpSpPr>
+        <a:xfrm>
+          <a:off x="0" y="0"/>
+          <a:ext cx="0" cy="0"/>
+          <a:chOff x="0" y="0"/>
+          <a:chExt cx="0" cy="0"/>
+        </a:xfrm>
+      </p:grpSpPr>
+      <p:sp>
+        <p:nvSpPr>
+          <p:cNvPr id="2" name="Shape 0"/>
+          <p:cNvSpPr/>
+          <p:nvPr/>
+        </p:nvSpPr>
+        <p:spPr>
+          <a:xfrm>
+            <a:off x="0" y="0"/>
+            <a:ext cx="9144000" cy="54864"/>
+          </a:xfrm>
+          <a:prstGeom prst="rect">
+            <a:avLst/>
+          </a:prstGeom>
+          <a:solidFill>
+            <a:srgbClr val="2A9D8F"/>
+          </a:solidFill>
+          <a:ln/>
+        </p:spPr>
+      </p:sp>
+      <p:sp>
+        <p:nvSpPr>
+          <p:cNvPr id="3" name="Text 1"/>
+          <p:cNvSpPr/>
+          <p:nvPr/>
+        </p:nvSpPr>
+        <p:spPr>
+          <a:xfrm>
+            <a:off x="7772400" y="4709160"/>
+            <a:ext cx="1097280" cy="320040"/>
+          </a:xfrm>
+          <a:prstGeom prst="rect">
+            <a:avLst/>
+          </a:prstGeom>
+          <a:noFill/>
+          <a:ln/>
+        </p:spPr>
+        <p:txBody>
+          <a:bodyPr wrap="square" rtlCol="0" anchor="ctr"/>
+          <a:lstStyle/>
+          <a:p>
+            <a:pPr algn="r" indent="0" marL="0">
+              <a:buNone/>
+            </a:pPr>
+            <a:r>
+              <a:rPr lang="en-US" sz="900" dirty="0">
+                <a:solidFill>
+                  <a:srgbClr val="6B6660"/>
+                </a:solidFill>
+                <a:latin typeface="Calibri" pitchFamily="34" charset="0"/>
+                <a:ea typeface="Calibri" pitchFamily="34" charset="-122"/>
+                <a:cs typeface="Calibri" pitchFamily="34" charset="-120"/>
+              </a:rPr>
+              <a:t>4 / 5</a:t>
+            </a:r>
+            <a:endParaRPr lang="en-US" sz="900" dirty="0"/>
+          </a:p>
+        </p:txBody>
+      </p:sp>
+      <p:sp>
+        <p:nvSpPr>
+          <p:cNvPr id="4" name="Text 2"/>
+          <p:cNvSpPr/>
+          <p:nvPr/>
+        </p:nvSpPr>
+        <p:spPr>
+          <a:xfrm>
+            <a:off x="457200" y="274320"/>
+            <a:ext cx="8229600" cy="640080"/>
+          </a:xfrm>
+          <a:prstGeom prst="rect">
+            <a:avLst/>
+          </a:prstGeom>
+          <a:noFill/>
+          <a:ln/>
+        </p:spPr>
+        <p:txBody>
+          <a:bodyPr wrap="square" rtlCol="0" anchor="ctr"/>
+          <a:lstStyle/>
+          <a:p>
+            <a:pPr indent="0" marL="0">
+              <a:buNone/>
+            </a:pPr>
+            <a:r>
+              <a:rPr lang="en-US" sz="2600" b="1" dirty="0">
+                <a:solidFill>
+                  <a:srgbClr val="1B2A4A"/>
+                </a:solidFill>
+                <a:latin typeface="Georgia" pitchFamily="34" charset="0"/>
+                <a:ea typeface="Georgia" pitchFamily="34" charset="-122"/>
+                <a:cs typeface="Georgia" pitchFamily="34" charset="-120"/>
+              </a:rPr>
+              <a:t>Choosing the Right Method</a:t>
+            </a:r>
+            <a:endParaRPr lang="en-US" sz="2600" dirty="0"/>
+          </a:p>
+        </p:txBody>
+      </p:sp>
+      <p:sp>
+        <p:nvSpPr>
+          <p:cNvPr id="5" name="Text 3"/>
+          <p:cNvSpPr/>
+          <p:nvPr/>
+        </p:nvSpPr>
+        <p:spPr>
+          <a:xfrm>
+            <a:off x="457200" y="1188720"/>
+            <a:ext cx="3840480" cy="3474720"/>
+          </a:xfrm>
+          <a:prstGeom prst="rect">
+            <a:avLst/>
+          </a:prstGeom>
+          <a:noFill/>
+          <a:ln/>
+        </p:spPr>
+        <p:txBody>
+          <a:bodyPr wrap="square" rtlCol="0" anchor="t"/>
+          <a:lstStyle/>
+          <a:p>
+            <a:pPr marL="342900" indent="-342900">
+              <a:spcAft>
+                <a:spcPts val="600"/>
+              </a:spcAft>
+              <a:buSzPct val="100000"/>
+              <a:buChar char="•"/>
+            </a:pPr>
+            <a:r>
+              <a:rPr lang="en-US" sz="1400" dirty="0">
+                <a:solidFill>
+                  <a:srgbClr val="3D3A36"/>
+                </a:solidFill>
+                <a:latin typeface="Calibri" pitchFamily="34" charset="0"/>
+                <a:ea typeface="Calibri" pitchFamily="34" charset="-122"/>
+                <a:cs typeface="Calibri" pitchFamily="34" charset="-120"/>
+              </a:rPr>
+              <a:t>Insoluble solid + liquid → Filtration</a:t>
+            </a:r>
+            <a:endParaRPr lang="en-US" sz="1400" dirty="0"/>
+          </a:p>
+          <a:p>
+            <a:pPr marL="342900" indent="-342900">
+              <a:spcAft>
+                <a:spcPts val="600"/>
+              </a:spcAft>
+              <a:buSzPct val="100000"/>
+              <a:buChar char="•"/>
+            </a:pPr>
+            <a:r>
+              <a:rPr lang="en-US" sz="1400" dirty="0">
+                <a:solidFill>
+                  <a:srgbClr val="3D3A36"/>
+                </a:solidFill>
+                <a:latin typeface="Calibri" pitchFamily="34" charset="0"/>
+                <a:ea typeface="Calibri" pitchFamily="34" charset="-122"/>
+                <a:cs typeface="Calibri" pitchFamily="34" charset="-120"/>
+              </a:rPr>
+              <a:t>Dissolved solid from solution → Evaporation</a:t>
+            </a:r>
+            <a:endParaRPr lang="en-US" sz="1400" dirty="0"/>
+          </a:p>
+          <a:p>
+            <a:pPr marL="342900" indent="-342900">
+              <a:spcAft>
+                <a:spcPts val="600"/>
+              </a:spcAft>
+              <a:buSzPct val="100000"/>
+              <a:buChar char="•"/>
+            </a:pPr>
+            <a:r>
+              <a:rPr lang="en-US" sz="1400" dirty="0">
+                <a:solidFill>
+                  <a:srgbClr val="3D3A36"/>
+                </a:solidFill>
+                <a:latin typeface="Calibri" pitchFamily="34" charset="0"/>
+                <a:ea typeface="Calibri" pitchFamily="34" charset="-122"/>
+                <a:cs typeface="Calibri" pitchFamily="34" charset="-120"/>
+              </a:rPr>
+              <a:t>Pure liquid from solution → Distillation</a:t>
+            </a:r>
+            <a:endParaRPr lang="en-US" sz="1400" dirty="0"/>
+          </a:p>
+          <a:p>
+            <a:pPr marL="342900" indent="-342900">
+              <a:spcAft>
+                <a:spcPts val="600"/>
+              </a:spcAft>
+              <a:buSzPct val="100000"/>
+              <a:buChar char="•"/>
+            </a:pPr>
+            <a:r>
+              <a:rPr lang="en-US" sz="1400" dirty="0">
+                <a:solidFill>
+                  <a:srgbClr val="3D3A36"/>
+                </a:solidFill>
+                <a:latin typeface="Calibri" pitchFamily="34" charset="0"/>
+                <a:ea typeface="Calibri" pitchFamily="34" charset="-122"/>
+                <a:cs typeface="Calibri" pitchFamily="34" charset="-120"/>
+              </a:rPr>
+              <a:t>Mixture of colours → Chromatography</a:t>
+            </a:r>
+            <a:endParaRPr lang="en-US" sz="1400" dirty="0"/>
+          </a:p>
+          <a:p>
+            <a:pPr marL="342900" indent="-342900">
+              <a:spcAft>
+                <a:spcPts val="600"/>
+              </a:spcAft>
+              <a:buSzPct val="100000"/>
+              <a:buChar char="•"/>
+            </a:pPr>
+            <a:r>
+              <a:rPr lang="en-US" sz="1400" dirty="0">
+                <a:solidFill>
+                  <a:srgbClr val="3D3A36"/>
+                </a:solidFill>
+                <a:latin typeface="Calibri" pitchFamily="34" charset="0"/>
+                <a:ea typeface="Calibri" pitchFamily="34" charset="-122"/>
+                <a:cs typeface="Calibri" pitchFamily="34" charset="-120"/>
+              </a:rPr>
+              <a:t>Magnetic + non-magnetic → Magnet</a:t>
+            </a:r>
+            <a:endParaRPr lang="en-US" sz="1400" dirty="0"/>
+          </a:p>
+          <a:p>
+            <a:pPr marL="342900" indent="-342900">
+              <a:spcAft>
+                <a:spcPts val="600"/>
+              </a:spcAft>
+              <a:buSzPct val="100000"/>
+              <a:buChar char="•"/>
+            </a:pPr>
+            <a:r>
+              <a:rPr lang="en-US" sz="1400" dirty="0">
+                <a:solidFill>
+                  <a:srgbClr val="3D3A36"/>
+                </a:solidFill>
+                <a:latin typeface="Calibri" pitchFamily="34" charset="0"/>
+                <a:ea typeface="Calibri" pitchFamily="34" charset="-122"/>
+                <a:cs typeface="Calibri" pitchFamily="34" charset="-120"/>
+              </a:rPr>
+              <a:t>Different sized solids → Sieving</a:t>
+            </a:r>
+            <a:endParaRPr lang="en-US" sz="1400" dirty="0"/>
+          </a:p>
+        </p:txBody>
+      </p:sp>
+      <p:sp>
+        <p:nvSpPr>
+          <p:cNvPr id="6" name="Shape 4"/>
+          <p:cNvSpPr/>
+          <p:nvPr/>
+        </p:nvSpPr>
+        <p:spPr>
+          <a:xfrm>
+            <a:off x="4846320" y="1188720"/>
+            <a:ext cx="3840480" cy="3474720"/>
+          </a:xfrm>
+          <a:prstGeom prst="rect">
+            <a:avLst/>
+          </a:prstGeom>
+          <a:solidFill>
+            <a:srgbClr val="FFFFFF"/>
+          </a:solidFill>
+          <a:ln w="12700">
+            <a:solidFill>
+              <a:srgbClr val="E5E2DC"/>
+            </a:solidFill>
+            <a:prstDash val="solid"/>
+          </a:ln>
+          <a:effectLst>
+            <a:outerShdw sx="100000" sy="100000" kx="0" ky="0" algn="bl" rotWithShape="0" blurRad="50800" dist="25400" dir="8100000">
+              <a:srgbClr val="000000">
+                <a:alpha val="10000"/>
+              </a:srgbClr>
+            </a:outerShdw>
+          </a:effectLst>
+        </p:spPr>
+      </p:sp>
+      <p:sp>
+        <p:nvSpPr>
+          <p:cNvPr id="7" name="Shape 5"/>
+          <p:cNvSpPr/>
+          <p:nvPr/>
+        </p:nvSpPr>
+        <p:spPr>
+          <a:xfrm>
+            <a:off x="4846320" y="1188720"/>
+            <a:ext cx="3840480" cy="54864"/>
+          </a:xfrm>
+          <a:prstGeom prst="rect">
+            <a:avLst/>
+          </a:prstGeom>
+          <a:solidFill>
+            <a:srgbClr val="2A9D8F"/>
+          </a:solidFill>
+          <a:ln/>
+        </p:spPr>
+      </p:sp>
+      <p:sp>
+        <p:nvSpPr>
+          <p:cNvPr id="8" name="Text 6"/>
+          <p:cNvSpPr/>
+          <p:nvPr/>
+        </p:nvSpPr>
+        <p:spPr>
+          <a:xfrm>
+            <a:off x="5120640" y="1371600"/>
+            <a:ext cx="3291840" cy="3108960"/>
+          </a:xfrm>
+          <a:prstGeom prst="rect">
+            <a:avLst/>
+          </a:prstGeom>
+          <a:noFill/>
+          <a:ln/>
+        </p:spPr>
+        <p:txBody>
+          <a:bodyPr wrap="square" rtlCol="0" anchor="t"/>
+          <a:lstStyle/>
+          <a:p>
+            <a:pPr indent="0" marL="0">
+              <a:spcAft>
+                <a:spcPts val="400"/>
+              </a:spcAft>
+              <a:buNone/>
+            </a:pPr>
+            <a:r>
+              <a:rPr lang="en-US" sz="1600" b="1" dirty="0">
+                <a:solidFill>
+                  <a:srgbClr val="1B2A4A"/>
+                </a:solidFill>
+                <a:latin typeface="Calibri" pitchFamily="34" charset="0"/>
+                <a:ea typeface="Calibri" pitchFamily="34" charset="-122"/>
+                <a:cs typeface="Calibri" pitchFamily="34" charset="-120"/>
+              </a:rPr>
+              <a:t>Distillation vs Evaporation</a:t>
+            </a:r>
+            <a:endParaRPr lang="en-US" sz="1600" dirty="0"/>
+          </a:p>
+          <a:p>
+            <a:pPr indent="0" marL="0">
+              <a:spcAft>
+                <a:spcPts val="400"/>
+              </a:spcAft>
+              <a:buNone/>
+            </a:pPr>
+            <a:endParaRPr lang="en-US" sz="1600" dirty="0"/>
+          </a:p>
+          <a:p>
+            <a:pPr indent="0" marL="0">
+              <a:spcAft>
+                <a:spcPts val="400"/>
+              </a:spcAft>
+              <a:buNone/>
+            </a:pPr>
+            <a:r>
+              <a:rPr lang="en-US" sz="1300" dirty="0">
+                <a:solidFill>
+                  <a:srgbClr val="3D3A36"/>
+                </a:solidFill>
+                <a:latin typeface="Calibri" pitchFamily="34" charset="0"/>
+                <a:ea typeface="Calibri" pitchFamily="34" charset="-122"/>
+                <a:cs typeface="Calibri" pitchFamily="34" charset="-120"/>
+              </a:rPr>
+              <a:t>Evaporation: you KEEP the solid, lose the liquid</a:t>
+            </a:r>
+            <a:endParaRPr lang="en-US" sz="1600" dirty="0"/>
+          </a:p>
+          <a:p>
+            <a:pPr indent="0" marL="0">
+              <a:spcAft>
+                <a:spcPts val="400"/>
+              </a:spcAft>
+              <a:buNone/>
+            </a:pPr>
+            <a:r>
+              <a:rPr lang="en-US" sz="1300" dirty="0">
+                <a:solidFill>
+                  <a:srgbClr val="3D3A36"/>
+                </a:solidFill>
+                <a:latin typeface="Calibri" pitchFamily="34" charset="0"/>
+                <a:ea typeface="Calibri" pitchFamily="34" charset="-122"/>
+                <a:cs typeface="Calibri" pitchFamily="34" charset="-120"/>
+              </a:rPr>
+              <a:t>Distillation: you KEEP the liquid, lose the solid</a:t>
+            </a:r>
+            <a:endParaRPr lang="en-US" sz="1600" dirty="0"/>
+          </a:p>
+          <a:p>
+            <a:pPr indent="0" marL="0">
+              <a:spcAft>
+                <a:spcPts val="400"/>
+              </a:spcAft>
+              <a:buNone/>
+            </a:pPr>
+            <a:r>
+              <a:rPr lang="en-US" sz="1300" dirty="0">
+                <a:solidFill>
+                  <a:srgbClr val="3D3A36"/>
+                </a:solidFill>
+                <a:latin typeface="Calibri" pitchFamily="34" charset="0"/>
+                <a:ea typeface="Calibri" pitchFamily="34" charset="-122"/>
+                <a:cs typeface="Calibri" pitchFamily="34" charset="-120"/>
+              </a:rPr>
+              <a:t>Distillation needs a condenser to cool the steam back to liquid</a:t>
+            </a:r>
+            <a:endParaRPr lang="en-US" sz="1600" dirty="0"/>
+          </a:p>
+          <a:p>
+            <a:pPr indent="0" marL="0">
+              <a:spcAft>
+                <a:spcPts val="400"/>
+              </a:spcAft>
+              <a:buNone/>
+            </a:pPr>
+            <a:r>
+              <a:rPr lang="en-US" sz="1300" dirty="0">
+                <a:solidFill>
+                  <a:srgbClr val="3D3A36"/>
+                </a:solidFill>
+                <a:latin typeface="Calibri" pitchFamily="34" charset="0"/>
+                <a:ea typeface="Calibri" pitchFamily="34" charset="-122"/>
+                <a:cs typeface="Calibri" pitchFamily="34" charset="-120"/>
+              </a:rPr>
+              <a:t>Both use heat energy</a:t>
+            </a:r>
+            <a:endParaRPr lang="en-US" sz="1600" dirty="0"/>
+          </a:p>
+          <a:p>
+            <a:pPr indent="0" marL="0">
+              <a:spcAft>
+                <a:spcPts val="400"/>
+              </a:spcAft>
+              <a:buNone/>
+            </a:pPr>
+            <a:r>
+              <a:rPr lang="en-US" sz="1300" dirty="0">
+                <a:solidFill>
+                  <a:srgbClr val="3D3A36"/>
+                </a:solidFill>
+                <a:latin typeface="Calibri" pitchFamily="34" charset="0"/>
+                <a:ea typeface="Calibri" pitchFamily="34" charset="-122"/>
+                <a:cs typeface="Calibri" pitchFamily="34" charset="-120"/>
+              </a:rPr>
+              <a:t>Distillation gives you PURE water; evaporation gives you salt</a:t>
+            </a:r>
+            <a:endParaRPr lang="en-US" sz="1600" dirty="0"/>
+          </a:p>
+        </p:txBody>
+      </p:sp>
+    </p:spTree>
+  </p:cSld>
+  <p:clrMapOvr>
+    <a:masterClrMapping/>
+  </p:clrMapOvr>
+</p:sld>
+</file>
+
+<file path=ppt/slides/slide5.xml><?xml version="1.0" encoding="utf-8"?>
+<p:sld xmlns:a="http://schemas.openxmlformats.org/drawingml/2006/main" xmlns:r="http://schemas.openxmlformats.org/officeDocument/2006/relationships" xmlns:p="http://schemas.openxmlformats.org/presentationml/2006/main">
+  <p:cSld name="Slide 5">
     <p:bg>
       <p:bgPr>
         <a:solidFill>
@@ -2065,13 +2952,13 @@
         <p:spPr>
           <a:xfrm>
             <a:off x="0" y="0"/>
-            <a:ext cx="9144000" cy="54864"/>
-          </a:xfrm>
-          <a:prstGeom prst="rect">
-            <a:avLst/>
-          </a:prstGeom>
-          <a:solidFill>
-            <a:srgbClr val="2A9D8F"/>
+            <a:ext cx="109728" cy="5143500"/>
+          </a:xfrm>
+          <a:prstGeom prst="rect">
+            <a:avLst/>
+          </a:prstGeom>
+          <a:solidFill>
+            <a:srgbClr val="E9C46A"/>
           </a:solidFill>
           <a:ln/>
         </p:spPr>
@@ -2084,8 +2971,8 @@
         </p:nvSpPr>
         <p:spPr>
           <a:xfrm>
-            <a:off x="548640" y="457200"/>
-            <a:ext cx="8046720" cy="640080"/>
+            <a:off x="731520" y="457200"/>
+            <a:ext cx="7772400" cy="731520"/>
           </a:xfrm>
           <a:prstGeom prst="rect">
             <a:avLst/>
@@ -2101,7 +2988,7 @@
               <a:buNone/>
             </a:pPr>
             <a:r>
-              <a:rPr lang="en-US" sz="2800" b="1" dirty="0">
+              <a:rPr lang="en-US" sz="3200" b="1" dirty="0">
                 <a:solidFill>
                   <a:srgbClr val="FFFFFF"/>
                 </a:solidFill>
@@ -2111,7 +2998,7 @@
               </a:rPr>
               <a:t>Key Takeaways</a:t>
             </a:r>
-            <a:endParaRPr lang="en-US" sz="2800" dirty="0"/>
+            <a:endParaRPr lang="en-US" sz="3200" dirty="0"/>
           </a:p>
         </p:txBody>
       </p:sp>
@@ -2123,8 +3010,8 @@
         </p:nvSpPr>
         <p:spPr>
           <a:xfrm>
-            <a:off x="731520" y="1371600"/>
-            <a:ext cx="7680960" cy="3200400"/>
+            <a:off x="731520" y="1463040"/>
+            <a:ext cx="7772400" cy="3200400"/>
           </a:xfrm>
           <a:prstGeom prst="rect">
             <a:avLst/>
@@ -2144,7 +3031,7 @@
               <a:buChar char="•"/>
             </a:pPr>
             <a:r>
-              <a:rPr lang="en-US" sz="1600" dirty="0">
+              <a:rPr lang="en-US" sz="1500" dirty="0">
                 <a:solidFill>
                   <a:srgbClr val="CADCFC"/>
                 </a:solidFill>
@@ -2152,9 +3039,9 @@
                 <a:ea typeface="Calibri" pitchFamily="34" charset="-122"/>
                 <a:cs typeface="Calibri" pitchFamily="34" charset="-120"/>
               </a:rPr>
-              <a:t>Choose separation method based on the properties of the mixture</a:t>
-            </a:r>
-            <a:endParaRPr lang="en-US" sz="1600" dirty="0"/>
+              <a:t>Filtration: insoluble solid from liquid</a:t>
+            </a:r>
+            <a:endParaRPr lang="en-US" sz="1500" dirty="0"/>
           </a:p>
           <a:p>
             <a:pPr marL="342900" indent="-342900">
@@ -2165,7 +3052,7 @@
               <a:buChar char="•"/>
             </a:pPr>
             <a:r>
-              <a:rPr lang="en-US" sz="1600" dirty="0">
+              <a:rPr lang="en-US" sz="1500" dirty="0">
                 <a:solidFill>
                   <a:srgbClr val="CADCFC"/>
                 </a:solidFill>
@@ -2173,9 +3060,9 @@
                 <a:ea typeface="Calibri" pitchFamily="34" charset="-122"/>
                 <a:cs typeface="Calibri" pitchFamily="34" charset="-120"/>
               </a:rPr>
-              <a:t>Filtration = insoluble solids, Evaporation = dissolved solids</a:t>
-            </a:r>
-            <a:endParaRPr lang="en-US" sz="1600" dirty="0"/>
+              <a:t>Evaporation: dissolved solid from solution (keep the solid)</a:t>
+            </a:r>
+            <a:endParaRPr lang="en-US" sz="1500" dirty="0"/>
           </a:p>
           <a:p>
             <a:pPr marL="342900" indent="-342900">
@@ -2186,7 +3073,7 @@
               <a:buChar char="•"/>
             </a:pPr>
             <a:r>
-              <a:rPr lang="en-US" sz="1600" dirty="0">
+              <a:rPr lang="en-US" sz="1500" dirty="0">
                 <a:solidFill>
                   <a:srgbClr val="CADCFC"/>
                 </a:solidFill>
@@ -2194,9 +3081,9 @@
                 <a:ea typeface="Calibri" pitchFamily="34" charset="-122"/>
                 <a:cs typeface="Calibri" pitchFamily="34" charset="-120"/>
               </a:rPr>
-              <a:t>Distillation collects BOTH the solid and liquid</a:t>
-            </a:r>
-            <a:endParaRPr lang="en-US" sz="1600" dirty="0"/>
+              <a:t>Distillation: pure liquid from solution (keep the liquid)</a:t>
+            </a:r>
+            <a:endParaRPr lang="en-US" sz="1500" dirty="0"/>
           </a:p>
           <a:p>
             <a:pPr marL="342900" indent="-342900">
@@ -2207,7 +3094,7 @@
               <a:buChar char="•"/>
             </a:pPr>
             <a:r>
-              <a:rPr lang="en-US" sz="1600" dirty="0">
+              <a:rPr lang="en-US" sz="1500" dirty="0">
                 <a:solidFill>
                   <a:srgbClr val="CADCFC"/>
                 </a:solidFill>
@@ -2215,9 +3102,30 @@
                 <a:ea typeface="Calibri" pitchFamily="34" charset="-122"/>
                 <a:cs typeface="Calibri" pitchFamily="34" charset="-120"/>
               </a:rPr>
-              <a:t>Chromatography shows how many substances are in a mixture</a:t>
-            </a:r>
-            <a:endParaRPr lang="en-US" sz="1600" dirty="0"/>
+              <a:t>Chromatography: separates mixtures of colours</a:t>
+            </a:r>
+            <a:endParaRPr lang="en-US" sz="1500" dirty="0"/>
+          </a:p>
+          <a:p>
+            <a:pPr marL="342900" indent="-342900">
+              <a:spcAft>
+                <a:spcPts val="1000"/>
+              </a:spcAft>
+              <a:buSzPct val="100000"/>
+              <a:buChar char="•"/>
+            </a:pPr>
+            <a:r>
+              <a:rPr lang="en-US" sz="1500" dirty="0">
+                <a:solidFill>
+                  <a:srgbClr val="CADCFC"/>
+                </a:solidFill>
+                <a:latin typeface="Calibri" pitchFamily="34" charset="0"/>
+                <a:ea typeface="Calibri" pitchFamily="34" charset="-122"/>
+                <a:cs typeface="Calibri" pitchFamily="34" charset="-120"/>
+              </a:rPr>
+              <a:t>Choose the method based on what you want to keep</a:t>
+            </a:r>
+            <a:endParaRPr lang="en-US" sz="1500" dirty="0"/>
           </a:p>
         </p:txBody>
       </p:sp>
@@ -2229,8 +3137,8 @@
         </p:nvSpPr>
         <p:spPr>
           <a:xfrm>
-            <a:off x="548640" y="4572000"/>
-            <a:ext cx="3657600" cy="274320"/>
+            <a:off x="731520" y="4572000"/>
+            <a:ext cx="7772400" cy="365760"/>
           </a:xfrm>
           <a:prstGeom prst="rect">
             <a:avLst/>
@@ -2246,14 +3154,17 @@
               <a:buNone/>
             </a:pPr>
             <a:r>
-              <a:rPr lang="en-US" sz="1000" dirty="0">
-                <a:solidFill>
-                  <a:srgbClr val="6B6660"/>
-                </a:solidFill>
+              <a:rPr lang="en-US" sz="1100" dirty="0">
+                <a:solidFill>
+                  <a:srgbClr val="E9C46A"/>
+                </a:solidFill>
+                <a:latin typeface="Calibri" pitchFamily="34" charset="0"/>
+                <a:ea typeface="Calibri" pitchFamily="34" charset="-122"/>
+                <a:cs typeface="Calibri" pitchFamily="34" charset="-120"/>
               </a:rPr>
               <a:t>mrzocchi.com</a:t>
             </a:r>
-            <a:endParaRPr lang="en-US" sz="1000" dirty="0"/>
+            <a:endParaRPr lang="en-US" sz="1100" dirty="0"/>
           </a:p>
         </p:txBody>
       </p:sp>

--- a/static/ppts/G6_Sci_T2_Separating_Mixtures.pptx
+++ b/static/ppts/G6_Sci_T2_Separating_Mixtures.pptx
@@ -10,9 +10,12 @@
     <p:sldId id="258" r:id="rId4"/>
     <p:sldId id="259" r:id="rId5"/>
     <p:sldId id="260" r:id="rId6"/>
+    <p:sldId id="261" r:id="rId7"/>
+    <p:sldId id="262" r:id="rId8"/>
+    <p:sldId id="263" r:id="rId9"/>
   </p:sldIdLst>
   <p:notesMasterIdLst>
-    <p:notesMasterId r:id="rId7"/>
+    <p:notesMasterId r:id="rId10"/>
   </p:notesMasterIdLst>
   <p:sldSz cx="9144000" cy="5143500"/>
   <p:notesSz cx="5143500" cy="9144000"/>
@@ -900,6 +903,270 @@
 </p:notes>
 </file>
 
+<file path=ppt/notesSlides/notesSlide6.xml><?xml version="1.0" encoding="utf-8"?>
+<p:notes xmlns:a="http://schemas.openxmlformats.org/drawingml/2006/main" xmlns:r="http://schemas.openxmlformats.org/officeDocument/2006/relationships" xmlns:p="http://schemas.openxmlformats.org/presentationml/2006/main">
+  <p:cSld>
+    <p:spTree>
+      <p:nvGrpSpPr>
+        <p:cNvPr id="1" name=""/>
+        <p:cNvGrpSpPr/>
+        <p:nvPr/>
+      </p:nvGrpSpPr>
+      <p:grpSpPr>
+        <a:xfrm>
+          <a:off x="0" y="0"/>
+          <a:ext cx="0" cy="0"/>
+          <a:chOff x="0" y="0"/>
+          <a:chExt cx="0" cy="0"/>
+        </a:xfrm>
+      </p:grpSpPr>
+      <p:sp>
+        <p:nvSpPr>
+          <p:cNvPr id="2" name="Slide Image Placeholder 1"/>
+          <p:cNvSpPr>
+            <a:spLocks noGrp="1" noRot="1" noChangeAspect="1"/>
+          </p:cNvSpPr>
+          <p:nvPr>
+            <p:ph type="sldImg"/>
+          </p:nvPr>
+        </p:nvSpPr>
+        <p:spPr/>
+      </p:sp>
+      <p:sp>
+        <p:nvSpPr>
+          <p:cNvPr id="3" name="Notes Placeholder 2"/>
+          <p:cNvSpPr>
+            <a:spLocks noGrp="1"/>
+          </p:cNvSpPr>
+          <p:nvPr>
+            <p:ph type="body" idx="1"/>
+          </p:nvPr>
+        </p:nvSpPr>
+        <p:spPr/>
+        <p:txBody>
+          <a:bodyPr/>
+          <a:lstStyle/>
+          <a:p>
+            <a:r>
+              <a:rPr lang="en-US" dirty="0"/>
+              <a:t/>
+            </a:r>
+            <a:endParaRPr lang="en-US" dirty="0"/>
+          </a:p>
+        </p:txBody>
+      </p:sp>
+      <p:sp>
+        <p:nvSpPr>
+          <p:cNvPr id="4" name="Slide Number Placeholder 3"/>
+          <p:cNvSpPr>
+            <a:spLocks noGrp="1"/>
+          </p:cNvSpPr>
+          <p:nvPr>
+            <p:ph type="sldNum" sz="quarter" idx="10"/>
+          </p:nvPr>
+        </p:nvSpPr>
+        <p:spPr/>
+        <p:txBody>
+          <a:bodyPr/>
+          <a:lstStyle/>
+          <a:p>
+            <a:fld id="{F7021451-1387-4CA6-816F-3879F97B5CBC}" type="slidenum">
+              <a:rPr lang="en-US"/>
+              <a:t>6</a:t>
+            </a:fld>
+            <a:endParaRPr lang="en-US"/>
+          </a:p>
+        </p:txBody>
+      </p:sp>
+    </p:spTree>
+    <p:extLst>
+      <p:ext uri="{BB962C8B-B14F-4D97-AF65-F5344CB8AC3E}">
+        <p14:creationId xmlns:p14="http://schemas.microsoft.com/office/powerpoint/2010/main" val="1024086991"/>
+      </p:ext>
+    </p:extLst>
+  </p:cSld>
+  <p:clrMapOvr>
+    <a:masterClrMapping/>
+  </p:clrMapOvr>
+</p:notes>
+</file>
+
+<file path=ppt/notesSlides/notesSlide7.xml><?xml version="1.0" encoding="utf-8"?>
+<p:notes xmlns:a="http://schemas.openxmlformats.org/drawingml/2006/main" xmlns:r="http://schemas.openxmlformats.org/officeDocument/2006/relationships" xmlns:p="http://schemas.openxmlformats.org/presentationml/2006/main">
+  <p:cSld>
+    <p:spTree>
+      <p:nvGrpSpPr>
+        <p:cNvPr id="1" name=""/>
+        <p:cNvGrpSpPr/>
+        <p:nvPr/>
+      </p:nvGrpSpPr>
+      <p:grpSpPr>
+        <a:xfrm>
+          <a:off x="0" y="0"/>
+          <a:ext cx="0" cy="0"/>
+          <a:chOff x="0" y="0"/>
+          <a:chExt cx="0" cy="0"/>
+        </a:xfrm>
+      </p:grpSpPr>
+      <p:sp>
+        <p:nvSpPr>
+          <p:cNvPr id="2" name="Slide Image Placeholder 1"/>
+          <p:cNvSpPr>
+            <a:spLocks noGrp="1" noRot="1" noChangeAspect="1"/>
+          </p:cNvSpPr>
+          <p:nvPr>
+            <p:ph type="sldImg"/>
+          </p:nvPr>
+        </p:nvSpPr>
+        <p:spPr/>
+      </p:sp>
+      <p:sp>
+        <p:nvSpPr>
+          <p:cNvPr id="3" name="Notes Placeholder 2"/>
+          <p:cNvSpPr>
+            <a:spLocks noGrp="1"/>
+          </p:cNvSpPr>
+          <p:nvPr>
+            <p:ph type="body" idx="1"/>
+          </p:nvPr>
+        </p:nvSpPr>
+        <p:spPr/>
+        <p:txBody>
+          <a:bodyPr/>
+          <a:lstStyle/>
+          <a:p>
+            <a:r>
+              <a:rPr lang="en-US" dirty="0"/>
+              <a:t/>
+            </a:r>
+            <a:endParaRPr lang="en-US" dirty="0"/>
+          </a:p>
+        </p:txBody>
+      </p:sp>
+      <p:sp>
+        <p:nvSpPr>
+          <p:cNvPr id="4" name="Slide Number Placeholder 3"/>
+          <p:cNvSpPr>
+            <a:spLocks noGrp="1"/>
+          </p:cNvSpPr>
+          <p:nvPr>
+            <p:ph type="sldNum" sz="quarter" idx="10"/>
+          </p:nvPr>
+        </p:nvSpPr>
+        <p:spPr/>
+        <p:txBody>
+          <a:bodyPr/>
+          <a:lstStyle/>
+          <a:p>
+            <a:fld id="{F7021451-1387-4CA6-816F-3879F97B5CBC}" type="slidenum">
+              <a:rPr lang="en-US"/>
+              <a:t>7</a:t>
+            </a:fld>
+            <a:endParaRPr lang="en-US"/>
+          </a:p>
+        </p:txBody>
+      </p:sp>
+    </p:spTree>
+    <p:extLst>
+      <p:ext uri="{BB962C8B-B14F-4D97-AF65-F5344CB8AC3E}">
+        <p14:creationId xmlns:p14="http://schemas.microsoft.com/office/powerpoint/2010/main" val="1024086991"/>
+      </p:ext>
+    </p:extLst>
+  </p:cSld>
+  <p:clrMapOvr>
+    <a:masterClrMapping/>
+  </p:clrMapOvr>
+</p:notes>
+</file>
+
+<file path=ppt/notesSlides/notesSlide8.xml><?xml version="1.0" encoding="utf-8"?>
+<p:notes xmlns:a="http://schemas.openxmlformats.org/drawingml/2006/main" xmlns:r="http://schemas.openxmlformats.org/officeDocument/2006/relationships" xmlns:p="http://schemas.openxmlformats.org/presentationml/2006/main">
+  <p:cSld>
+    <p:spTree>
+      <p:nvGrpSpPr>
+        <p:cNvPr id="1" name=""/>
+        <p:cNvGrpSpPr/>
+        <p:nvPr/>
+      </p:nvGrpSpPr>
+      <p:grpSpPr>
+        <a:xfrm>
+          <a:off x="0" y="0"/>
+          <a:ext cx="0" cy="0"/>
+          <a:chOff x="0" y="0"/>
+          <a:chExt cx="0" cy="0"/>
+        </a:xfrm>
+      </p:grpSpPr>
+      <p:sp>
+        <p:nvSpPr>
+          <p:cNvPr id="2" name="Slide Image Placeholder 1"/>
+          <p:cNvSpPr>
+            <a:spLocks noGrp="1" noRot="1" noChangeAspect="1"/>
+          </p:cNvSpPr>
+          <p:nvPr>
+            <p:ph type="sldImg"/>
+          </p:nvPr>
+        </p:nvSpPr>
+        <p:spPr/>
+      </p:sp>
+      <p:sp>
+        <p:nvSpPr>
+          <p:cNvPr id="3" name="Notes Placeholder 2"/>
+          <p:cNvSpPr>
+            <a:spLocks noGrp="1"/>
+          </p:cNvSpPr>
+          <p:nvPr>
+            <p:ph type="body" idx="1"/>
+          </p:nvPr>
+        </p:nvSpPr>
+        <p:spPr/>
+        <p:txBody>
+          <a:bodyPr/>
+          <a:lstStyle/>
+          <a:p>
+            <a:r>
+              <a:rPr lang="en-US" dirty="0"/>
+              <a:t/>
+            </a:r>
+            <a:endParaRPr lang="en-US" dirty="0"/>
+          </a:p>
+        </p:txBody>
+      </p:sp>
+      <p:sp>
+        <p:nvSpPr>
+          <p:cNvPr id="4" name="Slide Number Placeholder 3"/>
+          <p:cNvSpPr>
+            <a:spLocks noGrp="1"/>
+          </p:cNvSpPr>
+          <p:nvPr>
+            <p:ph type="sldNum" sz="quarter" idx="10"/>
+          </p:nvPr>
+        </p:nvSpPr>
+        <p:spPr/>
+        <p:txBody>
+          <a:bodyPr/>
+          <a:lstStyle/>
+          <a:p>
+            <a:fld id="{F7021451-1387-4CA6-816F-3879F97B5CBC}" type="slidenum">
+              <a:rPr lang="en-US"/>
+              <a:t>8</a:t>
+            </a:fld>
+            <a:endParaRPr lang="en-US"/>
+          </a:p>
+        </p:txBody>
+      </p:sp>
+    </p:spTree>
+    <p:extLst>
+      <p:ext uri="{BB962C8B-B14F-4D97-AF65-F5344CB8AC3E}">
+        <p14:creationId xmlns:p14="http://schemas.microsoft.com/office/powerpoint/2010/main" val="1024086991"/>
+      </p:ext>
+    </p:extLst>
+  </p:cSld>
+  <p:clrMapOvr>
+    <a:masterClrMapping/>
+  </p:clrMapOvr>
+</p:notes>
+</file>
+
 <file path=ppt/slideLayouts/slideLayout1.xml><?xml version="1.0" encoding="utf-8"?>
 <p:sldLayout xmlns:a="http://schemas.openxmlformats.org/drawingml/2006/main" xmlns:r="http://schemas.openxmlformats.org/officeDocument/2006/relationships" xmlns:p="http://schemas.openxmlformats.org/presentationml/2006/main" preserve="1">
   <p:cSld name="DEFAULT">
@@ -1210,13 +1477,6 @@
 <file path=ppt/slides/slide1.xml><?xml version="1.0" encoding="utf-8"?>
 <p:sld xmlns:a="http://schemas.openxmlformats.org/drawingml/2006/main" xmlns:r="http://schemas.openxmlformats.org/officeDocument/2006/relationships" xmlns:p="http://schemas.openxmlformats.org/presentationml/2006/main">
   <p:cSld name="Slide 1">
-    <p:bg>
-      <p:bgPr>
-        <a:solidFill>
-          <a:srgbClr val="1B2A4A"/>
-        </a:solidFill>
-      </p:bgPr>
-    </p:bg>
     <p:spTree>
       <p:nvGrpSpPr>
         <p:cNvPr id="1" name=""/>
@@ -1240,7 +1500,27 @@
         <p:spPr>
           <a:xfrm>
             <a:off x="0" y="0"/>
-            <a:ext cx="109728" cy="5143500"/>
+            <a:ext cx="9144000" cy="5143500"/>
+          </a:xfrm>
+          <a:prstGeom prst="rect">
+            <a:avLst/>
+          </a:prstGeom>
+          <a:solidFill>
+            <a:srgbClr val="1B2A4A"/>
+          </a:solidFill>
+          <a:ln/>
+        </p:spPr>
+      </p:sp>
+      <p:sp>
+        <p:nvSpPr>
+          <p:cNvPr id="3" name="Shape 1"/>
+          <p:cNvSpPr/>
+          <p:nvPr/>
+        </p:nvSpPr>
+        <p:spPr>
+          <a:xfrm>
+            <a:off x="0" y="4777740"/>
+            <a:ext cx="9144000" cy="365760"/>
           </a:xfrm>
           <a:prstGeom prst="rect">
             <a:avLst/>
@@ -1253,14 +1533,36 @@
       </p:sp>
       <p:sp>
         <p:nvSpPr>
-          <p:cNvPr id="3" name="Text 1"/>
-          <p:cNvSpPr/>
-          <p:nvPr/>
-        </p:nvSpPr>
-        <p:spPr>
-          <a:xfrm>
-            <a:off x="731520" y="1097280"/>
-            <a:ext cx="7772400" cy="1371600"/>
+          <p:cNvPr id="4" name="Shape 2"/>
+          <p:cNvSpPr/>
+          <p:nvPr/>
+        </p:nvSpPr>
+        <p:spPr>
+          <a:xfrm>
+            <a:off x="6858000" y="-1371600"/>
+            <a:ext cx="4572000" cy="4572000"/>
+          </a:xfrm>
+          <a:prstGeom prst="ellipse">
+            <a:avLst/>
+          </a:prstGeom>
+          <a:solidFill>
+            <a:srgbClr val="2A9D8F">
+              <a:alpha val="12000"/>
+            </a:srgbClr>
+          </a:solidFill>
+          <a:ln/>
+        </p:spPr>
+      </p:sp>
+      <p:sp>
+        <p:nvSpPr>
+          <p:cNvPr id="5" name="Text 3"/>
+          <p:cNvSpPr/>
+          <p:nvPr/>
+        </p:nvSpPr>
+        <p:spPr>
+          <a:xfrm>
+            <a:off x="731520" y="914400"/>
+            <a:ext cx="7680960" cy="457200"/>
           </a:xfrm>
           <a:prstGeom prst="rect">
             <a:avLst/>
@@ -1276,7 +1578,46 @@
               <a:buNone/>
             </a:pPr>
             <a:r>
-              <a:rPr lang="en-US" sz="4000" b="1" dirty="0">
+              <a:rPr lang="en-US" sz="1300" b="1" spc="500" kern="0" dirty="0">
+                <a:solidFill>
+                  <a:srgbClr val="2A9D8F"/>
+                </a:solidFill>
+                <a:latin typeface="Calibri" pitchFamily="34" charset="0"/>
+                <a:ea typeface="Calibri" pitchFamily="34" charset="-122"/>
+                <a:cs typeface="Calibri" pitchFamily="34" charset="-120"/>
+              </a:rPr>
+              <a:t>GRADE 6 SCIENCE</a:t>
+            </a:r>
+            <a:endParaRPr lang="en-US" sz="1300" dirty="0"/>
+          </a:p>
+        </p:txBody>
+      </p:sp>
+      <p:sp>
+        <p:nvSpPr>
+          <p:cNvPr id="6" name="Text 4"/>
+          <p:cNvSpPr/>
+          <p:nvPr/>
+        </p:nvSpPr>
+        <p:spPr>
+          <a:xfrm>
+            <a:off x="731520" y="1463040"/>
+            <a:ext cx="6858000" cy="1645920"/>
+          </a:xfrm>
+          <a:prstGeom prst="rect">
+            <a:avLst/>
+          </a:prstGeom>
+          <a:noFill/>
+          <a:ln/>
+        </p:spPr>
+        <p:txBody>
+          <a:bodyPr wrap="square" rtlCol="0" anchor="t"/>
+          <a:lstStyle/>
+          <a:p>
+            <a:pPr indent="0" marL="0">
+              <a:buNone/>
+            </a:pPr>
+            <a:r>
+              <a:rPr lang="en-US" sz="3800" b="1" dirty="0">
                 <a:solidFill>
                   <a:srgbClr val="FFFFFF"/>
                 </a:solidFill>
@@ -1286,20 +1627,20 @@
               </a:rPr>
               <a:t>Separating Mixtures</a:t>
             </a:r>
-            <a:endParaRPr lang="en-US" sz="4000" dirty="0"/>
-          </a:p>
-        </p:txBody>
-      </p:sp>
-      <p:sp>
-        <p:nvSpPr>
-          <p:cNvPr id="4" name="Text 2"/>
-          <p:cNvSpPr/>
-          <p:nvPr/>
-        </p:nvSpPr>
-        <p:spPr>
-          <a:xfrm>
-            <a:off x="731520" y="2560320"/>
-            <a:ext cx="7772400" cy="548640"/>
+            <a:endParaRPr lang="en-US" sz="3800" dirty="0"/>
+          </a:p>
+        </p:txBody>
+      </p:sp>
+      <p:sp>
+        <p:nvSpPr>
+          <p:cNvPr id="7" name="Text 5"/>
+          <p:cNvSpPr/>
+          <p:nvPr/>
+        </p:nvSpPr>
+        <p:spPr>
+          <a:xfrm>
+            <a:off x="731520" y="3200400"/>
+            <a:ext cx="6400800" cy="548640"/>
           </a:xfrm>
           <a:prstGeom prst="rect">
             <a:avLst/>
@@ -1315,15 +1656,15 @@
               <a:buNone/>
             </a:pPr>
             <a:r>
-              <a:rPr lang="en-US" sz="1600" dirty="0">
+              <a:rPr lang="en-US" sz="1600" i="1" dirty="0">
                 <a:solidFill>
-                  <a:srgbClr val="E9C46A"/>
+                  <a:srgbClr val="9B9690"/>
                 </a:solidFill>
                 <a:latin typeface="Calibri" pitchFamily="34" charset="0"/>
                 <a:ea typeface="Calibri" pitchFamily="34" charset="-122"/>
                 <a:cs typeface="Calibri" pitchFamily="34" charset="-120"/>
               </a:rPr>
-              <a:t>Grade 6 Science · Mr Zocchi</a:t>
+              <a:t>Techniques for separating different components</a:t>
             </a:r>
             <a:endParaRPr lang="en-US" sz="1600" dirty="0"/>
           </a:p>
@@ -1331,36 +1672,14 @@
       </p:sp>
       <p:sp>
         <p:nvSpPr>
-          <p:cNvPr id="5" name="Shape 3"/>
-          <p:cNvSpPr/>
-          <p:nvPr/>
-        </p:nvSpPr>
-        <p:spPr>
-          <a:xfrm>
-            <a:off x="731520" y="3474720"/>
-            <a:ext cx="2011680" cy="411480"/>
-          </a:xfrm>
-          <a:prstGeom prst="roundRect">
-            <a:avLst>
-              <a:gd name="adj" fmla="val 17778"/>
-            </a:avLst>
-          </a:prstGeom>
-          <a:solidFill>
-            <a:srgbClr val="2A9D8F"/>
-          </a:solidFill>
-          <a:ln/>
-        </p:spPr>
-      </p:sp>
-      <p:sp>
-        <p:nvSpPr>
-          <p:cNvPr id="6" name="Text 4"/>
-          <p:cNvSpPr/>
-          <p:nvPr/>
-        </p:nvSpPr>
-        <p:spPr>
-          <a:xfrm>
-            <a:off x="731520" y="3474720"/>
-            <a:ext cx="2011680" cy="411480"/>
+          <p:cNvPr id="8" name="Text 6"/>
+          <p:cNvSpPr/>
+          <p:nvPr/>
+        </p:nvSpPr>
+        <p:spPr>
+          <a:xfrm>
+            <a:off x="731520" y="4297680"/>
+            <a:ext cx="2743200" cy="365760"/>
           </a:xfrm>
           <a:prstGeom prst="rect">
             <a:avLst/>
@@ -1372,21 +1691,21 @@
           <a:bodyPr wrap="square" rtlCol="0" anchor="ctr"/>
           <a:lstStyle/>
           <a:p>
-            <a:pPr algn="ctr" indent="0" marL="0">
+            <a:pPr indent="0" marL="0">
               <a:buNone/>
             </a:pPr>
             <a:r>
-              <a:rPr lang="en-US" sz="1200" b="1" dirty="0">
+              <a:rPr lang="en-US" sz="1100" dirty="0">
                 <a:solidFill>
-                  <a:srgbClr val="FFFFFF"/>
+                  <a:srgbClr val="9B9690"/>
                 </a:solidFill>
                 <a:latin typeface="Calibri" pitchFamily="34" charset="0"/>
                 <a:ea typeface="Calibri" pitchFamily="34" charset="-122"/>
                 <a:cs typeface="Calibri" pitchFamily="34" charset="-120"/>
               </a:rPr>
-              <a:t>Term 2 · Chemistry</a:t>
-            </a:r>
-            <a:endParaRPr lang="en-US" sz="1200" dirty="0"/>
+              <a:t>mrzocchi.com</a:t>
+            </a:r>
+            <a:endParaRPr lang="en-US" sz="1100" dirty="0"/>
           </a:p>
         </p:txBody>
       </p:sp>
@@ -1431,7 +1750,47 @@
         <p:spPr>
           <a:xfrm>
             <a:off x="0" y="0"/>
-            <a:ext cx="9144000" cy="54864"/>
+            <a:ext cx="9144000" cy="822960"/>
+          </a:xfrm>
+          <a:prstGeom prst="rect">
+            <a:avLst/>
+          </a:prstGeom>
+          <a:solidFill>
+            <a:srgbClr val="FFFFFF"/>
+          </a:solidFill>
+          <a:ln/>
+        </p:spPr>
+      </p:sp>
+      <p:sp>
+        <p:nvSpPr>
+          <p:cNvPr id="3" name="Shape 1"/>
+          <p:cNvSpPr/>
+          <p:nvPr/>
+        </p:nvSpPr>
+        <p:spPr>
+          <a:xfrm>
+            <a:off x="0" y="804672"/>
+            <a:ext cx="9144000" cy="27432"/>
+          </a:xfrm>
+          <a:prstGeom prst="rect">
+            <a:avLst/>
+          </a:prstGeom>
+          <a:solidFill>
+            <a:srgbClr val="E5E2DC"/>
+          </a:solidFill>
+          <a:ln/>
+        </p:spPr>
+      </p:sp>
+      <p:sp>
+        <p:nvSpPr>
+          <p:cNvPr id="4" name="Shape 2"/>
+          <p:cNvSpPr/>
+          <p:nvPr/>
+        </p:nvSpPr>
+        <p:spPr>
+          <a:xfrm>
+            <a:off x="548640" y="201168"/>
+            <a:ext cx="54864" cy="420624"/>
           </a:xfrm>
           <a:prstGeom prst="rect">
             <a:avLst/>
@@ -1444,14 +1803,14 @@
       </p:sp>
       <p:sp>
         <p:nvSpPr>
-          <p:cNvPr id="3" name="Text 1"/>
-          <p:cNvSpPr/>
-          <p:nvPr/>
-        </p:nvSpPr>
-        <p:spPr>
-          <a:xfrm>
-            <a:off x="7772400" y="4709160"/>
-            <a:ext cx="1097280" cy="320040"/>
+          <p:cNvPr id="5" name="Text 3"/>
+          <p:cNvSpPr/>
+          <p:nvPr/>
+        </p:nvSpPr>
+        <p:spPr>
+          <a:xfrm>
+            <a:off x="777240" y="137160"/>
+            <a:ext cx="7772400" cy="548640"/>
           </a:xfrm>
           <a:prstGeom prst="rect">
             <a:avLst/>
@@ -1460,14 +1819,139 @@
           <a:ln/>
         </p:spPr>
         <p:txBody>
-          <a:bodyPr wrap="square" rtlCol="0" anchor="ctr"/>
+          <a:bodyPr wrap="square" lIns="0" tIns="0" rIns="0" bIns="0" rtlCol="0" anchor="ctr"/>
           <a:lstStyle/>
           <a:p>
-            <a:pPr algn="r" indent="0" marL="0">
+            <a:pPr indent="0" marL="0">
               <a:buNone/>
             </a:pPr>
             <a:r>
-              <a:rPr lang="en-US" sz="900" dirty="0">
+              <a:rPr lang="en-US" sz="2000" b="1" dirty="0">
+                <a:solidFill>
+                  <a:srgbClr val="1B2A4A"/>
+                </a:solidFill>
+                <a:latin typeface="Georgia" pitchFamily="34" charset="0"/>
+                <a:ea typeface="Georgia" pitchFamily="34" charset="-122"/>
+                <a:cs typeface="Georgia" pitchFamily="34" charset="-120"/>
+              </a:rPr>
+              <a:t>Key Vocabulary</a:t>
+            </a:r>
+            <a:endParaRPr lang="en-US" sz="2000" dirty="0"/>
+          </a:p>
+        </p:txBody>
+      </p:sp>
+      <p:sp>
+        <p:nvSpPr>
+          <p:cNvPr id="6" name="Shape 4"/>
+          <p:cNvSpPr/>
+          <p:nvPr/>
+        </p:nvSpPr>
+        <p:spPr>
+          <a:xfrm>
+            <a:off x="731520" y="1051560"/>
+            <a:ext cx="3657600" cy="658368"/>
+          </a:xfrm>
+          <a:prstGeom prst="rect">
+            <a:avLst/>
+          </a:prstGeom>
+          <a:solidFill>
+            <a:srgbClr val="FFFFFF"/>
+          </a:solidFill>
+          <a:ln/>
+          <a:effectLst>
+            <a:outerShdw sx="100000" sy="100000" kx="0" ky="0" algn="bl" rotWithShape="0" blurRad="50800" dist="25400" dir="8100000">
+              <a:srgbClr val="000000">
+                <a:alpha val="10000"/>
+              </a:srgbClr>
+            </a:outerShdw>
+          </a:effectLst>
+        </p:spPr>
+      </p:sp>
+      <p:sp>
+        <p:nvSpPr>
+          <p:cNvPr id="7" name="Shape 5"/>
+          <p:cNvSpPr/>
+          <p:nvPr/>
+        </p:nvSpPr>
+        <p:spPr>
+          <a:xfrm>
+            <a:off x="731520" y="1051560"/>
+            <a:ext cx="54864" cy="658368"/>
+          </a:xfrm>
+          <a:prstGeom prst="rect">
+            <a:avLst/>
+          </a:prstGeom>
+          <a:solidFill>
+            <a:srgbClr val="2A9D8F"/>
+          </a:solidFill>
+          <a:ln/>
+        </p:spPr>
+      </p:sp>
+      <p:sp>
+        <p:nvSpPr>
+          <p:cNvPr id="8" name="Text 6"/>
+          <p:cNvSpPr/>
+          <p:nvPr/>
+        </p:nvSpPr>
+        <p:spPr>
+          <a:xfrm>
+            <a:off x="914400" y="1051560"/>
+            <a:ext cx="1463040" cy="658368"/>
+          </a:xfrm>
+          <a:prstGeom prst="rect">
+            <a:avLst/>
+          </a:prstGeom>
+          <a:noFill/>
+          <a:ln/>
+        </p:spPr>
+        <p:txBody>
+          <a:bodyPr wrap="square" lIns="0" tIns="0" rIns="0" bIns="0" rtlCol="0" anchor="ctr"/>
+          <a:lstStyle/>
+          <a:p>
+            <a:pPr indent="0" marL="0">
+              <a:buNone/>
+            </a:pPr>
+            <a:r>
+              <a:rPr lang="en-US" sz="1300" b="1" dirty="0">
+                <a:solidFill>
+                  <a:srgbClr val="1B2A4A"/>
+                </a:solidFill>
+                <a:latin typeface="Georgia" pitchFamily="34" charset="0"/>
+                <a:ea typeface="Georgia" pitchFamily="34" charset="-122"/>
+                <a:cs typeface="Georgia" pitchFamily="34" charset="-120"/>
+              </a:rPr>
+              <a:t>Filtration</a:t>
+            </a:r>
+            <a:endParaRPr lang="en-US" sz="1300" dirty="0"/>
+          </a:p>
+        </p:txBody>
+      </p:sp>
+      <p:sp>
+        <p:nvSpPr>
+          <p:cNvPr id="9" name="Text 7"/>
+          <p:cNvSpPr/>
+          <p:nvPr/>
+        </p:nvSpPr>
+        <p:spPr>
+          <a:xfrm>
+            <a:off x="2377440" y="1051560"/>
+            <a:ext cx="1920240" cy="658368"/>
+          </a:xfrm>
+          <a:prstGeom prst="rect">
+            <a:avLst/>
+          </a:prstGeom>
+          <a:noFill/>
+          <a:ln/>
+        </p:spPr>
+        <p:txBody>
+          <a:bodyPr wrap="square" lIns="0" tIns="0" rIns="0" bIns="0" rtlCol="0" anchor="ctr"/>
+          <a:lstStyle/>
+          <a:p>
+            <a:pPr indent="0" marL="0">
+              <a:buNone/>
+            </a:pPr>
+            <a:r>
+              <a:rPr lang="en-US" sz="1100" dirty="0">
                 <a:solidFill>
                   <a:srgbClr val="6B6660"/>
                 </a:solidFill>
@@ -1475,22 +1959,69 @@
                 <a:ea typeface="Calibri" pitchFamily="34" charset="-122"/>
                 <a:cs typeface="Calibri" pitchFamily="34" charset="-120"/>
               </a:rPr>
-              <a:t>2 / 5</a:t>
-            </a:r>
-            <a:endParaRPr lang="en-US" sz="900" dirty="0"/>
-          </a:p>
-        </p:txBody>
-      </p:sp>
-      <p:sp>
-        <p:nvSpPr>
-          <p:cNvPr id="4" name="Text 2"/>
-          <p:cNvSpPr/>
-          <p:nvPr/>
-        </p:nvSpPr>
-        <p:spPr>
-          <a:xfrm>
-            <a:off x="457200" y="274320"/>
-            <a:ext cx="8229600" cy="640080"/>
+              <a:t>Separating an insoluble solid from a liquid</a:t>
+            </a:r>
+            <a:endParaRPr lang="en-US" sz="1100" dirty="0"/>
+          </a:p>
+        </p:txBody>
+      </p:sp>
+      <p:sp>
+        <p:nvSpPr>
+          <p:cNvPr id="10" name="Shape 8"/>
+          <p:cNvSpPr/>
+          <p:nvPr/>
+        </p:nvSpPr>
+        <p:spPr>
+          <a:xfrm>
+            <a:off x="4754880" y="1051560"/>
+            <a:ext cx="3657600" cy="658368"/>
+          </a:xfrm>
+          <a:prstGeom prst="rect">
+            <a:avLst/>
+          </a:prstGeom>
+          <a:solidFill>
+            <a:srgbClr val="FFFFFF"/>
+          </a:solidFill>
+          <a:ln/>
+          <a:effectLst>
+            <a:outerShdw sx="100000" sy="100000" kx="0" ky="0" algn="bl" rotWithShape="0" blurRad="50800" dist="25400" dir="8100000">
+              <a:srgbClr val="000000">
+                <a:alpha val="10000"/>
+              </a:srgbClr>
+            </a:outerShdw>
+          </a:effectLst>
+        </p:spPr>
+      </p:sp>
+      <p:sp>
+        <p:nvSpPr>
+          <p:cNvPr id="11" name="Shape 9"/>
+          <p:cNvSpPr/>
+          <p:nvPr/>
+        </p:nvSpPr>
+        <p:spPr>
+          <a:xfrm>
+            <a:off x="4754880" y="1051560"/>
+            <a:ext cx="54864" cy="658368"/>
+          </a:xfrm>
+          <a:prstGeom prst="rect">
+            <a:avLst/>
+          </a:prstGeom>
+          <a:solidFill>
+            <a:srgbClr val="2A9D8F"/>
+          </a:solidFill>
+          <a:ln/>
+        </p:spPr>
+      </p:sp>
+      <p:sp>
+        <p:nvSpPr>
+          <p:cNvPr id="12" name="Text 10"/>
+          <p:cNvSpPr/>
+          <p:nvPr/>
+        </p:nvSpPr>
+        <p:spPr>
+          <a:xfrm>
+            <a:off x="4937760" y="1051560"/>
+            <a:ext cx="1463040" cy="658368"/>
           </a:xfrm>
           <a:prstGeom prst="rect">
             <a:avLst/>
@@ -1499,14 +2030,14 @@
           <a:ln/>
         </p:spPr>
         <p:txBody>
-          <a:bodyPr wrap="square" rtlCol="0" anchor="ctr"/>
+          <a:bodyPr wrap="square" lIns="0" tIns="0" rIns="0" bIns="0" rtlCol="0" anchor="ctr"/>
           <a:lstStyle/>
           <a:p>
             <a:pPr indent="0" marL="0">
               <a:buNone/>
             </a:pPr>
             <a:r>
-              <a:rPr lang="en-US" sz="2600" b="1" dirty="0">
+              <a:rPr lang="en-US" sz="1300" b="1" dirty="0">
                 <a:solidFill>
                   <a:srgbClr val="1B2A4A"/>
                 </a:solidFill>
@@ -1514,22 +2045,61 @@
                 <a:ea typeface="Georgia" pitchFamily="34" charset="-122"/>
                 <a:cs typeface="Georgia" pitchFamily="34" charset="-120"/>
               </a:rPr>
-              <a:t>Separation Techniques</a:t>
-            </a:r>
-            <a:endParaRPr lang="en-US" sz="2600" dirty="0"/>
-          </a:p>
-        </p:txBody>
-      </p:sp>
-      <p:sp>
-        <p:nvSpPr>
-          <p:cNvPr id="5" name="Shape 3"/>
-          <p:cNvSpPr/>
-          <p:nvPr/>
-        </p:nvSpPr>
-        <p:spPr>
-          <a:xfrm>
-            <a:off x="457200" y="1188720"/>
-            <a:ext cx="2560320" cy="1828800"/>
+              <a:t>Evaporation</a:t>
+            </a:r>
+            <a:endParaRPr lang="en-US" sz="1300" dirty="0"/>
+          </a:p>
+        </p:txBody>
+      </p:sp>
+      <p:sp>
+        <p:nvSpPr>
+          <p:cNvPr id="13" name="Text 11"/>
+          <p:cNvSpPr/>
+          <p:nvPr/>
+        </p:nvSpPr>
+        <p:spPr>
+          <a:xfrm>
+            <a:off x="6400800" y="1051560"/>
+            <a:ext cx="1920240" cy="658368"/>
+          </a:xfrm>
+          <a:prstGeom prst="rect">
+            <a:avLst/>
+          </a:prstGeom>
+          <a:noFill/>
+          <a:ln/>
+        </p:spPr>
+        <p:txBody>
+          <a:bodyPr wrap="square" lIns="0" tIns="0" rIns="0" bIns="0" rtlCol="0" anchor="ctr"/>
+          <a:lstStyle/>
+          <a:p>
+            <a:pPr indent="0" marL="0">
+              <a:buNone/>
+            </a:pPr>
+            <a:r>
+              <a:rPr lang="en-US" sz="1100" dirty="0">
+                <a:solidFill>
+                  <a:srgbClr val="6B6660"/>
+                </a:solidFill>
+                <a:latin typeface="Calibri" pitchFamily="34" charset="0"/>
+                <a:ea typeface="Calibri" pitchFamily="34" charset="-122"/>
+                <a:cs typeface="Calibri" pitchFamily="34" charset="-120"/>
+              </a:rPr>
+              <a:t>Removing liquid to leave dissolved solid</a:t>
+            </a:r>
+            <a:endParaRPr lang="en-US" sz="1100" dirty="0"/>
+          </a:p>
+        </p:txBody>
+      </p:sp>
+      <p:sp>
+        <p:nvSpPr>
+          <p:cNvPr id="14" name="Shape 12"/>
+          <p:cNvSpPr/>
+          <p:nvPr/>
+        </p:nvSpPr>
+        <p:spPr>
+          <a:xfrm>
+            <a:off x="731520" y="1819656"/>
+            <a:ext cx="3657600" cy="658368"/>
           </a:xfrm>
           <a:prstGeom prst="rect">
             <a:avLst/>
@@ -1537,12 +2107,7 @@
           <a:solidFill>
             <a:srgbClr val="FFFFFF"/>
           </a:solidFill>
-          <a:ln w="12700">
-            <a:solidFill>
-              <a:srgbClr val="E5E2DC"/>
-            </a:solidFill>
-            <a:prstDash val="solid"/>
-          </a:ln>
+          <a:ln/>
           <a:effectLst>
             <a:outerShdw sx="100000" sy="100000" kx="0" ky="0" algn="bl" rotWithShape="0" blurRad="50800" dist="25400" dir="8100000">
               <a:srgbClr val="000000">
@@ -1554,14 +2119,14 @@
       </p:sp>
       <p:sp>
         <p:nvSpPr>
-          <p:cNvPr id="6" name="Shape 4"/>
-          <p:cNvSpPr/>
-          <p:nvPr/>
-        </p:nvSpPr>
-        <p:spPr>
-          <a:xfrm>
-            <a:off x="457200" y="1188720"/>
-            <a:ext cx="2560320" cy="54864"/>
+          <p:cNvPr id="15" name="Shape 13"/>
+          <p:cNvSpPr/>
+          <p:nvPr/>
+        </p:nvSpPr>
+        <p:spPr>
+          <a:xfrm>
+            <a:off x="731520" y="1819656"/>
+            <a:ext cx="54864" cy="658368"/>
           </a:xfrm>
           <a:prstGeom prst="rect">
             <a:avLst/>
@@ -1574,14 +2139,14 @@
       </p:sp>
       <p:sp>
         <p:nvSpPr>
-          <p:cNvPr id="7" name="Text 5"/>
-          <p:cNvSpPr/>
-          <p:nvPr/>
-        </p:nvSpPr>
-        <p:spPr>
-          <a:xfrm>
-            <a:off x="594360" y="1325880"/>
-            <a:ext cx="2286000" cy="365760"/>
+          <p:cNvPr id="16" name="Text 14"/>
+          <p:cNvSpPr/>
+          <p:nvPr/>
+        </p:nvSpPr>
+        <p:spPr>
+          <a:xfrm>
+            <a:off x="914400" y="1819656"/>
+            <a:ext cx="1463040" cy="658368"/>
           </a:xfrm>
           <a:prstGeom prst="rect">
             <a:avLst/>
@@ -1590,61 +2155,61 @@
           <a:ln/>
         </p:spPr>
         <p:txBody>
-          <a:bodyPr wrap="square" rtlCol="0" anchor="ctr"/>
+          <a:bodyPr wrap="square" lIns="0" tIns="0" rIns="0" bIns="0" rtlCol="0" anchor="ctr"/>
           <a:lstStyle/>
           <a:p>
             <a:pPr indent="0" marL="0">
               <a:buNone/>
             </a:pPr>
             <a:r>
-              <a:rPr lang="en-US" sz="1400" b="1" dirty="0">
+              <a:rPr lang="en-US" sz="1300" b="1" dirty="0">
                 <a:solidFill>
                   <a:srgbClr val="1B2A4A"/>
+                </a:solidFill>
+                <a:latin typeface="Georgia" pitchFamily="34" charset="0"/>
+                <a:ea typeface="Georgia" pitchFamily="34" charset="-122"/>
+                <a:cs typeface="Georgia" pitchFamily="34" charset="-120"/>
+              </a:rPr>
+              <a:t>Distillation</a:t>
+            </a:r>
+            <a:endParaRPr lang="en-US" sz="1300" dirty="0"/>
+          </a:p>
+        </p:txBody>
+      </p:sp>
+      <p:sp>
+        <p:nvSpPr>
+          <p:cNvPr id="17" name="Text 15"/>
+          <p:cNvSpPr/>
+          <p:nvPr/>
+        </p:nvSpPr>
+        <p:spPr>
+          <a:xfrm>
+            <a:off x="2377440" y="1819656"/>
+            <a:ext cx="1920240" cy="658368"/>
+          </a:xfrm>
+          <a:prstGeom prst="rect">
+            <a:avLst/>
+          </a:prstGeom>
+          <a:noFill/>
+          <a:ln/>
+        </p:spPr>
+        <p:txBody>
+          <a:bodyPr wrap="square" lIns="0" tIns="0" rIns="0" bIns="0" rtlCol="0" anchor="ctr"/>
+          <a:lstStyle/>
+          <a:p>
+            <a:pPr indent="0" marL="0">
+              <a:buNone/>
+            </a:pPr>
+            <a:r>
+              <a:rPr lang="en-US" sz="1100" dirty="0">
+                <a:solidFill>
+                  <a:srgbClr val="6B6660"/>
                 </a:solidFill>
                 <a:latin typeface="Calibri" pitchFamily="34" charset="0"/>
                 <a:ea typeface="Calibri" pitchFamily="34" charset="-122"/>
                 <a:cs typeface="Calibri" pitchFamily="34" charset="-120"/>
               </a:rPr>
-              <a:t>Filtration</a:t>
-            </a:r>
-            <a:endParaRPr lang="en-US" sz="1400" dirty="0"/>
-          </a:p>
-        </p:txBody>
-      </p:sp>
-      <p:sp>
-        <p:nvSpPr>
-          <p:cNvPr id="8" name="Text 6"/>
-          <p:cNvSpPr/>
-          <p:nvPr/>
-        </p:nvSpPr>
-        <p:spPr>
-          <a:xfrm>
-            <a:off x="594360" y="1737360"/>
-            <a:ext cx="2286000" cy="1097280"/>
-          </a:xfrm>
-          <a:prstGeom prst="rect">
-            <a:avLst/>
-          </a:prstGeom>
-          <a:noFill/>
-          <a:ln/>
-        </p:spPr>
-        <p:txBody>
-          <a:bodyPr wrap="square" rtlCol="0" anchor="t"/>
-          <a:lstStyle/>
-          <a:p>
-            <a:pPr indent="0" marL="0">
-              <a:buNone/>
-            </a:pPr>
-            <a:r>
-              <a:rPr lang="en-US" sz="1100" dirty="0">
-                <a:solidFill>
-                  <a:srgbClr val="3D3A36"/>
-                </a:solidFill>
-                <a:latin typeface="Calibri" pitchFamily="34" charset="0"/>
-                <a:ea typeface="Calibri" pitchFamily="34" charset="-122"/>
-                <a:cs typeface="Calibri" pitchFamily="34" charset="-120"/>
-              </a:rPr>
-              <a:t>Separates an insoluble solid from a liquid. The mixture is poured through filter paper in a funnel. Solid stays in paper (residue), liquid passes through (filtrate). Example: sand from water.</a:t>
+              <a:t>Separating liquids by boiling point</a:t>
             </a:r>
             <a:endParaRPr lang="en-US" sz="1100" dirty="0"/>
           </a:p>
@@ -1652,14 +2217,14 @@
       </p:sp>
       <p:sp>
         <p:nvSpPr>
-          <p:cNvPr id="9" name="Shape 7"/>
-          <p:cNvSpPr/>
-          <p:nvPr/>
-        </p:nvSpPr>
-        <p:spPr>
-          <a:xfrm>
-            <a:off x="3291840" y="1188720"/>
-            <a:ext cx="2560320" cy="1828800"/>
+          <p:cNvPr id="18" name="Shape 16"/>
+          <p:cNvSpPr/>
+          <p:nvPr/>
+        </p:nvSpPr>
+        <p:spPr>
+          <a:xfrm>
+            <a:off x="4754880" y="1819656"/>
+            <a:ext cx="3657600" cy="658368"/>
           </a:xfrm>
           <a:prstGeom prst="rect">
             <a:avLst/>
@@ -1667,12 +2232,7 @@
           <a:solidFill>
             <a:srgbClr val="FFFFFF"/>
           </a:solidFill>
-          <a:ln w="12700">
-            <a:solidFill>
-              <a:srgbClr val="E5E2DC"/>
-            </a:solidFill>
-            <a:prstDash val="solid"/>
-          </a:ln>
+          <a:ln/>
           <a:effectLst>
             <a:outerShdw sx="100000" sy="100000" kx="0" ky="0" algn="bl" rotWithShape="0" blurRad="50800" dist="25400" dir="8100000">
               <a:srgbClr val="000000">
@@ -1684,14 +2244,14 @@
       </p:sp>
       <p:sp>
         <p:nvSpPr>
-          <p:cNvPr id="10" name="Shape 8"/>
-          <p:cNvSpPr/>
-          <p:nvPr/>
-        </p:nvSpPr>
-        <p:spPr>
-          <a:xfrm>
-            <a:off x="3291840" y="1188720"/>
-            <a:ext cx="2560320" cy="54864"/>
+          <p:cNvPr id="19" name="Shape 17"/>
+          <p:cNvSpPr/>
+          <p:nvPr/>
+        </p:nvSpPr>
+        <p:spPr>
+          <a:xfrm>
+            <a:off x="4754880" y="1819656"/>
+            <a:ext cx="54864" cy="658368"/>
           </a:xfrm>
           <a:prstGeom prst="rect">
             <a:avLst/>
@@ -1704,14 +2264,14 @@
       </p:sp>
       <p:sp>
         <p:nvSpPr>
-          <p:cNvPr id="11" name="Text 9"/>
-          <p:cNvSpPr/>
-          <p:nvPr/>
-        </p:nvSpPr>
-        <p:spPr>
-          <a:xfrm>
-            <a:off x="3429000" y="1325880"/>
-            <a:ext cx="2286000" cy="365760"/>
+          <p:cNvPr id="20" name="Text 18"/>
+          <p:cNvSpPr/>
+          <p:nvPr/>
+        </p:nvSpPr>
+        <p:spPr>
+          <a:xfrm>
+            <a:off x="4937760" y="1819656"/>
+            <a:ext cx="1463040" cy="658368"/>
           </a:xfrm>
           <a:prstGeom prst="rect">
             <a:avLst/>
@@ -1720,61 +2280,61 @@
           <a:ln/>
         </p:spPr>
         <p:txBody>
-          <a:bodyPr wrap="square" rtlCol="0" anchor="ctr"/>
+          <a:bodyPr wrap="square" lIns="0" tIns="0" rIns="0" bIns="0" rtlCol="0" anchor="ctr"/>
           <a:lstStyle/>
           <a:p>
             <a:pPr indent="0" marL="0">
               <a:buNone/>
             </a:pPr>
             <a:r>
-              <a:rPr lang="en-US" sz="1400" b="1" dirty="0">
+              <a:rPr lang="en-US" sz="1300" b="1" dirty="0">
                 <a:solidFill>
                   <a:srgbClr val="1B2A4A"/>
+                </a:solidFill>
+                <a:latin typeface="Georgia" pitchFamily="34" charset="0"/>
+                <a:ea typeface="Georgia" pitchFamily="34" charset="-122"/>
+                <a:cs typeface="Georgia" pitchFamily="34" charset="-120"/>
+              </a:rPr>
+              <a:t>Chromatography</a:t>
+            </a:r>
+            <a:endParaRPr lang="en-US" sz="1300" dirty="0"/>
+          </a:p>
+        </p:txBody>
+      </p:sp>
+      <p:sp>
+        <p:nvSpPr>
+          <p:cNvPr id="21" name="Text 19"/>
+          <p:cNvSpPr/>
+          <p:nvPr/>
+        </p:nvSpPr>
+        <p:spPr>
+          <a:xfrm>
+            <a:off x="6400800" y="1819656"/>
+            <a:ext cx="1920240" cy="658368"/>
+          </a:xfrm>
+          <a:prstGeom prst="rect">
+            <a:avLst/>
+          </a:prstGeom>
+          <a:noFill/>
+          <a:ln/>
+        </p:spPr>
+        <p:txBody>
+          <a:bodyPr wrap="square" lIns="0" tIns="0" rIns="0" bIns="0" rtlCol="0" anchor="ctr"/>
+          <a:lstStyle/>
+          <a:p>
+            <a:pPr indent="0" marL="0">
+              <a:buNone/>
+            </a:pPr>
+            <a:r>
+              <a:rPr lang="en-US" sz="1100" dirty="0">
+                <a:solidFill>
+                  <a:srgbClr val="6B6660"/>
                 </a:solidFill>
                 <a:latin typeface="Calibri" pitchFamily="34" charset="0"/>
                 <a:ea typeface="Calibri" pitchFamily="34" charset="-122"/>
                 <a:cs typeface="Calibri" pitchFamily="34" charset="-120"/>
               </a:rPr>
-              <a:t>Evaporation</a:t>
-            </a:r>
-            <a:endParaRPr lang="en-US" sz="1400" dirty="0"/>
-          </a:p>
-        </p:txBody>
-      </p:sp>
-      <p:sp>
-        <p:nvSpPr>
-          <p:cNvPr id="12" name="Text 10"/>
-          <p:cNvSpPr/>
-          <p:nvPr/>
-        </p:nvSpPr>
-        <p:spPr>
-          <a:xfrm>
-            <a:off x="3429000" y="1737360"/>
-            <a:ext cx="2286000" cy="1097280"/>
-          </a:xfrm>
-          <a:prstGeom prst="rect">
-            <a:avLst/>
-          </a:prstGeom>
-          <a:noFill/>
-          <a:ln/>
-        </p:spPr>
-        <p:txBody>
-          <a:bodyPr wrap="square" rtlCol="0" anchor="t"/>
-          <a:lstStyle/>
-          <a:p>
-            <a:pPr indent="0" marL="0">
-              <a:buNone/>
-            </a:pPr>
-            <a:r>
-              <a:rPr lang="en-US" sz="1100" dirty="0">
-                <a:solidFill>
-                  <a:srgbClr val="3D3A36"/>
-                </a:solidFill>
-                <a:latin typeface="Calibri" pitchFamily="34" charset="0"/>
-                <a:ea typeface="Calibri" pitchFamily="34" charset="-122"/>
-                <a:cs typeface="Calibri" pitchFamily="34" charset="-120"/>
-              </a:rPr>
-              <a:t>Separates a dissolved solid from a solution. Heat the solution — water evaporates, solid crystals remain. Example: getting salt from salt water.</a:t>
+              <a:t>Separating dissolved substances</a:t>
             </a:r>
             <a:endParaRPr lang="en-US" sz="1100" dirty="0"/>
           </a:p>
@@ -1782,14 +2342,14 @@
       </p:sp>
       <p:sp>
         <p:nvSpPr>
-          <p:cNvPr id="13" name="Shape 11"/>
-          <p:cNvSpPr/>
-          <p:nvPr/>
-        </p:nvSpPr>
-        <p:spPr>
-          <a:xfrm>
-            <a:off x="6126480" y="1188720"/>
-            <a:ext cx="2560320" cy="1828800"/>
+          <p:cNvPr id="22" name="Shape 20"/>
+          <p:cNvSpPr/>
+          <p:nvPr/>
+        </p:nvSpPr>
+        <p:spPr>
+          <a:xfrm>
+            <a:off x="731520" y="2587752"/>
+            <a:ext cx="3657600" cy="658368"/>
           </a:xfrm>
           <a:prstGeom prst="rect">
             <a:avLst/>
@@ -1797,12 +2357,7 @@
           <a:solidFill>
             <a:srgbClr val="FFFFFF"/>
           </a:solidFill>
-          <a:ln w="12700">
-            <a:solidFill>
-              <a:srgbClr val="E5E2DC"/>
-            </a:solidFill>
-            <a:prstDash val="solid"/>
-          </a:ln>
+          <a:ln/>
           <a:effectLst>
             <a:outerShdw sx="100000" sy="100000" kx="0" ky="0" algn="bl" rotWithShape="0" blurRad="50800" dist="25400" dir="8100000">
               <a:srgbClr val="000000">
@@ -1814,14 +2369,14 @@
       </p:sp>
       <p:sp>
         <p:nvSpPr>
-          <p:cNvPr id="14" name="Shape 12"/>
-          <p:cNvSpPr/>
-          <p:nvPr/>
-        </p:nvSpPr>
-        <p:spPr>
-          <a:xfrm>
-            <a:off x="6126480" y="1188720"/>
-            <a:ext cx="2560320" cy="54864"/>
+          <p:cNvPr id="23" name="Shape 21"/>
+          <p:cNvSpPr/>
+          <p:nvPr/>
+        </p:nvSpPr>
+        <p:spPr>
+          <a:xfrm>
+            <a:off x="731520" y="2587752"/>
+            <a:ext cx="54864" cy="658368"/>
           </a:xfrm>
           <a:prstGeom prst="rect">
             <a:avLst/>
@@ -1834,14 +2389,14 @@
       </p:sp>
       <p:sp>
         <p:nvSpPr>
-          <p:cNvPr id="15" name="Text 13"/>
-          <p:cNvSpPr/>
-          <p:nvPr/>
-        </p:nvSpPr>
-        <p:spPr>
-          <a:xfrm>
-            <a:off x="6263640" y="1325880"/>
-            <a:ext cx="2286000" cy="365760"/>
+          <p:cNvPr id="24" name="Text 22"/>
+          <p:cNvSpPr/>
+          <p:nvPr/>
+        </p:nvSpPr>
+        <p:spPr>
+          <a:xfrm>
+            <a:off x="914400" y="2587752"/>
+            <a:ext cx="1463040" cy="658368"/>
           </a:xfrm>
           <a:prstGeom prst="rect">
             <a:avLst/>
@@ -1850,37 +2405,123 @@
           <a:ln/>
         </p:spPr>
         <p:txBody>
-          <a:bodyPr wrap="square" rtlCol="0" anchor="ctr"/>
+          <a:bodyPr wrap="square" lIns="0" tIns="0" rIns="0" bIns="0" rtlCol="0" anchor="ctr"/>
           <a:lstStyle/>
           <a:p>
             <a:pPr indent="0" marL="0">
               <a:buNone/>
             </a:pPr>
             <a:r>
-              <a:rPr lang="en-US" sz="1400" b="1" dirty="0">
+              <a:rPr lang="en-US" sz="1300" b="1" dirty="0">
                 <a:solidFill>
                   <a:srgbClr val="1B2A4A"/>
+                </a:solidFill>
+                <a:latin typeface="Georgia" pitchFamily="34" charset="0"/>
+                <a:ea typeface="Georgia" pitchFamily="34" charset="-122"/>
+                <a:cs typeface="Georgia" pitchFamily="34" charset="-120"/>
+              </a:rPr>
+              <a:t>Residue</a:t>
+            </a:r>
+            <a:endParaRPr lang="en-US" sz="1300" dirty="0"/>
+          </a:p>
+        </p:txBody>
+      </p:sp>
+      <p:sp>
+        <p:nvSpPr>
+          <p:cNvPr id="25" name="Text 23"/>
+          <p:cNvSpPr/>
+          <p:nvPr/>
+        </p:nvSpPr>
+        <p:spPr>
+          <a:xfrm>
+            <a:off x="2377440" y="2587752"/>
+            <a:ext cx="1920240" cy="658368"/>
+          </a:xfrm>
+          <a:prstGeom prst="rect">
+            <a:avLst/>
+          </a:prstGeom>
+          <a:noFill/>
+          <a:ln/>
+        </p:spPr>
+        <p:txBody>
+          <a:bodyPr wrap="square" lIns="0" tIns="0" rIns="0" bIns="0" rtlCol="0" anchor="ctr"/>
+          <a:lstStyle/>
+          <a:p>
+            <a:pPr indent="0" marL="0">
+              <a:buNone/>
+            </a:pPr>
+            <a:r>
+              <a:rPr lang="en-US" sz="1100" dirty="0">
+                <a:solidFill>
+                  <a:srgbClr val="6B6660"/>
                 </a:solidFill>
                 <a:latin typeface="Calibri" pitchFamily="34" charset="0"/>
                 <a:ea typeface="Calibri" pitchFamily="34" charset="-122"/>
                 <a:cs typeface="Calibri" pitchFamily="34" charset="-120"/>
               </a:rPr>
-              <a:t>Distillation</a:t>
-            </a:r>
-            <a:endParaRPr lang="en-US" sz="1400" dirty="0"/>
-          </a:p>
-        </p:txBody>
-      </p:sp>
-      <p:sp>
-        <p:nvSpPr>
-          <p:cNvPr id="16" name="Text 14"/>
-          <p:cNvSpPr/>
-          <p:nvPr/>
-        </p:nvSpPr>
-        <p:spPr>
-          <a:xfrm>
-            <a:off x="6263640" y="1737360"/>
-            <a:ext cx="2286000" cy="1097280"/>
+              <a:t>The solid left in the filter paper</a:t>
+            </a:r>
+            <a:endParaRPr lang="en-US" sz="1100" dirty="0"/>
+          </a:p>
+        </p:txBody>
+      </p:sp>
+      <p:sp>
+        <p:nvSpPr>
+          <p:cNvPr id="26" name="Shape 24"/>
+          <p:cNvSpPr/>
+          <p:nvPr/>
+        </p:nvSpPr>
+        <p:spPr>
+          <a:xfrm>
+            <a:off x="4754880" y="2587752"/>
+            <a:ext cx="3657600" cy="658368"/>
+          </a:xfrm>
+          <a:prstGeom prst="rect">
+            <a:avLst/>
+          </a:prstGeom>
+          <a:solidFill>
+            <a:srgbClr val="FFFFFF"/>
+          </a:solidFill>
+          <a:ln/>
+          <a:effectLst>
+            <a:outerShdw sx="100000" sy="100000" kx="0" ky="0" algn="bl" rotWithShape="0" blurRad="50800" dist="25400" dir="8100000">
+              <a:srgbClr val="000000">
+                <a:alpha val="10000"/>
+              </a:srgbClr>
+            </a:outerShdw>
+          </a:effectLst>
+        </p:spPr>
+      </p:sp>
+      <p:sp>
+        <p:nvSpPr>
+          <p:cNvPr id="27" name="Shape 25"/>
+          <p:cNvSpPr/>
+          <p:nvPr/>
+        </p:nvSpPr>
+        <p:spPr>
+          <a:xfrm>
+            <a:off x="4754880" y="2587752"/>
+            <a:ext cx="54864" cy="658368"/>
+          </a:xfrm>
+          <a:prstGeom prst="rect">
+            <a:avLst/>
+          </a:prstGeom>
+          <a:solidFill>
+            <a:srgbClr val="2A9D8F"/>
+          </a:solidFill>
+          <a:ln/>
+        </p:spPr>
+      </p:sp>
+      <p:sp>
+        <p:nvSpPr>
+          <p:cNvPr id="28" name="Text 26"/>
+          <p:cNvSpPr/>
+          <p:nvPr/>
+        </p:nvSpPr>
+        <p:spPr>
+          <a:xfrm>
+            <a:off x="4937760" y="2587752"/>
+            <a:ext cx="1463040" cy="658368"/>
           </a:xfrm>
           <a:prstGeom prst="rect">
             <a:avLst/>
@@ -1889,22 +2530,61 @@
           <a:ln/>
         </p:spPr>
         <p:txBody>
-          <a:bodyPr wrap="square" rtlCol="0" anchor="t"/>
+          <a:bodyPr wrap="square" lIns="0" tIns="0" rIns="0" bIns="0" rtlCol="0" anchor="ctr"/>
           <a:lstStyle/>
           <a:p>
             <a:pPr indent="0" marL="0">
               <a:buNone/>
             </a:pPr>
             <a:r>
+              <a:rPr lang="en-US" sz="1300" b="1" dirty="0">
+                <a:solidFill>
+                  <a:srgbClr val="1B2A4A"/>
+                </a:solidFill>
+                <a:latin typeface="Georgia" pitchFamily="34" charset="0"/>
+                <a:ea typeface="Georgia" pitchFamily="34" charset="-122"/>
+                <a:cs typeface="Georgia" pitchFamily="34" charset="-120"/>
+              </a:rPr>
+              <a:t>Filtrate</a:t>
+            </a:r>
+            <a:endParaRPr lang="en-US" sz="1300" dirty="0"/>
+          </a:p>
+        </p:txBody>
+      </p:sp>
+      <p:sp>
+        <p:nvSpPr>
+          <p:cNvPr id="29" name="Text 27"/>
+          <p:cNvSpPr/>
+          <p:nvPr/>
+        </p:nvSpPr>
+        <p:spPr>
+          <a:xfrm>
+            <a:off x="6400800" y="2587752"/>
+            <a:ext cx="1920240" cy="658368"/>
+          </a:xfrm>
+          <a:prstGeom prst="rect">
+            <a:avLst/>
+          </a:prstGeom>
+          <a:noFill/>
+          <a:ln/>
+        </p:spPr>
+        <p:txBody>
+          <a:bodyPr wrap="square" lIns="0" tIns="0" rIns="0" bIns="0" rtlCol="0" anchor="ctr"/>
+          <a:lstStyle/>
+          <a:p>
+            <a:pPr indent="0" marL="0">
+              <a:buNone/>
+            </a:pPr>
+            <a:r>
               <a:rPr lang="en-US" sz="1100" dirty="0">
                 <a:solidFill>
-                  <a:srgbClr val="3D3A36"/>
+                  <a:srgbClr val="6B6660"/>
                 </a:solidFill>
                 <a:latin typeface="Calibri" pitchFamily="34" charset="0"/>
                 <a:ea typeface="Calibri" pitchFamily="34" charset="-122"/>
                 <a:cs typeface="Calibri" pitchFamily="34" charset="-120"/>
               </a:rPr>
-              <a:t>Separates a liquid from a solution. Heat to boil — steam rises, passes through a condenser, cools back to liquid. Collects the pure solvent. Example: pure water from salt water.</a:t>
+              <a:t>The liquid that passes through the filter</a:t>
             </a:r>
             <a:endParaRPr lang="en-US" sz="1100" dirty="0"/>
           </a:p>
@@ -1951,7 +2631,47 @@
         <p:spPr>
           <a:xfrm>
             <a:off x="0" y="0"/>
-            <a:ext cx="9144000" cy="54864"/>
+            <a:ext cx="9144000" cy="822960"/>
+          </a:xfrm>
+          <a:prstGeom prst="rect">
+            <a:avLst/>
+          </a:prstGeom>
+          <a:solidFill>
+            <a:srgbClr val="FFFFFF"/>
+          </a:solidFill>
+          <a:ln/>
+        </p:spPr>
+      </p:sp>
+      <p:sp>
+        <p:nvSpPr>
+          <p:cNvPr id="3" name="Shape 1"/>
+          <p:cNvSpPr/>
+          <p:nvPr/>
+        </p:nvSpPr>
+        <p:spPr>
+          <a:xfrm>
+            <a:off x="0" y="804672"/>
+            <a:ext cx="9144000" cy="27432"/>
+          </a:xfrm>
+          <a:prstGeom prst="rect">
+            <a:avLst/>
+          </a:prstGeom>
+          <a:solidFill>
+            <a:srgbClr val="E5E2DC"/>
+          </a:solidFill>
+          <a:ln/>
+        </p:spPr>
+      </p:sp>
+      <p:sp>
+        <p:nvSpPr>
+          <p:cNvPr id="4" name="Shape 2"/>
+          <p:cNvSpPr/>
+          <p:nvPr/>
+        </p:nvSpPr>
+        <p:spPr>
+          <a:xfrm>
+            <a:off x="548640" y="201168"/>
+            <a:ext cx="54864" cy="420624"/>
           </a:xfrm>
           <a:prstGeom prst="rect">
             <a:avLst/>
@@ -1964,14 +2684,14 @@
       </p:sp>
       <p:sp>
         <p:nvSpPr>
-          <p:cNvPr id="3" name="Text 1"/>
-          <p:cNvSpPr/>
-          <p:nvPr/>
-        </p:nvSpPr>
-        <p:spPr>
-          <a:xfrm>
-            <a:off x="7772400" y="4709160"/>
-            <a:ext cx="1097280" cy="320040"/>
+          <p:cNvPr id="5" name="Text 3"/>
+          <p:cNvSpPr/>
+          <p:nvPr/>
+        </p:nvSpPr>
+        <p:spPr>
+          <a:xfrm>
+            <a:off x="777240" y="137160"/>
+            <a:ext cx="7772400" cy="548640"/>
           </a:xfrm>
           <a:prstGeom prst="rect">
             <a:avLst/>
@@ -1980,53 +2700,14 @@
           <a:ln/>
         </p:spPr>
         <p:txBody>
-          <a:bodyPr wrap="square" rtlCol="0" anchor="ctr"/>
-          <a:lstStyle/>
-          <a:p>
-            <a:pPr algn="r" indent="0" marL="0">
-              <a:buNone/>
-            </a:pPr>
-            <a:r>
-              <a:rPr lang="en-US" sz="900" dirty="0">
-                <a:solidFill>
-                  <a:srgbClr val="6B6660"/>
-                </a:solidFill>
-                <a:latin typeface="Calibri" pitchFamily="34" charset="0"/>
-                <a:ea typeface="Calibri" pitchFamily="34" charset="-122"/>
-                <a:cs typeface="Calibri" pitchFamily="34" charset="-120"/>
-              </a:rPr>
-              <a:t>3 / 5</a:t>
-            </a:r>
-            <a:endParaRPr lang="en-US" sz="900" dirty="0"/>
-          </a:p>
-        </p:txBody>
-      </p:sp>
-      <p:sp>
-        <p:nvSpPr>
-          <p:cNvPr id="4" name="Text 2"/>
-          <p:cNvSpPr/>
-          <p:nvPr/>
-        </p:nvSpPr>
-        <p:spPr>
-          <a:xfrm>
-            <a:off x="457200" y="274320"/>
-            <a:ext cx="8229600" cy="640080"/>
-          </a:xfrm>
-          <a:prstGeom prst="rect">
-            <a:avLst/>
-          </a:prstGeom>
-          <a:noFill/>
-          <a:ln/>
-        </p:spPr>
-        <p:txBody>
-          <a:bodyPr wrap="square" rtlCol="0" anchor="ctr"/>
+          <a:bodyPr wrap="square" lIns="0" tIns="0" rIns="0" bIns="0" rtlCol="0" anchor="ctr"/>
           <a:lstStyle/>
           <a:p>
             <a:pPr indent="0" marL="0">
               <a:buNone/>
             </a:pPr>
             <a:r>
-              <a:rPr lang="en-US" sz="2600" b="1" dirty="0">
+              <a:rPr lang="en-US" sz="2000" b="1" dirty="0">
                 <a:solidFill>
                   <a:srgbClr val="1B2A4A"/>
                 </a:solidFill>
@@ -2034,402 +2715,1279 @@
                 <a:ea typeface="Georgia" pitchFamily="34" charset="-122"/>
                 <a:cs typeface="Georgia" pitchFamily="34" charset="-120"/>
               </a:rPr>
-              <a:t>More Techniques</a:t>
-            </a:r>
-            <a:endParaRPr lang="en-US" sz="2600" dirty="0"/>
-          </a:p>
-        </p:txBody>
-      </p:sp>
-      <p:sp>
-        <p:nvSpPr>
-          <p:cNvPr id="5" name="Shape 3"/>
-          <p:cNvSpPr/>
-          <p:nvPr/>
-        </p:nvSpPr>
-        <p:spPr>
-          <a:xfrm>
-            <a:off x="457200" y="1188720"/>
-            <a:ext cx="2560320" cy="1828800"/>
-          </a:xfrm>
-          <a:prstGeom prst="rect">
-            <a:avLst/>
-          </a:prstGeom>
-          <a:solidFill>
-            <a:srgbClr val="FFFFFF"/>
-          </a:solidFill>
-          <a:ln w="12700">
-            <a:solidFill>
-              <a:srgbClr val="E5E2DC"/>
-            </a:solidFill>
-            <a:prstDash val="solid"/>
-          </a:ln>
-          <a:effectLst>
-            <a:outerShdw sx="100000" sy="100000" kx="0" ky="0" algn="bl" rotWithShape="0" blurRad="50800" dist="25400" dir="8100000">
-              <a:srgbClr val="000000">
-                <a:alpha val="10000"/>
-              </a:srgbClr>
-            </a:outerShdw>
-          </a:effectLst>
-        </p:spPr>
-      </p:sp>
-      <p:sp>
-        <p:nvSpPr>
-          <p:cNvPr id="6" name="Shape 4"/>
-          <p:cNvSpPr/>
-          <p:nvPr/>
-        </p:nvSpPr>
-        <p:spPr>
-          <a:xfrm>
-            <a:off x="457200" y="1188720"/>
-            <a:ext cx="2560320" cy="54864"/>
-          </a:xfrm>
-          <a:prstGeom prst="rect">
-            <a:avLst/>
-          </a:prstGeom>
-          <a:solidFill>
-            <a:srgbClr val="2A9D8F"/>
-          </a:solidFill>
-          <a:ln/>
-        </p:spPr>
-      </p:sp>
-      <p:sp>
-        <p:nvSpPr>
-          <p:cNvPr id="7" name="Text 5"/>
-          <p:cNvSpPr/>
-          <p:nvPr/>
-        </p:nvSpPr>
-        <p:spPr>
-          <a:xfrm>
-            <a:off x="594360" y="1325880"/>
-            <a:ext cx="2286000" cy="365760"/>
-          </a:xfrm>
-          <a:prstGeom prst="rect">
-            <a:avLst/>
-          </a:prstGeom>
-          <a:noFill/>
-          <a:ln/>
-        </p:spPr>
-        <p:txBody>
-          <a:bodyPr wrap="square" rtlCol="0" anchor="ctr"/>
-          <a:lstStyle/>
-          <a:p>
-            <a:pPr indent="0" marL="0">
-              <a:buNone/>
-            </a:pPr>
-            <a:r>
-              <a:rPr lang="en-US" sz="1400" b="1" dirty="0">
-                <a:solidFill>
-                  <a:srgbClr val="1B2A4A"/>
-                </a:solidFill>
-                <a:latin typeface="Calibri" pitchFamily="34" charset="0"/>
-                <a:ea typeface="Calibri" pitchFamily="34" charset="-122"/>
-                <a:cs typeface="Calibri" pitchFamily="34" charset="-120"/>
-              </a:rPr>
-              <a:t>Chromatography</a:t>
-            </a:r>
-            <a:endParaRPr lang="en-US" sz="1400" dirty="0"/>
-          </a:p>
-        </p:txBody>
-      </p:sp>
-      <p:sp>
-        <p:nvSpPr>
-          <p:cNvPr id="8" name="Text 6"/>
-          <p:cNvSpPr/>
-          <p:nvPr/>
-        </p:nvSpPr>
-        <p:spPr>
-          <a:xfrm>
-            <a:off x="594360" y="1737360"/>
-            <a:ext cx="2286000" cy="1097280"/>
-          </a:xfrm>
-          <a:prstGeom prst="rect">
-            <a:avLst/>
-          </a:prstGeom>
-          <a:noFill/>
-          <a:ln/>
-        </p:spPr>
-        <p:txBody>
-          <a:bodyPr wrap="square" rtlCol="0" anchor="t"/>
-          <a:lstStyle/>
-          <a:p>
-            <a:pPr indent="0" marL="0">
-              <a:buNone/>
-            </a:pPr>
-            <a:r>
-              <a:rPr lang="en-US" sz="1100" dirty="0">
-                <a:solidFill>
-                  <a:srgbClr val="3D3A36"/>
-                </a:solidFill>
-                <a:latin typeface="Calibri" pitchFamily="34" charset="0"/>
-                <a:ea typeface="Calibri" pitchFamily="34" charset="-122"/>
-                <a:cs typeface="Calibri" pitchFamily="34" charset="-120"/>
-              </a:rPr>
-              <a:t>Separates mixtures of colours/dyes. A spot of mixture is placed on paper. Solvent travels up the paper carrying different substances at different speeds. Example: separating ink colours.</a:t>
-            </a:r>
-            <a:endParaRPr lang="en-US" sz="1100" dirty="0"/>
-          </a:p>
-        </p:txBody>
-      </p:sp>
-      <p:sp>
-        <p:nvSpPr>
-          <p:cNvPr id="9" name="Shape 7"/>
-          <p:cNvSpPr/>
-          <p:nvPr/>
-        </p:nvSpPr>
-        <p:spPr>
-          <a:xfrm>
-            <a:off x="3291840" y="1188720"/>
-            <a:ext cx="2560320" cy="1828800"/>
-          </a:xfrm>
-          <a:prstGeom prst="rect">
-            <a:avLst/>
-          </a:prstGeom>
-          <a:solidFill>
-            <a:srgbClr val="FFFFFF"/>
-          </a:solidFill>
-          <a:ln w="12700">
-            <a:solidFill>
-              <a:srgbClr val="E5E2DC"/>
-            </a:solidFill>
-            <a:prstDash val="solid"/>
-          </a:ln>
-          <a:effectLst>
-            <a:outerShdw sx="100000" sy="100000" kx="0" ky="0" algn="bl" rotWithShape="0" blurRad="50800" dist="25400" dir="8100000">
-              <a:srgbClr val="000000">
-                <a:alpha val="10000"/>
-              </a:srgbClr>
-            </a:outerShdw>
-          </a:effectLst>
-        </p:spPr>
-      </p:sp>
-      <p:sp>
-        <p:nvSpPr>
-          <p:cNvPr id="10" name="Shape 8"/>
-          <p:cNvSpPr/>
-          <p:nvPr/>
-        </p:nvSpPr>
-        <p:spPr>
-          <a:xfrm>
-            <a:off x="3291840" y="1188720"/>
-            <a:ext cx="2560320" cy="54864"/>
-          </a:xfrm>
-          <a:prstGeom prst="rect">
-            <a:avLst/>
-          </a:prstGeom>
-          <a:solidFill>
-            <a:srgbClr val="2A9D8F"/>
-          </a:solidFill>
-          <a:ln/>
-        </p:spPr>
-      </p:sp>
-      <p:sp>
-        <p:nvSpPr>
-          <p:cNvPr id="11" name="Text 9"/>
-          <p:cNvSpPr/>
-          <p:nvPr/>
-        </p:nvSpPr>
-        <p:spPr>
-          <a:xfrm>
-            <a:off x="3429000" y="1325880"/>
-            <a:ext cx="2286000" cy="365760"/>
-          </a:xfrm>
-          <a:prstGeom prst="rect">
-            <a:avLst/>
-          </a:prstGeom>
-          <a:noFill/>
-          <a:ln/>
-        </p:spPr>
-        <p:txBody>
-          <a:bodyPr wrap="square" rtlCol="0" anchor="ctr"/>
-          <a:lstStyle/>
-          <a:p>
-            <a:pPr indent="0" marL="0">
-              <a:buNone/>
-            </a:pPr>
-            <a:r>
-              <a:rPr lang="en-US" sz="1400" b="1" dirty="0">
-                <a:solidFill>
-                  <a:srgbClr val="1B2A4A"/>
-                </a:solidFill>
-                <a:latin typeface="Calibri" pitchFamily="34" charset="0"/>
-                <a:ea typeface="Calibri" pitchFamily="34" charset="-122"/>
-                <a:cs typeface="Calibri" pitchFamily="34" charset="-120"/>
-              </a:rPr>
-              <a:t>Magnetic Separation</a:t>
-            </a:r>
-            <a:endParaRPr lang="en-US" sz="1400" dirty="0"/>
-          </a:p>
-        </p:txBody>
-      </p:sp>
-      <p:sp>
-        <p:nvSpPr>
-          <p:cNvPr id="12" name="Text 10"/>
-          <p:cNvSpPr/>
-          <p:nvPr/>
-        </p:nvSpPr>
-        <p:spPr>
-          <a:xfrm>
-            <a:off x="3429000" y="1737360"/>
-            <a:ext cx="2286000" cy="1097280"/>
-          </a:xfrm>
-          <a:prstGeom prst="rect">
-            <a:avLst/>
-          </a:prstGeom>
-          <a:noFill/>
-          <a:ln/>
-        </p:spPr>
-        <p:txBody>
-          <a:bodyPr wrap="square" rtlCol="0" anchor="t"/>
-          <a:lstStyle/>
-          <a:p>
-            <a:pPr indent="0" marL="0">
-              <a:buNone/>
-            </a:pPr>
-            <a:r>
-              <a:rPr lang="en-US" sz="1100" dirty="0">
-                <a:solidFill>
-                  <a:srgbClr val="3D3A36"/>
-                </a:solidFill>
-                <a:latin typeface="Calibri" pitchFamily="34" charset="0"/>
-                <a:ea typeface="Calibri" pitchFamily="34" charset="-122"/>
-                <a:cs typeface="Calibri" pitchFamily="34" charset="-120"/>
-              </a:rPr>
-              <a:t>Separates magnetic materials from non-magnetic. Use a magnet to attract iron or steel. Example: iron filings from sand.</a:t>
-            </a:r>
-            <a:endParaRPr lang="en-US" sz="1100" dirty="0"/>
-          </a:p>
-        </p:txBody>
-      </p:sp>
-      <p:sp>
-        <p:nvSpPr>
-          <p:cNvPr id="13" name="Shape 11"/>
-          <p:cNvSpPr/>
-          <p:nvPr/>
-        </p:nvSpPr>
-        <p:spPr>
-          <a:xfrm>
-            <a:off x="6126480" y="1188720"/>
-            <a:ext cx="2560320" cy="1828800"/>
-          </a:xfrm>
-          <a:prstGeom prst="rect">
-            <a:avLst/>
-          </a:prstGeom>
-          <a:solidFill>
-            <a:srgbClr val="FFFFFF"/>
-          </a:solidFill>
-          <a:ln w="12700">
-            <a:solidFill>
-              <a:srgbClr val="E5E2DC"/>
-            </a:solidFill>
-            <a:prstDash val="solid"/>
-          </a:ln>
-          <a:effectLst>
-            <a:outerShdw sx="100000" sy="100000" kx="0" ky="0" algn="bl" rotWithShape="0" blurRad="50800" dist="25400" dir="8100000">
-              <a:srgbClr val="000000">
-                <a:alpha val="10000"/>
-              </a:srgbClr>
-            </a:outerShdw>
-          </a:effectLst>
-        </p:spPr>
-      </p:sp>
-      <p:sp>
-        <p:nvSpPr>
-          <p:cNvPr id="14" name="Shape 12"/>
-          <p:cNvSpPr/>
-          <p:nvPr/>
-        </p:nvSpPr>
-        <p:spPr>
-          <a:xfrm>
-            <a:off x="6126480" y="1188720"/>
-            <a:ext cx="2560320" cy="54864"/>
-          </a:xfrm>
-          <a:prstGeom prst="rect">
-            <a:avLst/>
-          </a:prstGeom>
-          <a:solidFill>
-            <a:srgbClr val="2A9D8F"/>
-          </a:solidFill>
-          <a:ln/>
-        </p:spPr>
-      </p:sp>
-      <p:sp>
-        <p:nvSpPr>
-          <p:cNvPr id="15" name="Text 13"/>
-          <p:cNvSpPr/>
-          <p:nvPr/>
-        </p:nvSpPr>
-        <p:spPr>
-          <a:xfrm>
-            <a:off x="6263640" y="1325880"/>
-            <a:ext cx="2286000" cy="365760"/>
-          </a:xfrm>
-          <a:prstGeom prst="rect">
-            <a:avLst/>
-          </a:prstGeom>
-          <a:noFill/>
-          <a:ln/>
-        </p:spPr>
-        <p:txBody>
-          <a:bodyPr wrap="square" rtlCol="0" anchor="ctr"/>
-          <a:lstStyle/>
-          <a:p>
-            <a:pPr indent="0" marL="0">
-              <a:buNone/>
-            </a:pPr>
-            <a:r>
-              <a:rPr lang="en-US" sz="1400" b="1" dirty="0">
-                <a:solidFill>
-                  <a:srgbClr val="1B2A4A"/>
-                </a:solidFill>
-                <a:latin typeface="Calibri" pitchFamily="34" charset="0"/>
-                <a:ea typeface="Calibri" pitchFamily="34" charset="-122"/>
-                <a:cs typeface="Calibri" pitchFamily="34" charset="-120"/>
-              </a:rPr>
-              <a:t>Sieving</a:t>
-            </a:r>
-            <a:endParaRPr lang="en-US" sz="1400" dirty="0"/>
-          </a:p>
-        </p:txBody>
-      </p:sp>
-      <p:sp>
-        <p:nvSpPr>
-          <p:cNvPr id="16" name="Text 14"/>
-          <p:cNvSpPr/>
-          <p:nvPr/>
-        </p:nvSpPr>
-        <p:spPr>
-          <a:xfrm>
-            <a:off x="6263640" y="1737360"/>
-            <a:ext cx="2286000" cy="1097280"/>
-          </a:xfrm>
-          <a:prstGeom prst="rect">
-            <a:avLst/>
-          </a:prstGeom>
-          <a:noFill/>
-          <a:ln/>
-        </p:spPr>
-        <p:txBody>
-          <a:bodyPr wrap="square" rtlCol="0" anchor="t"/>
-          <a:lstStyle/>
-          <a:p>
-            <a:pPr indent="0" marL="0">
-              <a:buNone/>
-            </a:pPr>
-            <a:r>
-              <a:rPr lang="en-US" sz="1100" dirty="0">
-                <a:solidFill>
-                  <a:srgbClr val="3D3A36"/>
-                </a:solidFill>
-                <a:latin typeface="Calibri" pitchFamily="34" charset="0"/>
-                <a:ea typeface="Calibri" pitchFamily="34" charset="-122"/>
-                <a:cs typeface="Calibri" pitchFamily="34" charset="-120"/>
-              </a:rPr>
-              <a:t>Separates solids of different sizes. Smaller particles pass through the mesh, larger ones stay. Example: separating gravel from sand.</a:t>
-            </a:r>
-            <a:endParaRPr lang="en-US" sz="1100" dirty="0"/>
-          </a:p>
-        </p:txBody>
-      </p:sp>
+              <a:t>Choosing the Right Technique</a:t>
+            </a:r>
+            <a:endParaRPr lang="en-US" sz="2000" dirty="0"/>
+          </a:p>
+        </p:txBody>
+      </p:sp>
+      <p:graphicFrame>
+        <p:nvGraphicFramePr>
+          <p:cNvPr id="4" name="Table 0"/>
+          <p:cNvGraphicFramePr>
+            <a:graphicFrameLocks noGrp="1"/>
+          </p:cNvGraphicFramePr>
+          <p:nvPr>
+            <p:extLst>
+              <p:ext uri="{D42A27DB-BD31-4B8C-83A1-F6EECF244321}">
+                <p14:modId xmlns:p14="http://schemas.microsoft.com/office/powerpoint/2010/main" val="1579011935"/>
+              </p:ext>
+            </p:extLst>
+          </p:nvPr>
+        </p:nvGraphicFramePr>
+        <p:xfrm>
+          <a:off x="640080" y="1051560"/>
+          <a:ext cx="7863840" cy="914400"/>
+        </p:xfrm>
+        <a:graphic>
+          <a:graphicData uri="http://schemas.openxmlformats.org/drawingml/2006/table">
+            <a:tbl>
+              <a:tblPr/>
+              <a:tblGrid>
+                <a:gridCol w="2621280"/>
+                <a:gridCol w="2621280"/>
+                <a:gridCol w="2621280"/>
+              </a:tblGrid>
+              <a:tr h="502920">
+                <a:tc>
+                  <a:txBody>
+                    <a:bodyPr/>
+                    <a:lstStyle/>
+                    <a:p>
+                      <a:pPr indent="0" marL="0">
+                        <a:buNone/>
+                      </a:pPr>
+                      <a:r>
+                        <a:rPr lang="en-US" sz="1200" b="1" dirty="0">
+                          <a:solidFill>
+                            <a:srgbClr val="FFFFFF"/>
+                          </a:solidFill>
+                          <a:latin typeface="Calibri" pitchFamily="34" charset="0"/>
+                          <a:ea typeface="Calibri" pitchFamily="34" charset="-122"/>
+                          <a:cs typeface="Calibri" pitchFamily="34" charset="-120"/>
+                        </a:rPr>
+                        <a:t>Technique</a:t>
+                      </a:r>
+                      <a:endParaRPr lang="en-US" sz="1200" dirty="0">
+                        <a:latin typeface="Calibri" charset="0"/>
+                        <a:ea typeface="Calibri" charset="0"/>
+                        <a:cs typeface="Calibri" charset="0"/>
+                      </a:endParaRPr>
+                    </a:p>
+                  </a:txBody>
+                  <a:tcPr marL="91440" marR="91440" marT="45720" marB="45720">
+                    <a:lnL w="6350" cap="flat" cmpd="sng" algn="ctr">
+                      <a:solidFill>
+                        <a:srgbClr val="E5E2DC"/>
+                      </a:solidFill>
+                      <a:prstDash val="solid"/>
+                      <a:round/>
+                      <a:headEnd type="none" w="med" len="med"/>
+                      <a:tailEnd type="none" w="med" len="med"/>
+                    </a:lnL>
+                    <a:lnR w="6350" cap="flat" cmpd="sng" algn="ctr">
+                      <a:solidFill>
+                        <a:srgbClr val="E5E2DC"/>
+                      </a:solidFill>
+                      <a:prstDash val="solid"/>
+                      <a:round/>
+                      <a:headEnd type="none" w="med" len="med"/>
+                      <a:tailEnd type="none" w="med" len="med"/>
+                    </a:lnR>
+                    <a:lnT w="6350" cap="flat" cmpd="sng" algn="ctr">
+                      <a:solidFill>
+                        <a:srgbClr val="E5E2DC"/>
+                      </a:solidFill>
+                      <a:prstDash val="solid"/>
+                      <a:round/>
+                      <a:headEnd type="none" w="med" len="med"/>
+                      <a:tailEnd type="none" w="med" len="med"/>
+                    </a:lnT>
+                    <a:lnB w="6350" cap="flat" cmpd="sng" algn="ctr">
+                      <a:solidFill>
+                        <a:srgbClr val="E5E2DC"/>
+                      </a:solidFill>
+                      <a:prstDash val="solid"/>
+                      <a:round/>
+                      <a:headEnd type="none" w="med" len="med"/>
+                      <a:tailEnd type="none" w="med" len="med"/>
+                    </a:lnB>
+                    <a:solidFill>
+                      <a:srgbClr val="2A9D8F"/>
+                    </a:solidFill>
+                  </a:tcPr>
+                </a:tc>
+                <a:tc>
+                  <a:txBody>
+                    <a:bodyPr/>
+                    <a:lstStyle/>
+                    <a:p>
+                      <a:pPr indent="0" marL="0">
+                        <a:buNone/>
+                      </a:pPr>
+                      <a:r>
+                        <a:rPr lang="en-US" sz="1200" b="1" dirty="0">
+                          <a:solidFill>
+                            <a:srgbClr val="FFFFFF"/>
+                          </a:solidFill>
+                          <a:latin typeface="Calibri" pitchFamily="34" charset="0"/>
+                          <a:ea typeface="Calibri" pitchFamily="34" charset="-122"/>
+                          <a:cs typeface="Calibri" pitchFamily="34" charset="-120"/>
+                        </a:rPr>
+                        <a:t>What It Separates</a:t>
+                      </a:r>
+                      <a:endParaRPr lang="en-US" sz="1200" dirty="0">
+                        <a:latin typeface="Calibri" charset="0"/>
+                        <a:ea typeface="Calibri" charset="0"/>
+                        <a:cs typeface="Calibri" charset="0"/>
+                      </a:endParaRPr>
+                    </a:p>
+                  </a:txBody>
+                  <a:tcPr marL="91440" marR="91440" marT="45720" marB="45720">
+                    <a:lnL w="6350" cap="flat" cmpd="sng" algn="ctr">
+                      <a:solidFill>
+                        <a:srgbClr val="E5E2DC"/>
+                      </a:solidFill>
+                      <a:prstDash val="solid"/>
+                      <a:round/>
+                      <a:headEnd type="none" w="med" len="med"/>
+                      <a:tailEnd type="none" w="med" len="med"/>
+                    </a:lnL>
+                    <a:lnR w="6350" cap="flat" cmpd="sng" algn="ctr">
+                      <a:solidFill>
+                        <a:srgbClr val="E5E2DC"/>
+                      </a:solidFill>
+                      <a:prstDash val="solid"/>
+                      <a:round/>
+                      <a:headEnd type="none" w="med" len="med"/>
+                      <a:tailEnd type="none" w="med" len="med"/>
+                    </a:lnR>
+                    <a:lnT w="6350" cap="flat" cmpd="sng" algn="ctr">
+                      <a:solidFill>
+                        <a:srgbClr val="E5E2DC"/>
+                      </a:solidFill>
+                      <a:prstDash val="solid"/>
+                      <a:round/>
+                      <a:headEnd type="none" w="med" len="med"/>
+                      <a:tailEnd type="none" w="med" len="med"/>
+                    </a:lnT>
+                    <a:lnB w="6350" cap="flat" cmpd="sng" algn="ctr">
+                      <a:solidFill>
+                        <a:srgbClr val="E5E2DC"/>
+                      </a:solidFill>
+                      <a:prstDash val="solid"/>
+                      <a:round/>
+                      <a:headEnd type="none" w="med" len="med"/>
+                      <a:tailEnd type="none" w="med" len="med"/>
+                    </a:lnB>
+                    <a:solidFill>
+                      <a:srgbClr val="2A9D8F"/>
+                    </a:solidFill>
+                  </a:tcPr>
+                </a:tc>
+                <a:tc>
+                  <a:txBody>
+                    <a:bodyPr/>
+                    <a:lstStyle/>
+                    <a:p>
+                      <a:pPr indent="0" marL="0">
+                        <a:buNone/>
+                      </a:pPr>
+                      <a:r>
+                        <a:rPr lang="en-US" sz="1200" b="1" dirty="0">
+                          <a:solidFill>
+                            <a:srgbClr val="FFFFFF"/>
+                          </a:solidFill>
+                          <a:latin typeface="Calibri" pitchFamily="34" charset="0"/>
+                          <a:ea typeface="Calibri" pitchFamily="34" charset="-122"/>
+                          <a:cs typeface="Calibri" pitchFamily="34" charset="-120"/>
+                        </a:rPr>
+                        <a:t>Example</a:t>
+                      </a:r>
+                      <a:endParaRPr lang="en-US" sz="1200" dirty="0">
+                        <a:latin typeface="Calibri" charset="0"/>
+                        <a:ea typeface="Calibri" charset="0"/>
+                        <a:cs typeface="Calibri" charset="0"/>
+                      </a:endParaRPr>
+                    </a:p>
+                  </a:txBody>
+                  <a:tcPr marL="91440" marR="91440" marT="45720" marB="45720">
+                    <a:lnL w="6350" cap="flat" cmpd="sng" algn="ctr">
+                      <a:solidFill>
+                        <a:srgbClr val="E5E2DC"/>
+                      </a:solidFill>
+                      <a:prstDash val="solid"/>
+                      <a:round/>
+                      <a:headEnd type="none" w="med" len="med"/>
+                      <a:tailEnd type="none" w="med" len="med"/>
+                    </a:lnL>
+                    <a:lnR w="6350" cap="flat" cmpd="sng" algn="ctr">
+                      <a:solidFill>
+                        <a:srgbClr val="E5E2DC"/>
+                      </a:solidFill>
+                      <a:prstDash val="solid"/>
+                      <a:round/>
+                      <a:headEnd type="none" w="med" len="med"/>
+                      <a:tailEnd type="none" w="med" len="med"/>
+                    </a:lnR>
+                    <a:lnT w="6350" cap="flat" cmpd="sng" algn="ctr">
+                      <a:solidFill>
+                        <a:srgbClr val="E5E2DC"/>
+                      </a:solidFill>
+                      <a:prstDash val="solid"/>
+                      <a:round/>
+                      <a:headEnd type="none" w="med" len="med"/>
+                      <a:tailEnd type="none" w="med" len="med"/>
+                    </a:lnT>
+                    <a:lnB w="6350" cap="flat" cmpd="sng" algn="ctr">
+                      <a:solidFill>
+                        <a:srgbClr val="E5E2DC"/>
+                      </a:solidFill>
+                      <a:prstDash val="solid"/>
+                      <a:round/>
+                      <a:headEnd type="none" w="med" len="med"/>
+                      <a:tailEnd type="none" w="med" len="med"/>
+                    </a:lnB>
+                    <a:solidFill>
+                      <a:srgbClr val="2A9D8F"/>
+                    </a:solidFill>
+                  </a:tcPr>
+                </a:tc>
+              </a:tr>
+              <a:tr h="502920">
+                <a:tc>
+                  <a:txBody>
+                    <a:bodyPr/>
+                    <a:lstStyle/>
+                    <a:p>
+                      <a:pPr indent="0" marL="0">
+                        <a:buNone/>
+                      </a:pPr>
+                      <a:r>
+                        <a:rPr lang="en-US" sz="1200" dirty="0">
+                          <a:solidFill>
+                            <a:srgbClr val="3D3A36"/>
+                          </a:solidFill>
+                          <a:latin typeface="Calibri" pitchFamily="34" charset="0"/>
+                          <a:ea typeface="Calibri" pitchFamily="34" charset="-122"/>
+                          <a:cs typeface="Calibri" pitchFamily="34" charset="-120"/>
+                        </a:rPr>
+                        <a:t>Filtration</a:t>
+                      </a:r>
+                      <a:endParaRPr lang="en-US" sz="1200" dirty="0">
+                        <a:latin typeface="Calibri" charset="0"/>
+                        <a:ea typeface="Calibri" charset="0"/>
+                        <a:cs typeface="Calibri" charset="0"/>
+                      </a:endParaRPr>
+                    </a:p>
+                  </a:txBody>
+                  <a:tcPr marL="91440" marR="91440" marT="45720" marB="45720">
+                    <a:lnL w="6350" cap="flat" cmpd="sng" algn="ctr">
+                      <a:solidFill>
+                        <a:srgbClr val="E5E2DC"/>
+                      </a:solidFill>
+                      <a:prstDash val="solid"/>
+                      <a:round/>
+                      <a:headEnd type="none" w="med" len="med"/>
+                      <a:tailEnd type="none" w="med" len="med"/>
+                    </a:lnL>
+                    <a:lnR w="6350" cap="flat" cmpd="sng" algn="ctr">
+                      <a:solidFill>
+                        <a:srgbClr val="E5E2DC"/>
+                      </a:solidFill>
+                      <a:prstDash val="solid"/>
+                      <a:round/>
+                      <a:headEnd type="none" w="med" len="med"/>
+                      <a:tailEnd type="none" w="med" len="med"/>
+                    </a:lnR>
+                    <a:lnT w="6350" cap="flat" cmpd="sng" algn="ctr">
+                      <a:solidFill>
+                        <a:srgbClr val="E5E2DC"/>
+                      </a:solidFill>
+                      <a:prstDash val="solid"/>
+                      <a:round/>
+                      <a:headEnd type="none" w="med" len="med"/>
+                      <a:tailEnd type="none" w="med" len="med"/>
+                    </a:lnT>
+                    <a:lnB w="6350" cap="flat" cmpd="sng" algn="ctr">
+                      <a:solidFill>
+                        <a:srgbClr val="E5E2DC"/>
+                      </a:solidFill>
+                      <a:prstDash val="solid"/>
+                      <a:round/>
+                      <a:headEnd type="none" w="med" len="med"/>
+                      <a:tailEnd type="none" w="med" len="med"/>
+                    </a:lnB>
+                    <a:solidFill>
+                      <a:srgbClr val="FFFFFF"/>
+                    </a:solidFill>
+                  </a:tcPr>
+                </a:tc>
+                <a:tc>
+                  <a:txBody>
+                    <a:bodyPr/>
+                    <a:lstStyle/>
+                    <a:p>
+                      <a:pPr indent="0" marL="0">
+                        <a:buNone/>
+                      </a:pPr>
+                      <a:r>
+                        <a:rPr lang="en-US" sz="1200" dirty="0">
+                          <a:solidFill>
+                            <a:srgbClr val="3D3A36"/>
+                          </a:solidFill>
+                          <a:latin typeface="Calibri" pitchFamily="34" charset="0"/>
+                          <a:ea typeface="Calibri" pitchFamily="34" charset="-122"/>
+                          <a:cs typeface="Calibri" pitchFamily="34" charset="-120"/>
+                        </a:rPr>
+                        <a:t>Insoluble solid from liquid</a:t>
+                      </a:r>
+                      <a:endParaRPr lang="en-US" sz="1200" dirty="0">
+                        <a:latin typeface="Calibri" charset="0"/>
+                        <a:ea typeface="Calibri" charset="0"/>
+                        <a:cs typeface="Calibri" charset="0"/>
+                      </a:endParaRPr>
+                    </a:p>
+                  </a:txBody>
+                  <a:tcPr marL="91440" marR="91440" marT="45720" marB="45720">
+                    <a:lnL w="6350" cap="flat" cmpd="sng" algn="ctr">
+                      <a:solidFill>
+                        <a:srgbClr val="E5E2DC"/>
+                      </a:solidFill>
+                      <a:prstDash val="solid"/>
+                      <a:round/>
+                      <a:headEnd type="none" w="med" len="med"/>
+                      <a:tailEnd type="none" w="med" len="med"/>
+                    </a:lnL>
+                    <a:lnR w="6350" cap="flat" cmpd="sng" algn="ctr">
+                      <a:solidFill>
+                        <a:srgbClr val="E5E2DC"/>
+                      </a:solidFill>
+                      <a:prstDash val="solid"/>
+                      <a:round/>
+                      <a:headEnd type="none" w="med" len="med"/>
+                      <a:tailEnd type="none" w="med" len="med"/>
+                    </a:lnR>
+                    <a:lnT w="6350" cap="flat" cmpd="sng" algn="ctr">
+                      <a:solidFill>
+                        <a:srgbClr val="E5E2DC"/>
+                      </a:solidFill>
+                      <a:prstDash val="solid"/>
+                      <a:round/>
+                      <a:headEnd type="none" w="med" len="med"/>
+                      <a:tailEnd type="none" w="med" len="med"/>
+                    </a:lnT>
+                    <a:lnB w="6350" cap="flat" cmpd="sng" algn="ctr">
+                      <a:solidFill>
+                        <a:srgbClr val="E5E2DC"/>
+                      </a:solidFill>
+                      <a:prstDash val="solid"/>
+                      <a:round/>
+                      <a:headEnd type="none" w="med" len="med"/>
+                      <a:tailEnd type="none" w="med" len="med"/>
+                    </a:lnB>
+                    <a:solidFill>
+                      <a:srgbClr val="FFFFFF"/>
+                    </a:solidFill>
+                  </a:tcPr>
+                </a:tc>
+                <a:tc>
+                  <a:txBody>
+                    <a:bodyPr/>
+                    <a:lstStyle/>
+                    <a:p>
+                      <a:pPr indent="0" marL="0">
+                        <a:buNone/>
+                      </a:pPr>
+                      <a:r>
+                        <a:rPr lang="en-US" sz="1200" dirty="0">
+                          <a:solidFill>
+                            <a:srgbClr val="3D3A36"/>
+                          </a:solidFill>
+                          <a:latin typeface="Calibri" pitchFamily="34" charset="0"/>
+                          <a:ea typeface="Calibri" pitchFamily="34" charset="-122"/>
+                          <a:cs typeface="Calibri" pitchFamily="34" charset="-120"/>
+                        </a:rPr>
+                        <a:t>Sand from water</a:t>
+                      </a:r>
+                      <a:endParaRPr lang="en-US" sz="1200" dirty="0">
+                        <a:latin typeface="Calibri" charset="0"/>
+                        <a:ea typeface="Calibri" charset="0"/>
+                        <a:cs typeface="Calibri" charset="0"/>
+                      </a:endParaRPr>
+                    </a:p>
+                  </a:txBody>
+                  <a:tcPr marL="91440" marR="91440" marT="45720" marB="45720">
+                    <a:lnL w="6350" cap="flat" cmpd="sng" algn="ctr">
+                      <a:solidFill>
+                        <a:srgbClr val="E5E2DC"/>
+                      </a:solidFill>
+                      <a:prstDash val="solid"/>
+                      <a:round/>
+                      <a:headEnd type="none" w="med" len="med"/>
+                      <a:tailEnd type="none" w="med" len="med"/>
+                    </a:lnL>
+                    <a:lnR w="6350" cap="flat" cmpd="sng" algn="ctr">
+                      <a:solidFill>
+                        <a:srgbClr val="E5E2DC"/>
+                      </a:solidFill>
+                      <a:prstDash val="solid"/>
+                      <a:round/>
+                      <a:headEnd type="none" w="med" len="med"/>
+                      <a:tailEnd type="none" w="med" len="med"/>
+                    </a:lnR>
+                    <a:lnT w="6350" cap="flat" cmpd="sng" algn="ctr">
+                      <a:solidFill>
+                        <a:srgbClr val="E5E2DC"/>
+                      </a:solidFill>
+                      <a:prstDash val="solid"/>
+                      <a:round/>
+                      <a:headEnd type="none" w="med" len="med"/>
+                      <a:tailEnd type="none" w="med" len="med"/>
+                    </a:lnT>
+                    <a:lnB w="6350" cap="flat" cmpd="sng" algn="ctr">
+                      <a:solidFill>
+                        <a:srgbClr val="E5E2DC"/>
+                      </a:solidFill>
+                      <a:prstDash val="solid"/>
+                      <a:round/>
+                      <a:headEnd type="none" w="med" len="med"/>
+                      <a:tailEnd type="none" w="med" len="med"/>
+                    </a:lnB>
+                    <a:solidFill>
+                      <a:srgbClr val="FFFFFF"/>
+                    </a:solidFill>
+                  </a:tcPr>
+                </a:tc>
+              </a:tr>
+              <a:tr h="502920">
+                <a:tc>
+                  <a:txBody>
+                    <a:bodyPr/>
+                    <a:lstStyle/>
+                    <a:p>
+                      <a:pPr indent="0" marL="0">
+                        <a:buNone/>
+                      </a:pPr>
+                      <a:r>
+                        <a:rPr lang="en-US" sz="1200" dirty="0">
+                          <a:solidFill>
+                            <a:srgbClr val="3D3A36"/>
+                          </a:solidFill>
+                          <a:latin typeface="Calibri" pitchFamily="34" charset="0"/>
+                          <a:ea typeface="Calibri" pitchFamily="34" charset="-122"/>
+                          <a:cs typeface="Calibri" pitchFamily="34" charset="-120"/>
+                        </a:rPr>
+                        <a:t>Evaporation</a:t>
+                      </a:r>
+                      <a:endParaRPr lang="en-US" sz="1200" dirty="0">
+                        <a:latin typeface="Calibri" charset="0"/>
+                        <a:ea typeface="Calibri" charset="0"/>
+                        <a:cs typeface="Calibri" charset="0"/>
+                      </a:endParaRPr>
+                    </a:p>
+                  </a:txBody>
+                  <a:tcPr marL="91440" marR="91440" marT="45720" marB="45720">
+                    <a:lnL w="6350" cap="flat" cmpd="sng" algn="ctr">
+                      <a:solidFill>
+                        <a:srgbClr val="E5E2DC"/>
+                      </a:solidFill>
+                      <a:prstDash val="solid"/>
+                      <a:round/>
+                      <a:headEnd type="none" w="med" len="med"/>
+                      <a:tailEnd type="none" w="med" len="med"/>
+                    </a:lnL>
+                    <a:lnR w="6350" cap="flat" cmpd="sng" algn="ctr">
+                      <a:solidFill>
+                        <a:srgbClr val="E5E2DC"/>
+                      </a:solidFill>
+                      <a:prstDash val="solid"/>
+                      <a:round/>
+                      <a:headEnd type="none" w="med" len="med"/>
+                      <a:tailEnd type="none" w="med" len="med"/>
+                    </a:lnR>
+                    <a:lnT w="6350" cap="flat" cmpd="sng" algn="ctr">
+                      <a:solidFill>
+                        <a:srgbClr val="E5E2DC"/>
+                      </a:solidFill>
+                      <a:prstDash val="solid"/>
+                      <a:round/>
+                      <a:headEnd type="none" w="med" len="med"/>
+                      <a:tailEnd type="none" w="med" len="med"/>
+                    </a:lnT>
+                    <a:lnB w="6350" cap="flat" cmpd="sng" algn="ctr">
+                      <a:solidFill>
+                        <a:srgbClr val="E5E2DC"/>
+                      </a:solidFill>
+                      <a:prstDash val="solid"/>
+                      <a:round/>
+                      <a:headEnd type="none" w="med" len="med"/>
+                      <a:tailEnd type="none" w="med" len="med"/>
+                    </a:lnB>
+                    <a:solidFill>
+                      <a:srgbClr val="F8F6F3"/>
+                    </a:solidFill>
+                  </a:tcPr>
+                </a:tc>
+                <a:tc>
+                  <a:txBody>
+                    <a:bodyPr/>
+                    <a:lstStyle/>
+                    <a:p>
+                      <a:pPr indent="0" marL="0">
+                        <a:buNone/>
+                      </a:pPr>
+                      <a:r>
+                        <a:rPr lang="en-US" sz="1200" dirty="0">
+                          <a:solidFill>
+                            <a:srgbClr val="3D3A36"/>
+                          </a:solidFill>
+                          <a:latin typeface="Calibri" pitchFamily="34" charset="0"/>
+                          <a:ea typeface="Calibri" pitchFamily="34" charset="-122"/>
+                          <a:cs typeface="Calibri" pitchFamily="34" charset="-120"/>
+                        </a:rPr>
+                        <a:t>Dissolved solid from liquid</a:t>
+                      </a:r>
+                      <a:endParaRPr lang="en-US" sz="1200" dirty="0">
+                        <a:latin typeface="Calibri" charset="0"/>
+                        <a:ea typeface="Calibri" charset="0"/>
+                        <a:cs typeface="Calibri" charset="0"/>
+                      </a:endParaRPr>
+                    </a:p>
+                  </a:txBody>
+                  <a:tcPr marL="91440" marR="91440" marT="45720" marB="45720">
+                    <a:lnL w="6350" cap="flat" cmpd="sng" algn="ctr">
+                      <a:solidFill>
+                        <a:srgbClr val="E5E2DC"/>
+                      </a:solidFill>
+                      <a:prstDash val="solid"/>
+                      <a:round/>
+                      <a:headEnd type="none" w="med" len="med"/>
+                      <a:tailEnd type="none" w="med" len="med"/>
+                    </a:lnL>
+                    <a:lnR w="6350" cap="flat" cmpd="sng" algn="ctr">
+                      <a:solidFill>
+                        <a:srgbClr val="E5E2DC"/>
+                      </a:solidFill>
+                      <a:prstDash val="solid"/>
+                      <a:round/>
+                      <a:headEnd type="none" w="med" len="med"/>
+                      <a:tailEnd type="none" w="med" len="med"/>
+                    </a:lnR>
+                    <a:lnT w="6350" cap="flat" cmpd="sng" algn="ctr">
+                      <a:solidFill>
+                        <a:srgbClr val="E5E2DC"/>
+                      </a:solidFill>
+                      <a:prstDash val="solid"/>
+                      <a:round/>
+                      <a:headEnd type="none" w="med" len="med"/>
+                      <a:tailEnd type="none" w="med" len="med"/>
+                    </a:lnT>
+                    <a:lnB w="6350" cap="flat" cmpd="sng" algn="ctr">
+                      <a:solidFill>
+                        <a:srgbClr val="E5E2DC"/>
+                      </a:solidFill>
+                      <a:prstDash val="solid"/>
+                      <a:round/>
+                      <a:headEnd type="none" w="med" len="med"/>
+                      <a:tailEnd type="none" w="med" len="med"/>
+                    </a:lnB>
+                    <a:solidFill>
+                      <a:srgbClr val="F8F6F3"/>
+                    </a:solidFill>
+                  </a:tcPr>
+                </a:tc>
+                <a:tc>
+                  <a:txBody>
+                    <a:bodyPr/>
+                    <a:lstStyle/>
+                    <a:p>
+                      <a:pPr indent="0" marL="0">
+                        <a:buNone/>
+                      </a:pPr>
+                      <a:r>
+                        <a:rPr lang="en-US" sz="1200" dirty="0">
+                          <a:solidFill>
+                            <a:srgbClr val="3D3A36"/>
+                          </a:solidFill>
+                          <a:latin typeface="Calibri" pitchFamily="34" charset="0"/>
+                          <a:ea typeface="Calibri" pitchFamily="34" charset="-122"/>
+                          <a:cs typeface="Calibri" pitchFamily="34" charset="-120"/>
+                        </a:rPr>
+                        <a:t>Salt from salt water</a:t>
+                      </a:r>
+                      <a:endParaRPr lang="en-US" sz="1200" dirty="0">
+                        <a:latin typeface="Calibri" charset="0"/>
+                        <a:ea typeface="Calibri" charset="0"/>
+                        <a:cs typeface="Calibri" charset="0"/>
+                      </a:endParaRPr>
+                    </a:p>
+                  </a:txBody>
+                  <a:tcPr marL="91440" marR="91440" marT="45720" marB="45720">
+                    <a:lnL w="6350" cap="flat" cmpd="sng" algn="ctr">
+                      <a:solidFill>
+                        <a:srgbClr val="E5E2DC"/>
+                      </a:solidFill>
+                      <a:prstDash val="solid"/>
+                      <a:round/>
+                      <a:headEnd type="none" w="med" len="med"/>
+                      <a:tailEnd type="none" w="med" len="med"/>
+                    </a:lnL>
+                    <a:lnR w="6350" cap="flat" cmpd="sng" algn="ctr">
+                      <a:solidFill>
+                        <a:srgbClr val="E5E2DC"/>
+                      </a:solidFill>
+                      <a:prstDash val="solid"/>
+                      <a:round/>
+                      <a:headEnd type="none" w="med" len="med"/>
+                      <a:tailEnd type="none" w="med" len="med"/>
+                    </a:lnR>
+                    <a:lnT w="6350" cap="flat" cmpd="sng" algn="ctr">
+                      <a:solidFill>
+                        <a:srgbClr val="E5E2DC"/>
+                      </a:solidFill>
+                      <a:prstDash val="solid"/>
+                      <a:round/>
+                      <a:headEnd type="none" w="med" len="med"/>
+                      <a:tailEnd type="none" w="med" len="med"/>
+                    </a:lnT>
+                    <a:lnB w="6350" cap="flat" cmpd="sng" algn="ctr">
+                      <a:solidFill>
+                        <a:srgbClr val="E5E2DC"/>
+                      </a:solidFill>
+                      <a:prstDash val="solid"/>
+                      <a:round/>
+                      <a:headEnd type="none" w="med" len="med"/>
+                      <a:tailEnd type="none" w="med" len="med"/>
+                    </a:lnB>
+                    <a:solidFill>
+                      <a:srgbClr val="F8F6F3"/>
+                    </a:solidFill>
+                  </a:tcPr>
+                </a:tc>
+              </a:tr>
+              <a:tr h="502920">
+                <a:tc>
+                  <a:txBody>
+                    <a:bodyPr/>
+                    <a:lstStyle/>
+                    <a:p>
+                      <a:pPr indent="0" marL="0">
+                        <a:buNone/>
+                      </a:pPr>
+                      <a:r>
+                        <a:rPr lang="en-US" sz="1200" dirty="0">
+                          <a:solidFill>
+                            <a:srgbClr val="3D3A36"/>
+                          </a:solidFill>
+                          <a:latin typeface="Calibri" pitchFamily="34" charset="0"/>
+                          <a:ea typeface="Calibri" pitchFamily="34" charset="-122"/>
+                          <a:cs typeface="Calibri" pitchFamily="34" charset="-120"/>
+                        </a:rPr>
+                        <a:t>Distillation</a:t>
+                      </a:r>
+                      <a:endParaRPr lang="en-US" sz="1200" dirty="0">
+                        <a:latin typeface="Calibri" charset="0"/>
+                        <a:ea typeface="Calibri" charset="0"/>
+                        <a:cs typeface="Calibri" charset="0"/>
+                      </a:endParaRPr>
+                    </a:p>
+                  </a:txBody>
+                  <a:tcPr marL="91440" marR="91440" marT="45720" marB="45720">
+                    <a:lnL w="6350" cap="flat" cmpd="sng" algn="ctr">
+                      <a:solidFill>
+                        <a:srgbClr val="E5E2DC"/>
+                      </a:solidFill>
+                      <a:prstDash val="solid"/>
+                      <a:round/>
+                      <a:headEnd type="none" w="med" len="med"/>
+                      <a:tailEnd type="none" w="med" len="med"/>
+                    </a:lnL>
+                    <a:lnR w="6350" cap="flat" cmpd="sng" algn="ctr">
+                      <a:solidFill>
+                        <a:srgbClr val="E5E2DC"/>
+                      </a:solidFill>
+                      <a:prstDash val="solid"/>
+                      <a:round/>
+                      <a:headEnd type="none" w="med" len="med"/>
+                      <a:tailEnd type="none" w="med" len="med"/>
+                    </a:lnR>
+                    <a:lnT w="6350" cap="flat" cmpd="sng" algn="ctr">
+                      <a:solidFill>
+                        <a:srgbClr val="E5E2DC"/>
+                      </a:solidFill>
+                      <a:prstDash val="solid"/>
+                      <a:round/>
+                      <a:headEnd type="none" w="med" len="med"/>
+                      <a:tailEnd type="none" w="med" len="med"/>
+                    </a:lnT>
+                    <a:lnB w="6350" cap="flat" cmpd="sng" algn="ctr">
+                      <a:solidFill>
+                        <a:srgbClr val="E5E2DC"/>
+                      </a:solidFill>
+                      <a:prstDash val="solid"/>
+                      <a:round/>
+                      <a:headEnd type="none" w="med" len="med"/>
+                      <a:tailEnd type="none" w="med" len="med"/>
+                    </a:lnB>
+                    <a:solidFill>
+                      <a:srgbClr val="FFFFFF"/>
+                    </a:solidFill>
+                  </a:tcPr>
+                </a:tc>
+                <a:tc>
+                  <a:txBody>
+                    <a:bodyPr/>
+                    <a:lstStyle/>
+                    <a:p>
+                      <a:pPr indent="0" marL="0">
+                        <a:buNone/>
+                      </a:pPr>
+                      <a:r>
+                        <a:rPr lang="en-US" sz="1200" dirty="0">
+                          <a:solidFill>
+                            <a:srgbClr val="3D3A36"/>
+                          </a:solidFill>
+                          <a:latin typeface="Calibri" pitchFamily="34" charset="0"/>
+                          <a:ea typeface="Calibri" pitchFamily="34" charset="-122"/>
+                          <a:cs typeface="Calibri" pitchFamily="34" charset="-120"/>
+                        </a:rPr>
+                        <a:t>Two liquids / liquid from solution</a:t>
+                      </a:r>
+                      <a:endParaRPr lang="en-US" sz="1200" dirty="0">
+                        <a:latin typeface="Calibri" charset="0"/>
+                        <a:ea typeface="Calibri" charset="0"/>
+                        <a:cs typeface="Calibri" charset="0"/>
+                      </a:endParaRPr>
+                    </a:p>
+                  </a:txBody>
+                  <a:tcPr marL="91440" marR="91440" marT="45720" marB="45720">
+                    <a:lnL w="6350" cap="flat" cmpd="sng" algn="ctr">
+                      <a:solidFill>
+                        <a:srgbClr val="E5E2DC"/>
+                      </a:solidFill>
+                      <a:prstDash val="solid"/>
+                      <a:round/>
+                      <a:headEnd type="none" w="med" len="med"/>
+                      <a:tailEnd type="none" w="med" len="med"/>
+                    </a:lnL>
+                    <a:lnR w="6350" cap="flat" cmpd="sng" algn="ctr">
+                      <a:solidFill>
+                        <a:srgbClr val="E5E2DC"/>
+                      </a:solidFill>
+                      <a:prstDash val="solid"/>
+                      <a:round/>
+                      <a:headEnd type="none" w="med" len="med"/>
+                      <a:tailEnd type="none" w="med" len="med"/>
+                    </a:lnR>
+                    <a:lnT w="6350" cap="flat" cmpd="sng" algn="ctr">
+                      <a:solidFill>
+                        <a:srgbClr val="E5E2DC"/>
+                      </a:solidFill>
+                      <a:prstDash val="solid"/>
+                      <a:round/>
+                      <a:headEnd type="none" w="med" len="med"/>
+                      <a:tailEnd type="none" w="med" len="med"/>
+                    </a:lnT>
+                    <a:lnB w="6350" cap="flat" cmpd="sng" algn="ctr">
+                      <a:solidFill>
+                        <a:srgbClr val="E5E2DC"/>
+                      </a:solidFill>
+                      <a:prstDash val="solid"/>
+                      <a:round/>
+                      <a:headEnd type="none" w="med" len="med"/>
+                      <a:tailEnd type="none" w="med" len="med"/>
+                    </a:lnB>
+                    <a:solidFill>
+                      <a:srgbClr val="FFFFFF"/>
+                    </a:solidFill>
+                  </a:tcPr>
+                </a:tc>
+                <a:tc>
+                  <a:txBody>
+                    <a:bodyPr/>
+                    <a:lstStyle/>
+                    <a:p>
+                      <a:pPr indent="0" marL="0">
+                        <a:buNone/>
+                      </a:pPr>
+                      <a:r>
+                        <a:rPr lang="en-US" sz="1200" dirty="0">
+                          <a:solidFill>
+                            <a:srgbClr val="3D3A36"/>
+                          </a:solidFill>
+                          <a:latin typeface="Calibri" pitchFamily="34" charset="0"/>
+                          <a:ea typeface="Calibri" pitchFamily="34" charset="-122"/>
+                          <a:cs typeface="Calibri" pitchFamily="34" charset="-120"/>
+                        </a:rPr>
+                        <a:t>Water from salt water</a:t>
+                      </a:r>
+                      <a:endParaRPr lang="en-US" sz="1200" dirty="0">
+                        <a:latin typeface="Calibri" charset="0"/>
+                        <a:ea typeface="Calibri" charset="0"/>
+                        <a:cs typeface="Calibri" charset="0"/>
+                      </a:endParaRPr>
+                    </a:p>
+                  </a:txBody>
+                  <a:tcPr marL="91440" marR="91440" marT="45720" marB="45720">
+                    <a:lnL w="6350" cap="flat" cmpd="sng" algn="ctr">
+                      <a:solidFill>
+                        <a:srgbClr val="E5E2DC"/>
+                      </a:solidFill>
+                      <a:prstDash val="solid"/>
+                      <a:round/>
+                      <a:headEnd type="none" w="med" len="med"/>
+                      <a:tailEnd type="none" w="med" len="med"/>
+                    </a:lnL>
+                    <a:lnR w="6350" cap="flat" cmpd="sng" algn="ctr">
+                      <a:solidFill>
+                        <a:srgbClr val="E5E2DC"/>
+                      </a:solidFill>
+                      <a:prstDash val="solid"/>
+                      <a:round/>
+                      <a:headEnd type="none" w="med" len="med"/>
+                      <a:tailEnd type="none" w="med" len="med"/>
+                    </a:lnR>
+                    <a:lnT w="6350" cap="flat" cmpd="sng" algn="ctr">
+                      <a:solidFill>
+                        <a:srgbClr val="E5E2DC"/>
+                      </a:solidFill>
+                      <a:prstDash val="solid"/>
+                      <a:round/>
+                      <a:headEnd type="none" w="med" len="med"/>
+                      <a:tailEnd type="none" w="med" len="med"/>
+                    </a:lnT>
+                    <a:lnB w="6350" cap="flat" cmpd="sng" algn="ctr">
+                      <a:solidFill>
+                        <a:srgbClr val="E5E2DC"/>
+                      </a:solidFill>
+                      <a:prstDash val="solid"/>
+                      <a:round/>
+                      <a:headEnd type="none" w="med" len="med"/>
+                      <a:tailEnd type="none" w="med" len="med"/>
+                    </a:lnB>
+                    <a:solidFill>
+                      <a:srgbClr val="FFFFFF"/>
+                    </a:solidFill>
+                  </a:tcPr>
+                </a:tc>
+              </a:tr>
+              <a:tr h="502920">
+                <a:tc>
+                  <a:txBody>
+                    <a:bodyPr/>
+                    <a:lstStyle/>
+                    <a:p>
+                      <a:pPr indent="0" marL="0">
+                        <a:buNone/>
+                      </a:pPr>
+                      <a:r>
+                        <a:rPr lang="en-US" sz="1200" dirty="0">
+                          <a:solidFill>
+                            <a:srgbClr val="3D3A36"/>
+                          </a:solidFill>
+                          <a:latin typeface="Calibri" pitchFamily="34" charset="0"/>
+                          <a:ea typeface="Calibri" pitchFamily="34" charset="-122"/>
+                          <a:cs typeface="Calibri" pitchFamily="34" charset="-120"/>
+                        </a:rPr>
+                        <a:t>Chromatography</a:t>
+                      </a:r>
+                      <a:endParaRPr lang="en-US" sz="1200" dirty="0">
+                        <a:latin typeface="Calibri" charset="0"/>
+                        <a:ea typeface="Calibri" charset="0"/>
+                        <a:cs typeface="Calibri" charset="0"/>
+                      </a:endParaRPr>
+                    </a:p>
+                  </a:txBody>
+                  <a:tcPr marL="91440" marR="91440" marT="45720" marB="45720">
+                    <a:lnL w="6350" cap="flat" cmpd="sng" algn="ctr">
+                      <a:solidFill>
+                        <a:srgbClr val="E5E2DC"/>
+                      </a:solidFill>
+                      <a:prstDash val="solid"/>
+                      <a:round/>
+                      <a:headEnd type="none" w="med" len="med"/>
+                      <a:tailEnd type="none" w="med" len="med"/>
+                    </a:lnL>
+                    <a:lnR w="6350" cap="flat" cmpd="sng" algn="ctr">
+                      <a:solidFill>
+                        <a:srgbClr val="E5E2DC"/>
+                      </a:solidFill>
+                      <a:prstDash val="solid"/>
+                      <a:round/>
+                      <a:headEnd type="none" w="med" len="med"/>
+                      <a:tailEnd type="none" w="med" len="med"/>
+                    </a:lnR>
+                    <a:lnT w="6350" cap="flat" cmpd="sng" algn="ctr">
+                      <a:solidFill>
+                        <a:srgbClr val="E5E2DC"/>
+                      </a:solidFill>
+                      <a:prstDash val="solid"/>
+                      <a:round/>
+                      <a:headEnd type="none" w="med" len="med"/>
+                      <a:tailEnd type="none" w="med" len="med"/>
+                    </a:lnT>
+                    <a:lnB w="6350" cap="flat" cmpd="sng" algn="ctr">
+                      <a:solidFill>
+                        <a:srgbClr val="E5E2DC"/>
+                      </a:solidFill>
+                      <a:prstDash val="solid"/>
+                      <a:round/>
+                      <a:headEnd type="none" w="med" len="med"/>
+                      <a:tailEnd type="none" w="med" len="med"/>
+                    </a:lnB>
+                    <a:solidFill>
+                      <a:srgbClr val="F8F6F3"/>
+                    </a:solidFill>
+                  </a:tcPr>
+                </a:tc>
+                <a:tc>
+                  <a:txBody>
+                    <a:bodyPr/>
+                    <a:lstStyle/>
+                    <a:p>
+                      <a:pPr indent="0" marL="0">
+                        <a:buNone/>
+                      </a:pPr>
+                      <a:r>
+                        <a:rPr lang="en-US" sz="1200" dirty="0">
+                          <a:solidFill>
+                            <a:srgbClr val="3D3A36"/>
+                          </a:solidFill>
+                          <a:latin typeface="Calibri" pitchFamily="34" charset="0"/>
+                          <a:ea typeface="Calibri" pitchFamily="34" charset="-122"/>
+                          <a:cs typeface="Calibri" pitchFamily="34" charset="-120"/>
+                        </a:rPr>
+                        <a:t>Dissolved coloured substances</a:t>
+                      </a:r>
+                      <a:endParaRPr lang="en-US" sz="1200" dirty="0">
+                        <a:latin typeface="Calibri" charset="0"/>
+                        <a:ea typeface="Calibri" charset="0"/>
+                        <a:cs typeface="Calibri" charset="0"/>
+                      </a:endParaRPr>
+                    </a:p>
+                  </a:txBody>
+                  <a:tcPr marL="91440" marR="91440" marT="45720" marB="45720">
+                    <a:lnL w="6350" cap="flat" cmpd="sng" algn="ctr">
+                      <a:solidFill>
+                        <a:srgbClr val="E5E2DC"/>
+                      </a:solidFill>
+                      <a:prstDash val="solid"/>
+                      <a:round/>
+                      <a:headEnd type="none" w="med" len="med"/>
+                      <a:tailEnd type="none" w="med" len="med"/>
+                    </a:lnL>
+                    <a:lnR w="6350" cap="flat" cmpd="sng" algn="ctr">
+                      <a:solidFill>
+                        <a:srgbClr val="E5E2DC"/>
+                      </a:solidFill>
+                      <a:prstDash val="solid"/>
+                      <a:round/>
+                      <a:headEnd type="none" w="med" len="med"/>
+                      <a:tailEnd type="none" w="med" len="med"/>
+                    </a:lnR>
+                    <a:lnT w="6350" cap="flat" cmpd="sng" algn="ctr">
+                      <a:solidFill>
+                        <a:srgbClr val="E5E2DC"/>
+                      </a:solidFill>
+                      <a:prstDash val="solid"/>
+                      <a:round/>
+                      <a:headEnd type="none" w="med" len="med"/>
+                      <a:tailEnd type="none" w="med" len="med"/>
+                    </a:lnT>
+                    <a:lnB w="6350" cap="flat" cmpd="sng" algn="ctr">
+                      <a:solidFill>
+                        <a:srgbClr val="E5E2DC"/>
+                      </a:solidFill>
+                      <a:prstDash val="solid"/>
+                      <a:round/>
+                      <a:headEnd type="none" w="med" len="med"/>
+                      <a:tailEnd type="none" w="med" len="med"/>
+                    </a:lnB>
+                    <a:solidFill>
+                      <a:srgbClr val="F8F6F3"/>
+                    </a:solidFill>
+                  </a:tcPr>
+                </a:tc>
+                <a:tc>
+                  <a:txBody>
+                    <a:bodyPr/>
+                    <a:lstStyle/>
+                    <a:p>
+                      <a:pPr indent="0" marL="0">
+                        <a:buNone/>
+                      </a:pPr>
+                      <a:r>
+                        <a:rPr lang="en-US" sz="1200" dirty="0">
+                          <a:solidFill>
+                            <a:srgbClr val="3D3A36"/>
+                          </a:solidFill>
+                          <a:latin typeface="Calibri" pitchFamily="34" charset="0"/>
+                          <a:ea typeface="Calibri" pitchFamily="34" charset="-122"/>
+                          <a:cs typeface="Calibri" pitchFamily="34" charset="-120"/>
+                        </a:rPr>
+                        <a:t>Dyes in ink</a:t>
+                      </a:r>
+                      <a:endParaRPr lang="en-US" sz="1200" dirty="0">
+                        <a:latin typeface="Calibri" charset="0"/>
+                        <a:ea typeface="Calibri" charset="0"/>
+                        <a:cs typeface="Calibri" charset="0"/>
+                      </a:endParaRPr>
+                    </a:p>
+                  </a:txBody>
+                  <a:tcPr marL="91440" marR="91440" marT="45720" marB="45720">
+                    <a:lnL w="6350" cap="flat" cmpd="sng" algn="ctr">
+                      <a:solidFill>
+                        <a:srgbClr val="E5E2DC"/>
+                      </a:solidFill>
+                      <a:prstDash val="solid"/>
+                      <a:round/>
+                      <a:headEnd type="none" w="med" len="med"/>
+                      <a:tailEnd type="none" w="med" len="med"/>
+                    </a:lnL>
+                    <a:lnR w="6350" cap="flat" cmpd="sng" algn="ctr">
+                      <a:solidFill>
+                        <a:srgbClr val="E5E2DC"/>
+                      </a:solidFill>
+                      <a:prstDash val="solid"/>
+                      <a:round/>
+                      <a:headEnd type="none" w="med" len="med"/>
+                      <a:tailEnd type="none" w="med" len="med"/>
+                    </a:lnR>
+                    <a:lnT w="6350" cap="flat" cmpd="sng" algn="ctr">
+                      <a:solidFill>
+                        <a:srgbClr val="E5E2DC"/>
+                      </a:solidFill>
+                      <a:prstDash val="solid"/>
+                      <a:round/>
+                      <a:headEnd type="none" w="med" len="med"/>
+                      <a:tailEnd type="none" w="med" len="med"/>
+                    </a:lnT>
+                    <a:lnB w="6350" cap="flat" cmpd="sng" algn="ctr">
+                      <a:solidFill>
+                        <a:srgbClr val="E5E2DC"/>
+                      </a:solidFill>
+                      <a:prstDash val="solid"/>
+                      <a:round/>
+                      <a:headEnd type="none" w="med" len="med"/>
+                      <a:tailEnd type="none" w="med" len="med"/>
+                    </a:lnB>
+                    <a:solidFill>
+                      <a:srgbClr val="F8F6F3"/>
+                    </a:solidFill>
+                  </a:tcPr>
+                </a:tc>
+              </a:tr>
+              <a:tr h="502920">
+                <a:tc>
+                  <a:txBody>
+                    <a:bodyPr/>
+                    <a:lstStyle/>
+                    <a:p>
+                      <a:pPr indent="0" marL="0">
+                        <a:buNone/>
+                      </a:pPr>
+                      <a:r>
+                        <a:rPr lang="en-US" sz="1200" dirty="0">
+                          <a:solidFill>
+                            <a:srgbClr val="3D3A36"/>
+                          </a:solidFill>
+                          <a:latin typeface="Calibri" pitchFamily="34" charset="0"/>
+                          <a:ea typeface="Calibri" pitchFamily="34" charset="-122"/>
+                          <a:cs typeface="Calibri" pitchFamily="34" charset="-120"/>
+                        </a:rPr>
+                        <a:t>Magnetic separation</a:t>
+                      </a:r>
+                      <a:endParaRPr lang="en-US" sz="1200" dirty="0">
+                        <a:latin typeface="Calibri" charset="0"/>
+                        <a:ea typeface="Calibri" charset="0"/>
+                        <a:cs typeface="Calibri" charset="0"/>
+                      </a:endParaRPr>
+                    </a:p>
+                  </a:txBody>
+                  <a:tcPr marL="91440" marR="91440" marT="45720" marB="45720">
+                    <a:lnL w="6350" cap="flat" cmpd="sng" algn="ctr">
+                      <a:solidFill>
+                        <a:srgbClr val="E5E2DC"/>
+                      </a:solidFill>
+                      <a:prstDash val="solid"/>
+                      <a:round/>
+                      <a:headEnd type="none" w="med" len="med"/>
+                      <a:tailEnd type="none" w="med" len="med"/>
+                    </a:lnL>
+                    <a:lnR w="6350" cap="flat" cmpd="sng" algn="ctr">
+                      <a:solidFill>
+                        <a:srgbClr val="E5E2DC"/>
+                      </a:solidFill>
+                      <a:prstDash val="solid"/>
+                      <a:round/>
+                      <a:headEnd type="none" w="med" len="med"/>
+                      <a:tailEnd type="none" w="med" len="med"/>
+                    </a:lnR>
+                    <a:lnT w="6350" cap="flat" cmpd="sng" algn="ctr">
+                      <a:solidFill>
+                        <a:srgbClr val="E5E2DC"/>
+                      </a:solidFill>
+                      <a:prstDash val="solid"/>
+                      <a:round/>
+                      <a:headEnd type="none" w="med" len="med"/>
+                      <a:tailEnd type="none" w="med" len="med"/>
+                    </a:lnT>
+                    <a:lnB w="6350" cap="flat" cmpd="sng" algn="ctr">
+                      <a:solidFill>
+                        <a:srgbClr val="E5E2DC"/>
+                      </a:solidFill>
+                      <a:prstDash val="solid"/>
+                      <a:round/>
+                      <a:headEnd type="none" w="med" len="med"/>
+                      <a:tailEnd type="none" w="med" len="med"/>
+                    </a:lnB>
+                    <a:solidFill>
+                      <a:srgbClr val="FFFFFF"/>
+                    </a:solidFill>
+                  </a:tcPr>
+                </a:tc>
+                <a:tc>
+                  <a:txBody>
+                    <a:bodyPr/>
+                    <a:lstStyle/>
+                    <a:p>
+                      <a:pPr indent="0" marL="0">
+                        <a:buNone/>
+                      </a:pPr>
+                      <a:r>
+                        <a:rPr lang="en-US" sz="1200" dirty="0">
+                          <a:solidFill>
+                            <a:srgbClr val="3D3A36"/>
+                          </a:solidFill>
+                          <a:latin typeface="Calibri" pitchFamily="34" charset="0"/>
+                          <a:ea typeface="Calibri" pitchFamily="34" charset="-122"/>
+                          <a:cs typeface="Calibri" pitchFamily="34" charset="-120"/>
+                        </a:rPr>
+                        <a:t>Magnetic from non-magnetic</a:t>
+                      </a:r>
+                      <a:endParaRPr lang="en-US" sz="1200" dirty="0">
+                        <a:latin typeface="Calibri" charset="0"/>
+                        <a:ea typeface="Calibri" charset="0"/>
+                        <a:cs typeface="Calibri" charset="0"/>
+                      </a:endParaRPr>
+                    </a:p>
+                  </a:txBody>
+                  <a:tcPr marL="91440" marR="91440" marT="45720" marB="45720">
+                    <a:lnL w="6350" cap="flat" cmpd="sng" algn="ctr">
+                      <a:solidFill>
+                        <a:srgbClr val="E5E2DC"/>
+                      </a:solidFill>
+                      <a:prstDash val="solid"/>
+                      <a:round/>
+                      <a:headEnd type="none" w="med" len="med"/>
+                      <a:tailEnd type="none" w="med" len="med"/>
+                    </a:lnL>
+                    <a:lnR w="6350" cap="flat" cmpd="sng" algn="ctr">
+                      <a:solidFill>
+                        <a:srgbClr val="E5E2DC"/>
+                      </a:solidFill>
+                      <a:prstDash val="solid"/>
+                      <a:round/>
+                      <a:headEnd type="none" w="med" len="med"/>
+                      <a:tailEnd type="none" w="med" len="med"/>
+                    </a:lnR>
+                    <a:lnT w="6350" cap="flat" cmpd="sng" algn="ctr">
+                      <a:solidFill>
+                        <a:srgbClr val="E5E2DC"/>
+                      </a:solidFill>
+                      <a:prstDash val="solid"/>
+                      <a:round/>
+                      <a:headEnd type="none" w="med" len="med"/>
+                      <a:tailEnd type="none" w="med" len="med"/>
+                    </a:lnT>
+                    <a:lnB w="6350" cap="flat" cmpd="sng" algn="ctr">
+                      <a:solidFill>
+                        <a:srgbClr val="E5E2DC"/>
+                      </a:solidFill>
+                      <a:prstDash val="solid"/>
+                      <a:round/>
+                      <a:headEnd type="none" w="med" len="med"/>
+                      <a:tailEnd type="none" w="med" len="med"/>
+                    </a:lnB>
+                    <a:solidFill>
+                      <a:srgbClr val="FFFFFF"/>
+                    </a:solidFill>
+                  </a:tcPr>
+                </a:tc>
+                <a:tc>
+                  <a:txBody>
+                    <a:bodyPr/>
+                    <a:lstStyle/>
+                    <a:p>
+                      <a:pPr indent="0" marL="0">
+                        <a:buNone/>
+                      </a:pPr>
+                      <a:r>
+                        <a:rPr lang="en-US" sz="1200" dirty="0">
+                          <a:solidFill>
+                            <a:srgbClr val="3D3A36"/>
+                          </a:solidFill>
+                          <a:latin typeface="Calibri" pitchFamily="34" charset="0"/>
+                          <a:ea typeface="Calibri" pitchFamily="34" charset="-122"/>
+                          <a:cs typeface="Calibri" pitchFamily="34" charset="-120"/>
+                        </a:rPr>
+                        <a:t>Iron filings from sand</a:t>
+                      </a:r>
+                      <a:endParaRPr lang="en-US" sz="1200" dirty="0">
+                        <a:latin typeface="Calibri" charset="0"/>
+                        <a:ea typeface="Calibri" charset="0"/>
+                        <a:cs typeface="Calibri" charset="0"/>
+                      </a:endParaRPr>
+                    </a:p>
+                  </a:txBody>
+                  <a:tcPr marL="91440" marR="91440" marT="45720" marB="45720">
+                    <a:lnL w="6350" cap="flat" cmpd="sng" algn="ctr">
+                      <a:solidFill>
+                        <a:srgbClr val="E5E2DC"/>
+                      </a:solidFill>
+                      <a:prstDash val="solid"/>
+                      <a:round/>
+                      <a:headEnd type="none" w="med" len="med"/>
+                      <a:tailEnd type="none" w="med" len="med"/>
+                    </a:lnL>
+                    <a:lnR w="6350" cap="flat" cmpd="sng" algn="ctr">
+                      <a:solidFill>
+                        <a:srgbClr val="E5E2DC"/>
+                      </a:solidFill>
+                      <a:prstDash val="solid"/>
+                      <a:round/>
+                      <a:headEnd type="none" w="med" len="med"/>
+                      <a:tailEnd type="none" w="med" len="med"/>
+                    </a:lnR>
+                    <a:lnT w="6350" cap="flat" cmpd="sng" algn="ctr">
+                      <a:solidFill>
+                        <a:srgbClr val="E5E2DC"/>
+                      </a:solidFill>
+                      <a:prstDash val="solid"/>
+                      <a:round/>
+                      <a:headEnd type="none" w="med" len="med"/>
+                      <a:tailEnd type="none" w="med" len="med"/>
+                    </a:lnT>
+                    <a:lnB w="6350" cap="flat" cmpd="sng" algn="ctr">
+                      <a:solidFill>
+                        <a:srgbClr val="E5E2DC"/>
+                      </a:solidFill>
+                      <a:prstDash val="solid"/>
+                      <a:round/>
+                      <a:headEnd type="none" w="med" len="med"/>
+                      <a:tailEnd type="none" w="med" len="med"/>
+                    </a:lnB>
+                    <a:solidFill>
+                      <a:srgbClr val="FFFFFF"/>
+                    </a:solidFill>
+                  </a:tcPr>
+                </a:tc>
+              </a:tr>
+            </a:tbl>
+          </a:graphicData>
+        </a:graphic>
+      </p:graphicFrame>
     </p:spTree>
   </p:cSld>
   <p:clrMapOvr>
@@ -2471,7 +4029,47 @@
         <p:spPr>
           <a:xfrm>
             <a:off x="0" y="0"/>
-            <a:ext cx="9144000" cy="54864"/>
+            <a:ext cx="9144000" cy="822960"/>
+          </a:xfrm>
+          <a:prstGeom prst="rect">
+            <a:avLst/>
+          </a:prstGeom>
+          <a:solidFill>
+            <a:srgbClr val="FFFFFF"/>
+          </a:solidFill>
+          <a:ln/>
+        </p:spPr>
+      </p:sp>
+      <p:sp>
+        <p:nvSpPr>
+          <p:cNvPr id="3" name="Shape 1"/>
+          <p:cNvSpPr/>
+          <p:nvPr/>
+        </p:nvSpPr>
+        <p:spPr>
+          <a:xfrm>
+            <a:off x="0" y="804672"/>
+            <a:ext cx="9144000" cy="27432"/>
+          </a:xfrm>
+          <a:prstGeom prst="rect">
+            <a:avLst/>
+          </a:prstGeom>
+          <a:solidFill>
+            <a:srgbClr val="E5E2DC"/>
+          </a:solidFill>
+          <a:ln/>
+        </p:spPr>
+      </p:sp>
+      <p:sp>
+        <p:nvSpPr>
+          <p:cNvPr id="4" name="Shape 2"/>
+          <p:cNvSpPr/>
+          <p:nvPr/>
+        </p:nvSpPr>
+        <p:spPr>
+          <a:xfrm>
+            <a:off x="548640" y="201168"/>
+            <a:ext cx="54864" cy="420624"/>
           </a:xfrm>
           <a:prstGeom prst="rect">
             <a:avLst/>
@@ -2484,14 +4082,14 @@
       </p:sp>
       <p:sp>
         <p:nvSpPr>
-          <p:cNvPr id="3" name="Text 1"/>
-          <p:cNvSpPr/>
-          <p:nvPr/>
-        </p:nvSpPr>
-        <p:spPr>
-          <a:xfrm>
-            <a:off x="7772400" y="4709160"/>
-            <a:ext cx="1097280" cy="320040"/>
+          <p:cNvPr id="5" name="Text 3"/>
+          <p:cNvSpPr/>
+          <p:nvPr/>
+        </p:nvSpPr>
+        <p:spPr>
+          <a:xfrm>
+            <a:off x="777240" y="137160"/>
+            <a:ext cx="7772400" cy="548640"/>
           </a:xfrm>
           <a:prstGeom prst="rect">
             <a:avLst/>
@@ -2500,53 +4098,14 @@
           <a:ln/>
         </p:spPr>
         <p:txBody>
-          <a:bodyPr wrap="square" rtlCol="0" anchor="ctr"/>
-          <a:lstStyle/>
-          <a:p>
-            <a:pPr algn="r" indent="0" marL="0">
-              <a:buNone/>
-            </a:pPr>
-            <a:r>
-              <a:rPr lang="en-US" sz="900" dirty="0">
-                <a:solidFill>
-                  <a:srgbClr val="6B6660"/>
-                </a:solidFill>
-                <a:latin typeface="Calibri" pitchFamily="34" charset="0"/>
-                <a:ea typeface="Calibri" pitchFamily="34" charset="-122"/>
-                <a:cs typeface="Calibri" pitchFamily="34" charset="-120"/>
-              </a:rPr>
-              <a:t>4 / 5</a:t>
-            </a:r>
-            <a:endParaRPr lang="en-US" sz="900" dirty="0"/>
-          </a:p>
-        </p:txBody>
-      </p:sp>
-      <p:sp>
-        <p:nvSpPr>
-          <p:cNvPr id="4" name="Text 2"/>
-          <p:cNvSpPr/>
-          <p:nvPr/>
-        </p:nvSpPr>
-        <p:spPr>
-          <a:xfrm>
-            <a:off x="457200" y="274320"/>
-            <a:ext cx="8229600" cy="640080"/>
-          </a:xfrm>
-          <a:prstGeom prst="rect">
-            <a:avLst/>
-          </a:prstGeom>
-          <a:noFill/>
-          <a:ln/>
-        </p:spPr>
-        <p:txBody>
-          <a:bodyPr wrap="square" rtlCol="0" anchor="ctr"/>
+          <a:bodyPr wrap="square" lIns="0" tIns="0" rIns="0" bIns="0" rtlCol="0" anchor="ctr"/>
           <a:lstStyle/>
           <a:p>
             <a:pPr indent="0" marL="0">
               <a:buNone/>
             </a:pPr>
             <a:r>
-              <a:rPr lang="en-US" sz="2600" b="1" dirty="0">
+              <a:rPr lang="en-US" sz="2000" b="1" dirty="0">
                 <a:solidFill>
                   <a:srgbClr val="1B2A4A"/>
                 </a:solidFill>
@@ -2554,22 +4113,22 @@
                 <a:ea typeface="Georgia" pitchFamily="34" charset="-122"/>
                 <a:cs typeface="Georgia" pitchFamily="34" charset="-120"/>
               </a:rPr>
-              <a:t>Choosing the Right Method</a:t>
-            </a:r>
-            <a:endParaRPr lang="en-US" sz="2600" dirty="0"/>
-          </a:p>
-        </p:txBody>
-      </p:sp>
-      <p:sp>
-        <p:nvSpPr>
-          <p:cNvPr id="5" name="Text 3"/>
-          <p:cNvSpPr/>
-          <p:nvPr/>
-        </p:nvSpPr>
-        <p:spPr>
-          <a:xfrm>
-            <a:off x="457200" y="1188720"/>
-            <a:ext cx="3840480" cy="3474720"/>
+              <a:t>Filtration — Step by Step</a:t>
+            </a:r>
+            <a:endParaRPr lang="en-US" sz="2000" dirty="0"/>
+          </a:p>
+        </p:txBody>
+      </p:sp>
+      <p:sp>
+        <p:nvSpPr>
+          <p:cNvPr id="6" name="Text 4"/>
+          <p:cNvSpPr/>
+          <p:nvPr/>
+        </p:nvSpPr>
+        <p:spPr>
+          <a:xfrm>
+            <a:off x="731520" y="1051560"/>
+            <a:ext cx="7680960" cy="3108960"/>
           </a:xfrm>
           <a:prstGeom prst="rect">
             <a:avLst/>
@@ -2583,13 +4142,13 @@
           <a:p>
             <a:pPr marL="342900" indent="-342900">
               <a:spcAft>
-                <a:spcPts val="600"/>
+                <a:spcPts val="800"/>
               </a:spcAft>
               <a:buSzPct val="100000"/>
               <a:buChar char="•"/>
             </a:pPr>
             <a:r>
-              <a:rPr lang="en-US" sz="1400" dirty="0">
+              <a:rPr lang="en-US" sz="1500" dirty="0">
                 <a:solidFill>
                   <a:srgbClr val="3D3A36"/>
                 </a:solidFill>
@@ -2597,20 +4156,20 @@
                 <a:ea typeface="Calibri" pitchFamily="34" charset="-122"/>
                 <a:cs typeface="Calibri" pitchFamily="34" charset="-120"/>
               </a:rPr>
-              <a:t>Insoluble solid + liquid → Filtration</a:t>
-            </a:r>
-            <a:endParaRPr lang="en-US" sz="1400" dirty="0"/>
+              <a:t>1. Fold filter paper into a cone shape.</a:t>
+            </a:r>
+            <a:endParaRPr lang="en-US" sz="1500" dirty="0"/>
           </a:p>
           <a:p>
             <a:pPr marL="342900" indent="-342900">
               <a:spcAft>
-                <a:spcPts val="600"/>
+                <a:spcPts val="800"/>
               </a:spcAft>
               <a:buSzPct val="100000"/>
               <a:buChar char="•"/>
             </a:pPr>
             <a:r>
-              <a:rPr lang="en-US" sz="1400" dirty="0">
+              <a:rPr lang="en-US" sz="1500" dirty="0">
                 <a:solidFill>
                   <a:srgbClr val="3D3A36"/>
                 </a:solidFill>
@@ -2618,20 +4177,20 @@
                 <a:ea typeface="Calibri" pitchFamily="34" charset="-122"/>
                 <a:cs typeface="Calibri" pitchFamily="34" charset="-120"/>
               </a:rPr>
-              <a:t>Dissolved solid from solution → Evaporation</a:t>
-            </a:r>
-            <a:endParaRPr lang="en-US" sz="1400" dirty="0"/>
+              <a:t>2. Place it in a funnel over a beaker.</a:t>
+            </a:r>
+            <a:endParaRPr lang="en-US" sz="1500" dirty="0"/>
           </a:p>
           <a:p>
             <a:pPr marL="342900" indent="-342900">
               <a:spcAft>
-                <a:spcPts val="600"/>
+                <a:spcPts val="800"/>
               </a:spcAft>
               <a:buSzPct val="100000"/>
               <a:buChar char="•"/>
             </a:pPr>
             <a:r>
-              <a:rPr lang="en-US" sz="1400" dirty="0">
+              <a:rPr lang="en-US" sz="1500" dirty="0">
                 <a:solidFill>
                   <a:srgbClr val="3D3A36"/>
                 </a:solidFill>
@@ -2639,20 +4198,20 @@
                 <a:ea typeface="Calibri" pitchFamily="34" charset="-122"/>
                 <a:cs typeface="Calibri" pitchFamily="34" charset="-120"/>
               </a:rPr>
-              <a:t>Pure liquid from solution → Distillation</a:t>
-            </a:r>
-            <a:endParaRPr lang="en-US" sz="1400" dirty="0"/>
+              <a:t>3. Pour the mixture through the filter paper.</a:t>
+            </a:r>
+            <a:endParaRPr lang="en-US" sz="1500" dirty="0"/>
           </a:p>
           <a:p>
             <a:pPr marL="342900" indent="-342900">
               <a:spcAft>
-                <a:spcPts val="600"/>
+                <a:spcPts val="800"/>
               </a:spcAft>
               <a:buSzPct val="100000"/>
               <a:buChar char="•"/>
             </a:pPr>
             <a:r>
-              <a:rPr lang="en-US" sz="1400" dirty="0">
+              <a:rPr lang="en-US" sz="1500" dirty="0">
                 <a:solidFill>
                   <a:srgbClr val="3D3A36"/>
                 </a:solidFill>
@@ -2660,20 +4219,20 @@
                 <a:ea typeface="Calibri" pitchFamily="34" charset="-122"/>
                 <a:cs typeface="Calibri" pitchFamily="34" charset="-120"/>
               </a:rPr>
-              <a:t>Mixture of colours → Chromatography</a:t>
-            </a:r>
-            <a:endParaRPr lang="en-US" sz="1400" dirty="0"/>
+              <a:t>4. The RESIDUE (solid) stays in the filter paper.</a:t>
+            </a:r>
+            <a:endParaRPr lang="en-US" sz="1500" dirty="0"/>
           </a:p>
           <a:p>
             <a:pPr marL="342900" indent="-342900">
               <a:spcAft>
-                <a:spcPts val="600"/>
+                <a:spcPts val="800"/>
               </a:spcAft>
               <a:buSzPct val="100000"/>
               <a:buChar char="•"/>
             </a:pPr>
             <a:r>
-              <a:rPr lang="en-US" sz="1400" dirty="0">
+              <a:rPr lang="en-US" sz="1500" dirty="0">
                 <a:solidFill>
                   <a:srgbClr val="3D3A36"/>
                 </a:solidFill>
@@ -2681,20 +4240,20 @@
                 <a:ea typeface="Calibri" pitchFamily="34" charset="-122"/>
                 <a:cs typeface="Calibri" pitchFamily="34" charset="-120"/>
               </a:rPr>
-              <a:t>Magnetic + non-magnetic → Magnet</a:t>
-            </a:r>
-            <a:endParaRPr lang="en-US" sz="1400" dirty="0"/>
+              <a:t>5. The FILTRATE (liquid) passes through into the beaker.</a:t>
+            </a:r>
+            <a:endParaRPr lang="en-US" sz="1500" dirty="0"/>
           </a:p>
           <a:p>
             <a:pPr marL="342900" indent="-342900">
               <a:spcAft>
-                <a:spcPts val="600"/>
+                <a:spcPts val="800"/>
               </a:spcAft>
               <a:buSzPct val="100000"/>
               <a:buChar char="•"/>
             </a:pPr>
             <a:r>
-              <a:rPr lang="en-US" sz="1400" dirty="0">
+              <a:rPr lang="en-US" sz="1500" dirty="0">
                 <a:solidFill>
                   <a:srgbClr val="3D3A36"/>
                 </a:solidFill>
@@ -2702,35 +4261,30 @@
                 <a:ea typeface="Calibri" pitchFamily="34" charset="-122"/>
                 <a:cs typeface="Calibri" pitchFamily="34" charset="-120"/>
               </a:rPr>
-              <a:t>Different sized solids → Sieving</a:t>
-            </a:r>
-            <a:endParaRPr lang="en-US" sz="1400" dirty="0"/>
-          </a:p>
-        </p:txBody>
-      </p:sp>
-      <p:sp>
-        <p:nvSpPr>
-          <p:cNvPr id="6" name="Shape 4"/>
-          <p:cNvSpPr/>
-          <p:nvPr/>
-        </p:nvSpPr>
-        <p:spPr>
-          <a:xfrm>
-            <a:off x="4846320" y="1188720"/>
-            <a:ext cx="3840480" cy="3474720"/>
-          </a:xfrm>
-          <a:prstGeom prst="rect">
-            <a:avLst/>
-          </a:prstGeom>
-          <a:solidFill>
-            <a:srgbClr val="FFFFFF"/>
-          </a:solidFill>
-          <a:ln w="12700">
-            <a:solidFill>
-              <a:srgbClr val="E5E2DC"/>
-            </a:solidFill>
-            <a:prstDash val="solid"/>
-          </a:ln>
+              <a:t>This works because the solid particles are too big to pass through the paper.</a:t>
+            </a:r>
+            <a:endParaRPr lang="en-US" sz="1500" dirty="0"/>
+          </a:p>
+        </p:txBody>
+      </p:sp>
+      <p:sp>
+        <p:nvSpPr>
+          <p:cNvPr id="7" name="Shape 5"/>
+          <p:cNvSpPr/>
+          <p:nvPr/>
+        </p:nvSpPr>
+        <p:spPr>
+          <a:xfrm>
+            <a:off x="731520" y="4206240"/>
+            <a:ext cx="7680960" cy="640080"/>
+          </a:xfrm>
+          <a:prstGeom prst="rect">
+            <a:avLst/>
+          </a:prstGeom>
+          <a:solidFill>
+            <a:srgbClr val="E8F5F3"/>
+          </a:solidFill>
+          <a:ln/>
           <a:effectLst>
             <a:outerShdw sx="100000" sy="100000" kx="0" ky="0" algn="bl" rotWithShape="0" blurRad="50800" dist="25400" dir="8100000">
               <a:srgbClr val="000000">
@@ -2742,34 +4296,14 @@
       </p:sp>
       <p:sp>
         <p:nvSpPr>
-          <p:cNvPr id="7" name="Shape 5"/>
-          <p:cNvSpPr/>
-          <p:nvPr/>
-        </p:nvSpPr>
-        <p:spPr>
-          <a:xfrm>
-            <a:off x="4846320" y="1188720"/>
-            <a:ext cx="3840480" cy="54864"/>
-          </a:xfrm>
-          <a:prstGeom prst="rect">
-            <a:avLst/>
-          </a:prstGeom>
-          <a:solidFill>
-            <a:srgbClr val="2A9D8F"/>
-          </a:solidFill>
-          <a:ln/>
-        </p:spPr>
-      </p:sp>
-      <p:sp>
-        <p:nvSpPr>
           <p:cNvPr id="8" name="Text 6"/>
           <p:cNvSpPr/>
           <p:nvPr/>
         </p:nvSpPr>
         <p:spPr>
           <a:xfrm>
-            <a:off x="5120640" y="1371600"/>
-            <a:ext cx="3291840" cy="3108960"/>
+            <a:off x="914400" y="4251960"/>
+            <a:ext cx="7315200" cy="548640"/>
           </a:xfrm>
           <a:prstGeom prst="rect">
             <a:avLst/>
@@ -2778,46 +4312,28 @@
           <a:ln/>
         </p:spPr>
         <p:txBody>
-          <a:bodyPr wrap="square" rtlCol="0" anchor="t"/>
+          <a:bodyPr wrap="square" rtlCol="0" anchor="ctr"/>
           <a:lstStyle/>
           <a:p>
             <a:pPr indent="0" marL="0">
-              <a:spcAft>
-                <a:spcPts val="400"/>
-              </a:spcAft>
               <a:buNone/>
             </a:pPr>
             <a:r>
-              <a:rPr lang="en-US" sz="1600" b="1" dirty="0">
+              <a:rPr lang="en-US" sz="1200" b="1" dirty="0">
                 <a:solidFill>
-                  <a:srgbClr val="1B2A4A"/>
+                  <a:srgbClr val="2A9D8F"/>
                 </a:solidFill>
                 <a:latin typeface="Calibri" pitchFamily="34" charset="0"/>
                 <a:ea typeface="Calibri" pitchFamily="34" charset="-122"/>
                 <a:cs typeface="Calibri" pitchFamily="34" charset="-120"/>
               </a:rPr>
-              <a:t>Distillation vs Evaporation</a:t>
-            </a:r>
-            <a:endParaRPr lang="en-US" sz="1600" dirty="0"/>
-          </a:p>
-          <a:p>
+              <a:t>Key Idea: </a:t>
+            </a:r>
             <a:pPr indent="0" marL="0">
-              <a:spcAft>
-                <a:spcPts val="400"/>
-              </a:spcAft>
               <a:buNone/>
             </a:pPr>
-            <a:endParaRPr lang="en-US" sz="1600" dirty="0"/>
-          </a:p>
-          <a:p>
-            <a:pPr indent="0" marL="0">
-              <a:spcAft>
-                <a:spcPts val="400"/>
-              </a:spcAft>
-              <a:buNone/>
-            </a:pPr>
-            <a:r>
-              <a:rPr lang="en-US" sz="1300" dirty="0">
+            <a:r>
+              <a:rPr lang="en-US" sz="1200" i="1" dirty="0">
                 <a:solidFill>
                   <a:srgbClr val="3D3A36"/>
                 </a:solidFill>
@@ -2825,89 +4341,9 @@
                 <a:ea typeface="Calibri" pitchFamily="34" charset="-122"/>
                 <a:cs typeface="Calibri" pitchFamily="34" charset="-120"/>
               </a:rPr>
-              <a:t>Evaporation: you KEEP the solid, lose the liquid</a:t>
-            </a:r>
-            <a:endParaRPr lang="en-US" sz="1600" dirty="0"/>
-          </a:p>
-          <a:p>
-            <a:pPr indent="0" marL="0">
-              <a:spcAft>
-                <a:spcPts val="400"/>
-              </a:spcAft>
-              <a:buNone/>
-            </a:pPr>
-            <a:r>
-              <a:rPr lang="en-US" sz="1300" dirty="0">
-                <a:solidFill>
-                  <a:srgbClr val="3D3A36"/>
-                </a:solidFill>
-                <a:latin typeface="Calibri" pitchFamily="34" charset="0"/>
-                <a:ea typeface="Calibri" pitchFamily="34" charset="-122"/>
-                <a:cs typeface="Calibri" pitchFamily="34" charset="-120"/>
-              </a:rPr>
-              <a:t>Distillation: you KEEP the liquid, lose the solid</a:t>
-            </a:r>
-            <a:endParaRPr lang="en-US" sz="1600" dirty="0"/>
-          </a:p>
-          <a:p>
-            <a:pPr indent="0" marL="0">
-              <a:spcAft>
-                <a:spcPts val="400"/>
-              </a:spcAft>
-              <a:buNone/>
-            </a:pPr>
-            <a:r>
-              <a:rPr lang="en-US" sz="1300" dirty="0">
-                <a:solidFill>
-                  <a:srgbClr val="3D3A36"/>
-                </a:solidFill>
-                <a:latin typeface="Calibri" pitchFamily="34" charset="0"/>
-                <a:ea typeface="Calibri" pitchFamily="34" charset="-122"/>
-                <a:cs typeface="Calibri" pitchFamily="34" charset="-120"/>
-              </a:rPr>
-              <a:t>Distillation needs a condenser to cool the steam back to liquid</a:t>
-            </a:r>
-            <a:endParaRPr lang="en-US" sz="1600" dirty="0"/>
-          </a:p>
-          <a:p>
-            <a:pPr indent="0" marL="0">
-              <a:spcAft>
-                <a:spcPts val="400"/>
-              </a:spcAft>
-              <a:buNone/>
-            </a:pPr>
-            <a:r>
-              <a:rPr lang="en-US" sz="1300" dirty="0">
-                <a:solidFill>
-                  <a:srgbClr val="3D3A36"/>
-                </a:solidFill>
-                <a:latin typeface="Calibri" pitchFamily="34" charset="0"/>
-                <a:ea typeface="Calibri" pitchFamily="34" charset="-122"/>
-                <a:cs typeface="Calibri" pitchFamily="34" charset="-120"/>
-              </a:rPr>
-              <a:t>Both use heat energy</a:t>
-            </a:r>
-            <a:endParaRPr lang="en-US" sz="1600" dirty="0"/>
-          </a:p>
-          <a:p>
-            <a:pPr indent="0" marL="0">
-              <a:spcAft>
-                <a:spcPts val="400"/>
-              </a:spcAft>
-              <a:buNone/>
-            </a:pPr>
-            <a:r>
-              <a:rPr lang="en-US" sz="1300" dirty="0">
-                <a:solidFill>
-                  <a:srgbClr val="3D3A36"/>
-                </a:solidFill>
-                <a:latin typeface="Calibri" pitchFamily="34" charset="0"/>
-                <a:ea typeface="Calibri" pitchFamily="34" charset="-122"/>
-                <a:cs typeface="Calibri" pitchFamily="34" charset="-120"/>
-              </a:rPr>
-              <a:t>Distillation gives you PURE water; evaporation gives you salt</a:t>
-            </a:r>
-            <a:endParaRPr lang="en-US" sz="1600" dirty="0"/>
+              <a:t>Filtration only works for INSOLUBLE solids — dissolved substances pass straight through.</a:t>
+            </a:r>
+            <a:endParaRPr lang="en-US" sz="1200" dirty="0"/>
           </a:p>
         </p:txBody>
       </p:sp>
@@ -2925,7 +4361,7 @@
     <p:bg>
       <p:bgPr>
         <a:solidFill>
-          <a:srgbClr val="1B2A4A"/>
+          <a:srgbClr val="FAF8F5"/>
         </a:solidFill>
       </p:bgPr>
     </p:bg>
@@ -2952,27 +4388,67 @@
         <p:spPr>
           <a:xfrm>
             <a:off x="0" y="0"/>
-            <a:ext cx="109728" cy="5143500"/>
-          </a:xfrm>
-          <a:prstGeom prst="rect">
-            <a:avLst/>
-          </a:prstGeom>
-          <a:solidFill>
-            <a:srgbClr val="E9C46A"/>
-          </a:solidFill>
-          <a:ln/>
-        </p:spPr>
-      </p:sp>
-      <p:sp>
-        <p:nvSpPr>
-          <p:cNvPr id="3" name="Text 1"/>
-          <p:cNvSpPr/>
-          <p:nvPr/>
-        </p:nvSpPr>
-        <p:spPr>
-          <a:xfrm>
-            <a:off x="731520" y="457200"/>
-            <a:ext cx="7772400" cy="731520"/>
+            <a:ext cx="9144000" cy="822960"/>
+          </a:xfrm>
+          <a:prstGeom prst="rect">
+            <a:avLst/>
+          </a:prstGeom>
+          <a:solidFill>
+            <a:srgbClr val="FFFFFF"/>
+          </a:solidFill>
+          <a:ln/>
+        </p:spPr>
+      </p:sp>
+      <p:sp>
+        <p:nvSpPr>
+          <p:cNvPr id="3" name="Shape 1"/>
+          <p:cNvSpPr/>
+          <p:nvPr/>
+        </p:nvSpPr>
+        <p:spPr>
+          <a:xfrm>
+            <a:off x="0" y="804672"/>
+            <a:ext cx="9144000" cy="27432"/>
+          </a:xfrm>
+          <a:prstGeom prst="rect">
+            <a:avLst/>
+          </a:prstGeom>
+          <a:solidFill>
+            <a:srgbClr val="E5E2DC"/>
+          </a:solidFill>
+          <a:ln/>
+        </p:spPr>
+      </p:sp>
+      <p:sp>
+        <p:nvSpPr>
+          <p:cNvPr id="4" name="Shape 2"/>
+          <p:cNvSpPr/>
+          <p:nvPr/>
+        </p:nvSpPr>
+        <p:spPr>
+          <a:xfrm>
+            <a:off x="548640" y="201168"/>
+            <a:ext cx="54864" cy="420624"/>
+          </a:xfrm>
+          <a:prstGeom prst="rect">
+            <a:avLst/>
+          </a:prstGeom>
+          <a:solidFill>
+            <a:srgbClr val="2A9D8F"/>
+          </a:solidFill>
+          <a:ln/>
+        </p:spPr>
+      </p:sp>
+      <p:sp>
+        <p:nvSpPr>
+          <p:cNvPr id="5" name="Text 3"/>
+          <p:cNvSpPr/>
+          <p:nvPr/>
+        </p:nvSpPr>
+        <p:spPr>
+          <a:xfrm>
+            <a:off x="777240" y="137160"/>
+            <a:ext cx="7772400" cy="548640"/>
           </a:xfrm>
           <a:prstGeom prst="rect">
             <a:avLst/>
@@ -2981,14 +4457,1371 @@
           <a:ln/>
         </p:spPr>
         <p:txBody>
-          <a:bodyPr wrap="square" rtlCol="0" anchor="ctr"/>
+          <a:bodyPr wrap="square" lIns="0" tIns="0" rIns="0" bIns="0" rtlCol="0" anchor="ctr"/>
           <a:lstStyle/>
           <a:p>
             <a:pPr indent="0" marL="0">
               <a:buNone/>
             </a:pPr>
             <a:r>
-              <a:rPr lang="en-US" sz="3200" b="1" dirty="0">
+              <a:rPr lang="en-US" sz="2000" b="1" dirty="0">
+                <a:solidFill>
+                  <a:srgbClr val="1B2A4A"/>
+                </a:solidFill>
+                <a:latin typeface="Georgia" pitchFamily="34" charset="0"/>
+                <a:ea typeface="Georgia" pitchFamily="34" charset="-122"/>
+                <a:cs typeface="Georgia" pitchFamily="34" charset="-120"/>
+              </a:rPr>
+              <a:t>Distillation — Separating Liquids</a:t>
+            </a:r>
+            <a:endParaRPr lang="en-US" sz="2000" dirty="0"/>
+          </a:p>
+        </p:txBody>
+      </p:sp>
+      <p:sp>
+        <p:nvSpPr>
+          <p:cNvPr id="6" name="Text 4"/>
+          <p:cNvSpPr/>
+          <p:nvPr/>
+        </p:nvSpPr>
+        <p:spPr>
+          <a:xfrm>
+            <a:off x="731520" y="1051560"/>
+            <a:ext cx="7680960" cy="3108960"/>
+          </a:xfrm>
+          <a:prstGeom prst="rect">
+            <a:avLst/>
+          </a:prstGeom>
+          <a:noFill/>
+          <a:ln/>
+        </p:spPr>
+        <p:txBody>
+          <a:bodyPr wrap="square" rtlCol="0" anchor="t"/>
+          <a:lstStyle/>
+          <a:p>
+            <a:pPr marL="342900" indent="-342900">
+              <a:spcAft>
+                <a:spcPts val="800"/>
+              </a:spcAft>
+              <a:buSzPct val="100000"/>
+              <a:buChar char="•"/>
+            </a:pPr>
+            <a:r>
+              <a:rPr lang="en-US" sz="1500" dirty="0">
+                <a:solidFill>
+                  <a:srgbClr val="3D3A36"/>
+                </a:solidFill>
+                <a:latin typeface="Calibri" pitchFamily="34" charset="0"/>
+                <a:ea typeface="Calibri" pitchFamily="34" charset="-122"/>
+                <a:cs typeface="Calibri" pitchFamily="34" charset="-120"/>
+              </a:rPr>
+              <a:t>Used when you want to KEEP the liquid (evaporation loses it).</a:t>
+            </a:r>
+            <a:endParaRPr lang="en-US" sz="1500" dirty="0"/>
+          </a:p>
+          <a:p>
+            <a:pPr marL="342900" indent="-342900">
+              <a:spcAft>
+                <a:spcPts val="800"/>
+              </a:spcAft>
+              <a:buSzPct val="100000"/>
+              <a:buChar char="•"/>
+            </a:pPr>
+            <a:r>
+              <a:rPr lang="en-US" sz="1500" dirty="0">
+                <a:solidFill>
+                  <a:srgbClr val="3D3A36"/>
+                </a:solidFill>
+                <a:latin typeface="Calibri" pitchFamily="34" charset="0"/>
+                <a:ea typeface="Calibri" pitchFamily="34" charset="-122"/>
+                <a:cs typeface="Calibri" pitchFamily="34" charset="-120"/>
+              </a:rPr>
+              <a:t>Heat the solution — the liquid with the LOWEST boiling point evaporates first.</a:t>
+            </a:r>
+            <a:endParaRPr lang="en-US" sz="1500" dirty="0"/>
+          </a:p>
+          <a:p>
+            <a:pPr marL="342900" indent="-342900">
+              <a:spcAft>
+                <a:spcPts val="800"/>
+              </a:spcAft>
+              <a:buSzPct val="100000"/>
+              <a:buChar char="•"/>
+            </a:pPr>
+            <a:r>
+              <a:rPr lang="en-US" sz="1500" dirty="0">
+                <a:solidFill>
+                  <a:srgbClr val="3D3A36"/>
+                </a:solidFill>
+                <a:latin typeface="Calibri" pitchFamily="34" charset="0"/>
+                <a:ea typeface="Calibri" pitchFamily="34" charset="-122"/>
+                <a:cs typeface="Calibri" pitchFamily="34" charset="-120"/>
+              </a:rPr>
+              <a:t>Steam travels into a condenser (cold tube) and turns back to liquid.</a:t>
+            </a:r>
+            <a:endParaRPr lang="en-US" sz="1500" dirty="0"/>
+          </a:p>
+          <a:p>
+            <a:pPr marL="342900" indent="-342900">
+              <a:spcAft>
+                <a:spcPts val="800"/>
+              </a:spcAft>
+              <a:buSzPct val="100000"/>
+              <a:buChar char="•"/>
+            </a:pPr>
+            <a:r>
+              <a:rPr lang="en-US" sz="1500" dirty="0">
+                <a:solidFill>
+                  <a:srgbClr val="3D3A36"/>
+                </a:solidFill>
+                <a:latin typeface="Calibri" pitchFamily="34" charset="0"/>
+                <a:ea typeface="Calibri" pitchFamily="34" charset="-122"/>
+                <a:cs typeface="Calibri" pitchFamily="34" charset="-120"/>
+              </a:rPr>
+              <a:t>The collected liquid is called the DISTILLATE.</a:t>
+            </a:r>
+            <a:endParaRPr lang="en-US" sz="1500" dirty="0"/>
+          </a:p>
+          <a:p>
+            <a:pPr marL="342900" indent="-342900">
+              <a:spcAft>
+                <a:spcPts val="800"/>
+              </a:spcAft>
+              <a:buSzPct val="100000"/>
+              <a:buChar char="•"/>
+            </a:pPr>
+            <a:r>
+              <a:rPr lang="en-US" sz="1500" dirty="0">
+                <a:solidFill>
+                  <a:srgbClr val="3D3A36"/>
+                </a:solidFill>
+                <a:latin typeface="Calibri" pitchFamily="34" charset="0"/>
+                <a:ea typeface="Calibri" pitchFamily="34" charset="-122"/>
+                <a:cs typeface="Calibri" pitchFamily="34" charset="-120"/>
+              </a:rPr>
+              <a:t>Example: getting pure water from salt water.</a:t>
+            </a:r>
+            <a:endParaRPr lang="en-US" sz="1500" dirty="0"/>
+          </a:p>
+        </p:txBody>
+      </p:sp>
+      <p:sp>
+        <p:nvSpPr>
+          <p:cNvPr id="7" name="Shape 5"/>
+          <p:cNvSpPr/>
+          <p:nvPr/>
+        </p:nvSpPr>
+        <p:spPr>
+          <a:xfrm>
+            <a:off x="731520" y="4206240"/>
+            <a:ext cx="7680960" cy="640080"/>
+          </a:xfrm>
+          <a:prstGeom prst="rect">
+            <a:avLst/>
+          </a:prstGeom>
+          <a:solidFill>
+            <a:srgbClr val="E8F5F3"/>
+          </a:solidFill>
+          <a:ln/>
+          <a:effectLst>
+            <a:outerShdw sx="100000" sy="100000" kx="0" ky="0" algn="bl" rotWithShape="0" blurRad="50800" dist="25400" dir="8100000">
+              <a:srgbClr val="000000">
+                <a:alpha val="10000"/>
+              </a:srgbClr>
+            </a:outerShdw>
+          </a:effectLst>
+        </p:spPr>
+      </p:sp>
+      <p:sp>
+        <p:nvSpPr>
+          <p:cNvPr id="8" name="Text 6"/>
+          <p:cNvSpPr/>
+          <p:nvPr/>
+        </p:nvSpPr>
+        <p:spPr>
+          <a:xfrm>
+            <a:off x="914400" y="4251960"/>
+            <a:ext cx="7315200" cy="548640"/>
+          </a:xfrm>
+          <a:prstGeom prst="rect">
+            <a:avLst/>
+          </a:prstGeom>
+          <a:noFill/>
+          <a:ln/>
+        </p:spPr>
+        <p:txBody>
+          <a:bodyPr wrap="square" rtlCol="0" anchor="ctr"/>
+          <a:lstStyle/>
+          <a:p>
+            <a:pPr indent="0" marL="0">
+              <a:buNone/>
+            </a:pPr>
+            <a:r>
+              <a:rPr lang="en-US" sz="1200" b="1" dirty="0">
+                <a:solidFill>
+                  <a:srgbClr val="2A9D8F"/>
+                </a:solidFill>
+                <a:latin typeface="Calibri" pitchFamily="34" charset="0"/>
+                <a:ea typeface="Calibri" pitchFamily="34" charset="-122"/>
+                <a:cs typeface="Calibri" pitchFamily="34" charset="-120"/>
+              </a:rPr>
+              <a:t>Key Idea: </a:t>
+            </a:r>
+            <a:pPr indent="0" marL="0">
+              <a:buNone/>
+            </a:pPr>
+            <a:r>
+              <a:rPr lang="en-US" sz="1200" i="1" dirty="0">
+                <a:solidFill>
+                  <a:srgbClr val="3D3A36"/>
+                </a:solidFill>
+                <a:latin typeface="Calibri" pitchFamily="34" charset="0"/>
+                <a:ea typeface="Calibri" pitchFamily="34" charset="-122"/>
+                <a:cs typeface="Calibri" pitchFamily="34" charset="-120"/>
+              </a:rPr>
+              <a:t>Distillation uses differences in BOILING POINT to separate liquids.</a:t>
+            </a:r>
+            <a:endParaRPr lang="en-US" sz="1200" dirty="0"/>
+          </a:p>
+        </p:txBody>
+      </p:sp>
+    </p:spTree>
+  </p:cSld>
+  <p:clrMapOvr>
+    <a:masterClrMapping/>
+  </p:clrMapOvr>
+</p:sld>
+</file>
+
+<file path=ppt/slides/slide6.xml><?xml version="1.0" encoding="utf-8"?>
+<p:sld xmlns:a="http://schemas.openxmlformats.org/drawingml/2006/main" xmlns:r="http://schemas.openxmlformats.org/officeDocument/2006/relationships" xmlns:p="http://schemas.openxmlformats.org/presentationml/2006/main">
+  <p:cSld name="Slide 6">
+    <p:bg>
+      <p:bgPr>
+        <a:solidFill>
+          <a:srgbClr val="FAF8F5"/>
+        </a:solidFill>
+      </p:bgPr>
+    </p:bg>
+    <p:spTree>
+      <p:nvGrpSpPr>
+        <p:cNvPr id="1" name=""/>
+        <p:cNvGrpSpPr/>
+        <p:nvPr/>
+      </p:nvGrpSpPr>
+      <p:grpSpPr>
+        <a:xfrm>
+          <a:off x="0" y="0"/>
+          <a:ext cx="0" cy="0"/>
+          <a:chOff x="0" y="0"/>
+          <a:chExt cx="0" cy="0"/>
+        </a:xfrm>
+      </p:grpSpPr>
+      <p:sp>
+        <p:nvSpPr>
+          <p:cNvPr id="2" name="Shape 0"/>
+          <p:cNvSpPr/>
+          <p:nvPr/>
+        </p:nvSpPr>
+        <p:spPr>
+          <a:xfrm>
+            <a:off x="0" y="0"/>
+            <a:ext cx="9144000" cy="822960"/>
+          </a:xfrm>
+          <a:prstGeom prst="rect">
+            <a:avLst/>
+          </a:prstGeom>
+          <a:solidFill>
+            <a:srgbClr val="FFFFFF"/>
+          </a:solidFill>
+          <a:ln/>
+        </p:spPr>
+      </p:sp>
+      <p:sp>
+        <p:nvSpPr>
+          <p:cNvPr id="3" name="Shape 1"/>
+          <p:cNvSpPr/>
+          <p:nvPr/>
+        </p:nvSpPr>
+        <p:spPr>
+          <a:xfrm>
+            <a:off x="0" y="804672"/>
+            <a:ext cx="9144000" cy="27432"/>
+          </a:xfrm>
+          <a:prstGeom prst="rect">
+            <a:avLst/>
+          </a:prstGeom>
+          <a:solidFill>
+            <a:srgbClr val="E5E2DC"/>
+          </a:solidFill>
+          <a:ln/>
+        </p:spPr>
+      </p:sp>
+      <p:sp>
+        <p:nvSpPr>
+          <p:cNvPr id="4" name="Shape 2"/>
+          <p:cNvSpPr/>
+          <p:nvPr/>
+        </p:nvSpPr>
+        <p:spPr>
+          <a:xfrm>
+            <a:off x="548640" y="201168"/>
+            <a:ext cx="54864" cy="420624"/>
+          </a:xfrm>
+          <a:prstGeom prst="rect">
+            <a:avLst/>
+          </a:prstGeom>
+          <a:solidFill>
+            <a:srgbClr val="2A9D8F"/>
+          </a:solidFill>
+          <a:ln/>
+        </p:spPr>
+      </p:sp>
+      <p:sp>
+        <p:nvSpPr>
+          <p:cNvPr id="5" name="Text 3"/>
+          <p:cNvSpPr/>
+          <p:nvPr/>
+        </p:nvSpPr>
+        <p:spPr>
+          <a:xfrm>
+            <a:off x="777240" y="137160"/>
+            <a:ext cx="7772400" cy="548640"/>
+          </a:xfrm>
+          <a:prstGeom prst="rect">
+            <a:avLst/>
+          </a:prstGeom>
+          <a:noFill/>
+          <a:ln/>
+        </p:spPr>
+        <p:txBody>
+          <a:bodyPr wrap="square" lIns="0" tIns="0" rIns="0" bIns="0" rtlCol="0" anchor="ctr"/>
+          <a:lstStyle/>
+          <a:p>
+            <a:pPr indent="0" marL="0">
+              <a:buNone/>
+            </a:pPr>
+            <a:r>
+              <a:rPr lang="en-US" sz="2000" b="1" dirty="0">
+                <a:solidFill>
+                  <a:srgbClr val="1B2A4A"/>
+                </a:solidFill>
+                <a:latin typeface="Georgia" pitchFamily="34" charset="0"/>
+                <a:ea typeface="Georgia" pitchFamily="34" charset="-122"/>
+                <a:cs typeface="Georgia" pitchFamily="34" charset="-120"/>
+              </a:rPr>
+              <a:t>Chromatography</a:t>
+            </a:r>
+            <a:endParaRPr lang="en-US" sz="2000" dirty="0"/>
+          </a:p>
+        </p:txBody>
+      </p:sp>
+      <p:sp>
+        <p:nvSpPr>
+          <p:cNvPr id="6" name="Text 4"/>
+          <p:cNvSpPr/>
+          <p:nvPr/>
+        </p:nvSpPr>
+        <p:spPr>
+          <a:xfrm>
+            <a:off x="731520" y="1051560"/>
+            <a:ext cx="7680960" cy="3108960"/>
+          </a:xfrm>
+          <a:prstGeom prst="rect">
+            <a:avLst/>
+          </a:prstGeom>
+          <a:noFill/>
+          <a:ln/>
+        </p:spPr>
+        <p:txBody>
+          <a:bodyPr wrap="square" rtlCol="0" anchor="t"/>
+          <a:lstStyle/>
+          <a:p>
+            <a:pPr marL="342900" indent="-342900">
+              <a:spcAft>
+                <a:spcPts val="800"/>
+              </a:spcAft>
+              <a:buSzPct val="100000"/>
+              <a:buChar char="•"/>
+            </a:pPr>
+            <a:r>
+              <a:rPr lang="en-US" sz="1500" dirty="0">
+                <a:solidFill>
+                  <a:srgbClr val="3D3A36"/>
+                </a:solidFill>
+                <a:latin typeface="Calibri" pitchFamily="34" charset="0"/>
+                <a:ea typeface="Calibri" pitchFamily="34" charset="-122"/>
+                <a:cs typeface="Calibri" pitchFamily="34" charset="-120"/>
+              </a:rPr>
+              <a:t>Used to separate dissolved coloured substances (like ink dyes).</a:t>
+            </a:r>
+            <a:endParaRPr lang="en-US" sz="1500" dirty="0"/>
+          </a:p>
+          <a:p>
+            <a:pPr marL="342900" indent="-342900">
+              <a:spcAft>
+                <a:spcPts val="800"/>
+              </a:spcAft>
+              <a:buSzPct val="100000"/>
+              <a:buChar char="•"/>
+            </a:pPr>
+            <a:r>
+              <a:rPr lang="en-US" sz="1500" dirty="0">
+                <a:solidFill>
+                  <a:srgbClr val="3D3A36"/>
+                </a:solidFill>
+                <a:latin typeface="Calibri" pitchFamily="34" charset="0"/>
+                <a:ea typeface="Calibri" pitchFamily="34" charset="-122"/>
+                <a:cs typeface="Calibri" pitchFamily="34" charset="-120"/>
+              </a:rPr>
+              <a:t>A spot of ink is placed on paper, and solvent moves up through it.</a:t>
+            </a:r>
+            <a:endParaRPr lang="en-US" sz="1500" dirty="0"/>
+          </a:p>
+          <a:p>
+            <a:pPr marL="342900" indent="-342900">
+              <a:spcAft>
+                <a:spcPts val="800"/>
+              </a:spcAft>
+              <a:buSzPct val="100000"/>
+              <a:buChar char="•"/>
+            </a:pPr>
+            <a:r>
+              <a:rPr lang="en-US" sz="1500" dirty="0">
+                <a:solidFill>
+                  <a:srgbClr val="3D3A36"/>
+                </a:solidFill>
+                <a:latin typeface="Calibri" pitchFamily="34" charset="0"/>
+                <a:ea typeface="Calibri" pitchFamily="34" charset="-122"/>
+                <a:cs typeface="Calibri" pitchFamily="34" charset="-120"/>
+              </a:rPr>
+              <a:t>Different dyes travel different distances — they separate into bands.</a:t>
+            </a:r>
+            <a:endParaRPr lang="en-US" sz="1500" dirty="0"/>
+          </a:p>
+          <a:p>
+            <a:pPr marL="342900" indent="-342900">
+              <a:spcAft>
+                <a:spcPts val="800"/>
+              </a:spcAft>
+              <a:buSzPct val="100000"/>
+              <a:buChar char="•"/>
+            </a:pPr>
+            <a:r>
+              <a:rPr lang="en-US" sz="1500" dirty="0">
+                <a:solidFill>
+                  <a:srgbClr val="3D3A36"/>
+                </a:solidFill>
+                <a:latin typeface="Calibri" pitchFamily="34" charset="0"/>
+                <a:ea typeface="Calibri" pitchFamily="34" charset="-122"/>
+                <a:cs typeface="Calibri" pitchFamily="34" charset="-120"/>
+              </a:rPr>
+              <a:t>Each colour band is a different substance in the ink.</a:t>
+            </a:r>
+            <a:endParaRPr lang="en-US" sz="1500" dirty="0"/>
+          </a:p>
+          <a:p>
+            <a:pPr marL="342900" indent="-342900">
+              <a:spcAft>
+                <a:spcPts val="800"/>
+              </a:spcAft>
+              <a:buSzPct val="100000"/>
+              <a:buChar char="•"/>
+            </a:pPr>
+            <a:r>
+              <a:rPr lang="en-US" sz="1500" dirty="0">
+                <a:solidFill>
+                  <a:srgbClr val="3D3A36"/>
+                </a:solidFill>
+                <a:latin typeface="Calibri" pitchFamily="34" charset="0"/>
+                <a:ea typeface="Calibri" pitchFamily="34" charset="-122"/>
+                <a:cs typeface="Calibri" pitchFamily="34" charset="-120"/>
+              </a:rPr>
+              <a:t>This technique is used in forensic science to analyse evidence.</a:t>
+            </a:r>
+            <a:endParaRPr lang="en-US" sz="1500" dirty="0"/>
+          </a:p>
+        </p:txBody>
+      </p:sp>
+      <p:sp>
+        <p:nvSpPr>
+          <p:cNvPr id="7" name="Shape 5"/>
+          <p:cNvSpPr/>
+          <p:nvPr/>
+        </p:nvSpPr>
+        <p:spPr>
+          <a:xfrm>
+            <a:off x="731520" y="4206240"/>
+            <a:ext cx="7680960" cy="640080"/>
+          </a:xfrm>
+          <a:prstGeom prst="rect">
+            <a:avLst/>
+          </a:prstGeom>
+          <a:solidFill>
+            <a:srgbClr val="E8F5F3"/>
+          </a:solidFill>
+          <a:ln/>
+          <a:effectLst>
+            <a:outerShdw sx="100000" sy="100000" kx="0" ky="0" algn="bl" rotWithShape="0" blurRad="50800" dist="25400" dir="8100000">
+              <a:srgbClr val="000000">
+                <a:alpha val="10000"/>
+              </a:srgbClr>
+            </a:outerShdw>
+          </a:effectLst>
+        </p:spPr>
+      </p:sp>
+      <p:sp>
+        <p:nvSpPr>
+          <p:cNvPr id="8" name="Text 6"/>
+          <p:cNvSpPr/>
+          <p:nvPr/>
+        </p:nvSpPr>
+        <p:spPr>
+          <a:xfrm>
+            <a:off x="914400" y="4251960"/>
+            <a:ext cx="7315200" cy="548640"/>
+          </a:xfrm>
+          <a:prstGeom prst="rect">
+            <a:avLst/>
+          </a:prstGeom>
+          <a:noFill/>
+          <a:ln/>
+        </p:spPr>
+        <p:txBody>
+          <a:bodyPr wrap="square" rtlCol="0" anchor="ctr"/>
+          <a:lstStyle/>
+          <a:p>
+            <a:pPr indent="0" marL="0">
+              <a:buNone/>
+            </a:pPr>
+            <a:r>
+              <a:rPr lang="en-US" sz="1200" b="1" dirty="0">
+                <a:solidFill>
+                  <a:srgbClr val="2A9D8F"/>
+                </a:solidFill>
+                <a:latin typeface="Calibri" pitchFamily="34" charset="0"/>
+                <a:ea typeface="Calibri" pitchFamily="34" charset="-122"/>
+                <a:cs typeface="Calibri" pitchFamily="34" charset="-120"/>
+              </a:rPr>
+              <a:t>Key Idea: </a:t>
+            </a:r>
+            <a:pPr indent="0" marL="0">
+              <a:buNone/>
+            </a:pPr>
+            <a:r>
+              <a:rPr lang="en-US" sz="1200" i="1" dirty="0">
+                <a:solidFill>
+                  <a:srgbClr val="3D3A36"/>
+                </a:solidFill>
+                <a:latin typeface="Calibri" pitchFamily="34" charset="0"/>
+                <a:ea typeface="Calibri" pitchFamily="34" charset="-122"/>
+                <a:cs typeface="Calibri" pitchFamily="34" charset="-120"/>
+              </a:rPr>
+              <a:t>The further a substance travels, the more soluble it is in the solvent.</a:t>
+            </a:r>
+            <a:endParaRPr lang="en-US" sz="1200" dirty="0"/>
+          </a:p>
+        </p:txBody>
+      </p:sp>
+    </p:spTree>
+  </p:cSld>
+  <p:clrMapOvr>
+    <a:masterClrMapping/>
+  </p:clrMapOvr>
+</p:sld>
+</file>
+
+<file path=ppt/slides/slide7.xml><?xml version="1.0" encoding="utf-8"?>
+<p:sld xmlns:a="http://schemas.openxmlformats.org/drawingml/2006/main" xmlns:r="http://schemas.openxmlformats.org/officeDocument/2006/relationships" xmlns:p="http://schemas.openxmlformats.org/presentationml/2006/main">
+  <p:cSld name="Slide 7">
+    <p:bg>
+      <p:bgPr>
+        <a:solidFill>
+          <a:srgbClr val="FAF8F5"/>
+        </a:solidFill>
+      </p:bgPr>
+    </p:bg>
+    <p:spTree>
+      <p:nvGrpSpPr>
+        <p:cNvPr id="1" name=""/>
+        <p:cNvGrpSpPr/>
+        <p:nvPr/>
+      </p:nvGrpSpPr>
+      <p:grpSpPr>
+        <a:xfrm>
+          <a:off x="0" y="0"/>
+          <a:ext cx="0" cy="0"/>
+          <a:chOff x="0" y="0"/>
+          <a:chExt cx="0" cy="0"/>
+        </a:xfrm>
+      </p:grpSpPr>
+      <p:sp>
+        <p:nvSpPr>
+          <p:cNvPr id="2" name="Shape 0"/>
+          <p:cNvSpPr/>
+          <p:nvPr/>
+        </p:nvSpPr>
+        <p:spPr>
+          <a:xfrm>
+            <a:off x="0" y="0"/>
+            <a:ext cx="9144000" cy="822960"/>
+          </a:xfrm>
+          <a:prstGeom prst="rect">
+            <a:avLst/>
+          </a:prstGeom>
+          <a:solidFill>
+            <a:srgbClr val="FFFFFF"/>
+          </a:solidFill>
+          <a:ln/>
+        </p:spPr>
+      </p:sp>
+      <p:sp>
+        <p:nvSpPr>
+          <p:cNvPr id="3" name="Shape 1"/>
+          <p:cNvSpPr/>
+          <p:nvPr/>
+        </p:nvSpPr>
+        <p:spPr>
+          <a:xfrm>
+            <a:off x="0" y="804672"/>
+            <a:ext cx="9144000" cy="27432"/>
+          </a:xfrm>
+          <a:prstGeom prst="rect">
+            <a:avLst/>
+          </a:prstGeom>
+          <a:solidFill>
+            <a:srgbClr val="E5E2DC"/>
+          </a:solidFill>
+          <a:ln/>
+        </p:spPr>
+      </p:sp>
+      <p:sp>
+        <p:nvSpPr>
+          <p:cNvPr id="4" name="Shape 2"/>
+          <p:cNvSpPr/>
+          <p:nvPr/>
+        </p:nvSpPr>
+        <p:spPr>
+          <a:xfrm>
+            <a:off x="548640" y="201168"/>
+            <a:ext cx="54864" cy="420624"/>
+          </a:xfrm>
+          <a:prstGeom prst="rect">
+            <a:avLst/>
+          </a:prstGeom>
+          <a:solidFill>
+            <a:srgbClr val="2A9D8F"/>
+          </a:solidFill>
+          <a:ln/>
+        </p:spPr>
+      </p:sp>
+      <p:sp>
+        <p:nvSpPr>
+          <p:cNvPr id="5" name="Text 3"/>
+          <p:cNvSpPr/>
+          <p:nvPr/>
+        </p:nvSpPr>
+        <p:spPr>
+          <a:xfrm>
+            <a:off x="777240" y="137160"/>
+            <a:ext cx="7772400" cy="548640"/>
+          </a:xfrm>
+          <a:prstGeom prst="rect">
+            <a:avLst/>
+          </a:prstGeom>
+          <a:noFill/>
+          <a:ln/>
+        </p:spPr>
+        <p:txBody>
+          <a:bodyPr wrap="square" lIns="0" tIns="0" rIns="0" bIns="0" rtlCol="0" anchor="ctr"/>
+          <a:lstStyle/>
+          <a:p>
+            <a:pPr indent="0" marL="0">
+              <a:buNone/>
+            </a:pPr>
+            <a:r>
+              <a:rPr lang="en-US" sz="2000" b="1" dirty="0">
+                <a:solidFill>
+                  <a:srgbClr val="1B2A4A"/>
+                </a:solidFill>
+                <a:latin typeface="Georgia" pitchFamily="34" charset="0"/>
+                <a:ea typeface="Georgia" pitchFamily="34" charset="-122"/>
+                <a:cs typeface="Georgia" pitchFamily="34" charset="-120"/>
+              </a:rPr>
+              <a:t>Check Your Understanding</a:t>
+            </a:r>
+            <a:endParaRPr lang="en-US" sz="2000" dirty="0"/>
+          </a:p>
+        </p:txBody>
+      </p:sp>
+      <p:sp>
+        <p:nvSpPr>
+          <p:cNvPr id="6" name="Shape 4"/>
+          <p:cNvSpPr/>
+          <p:nvPr/>
+        </p:nvSpPr>
+        <p:spPr>
+          <a:xfrm>
+            <a:off x="731520" y="1051560"/>
+            <a:ext cx="7680960" cy="438912"/>
+          </a:xfrm>
+          <a:prstGeom prst="rect">
+            <a:avLst/>
+          </a:prstGeom>
+          <a:solidFill>
+            <a:srgbClr val="FFFFFF"/>
+          </a:solidFill>
+          <a:ln/>
+        </p:spPr>
+      </p:sp>
+      <p:sp>
+        <p:nvSpPr>
+          <p:cNvPr id="7" name="Text 5"/>
+          <p:cNvSpPr/>
+          <p:nvPr/>
+        </p:nvSpPr>
+        <p:spPr>
+          <a:xfrm>
+            <a:off x="868680" y="1051560"/>
+            <a:ext cx="320040" cy="438912"/>
+          </a:xfrm>
+          <a:prstGeom prst="rect">
+            <a:avLst/>
+          </a:prstGeom>
+          <a:noFill/>
+          <a:ln/>
+        </p:spPr>
+        <p:txBody>
+          <a:bodyPr wrap="square" rtlCol="0" anchor="ctr"/>
+          <a:lstStyle/>
+          <a:p>
+            <a:pPr indent="0" marL="0">
+              <a:buNone/>
+            </a:pPr>
+            <a:r>
+              <a:rPr lang="en-US" sz="1400" dirty="0">
+                <a:solidFill>
+                  <a:srgbClr val="2A9D8F"/>
+                </a:solidFill>
+              </a:rPr>
+              <a:t>☐</a:t>
+            </a:r>
+            <a:endParaRPr lang="en-US" sz="1400" dirty="0"/>
+          </a:p>
+        </p:txBody>
+      </p:sp>
+      <p:sp>
+        <p:nvSpPr>
+          <p:cNvPr id="8" name="Text 6"/>
+          <p:cNvSpPr/>
+          <p:nvPr/>
+        </p:nvSpPr>
+        <p:spPr>
+          <a:xfrm>
+            <a:off x="1234440" y="1051560"/>
+            <a:ext cx="6949440" cy="438912"/>
+          </a:xfrm>
+          <a:prstGeom prst="rect">
+            <a:avLst/>
+          </a:prstGeom>
+          <a:noFill/>
+          <a:ln/>
+        </p:spPr>
+        <p:txBody>
+          <a:bodyPr wrap="square" rtlCol="0" anchor="ctr"/>
+          <a:lstStyle/>
+          <a:p>
+            <a:pPr indent="0" marL="0">
+              <a:buNone/>
+            </a:pPr>
+            <a:r>
+              <a:rPr lang="en-US" sz="1300" dirty="0">
+                <a:solidFill>
+                  <a:srgbClr val="3D3A36"/>
+                </a:solidFill>
+                <a:latin typeface="Calibri" pitchFamily="34" charset="0"/>
+                <a:ea typeface="Calibri" pitchFamily="34" charset="-122"/>
+                <a:cs typeface="Calibri" pitchFamily="34" charset="-120"/>
+              </a:rPr>
+              <a:t>I can choose the correct separation technique for a mixture</a:t>
+            </a:r>
+            <a:endParaRPr lang="en-US" sz="1300" dirty="0"/>
+          </a:p>
+        </p:txBody>
+      </p:sp>
+      <p:sp>
+        <p:nvSpPr>
+          <p:cNvPr id="9" name="Shape 7"/>
+          <p:cNvSpPr/>
+          <p:nvPr/>
+        </p:nvSpPr>
+        <p:spPr>
+          <a:xfrm>
+            <a:off x="731520" y="1554480"/>
+            <a:ext cx="7680960" cy="438912"/>
+          </a:xfrm>
+          <a:prstGeom prst="rect">
+            <a:avLst/>
+          </a:prstGeom>
+          <a:solidFill>
+            <a:srgbClr val="F8F6F3"/>
+          </a:solidFill>
+          <a:ln/>
+        </p:spPr>
+      </p:sp>
+      <p:sp>
+        <p:nvSpPr>
+          <p:cNvPr id="10" name="Text 8"/>
+          <p:cNvSpPr/>
+          <p:nvPr/>
+        </p:nvSpPr>
+        <p:spPr>
+          <a:xfrm>
+            <a:off x="868680" y="1554480"/>
+            <a:ext cx="320040" cy="438912"/>
+          </a:xfrm>
+          <a:prstGeom prst="rect">
+            <a:avLst/>
+          </a:prstGeom>
+          <a:noFill/>
+          <a:ln/>
+        </p:spPr>
+        <p:txBody>
+          <a:bodyPr wrap="square" rtlCol="0" anchor="ctr"/>
+          <a:lstStyle/>
+          <a:p>
+            <a:pPr indent="0" marL="0">
+              <a:buNone/>
+            </a:pPr>
+            <a:r>
+              <a:rPr lang="en-US" sz="1400" dirty="0">
+                <a:solidFill>
+                  <a:srgbClr val="2A9D8F"/>
+                </a:solidFill>
+              </a:rPr>
+              <a:t>☐</a:t>
+            </a:r>
+            <a:endParaRPr lang="en-US" sz="1400" dirty="0"/>
+          </a:p>
+        </p:txBody>
+      </p:sp>
+      <p:sp>
+        <p:nvSpPr>
+          <p:cNvPr id="11" name="Text 9"/>
+          <p:cNvSpPr/>
+          <p:nvPr/>
+        </p:nvSpPr>
+        <p:spPr>
+          <a:xfrm>
+            <a:off x="1234440" y="1554480"/>
+            <a:ext cx="6949440" cy="438912"/>
+          </a:xfrm>
+          <a:prstGeom prst="rect">
+            <a:avLst/>
+          </a:prstGeom>
+          <a:noFill/>
+          <a:ln/>
+        </p:spPr>
+        <p:txBody>
+          <a:bodyPr wrap="square" rtlCol="0" anchor="ctr"/>
+          <a:lstStyle/>
+          <a:p>
+            <a:pPr indent="0" marL="0">
+              <a:buNone/>
+            </a:pPr>
+            <a:r>
+              <a:rPr lang="en-US" sz="1300" dirty="0">
+                <a:solidFill>
+                  <a:srgbClr val="3D3A36"/>
+                </a:solidFill>
+                <a:latin typeface="Calibri" pitchFamily="34" charset="0"/>
+                <a:ea typeface="Calibri" pitchFamily="34" charset="-122"/>
+                <a:cs typeface="Calibri" pitchFamily="34" charset="-120"/>
+              </a:rPr>
+              <a:t>I can describe filtration, evaporation, distillation, and chromatography</a:t>
+            </a:r>
+            <a:endParaRPr lang="en-US" sz="1300" dirty="0"/>
+          </a:p>
+        </p:txBody>
+      </p:sp>
+      <p:sp>
+        <p:nvSpPr>
+          <p:cNvPr id="12" name="Shape 10"/>
+          <p:cNvSpPr/>
+          <p:nvPr/>
+        </p:nvSpPr>
+        <p:spPr>
+          <a:xfrm>
+            <a:off x="731520" y="2057400"/>
+            <a:ext cx="7680960" cy="438912"/>
+          </a:xfrm>
+          <a:prstGeom prst="rect">
+            <a:avLst/>
+          </a:prstGeom>
+          <a:solidFill>
+            <a:srgbClr val="FFFFFF"/>
+          </a:solidFill>
+          <a:ln/>
+        </p:spPr>
+      </p:sp>
+      <p:sp>
+        <p:nvSpPr>
+          <p:cNvPr id="13" name="Text 11"/>
+          <p:cNvSpPr/>
+          <p:nvPr/>
+        </p:nvSpPr>
+        <p:spPr>
+          <a:xfrm>
+            <a:off x="868680" y="2057400"/>
+            <a:ext cx="320040" cy="438912"/>
+          </a:xfrm>
+          <a:prstGeom prst="rect">
+            <a:avLst/>
+          </a:prstGeom>
+          <a:noFill/>
+          <a:ln/>
+        </p:spPr>
+        <p:txBody>
+          <a:bodyPr wrap="square" rtlCol="0" anchor="ctr"/>
+          <a:lstStyle/>
+          <a:p>
+            <a:pPr indent="0" marL="0">
+              <a:buNone/>
+            </a:pPr>
+            <a:r>
+              <a:rPr lang="en-US" sz="1400" dirty="0">
+                <a:solidFill>
+                  <a:srgbClr val="2A9D8F"/>
+                </a:solidFill>
+              </a:rPr>
+              <a:t>☐</a:t>
+            </a:r>
+            <a:endParaRPr lang="en-US" sz="1400" dirty="0"/>
+          </a:p>
+        </p:txBody>
+      </p:sp>
+      <p:sp>
+        <p:nvSpPr>
+          <p:cNvPr id="14" name="Text 12"/>
+          <p:cNvSpPr/>
+          <p:nvPr/>
+        </p:nvSpPr>
+        <p:spPr>
+          <a:xfrm>
+            <a:off x="1234440" y="2057400"/>
+            <a:ext cx="6949440" cy="438912"/>
+          </a:xfrm>
+          <a:prstGeom prst="rect">
+            <a:avLst/>
+          </a:prstGeom>
+          <a:noFill/>
+          <a:ln/>
+        </p:spPr>
+        <p:txBody>
+          <a:bodyPr wrap="square" rtlCol="0" anchor="ctr"/>
+          <a:lstStyle/>
+          <a:p>
+            <a:pPr indent="0" marL="0">
+              <a:buNone/>
+            </a:pPr>
+            <a:r>
+              <a:rPr lang="en-US" sz="1300" dirty="0">
+                <a:solidFill>
+                  <a:srgbClr val="3D3A36"/>
+                </a:solidFill>
+                <a:latin typeface="Calibri" pitchFamily="34" charset="0"/>
+                <a:ea typeface="Calibri" pitchFamily="34" charset="-122"/>
+                <a:cs typeface="Calibri" pitchFamily="34" charset="-120"/>
+              </a:rPr>
+              <a:t>I know the difference between residue and filtrate</a:t>
+            </a:r>
+            <a:endParaRPr lang="en-US" sz="1300" dirty="0"/>
+          </a:p>
+        </p:txBody>
+      </p:sp>
+      <p:sp>
+        <p:nvSpPr>
+          <p:cNvPr id="15" name="Shape 13"/>
+          <p:cNvSpPr/>
+          <p:nvPr/>
+        </p:nvSpPr>
+        <p:spPr>
+          <a:xfrm>
+            <a:off x="731520" y="2560320"/>
+            <a:ext cx="7680960" cy="438912"/>
+          </a:xfrm>
+          <a:prstGeom prst="rect">
+            <a:avLst/>
+          </a:prstGeom>
+          <a:solidFill>
+            <a:srgbClr val="F8F6F3"/>
+          </a:solidFill>
+          <a:ln/>
+        </p:spPr>
+      </p:sp>
+      <p:sp>
+        <p:nvSpPr>
+          <p:cNvPr id="16" name="Text 14"/>
+          <p:cNvSpPr/>
+          <p:nvPr/>
+        </p:nvSpPr>
+        <p:spPr>
+          <a:xfrm>
+            <a:off x="868680" y="2560320"/>
+            <a:ext cx="320040" cy="438912"/>
+          </a:xfrm>
+          <a:prstGeom prst="rect">
+            <a:avLst/>
+          </a:prstGeom>
+          <a:noFill/>
+          <a:ln/>
+        </p:spPr>
+        <p:txBody>
+          <a:bodyPr wrap="square" rtlCol="0" anchor="ctr"/>
+          <a:lstStyle/>
+          <a:p>
+            <a:pPr indent="0" marL="0">
+              <a:buNone/>
+            </a:pPr>
+            <a:r>
+              <a:rPr lang="en-US" sz="1400" dirty="0">
+                <a:solidFill>
+                  <a:srgbClr val="2A9D8F"/>
+                </a:solidFill>
+              </a:rPr>
+              <a:t>☐</a:t>
+            </a:r>
+            <a:endParaRPr lang="en-US" sz="1400" dirty="0"/>
+          </a:p>
+        </p:txBody>
+      </p:sp>
+      <p:sp>
+        <p:nvSpPr>
+          <p:cNvPr id="17" name="Text 15"/>
+          <p:cNvSpPr/>
+          <p:nvPr/>
+        </p:nvSpPr>
+        <p:spPr>
+          <a:xfrm>
+            <a:off x="1234440" y="2560320"/>
+            <a:ext cx="6949440" cy="438912"/>
+          </a:xfrm>
+          <a:prstGeom prst="rect">
+            <a:avLst/>
+          </a:prstGeom>
+          <a:noFill/>
+          <a:ln/>
+        </p:spPr>
+        <p:txBody>
+          <a:bodyPr wrap="square" rtlCol="0" anchor="ctr"/>
+          <a:lstStyle/>
+          <a:p>
+            <a:pPr indent="0" marL="0">
+              <a:buNone/>
+            </a:pPr>
+            <a:r>
+              <a:rPr lang="en-US" sz="1300" dirty="0">
+                <a:solidFill>
+                  <a:srgbClr val="3D3A36"/>
+                </a:solidFill>
+                <a:latin typeface="Calibri" pitchFamily="34" charset="0"/>
+                <a:ea typeface="Calibri" pitchFamily="34" charset="-122"/>
+                <a:cs typeface="Calibri" pitchFamily="34" charset="-120"/>
+              </a:rPr>
+              <a:t>I understand why each technique works (the science behind it)</a:t>
+            </a:r>
+            <a:endParaRPr lang="en-US" sz="1300" dirty="0"/>
+          </a:p>
+        </p:txBody>
+      </p:sp>
+      <p:sp>
+        <p:nvSpPr>
+          <p:cNvPr id="18" name="Shape 16"/>
+          <p:cNvSpPr/>
+          <p:nvPr/>
+        </p:nvSpPr>
+        <p:spPr>
+          <a:xfrm>
+            <a:off x="731520" y="3063240"/>
+            <a:ext cx="7680960" cy="438912"/>
+          </a:xfrm>
+          <a:prstGeom prst="rect">
+            <a:avLst/>
+          </a:prstGeom>
+          <a:solidFill>
+            <a:srgbClr val="FFFFFF"/>
+          </a:solidFill>
+          <a:ln/>
+        </p:spPr>
+      </p:sp>
+      <p:sp>
+        <p:nvSpPr>
+          <p:cNvPr id="19" name="Text 17"/>
+          <p:cNvSpPr/>
+          <p:nvPr/>
+        </p:nvSpPr>
+        <p:spPr>
+          <a:xfrm>
+            <a:off x="868680" y="3063240"/>
+            <a:ext cx="320040" cy="438912"/>
+          </a:xfrm>
+          <a:prstGeom prst="rect">
+            <a:avLst/>
+          </a:prstGeom>
+          <a:noFill/>
+          <a:ln/>
+        </p:spPr>
+        <p:txBody>
+          <a:bodyPr wrap="square" rtlCol="0" anchor="ctr"/>
+          <a:lstStyle/>
+          <a:p>
+            <a:pPr indent="0" marL="0">
+              <a:buNone/>
+            </a:pPr>
+            <a:r>
+              <a:rPr lang="en-US" sz="1400" dirty="0">
+                <a:solidFill>
+                  <a:srgbClr val="2A9D8F"/>
+                </a:solidFill>
+              </a:rPr>
+              <a:t>☐</a:t>
+            </a:r>
+            <a:endParaRPr lang="en-US" sz="1400" dirty="0"/>
+          </a:p>
+        </p:txBody>
+      </p:sp>
+      <p:sp>
+        <p:nvSpPr>
+          <p:cNvPr id="20" name="Text 18"/>
+          <p:cNvSpPr/>
+          <p:nvPr/>
+        </p:nvSpPr>
+        <p:spPr>
+          <a:xfrm>
+            <a:off x="1234440" y="3063240"/>
+            <a:ext cx="6949440" cy="438912"/>
+          </a:xfrm>
+          <a:prstGeom prst="rect">
+            <a:avLst/>
+          </a:prstGeom>
+          <a:noFill/>
+          <a:ln/>
+        </p:spPr>
+        <p:txBody>
+          <a:bodyPr wrap="square" rtlCol="0" anchor="ctr"/>
+          <a:lstStyle/>
+          <a:p>
+            <a:pPr indent="0" marL="0">
+              <a:buNone/>
+            </a:pPr>
+            <a:r>
+              <a:rPr lang="en-US" sz="1300" dirty="0">
+                <a:solidFill>
+                  <a:srgbClr val="3D3A36"/>
+                </a:solidFill>
+                <a:latin typeface="Calibri" pitchFamily="34" charset="0"/>
+                <a:ea typeface="Calibri" pitchFamily="34" charset="-122"/>
+                <a:cs typeface="Calibri" pitchFamily="34" charset="-120"/>
+              </a:rPr>
+              <a:t>I can explain when to use distillation instead of evaporation</a:t>
+            </a:r>
+            <a:endParaRPr lang="en-US" sz="1300" dirty="0"/>
+          </a:p>
+        </p:txBody>
+      </p:sp>
+      <p:sp>
+        <p:nvSpPr>
+          <p:cNvPr id="21" name="Shape 19"/>
+          <p:cNvSpPr/>
+          <p:nvPr/>
+        </p:nvSpPr>
+        <p:spPr>
+          <a:xfrm>
+            <a:off x="731520" y="3749040"/>
+            <a:ext cx="7680960" cy="594360"/>
+          </a:xfrm>
+          <a:prstGeom prst="rect">
+            <a:avLst/>
+          </a:prstGeom>
+          <a:solidFill>
+            <a:srgbClr val="E8F5F3"/>
+          </a:solidFill>
+          <a:ln/>
+          <a:effectLst>
+            <a:outerShdw sx="100000" sy="100000" kx="0" ky="0" algn="bl" rotWithShape="0" blurRad="50800" dist="25400" dir="8100000">
+              <a:srgbClr val="000000">
+                <a:alpha val="10000"/>
+              </a:srgbClr>
+            </a:outerShdw>
+          </a:effectLst>
+        </p:spPr>
+      </p:sp>
+      <p:sp>
+        <p:nvSpPr>
+          <p:cNvPr id="22" name="Text 20"/>
+          <p:cNvSpPr/>
+          <p:nvPr/>
+        </p:nvSpPr>
+        <p:spPr>
+          <a:xfrm>
+            <a:off x="914400" y="3749040"/>
+            <a:ext cx="7315200" cy="594360"/>
+          </a:xfrm>
+          <a:prstGeom prst="rect">
+            <a:avLst/>
+          </a:prstGeom>
+          <a:noFill/>
+          <a:ln/>
+        </p:spPr>
+        <p:txBody>
+          <a:bodyPr wrap="square" rtlCol="0" anchor="ctr"/>
+          <a:lstStyle/>
+          <a:p>
+            <a:pPr indent="0" marL="0">
+              <a:buNone/>
+            </a:pPr>
+            <a:r>
+              <a:rPr lang="en-US" sz="1200" b="1" dirty="0">
+                <a:solidFill>
+                  <a:srgbClr val="2A9D8F"/>
+                </a:solidFill>
+                <a:latin typeface="Calibri" pitchFamily="34" charset="0"/>
+                <a:ea typeface="Calibri" pitchFamily="34" charset="-122"/>
+                <a:cs typeface="Calibri" pitchFamily="34" charset="-120"/>
+              </a:rPr>
+              <a:t>Key Idea: </a:t>
+            </a:r>
+            <a:pPr indent="0" marL="0">
+              <a:buNone/>
+            </a:pPr>
+            <a:r>
+              <a:rPr lang="en-US" sz="1200" i="1" dirty="0">
+                <a:solidFill>
+                  <a:srgbClr val="3D3A36"/>
+                </a:solidFill>
+                <a:latin typeface="Calibri" pitchFamily="34" charset="0"/>
+                <a:ea typeface="Calibri" pitchFamily="34" charset="-122"/>
+                <a:cs typeface="Calibri" pitchFamily="34" charset="-120"/>
+              </a:rPr>
+              <a:t>The right technique depends on the PROPERTIES of the substances in the mixture.</a:t>
+            </a:r>
+            <a:endParaRPr lang="en-US" sz="1200" dirty="0"/>
+          </a:p>
+        </p:txBody>
+      </p:sp>
+    </p:spTree>
+  </p:cSld>
+  <p:clrMapOvr>
+    <a:masterClrMapping/>
+  </p:clrMapOvr>
+</p:sld>
+</file>
+
+<file path=ppt/slides/slide8.xml><?xml version="1.0" encoding="utf-8"?>
+<p:sld xmlns:a="http://schemas.openxmlformats.org/drawingml/2006/main" xmlns:r="http://schemas.openxmlformats.org/officeDocument/2006/relationships" xmlns:p="http://schemas.openxmlformats.org/presentationml/2006/main">
+  <p:cSld name="Slide 8">
+    <p:spTree>
+      <p:nvGrpSpPr>
+        <p:cNvPr id="1" name=""/>
+        <p:cNvGrpSpPr/>
+        <p:nvPr/>
+      </p:nvGrpSpPr>
+      <p:grpSpPr>
+        <a:xfrm>
+          <a:off x="0" y="0"/>
+          <a:ext cx="0" cy="0"/>
+          <a:chOff x="0" y="0"/>
+          <a:chExt cx="0" cy="0"/>
+        </a:xfrm>
+      </p:grpSpPr>
+      <p:sp>
+        <p:nvSpPr>
+          <p:cNvPr id="2" name="Shape 0"/>
+          <p:cNvSpPr/>
+          <p:nvPr/>
+        </p:nvSpPr>
+        <p:spPr>
+          <a:xfrm>
+            <a:off x="0" y="0"/>
+            <a:ext cx="9144000" cy="5143500"/>
+          </a:xfrm>
+          <a:prstGeom prst="rect">
+            <a:avLst/>
+          </a:prstGeom>
+          <a:solidFill>
+            <a:srgbClr val="1B2A4A"/>
+          </a:solidFill>
+          <a:ln/>
+        </p:spPr>
+      </p:sp>
+      <p:sp>
+        <p:nvSpPr>
+          <p:cNvPr id="3" name="Shape 1"/>
+          <p:cNvSpPr/>
+          <p:nvPr/>
+        </p:nvSpPr>
+        <p:spPr>
+          <a:xfrm>
+            <a:off x="0" y="4777740"/>
+            <a:ext cx="9144000" cy="365760"/>
+          </a:xfrm>
+          <a:prstGeom prst="rect">
+            <a:avLst/>
+          </a:prstGeom>
+          <a:solidFill>
+            <a:srgbClr val="2A9D8F"/>
+          </a:solidFill>
+          <a:ln/>
+        </p:spPr>
+      </p:sp>
+      <p:sp>
+        <p:nvSpPr>
+          <p:cNvPr id="4" name="Shape 2"/>
+          <p:cNvSpPr/>
+          <p:nvPr/>
+        </p:nvSpPr>
+        <p:spPr>
+          <a:xfrm>
+            <a:off x="-914400" y="-914400"/>
+            <a:ext cx="3657600" cy="3657600"/>
+          </a:xfrm>
+          <a:prstGeom prst="ellipse">
+            <a:avLst/>
+          </a:prstGeom>
+          <a:solidFill>
+            <a:srgbClr val="2A9D8F">
+              <a:alpha val="10000"/>
+            </a:srgbClr>
+          </a:solidFill>
+          <a:ln/>
+        </p:spPr>
+      </p:sp>
+      <p:sp>
+        <p:nvSpPr>
+          <p:cNvPr id="5" name="Text 3"/>
+          <p:cNvSpPr/>
+          <p:nvPr/>
+        </p:nvSpPr>
+        <p:spPr>
+          <a:xfrm>
+            <a:off x="731520" y="1463040"/>
+            <a:ext cx="7680960" cy="822960"/>
+          </a:xfrm>
+          <a:prstGeom prst="rect">
+            <a:avLst/>
+          </a:prstGeom>
+          <a:noFill/>
+          <a:ln/>
+        </p:spPr>
+        <p:txBody>
+          <a:bodyPr wrap="square" rtlCol="0" anchor="ctr"/>
+          <a:lstStyle/>
+          <a:p>
+            <a:pPr algn="ctr" indent="0" marL="0">
+              <a:buNone/>
+            </a:pPr>
+            <a:r>
+              <a:rPr lang="en-US" sz="3400" b="1" dirty="0">
                 <a:solidFill>
                   <a:srgbClr val="FFFFFF"/>
                 </a:solidFill>
@@ -2996,149 +5829,22 @@
                 <a:ea typeface="Georgia" pitchFamily="34" charset="-122"/>
                 <a:cs typeface="Georgia" pitchFamily="34" charset="-120"/>
               </a:rPr>
-              <a:t>Key Takeaways</a:t>
-            </a:r>
-            <a:endParaRPr lang="en-US" sz="3200" dirty="0"/>
-          </a:p>
-        </p:txBody>
-      </p:sp>
-      <p:sp>
-        <p:nvSpPr>
-          <p:cNvPr id="4" name="Text 2"/>
-          <p:cNvSpPr/>
-          <p:nvPr/>
-        </p:nvSpPr>
-        <p:spPr>
-          <a:xfrm>
-            <a:off x="731520" y="1463040"/>
-            <a:ext cx="7772400" cy="3200400"/>
-          </a:xfrm>
-          <a:prstGeom prst="rect">
-            <a:avLst/>
-          </a:prstGeom>
-          <a:noFill/>
-          <a:ln/>
-        </p:spPr>
-        <p:txBody>
-          <a:bodyPr wrap="square" rtlCol="0" anchor="t"/>
-          <a:lstStyle/>
-          <a:p>
-            <a:pPr marL="342900" indent="-342900">
-              <a:spcAft>
-                <a:spcPts val="1000"/>
-              </a:spcAft>
-              <a:buSzPct val="100000"/>
-              <a:buChar char="•"/>
-            </a:pPr>
-            <a:r>
-              <a:rPr lang="en-US" sz="1500" dirty="0">
-                <a:solidFill>
-                  <a:srgbClr val="CADCFC"/>
-                </a:solidFill>
-                <a:latin typeface="Calibri" pitchFamily="34" charset="0"/>
-                <a:ea typeface="Calibri" pitchFamily="34" charset="-122"/>
-                <a:cs typeface="Calibri" pitchFamily="34" charset="-120"/>
-              </a:rPr>
-              <a:t>Filtration: insoluble solid from liquid</a:t>
-            </a:r>
-            <a:endParaRPr lang="en-US" sz="1500" dirty="0"/>
-          </a:p>
-          <a:p>
-            <a:pPr marL="342900" indent="-342900">
-              <a:spcAft>
-                <a:spcPts val="1000"/>
-              </a:spcAft>
-              <a:buSzPct val="100000"/>
-              <a:buChar char="•"/>
-            </a:pPr>
-            <a:r>
-              <a:rPr lang="en-US" sz="1500" dirty="0">
-                <a:solidFill>
-                  <a:srgbClr val="CADCFC"/>
-                </a:solidFill>
-                <a:latin typeface="Calibri" pitchFamily="34" charset="0"/>
-                <a:ea typeface="Calibri" pitchFamily="34" charset="-122"/>
-                <a:cs typeface="Calibri" pitchFamily="34" charset="-120"/>
-              </a:rPr>
-              <a:t>Evaporation: dissolved solid from solution (keep the solid)</a:t>
-            </a:r>
-            <a:endParaRPr lang="en-US" sz="1500" dirty="0"/>
-          </a:p>
-          <a:p>
-            <a:pPr marL="342900" indent="-342900">
-              <a:spcAft>
-                <a:spcPts val="1000"/>
-              </a:spcAft>
-              <a:buSzPct val="100000"/>
-              <a:buChar char="•"/>
-            </a:pPr>
-            <a:r>
-              <a:rPr lang="en-US" sz="1500" dirty="0">
-                <a:solidFill>
-                  <a:srgbClr val="CADCFC"/>
-                </a:solidFill>
-                <a:latin typeface="Calibri" pitchFamily="34" charset="0"/>
-                <a:ea typeface="Calibri" pitchFamily="34" charset="-122"/>
-                <a:cs typeface="Calibri" pitchFamily="34" charset="-120"/>
-              </a:rPr>
-              <a:t>Distillation: pure liquid from solution (keep the liquid)</a:t>
-            </a:r>
-            <a:endParaRPr lang="en-US" sz="1500" dirty="0"/>
-          </a:p>
-          <a:p>
-            <a:pPr marL="342900" indent="-342900">
-              <a:spcAft>
-                <a:spcPts val="1000"/>
-              </a:spcAft>
-              <a:buSzPct val="100000"/>
-              <a:buChar char="•"/>
-            </a:pPr>
-            <a:r>
-              <a:rPr lang="en-US" sz="1500" dirty="0">
-                <a:solidFill>
-                  <a:srgbClr val="CADCFC"/>
-                </a:solidFill>
-                <a:latin typeface="Calibri" pitchFamily="34" charset="0"/>
-                <a:ea typeface="Calibri" pitchFamily="34" charset="-122"/>
-                <a:cs typeface="Calibri" pitchFamily="34" charset="-120"/>
-              </a:rPr>
-              <a:t>Chromatography: separates mixtures of colours</a:t>
-            </a:r>
-            <a:endParaRPr lang="en-US" sz="1500" dirty="0"/>
-          </a:p>
-          <a:p>
-            <a:pPr marL="342900" indent="-342900">
-              <a:spcAft>
-                <a:spcPts val="1000"/>
-              </a:spcAft>
-              <a:buSzPct val="100000"/>
-              <a:buChar char="•"/>
-            </a:pPr>
-            <a:r>
-              <a:rPr lang="en-US" sz="1500" dirty="0">
-                <a:solidFill>
-                  <a:srgbClr val="CADCFC"/>
-                </a:solidFill>
-                <a:latin typeface="Calibri" pitchFamily="34" charset="0"/>
-                <a:ea typeface="Calibri" pitchFamily="34" charset="-122"/>
-                <a:cs typeface="Calibri" pitchFamily="34" charset="-120"/>
-              </a:rPr>
-              <a:t>Choose the method based on what you want to keep</a:t>
-            </a:r>
-            <a:endParaRPr lang="en-US" sz="1500" dirty="0"/>
-          </a:p>
-        </p:txBody>
-      </p:sp>
-      <p:sp>
-        <p:nvSpPr>
-          <p:cNvPr id="5" name="Text 3"/>
-          <p:cNvSpPr/>
-          <p:nvPr/>
-        </p:nvSpPr>
-        <p:spPr>
-          <a:xfrm>
-            <a:off x="731520" y="4572000"/>
-            <a:ext cx="7772400" cy="365760"/>
+              <a:t>Review &amp; Practise</a:t>
+            </a:r>
+            <a:endParaRPr lang="en-US" sz="3400" dirty="0"/>
+          </a:p>
+        </p:txBody>
+      </p:sp>
+      <p:sp>
+        <p:nvSpPr>
+          <p:cNvPr id="6" name="Text 4"/>
+          <p:cNvSpPr/>
+          <p:nvPr/>
+        </p:nvSpPr>
+        <p:spPr>
+          <a:xfrm>
+            <a:off x="731520" y="2468880"/>
+            <a:ext cx="7680960" cy="457200"/>
           </a:xfrm>
           <a:prstGeom prst="rect">
             <a:avLst/>
@@ -3150,13 +5856,13 @@
           <a:bodyPr wrap="square" rtlCol="0" anchor="ctr"/>
           <a:lstStyle/>
           <a:p>
-            <a:pPr indent="0" marL="0">
+            <a:pPr algn="ctr" indent="0" marL="0">
               <a:buNone/>
             </a:pPr>
             <a:r>
-              <a:rPr lang="en-US" sz="1100" dirty="0">
+              <a:rPr lang="en-US" sz="1800" dirty="0">
                 <a:solidFill>
-                  <a:srgbClr val="E9C46A"/>
+                  <a:srgbClr val="2A9D8F"/>
                 </a:solidFill>
                 <a:latin typeface="Calibri" pitchFamily="34" charset="0"/>
                 <a:ea typeface="Calibri" pitchFamily="34" charset="-122"/>
@@ -3164,7 +5870,46 @@
               </a:rPr>
               <a:t>mrzocchi.com</a:t>
             </a:r>
-            <a:endParaRPr lang="en-US" sz="1100" dirty="0"/>
+            <a:endParaRPr lang="en-US" sz="1800" dirty="0"/>
+          </a:p>
+        </p:txBody>
+      </p:sp>
+      <p:sp>
+        <p:nvSpPr>
+          <p:cNvPr id="7" name="Text 5"/>
+          <p:cNvSpPr/>
+          <p:nvPr/>
+        </p:nvSpPr>
+        <p:spPr>
+          <a:xfrm>
+            <a:off x="731520" y="3108960"/>
+            <a:ext cx="7680960" cy="457200"/>
+          </a:xfrm>
+          <a:prstGeom prst="rect">
+            <a:avLst/>
+          </a:prstGeom>
+          <a:noFill/>
+          <a:ln/>
+        </p:spPr>
+        <p:txBody>
+          <a:bodyPr wrap="square" rtlCol="0" anchor="ctr"/>
+          <a:lstStyle/>
+          <a:p>
+            <a:pPr algn="ctr" indent="0" marL="0">
+              <a:buNone/>
+            </a:pPr>
+            <a:r>
+              <a:rPr lang="en-US" sz="1300" dirty="0">
+                <a:solidFill>
+                  <a:srgbClr val="9B9690"/>
+                </a:solidFill>
+                <a:latin typeface="Calibri" pitchFamily="34" charset="0"/>
+                <a:ea typeface="Calibri" pitchFamily="34" charset="-122"/>
+                <a:cs typeface="Calibri" pitchFamily="34" charset="-120"/>
+              </a:rPr>
+              <a:t>Use the Self-Quiz, Review Games, and Practice Builder to test yourself.</a:t>
+            </a:r>
+            <a:endParaRPr lang="en-US" sz="1300" dirty="0"/>
           </a:p>
         </p:txBody>
       </p:sp>

--- a/static/ppts/G6_Sci_T2_Separating_Mixtures.pptx
+++ b/static/ppts/G6_Sci_T2_Separating_Mixtures.pptx
@@ -12,13 +12,12 @@
     <p:sldId id="260" r:id="rId6"/>
     <p:sldId id="261" r:id="rId7"/>
     <p:sldId id="262" r:id="rId8"/>
-    <p:sldId id="263" r:id="rId9"/>
   </p:sldIdLst>
   <p:notesMasterIdLst>
-    <p:notesMasterId r:id="rId10"/>
+    <p:notesMasterId r:id="rId9"/>
   </p:notesMasterIdLst>
-  <p:sldSz cx="9144000" cy="5143500"/>
-  <p:notesSz cx="5143500" cy="9144000"/>
+  <p:sldSz cx="12192000" cy="6858000"/>
+  <p:notesSz cx="6858000" cy="12192000"/>
   <p:defaultTextStyle>
     <a:lvl1pPr marL="0" algn="l" defTabSz="914400" rtl="0" eaLnBrk="1" latinLnBrk="0" hangingPunct="1">
       <a:defRPr sz="1800" kern="1200">
@@ -1061,94 +1060,6 @@
             <a:fld id="{F7021451-1387-4CA6-816F-3879F97B5CBC}" type="slidenum">
               <a:rPr lang="en-US"/>
               <a:t>7</a:t>
-            </a:fld>
-            <a:endParaRPr lang="en-US"/>
-          </a:p>
-        </p:txBody>
-      </p:sp>
-    </p:spTree>
-    <p:extLst>
-      <p:ext uri="{BB962C8B-B14F-4D97-AF65-F5344CB8AC3E}">
-        <p14:creationId xmlns:p14="http://schemas.microsoft.com/office/powerpoint/2010/main" val="1024086991"/>
-      </p:ext>
-    </p:extLst>
-  </p:cSld>
-  <p:clrMapOvr>
-    <a:masterClrMapping/>
-  </p:clrMapOvr>
-</p:notes>
-</file>
-
-<file path=ppt/notesSlides/notesSlide8.xml><?xml version="1.0" encoding="utf-8"?>
-<p:notes xmlns:a="http://schemas.openxmlformats.org/drawingml/2006/main" xmlns:r="http://schemas.openxmlformats.org/officeDocument/2006/relationships" xmlns:p="http://schemas.openxmlformats.org/presentationml/2006/main">
-  <p:cSld>
-    <p:spTree>
-      <p:nvGrpSpPr>
-        <p:cNvPr id="1" name=""/>
-        <p:cNvGrpSpPr/>
-        <p:nvPr/>
-      </p:nvGrpSpPr>
-      <p:grpSpPr>
-        <a:xfrm>
-          <a:off x="0" y="0"/>
-          <a:ext cx="0" cy="0"/>
-          <a:chOff x="0" y="0"/>
-          <a:chExt cx="0" cy="0"/>
-        </a:xfrm>
-      </p:grpSpPr>
-      <p:sp>
-        <p:nvSpPr>
-          <p:cNvPr id="2" name="Slide Image Placeholder 1"/>
-          <p:cNvSpPr>
-            <a:spLocks noGrp="1" noRot="1" noChangeAspect="1"/>
-          </p:cNvSpPr>
-          <p:nvPr>
-            <p:ph type="sldImg"/>
-          </p:nvPr>
-        </p:nvSpPr>
-        <p:spPr/>
-      </p:sp>
-      <p:sp>
-        <p:nvSpPr>
-          <p:cNvPr id="3" name="Notes Placeholder 2"/>
-          <p:cNvSpPr>
-            <a:spLocks noGrp="1"/>
-          </p:cNvSpPr>
-          <p:nvPr>
-            <p:ph type="body" idx="1"/>
-          </p:nvPr>
-        </p:nvSpPr>
-        <p:spPr/>
-        <p:txBody>
-          <a:bodyPr/>
-          <a:lstStyle/>
-          <a:p>
-            <a:r>
-              <a:rPr lang="en-US" dirty="0"/>
-              <a:t/>
-            </a:r>
-            <a:endParaRPr lang="en-US" dirty="0"/>
-          </a:p>
-        </p:txBody>
-      </p:sp>
-      <p:sp>
-        <p:nvSpPr>
-          <p:cNvPr id="4" name="Slide Number Placeholder 3"/>
-          <p:cNvSpPr>
-            <a:spLocks noGrp="1"/>
-          </p:cNvSpPr>
-          <p:nvPr>
-            <p:ph type="sldNum" sz="quarter" idx="10"/>
-          </p:nvPr>
-        </p:nvSpPr>
-        <p:spPr/>
-        <p:txBody>
-          <a:bodyPr/>
-          <a:lstStyle/>
-          <a:p>
-            <a:fld id="{F7021451-1387-4CA6-816F-3879F97B5CBC}" type="slidenum">
-              <a:rPr lang="en-US"/>
-              <a:t>8</a:t>
             </a:fld>
             <a:endParaRPr lang="en-US"/>
           </a:p>
@@ -1477,6 +1388,13 @@
 <file path=ppt/slides/slide1.xml><?xml version="1.0" encoding="utf-8"?>
 <p:sld xmlns:a="http://schemas.openxmlformats.org/drawingml/2006/main" xmlns:r="http://schemas.openxmlformats.org/officeDocument/2006/relationships" xmlns:p="http://schemas.openxmlformats.org/presentationml/2006/main">
   <p:cSld name="Slide 1">
+    <p:bg>
+      <p:bgPr>
+        <a:solidFill>
+          <a:srgbClr val="2A9D8F"/>
+        </a:solidFill>
+      </p:bgPr>
+    </p:bg>
     <p:spTree>
       <p:nvGrpSpPr>
         <p:cNvPr id="1" name=""/>
@@ -1499,55 +1417,15 @@
         </p:nvSpPr>
         <p:spPr>
           <a:xfrm>
-            <a:off x="0" y="0"/>
-            <a:ext cx="9144000" cy="5143500"/>
-          </a:xfrm>
-          <a:prstGeom prst="rect">
-            <a:avLst/>
-          </a:prstGeom>
-          <a:solidFill>
-            <a:srgbClr val="1B2A4A"/>
-          </a:solidFill>
-          <a:ln/>
-        </p:spPr>
-      </p:sp>
-      <p:sp>
-        <p:nvSpPr>
-          <p:cNvPr id="3" name="Shape 1"/>
-          <p:cNvSpPr/>
-          <p:nvPr/>
-        </p:nvSpPr>
-        <p:spPr>
-          <a:xfrm>
-            <a:off x="0" y="4777740"/>
-            <a:ext cx="9144000" cy="365760"/>
-          </a:xfrm>
-          <a:prstGeom prst="rect">
-            <a:avLst/>
-          </a:prstGeom>
-          <a:solidFill>
-            <a:srgbClr val="2A9D8F"/>
-          </a:solidFill>
-          <a:ln/>
-        </p:spPr>
-      </p:sp>
-      <p:sp>
-        <p:nvSpPr>
-          <p:cNvPr id="4" name="Shape 2"/>
-          <p:cNvSpPr/>
-          <p:nvPr/>
-        </p:nvSpPr>
-        <p:spPr>
-          <a:xfrm>
-            <a:off x="6858000" y="-1371600"/>
-            <a:ext cx="4572000" cy="4572000"/>
+            <a:off x="7772400" y="-914400"/>
+            <a:ext cx="3657600" cy="3657600"/>
           </a:xfrm>
           <a:prstGeom prst="ellipse">
             <a:avLst/>
           </a:prstGeom>
           <a:solidFill>
-            <a:srgbClr val="2A9D8F">
-              <a:alpha val="12000"/>
+            <a:srgbClr val="FFFFFF">
+              <a:alpha val="8000"/>
             </a:srgbClr>
           </a:solidFill>
           <a:ln/>
@@ -1555,14 +1433,14 @@
       </p:sp>
       <p:sp>
         <p:nvSpPr>
-          <p:cNvPr id="5" name="Text 3"/>
+          <p:cNvPr id="3" name="Text 1"/>
           <p:cNvSpPr/>
           <p:nvPr/>
         </p:nvSpPr>
         <p:spPr>
           <a:xfrm>
-            <a:off x="731520" y="914400"/>
-            <a:ext cx="7680960" cy="457200"/>
+            <a:off x="731520" y="548640"/>
+            <a:ext cx="7315200" cy="365760"/>
           </a:xfrm>
           <a:prstGeom prst="rect">
             <a:avLst/>
@@ -1578,30 +1456,30 @@
               <a:buNone/>
             </a:pPr>
             <a:r>
-              <a:rPr lang="en-US" sz="1300" b="1" spc="500" kern="0" dirty="0">
+              <a:rPr lang="en-US" sz="1100" b="1" dirty="0">
                 <a:solidFill>
-                  <a:srgbClr val="2A9D8F"/>
+                  <a:srgbClr val="F2D68A"/>
                 </a:solidFill>
-                <a:latin typeface="Calibri" pitchFamily="34" charset="0"/>
-                <a:ea typeface="Calibri" pitchFamily="34" charset="-122"/>
-                <a:cs typeface="Calibri" pitchFamily="34" charset="-120"/>
+                <a:latin typeface="Arial" pitchFamily="34" charset="0"/>
+                <a:ea typeface="Arial" pitchFamily="34" charset="-122"/>
+                <a:cs typeface="Arial" pitchFamily="34" charset="-120"/>
               </a:rPr>
               <a:t>GRADE 6 SCIENCE</a:t>
             </a:r>
-            <a:endParaRPr lang="en-US" sz="1300" dirty="0"/>
+            <a:endParaRPr lang="en-US" sz="1100" dirty="0"/>
           </a:p>
         </p:txBody>
       </p:sp>
       <p:sp>
         <p:nvSpPr>
-          <p:cNvPr id="6" name="Text 4"/>
+          <p:cNvPr id="4" name="Text 2"/>
           <p:cNvSpPr/>
           <p:nvPr/>
         </p:nvSpPr>
         <p:spPr>
           <a:xfrm>
-            <a:off x="731520" y="1463040"/>
-            <a:ext cx="6858000" cy="1645920"/>
+            <a:off x="731520" y="1371600"/>
+            <a:ext cx="9144000" cy="1645920"/>
           </a:xfrm>
           <a:prstGeom prst="rect">
             <a:avLst/>
@@ -1610,14 +1488,17 @@
           <a:ln/>
         </p:spPr>
         <p:txBody>
-          <a:bodyPr wrap="square" rtlCol="0" anchor="t"/>
+          <a:bodyPr wrap="square" rtlCol="0" anchor="ctr"/>
           <a:lstStyle/>
           <a:p>
             <a:pPr indent="0" marL="0">
+              <a:lnSpc>
+                <a:spcPct val="110000"/>
+              </a:lnSpc>
               <a:buNone/>
             </a:pPr>
             <a:r>
-              <a:rPr lang="en-US" sz="3800" b="1" dirty="0">
+              <a:rPr lang="en-US" sz="3600" b="1" dirty="0">
                 <a:solidFill>
                   <a:srgbClr val="FFFFFF"/>
                 </a:solidFill>
@@ -1627,20 +1508,20 @@
               </a:rPr>
               <a:t>Separating Mixtures</a:t>
             </a:r>
-            <a:endParaRPr lang="en-US" sz="3800" dirty="0"/>
+            <a:endParaRPr lang="en-US" sz="3600" dirty="0"/>
           </a:p>
         </p:txBody>
       </p:sp>
       <p:sp>
         <p:nvSpPr>
-          <p:cNvPr id="7" name="Text 5"/>
+          <p:cNvPr id="5" name="Text 3"/>
           <p:cNvSpPr/>
           <p:nvPr/>
         </p:nvSpPr>
         <p:spPr>
           <a:xfrm>
             <a:off x="731520" y="3200400"/>
-            <a:ext cx="6400800" cy="548640"/>
+            <a:ext cx="7315200" cy="548640"/>
           </a:xfrm>
           <a:prstGeom prst="rect">
             <a:avLst/>
@@ -1656,15 +1537,17 @@
               <a:buNone/>
             </a:pPr>
             <a:r>
-              <a:rPr lang="en-US" sz="1600" i="1" dirty="0">
+              <a:rPr lang="en-US" sz="1600" dirty="0">
                 <a:solidFill>
-                  <a:srgbClr val="9B9690"/>
+                  <a:srgbClr val="FFFFFF">
+                    <a:alpha val="65000"/>
+                  </a:srgbClr>
                 </a:solidFill>
-                <a:latin typeface="Calibri" pitchFamily="34" charset="0"/>
-                <a:ea typeface="Calibri" pitchFamily="34" charset="-122"/>
-                <a:cs typeface="Calibri" pitchFamily="34" charset="-120"/>
+                <a:latin typeface="Arial" pitchFamily="34" charset="0"/>
+                <a:ea typeface="Arial" pitchFamily="34" charset="-122"/>
+                <a:cs typeface="Arial" pitchFamily="34" charset="-120"/>
               </a:rPr>
-              <a:t>Techniques for separating different components</a:t>
+              <a:t>How to separate substances from a mixture</a:t>
             </a:r>
             <a:endParaRPr lang="en-US" sz="1600" dirty="0"/>
           </a:p>
@@ -1672,14 +1555,14 @@
       </p:sp>
       <p:sp>
         <p:nvSpPr>
-          <p:cNvPr id="8" name="Text 6"/>
+          <p:cNvPr id="6" name="Text 4"/>
           <p:cNvSpPr/>
           <p:nvPr/>
         </p:nvSpPr>
         <p:spPr>
           <a:xfrm>
-            <a:off x="731520" y="4297680"/>
-            <a:ext cx="2743200" cy="365760"/>
+            <a:off x="731520" y="4389120"/>
+            <a:ext cx="2743200" cy="320040"/>
           </a:xfrm>
           <a:prstGeom prst="rect">
             <a:avLst/>
@@ -1695,17 +1578,19 @@
               <a:buNone/>
             </a:pPr>
             <a:r>
-              <a:rPr lang="en-US" sz="1100" dirty="0">
+              <a:rPr lang="en-US" sz="1000" dirty="0">
                 <a:solidFill>
-                  <a:srgbClr val="9B9690"/>
+                  <a:srgbClr val="FFFFFF">
+                    <a:alpha val="40000"/>
+                  </a:srgbClr>
                 </a:solidFill>
-                <a:latin typeface="Calibri" pitchFamily="34" charset="0"/>
-                <a:ea typeface="Calibri" pitchFamily="34" charset="-122"/>
-                <a:cs typeface="Calibri" pitchFamily="34" charset="-120"/>
+                <a:latin typeface="Arial" pitchFamily="34" charset="0"/>
+                <a:ea typeface="Arial" pitchFamily="34" charset="-122"/>
+                <a:cs typeface="Arial" pitchFamily="34" charset="-120"/>
               </a:rPr>
               <a:t>mrzocchi.com</a:t>
             </a:r>
-            <a:endParaRPr lang="en-US" sz="1100" dirty="0"/>
+            <a:endParaRPr lang="en-US" sz="1000" dirty="0"/>
           </a:p>
         </p:txBody>
       </p:sp>
@@ -1750,47 +1635,7 @@
         <p:spPr>
           <a:xfrm>
             <a:off x="0" y="0"/>
-            <a:ext cx="9144000" cy="822960"/>
-          </a:xfrm>
-          <a:prstGeom prst="rect">
-            <a:avLst/>
-          </a:prstGeom>
-          <a:solidFill>
-            <a:srgbClr val="FFFFFF"/>
-          </a:solidFill>
-          <a:ln/>
-        </p:spPr>
-      </p:sp>
-      <p:sp>
-        <p:nvSpPr>
-          <p:cNvPr id="3" name="Shape 1"/>
-          <p:cNvSpPr/>
-          <p:nvPr/>
-        </p:nvSpPr>
-        <p:spPr>
-          <a:xfrm>
-            <a:off x="0" y="804672"/>
-            <a:ext cx="9144000" cy="27432"/>
-          </a:xfrm>
-          <a:prstGeom prst="rect">
-            <a:avLst/>
-          </a:prstGeom>
-          <a:solidFill>
-            <a:srgbClr val="E5E2DC"/>
-          </a:solidFill>
-          <a:ln/>
-        </p:spPr>
-      </p:sp>
-      <p:sp>
-        <p:nvSpPr>
-          <p:cNvPr id="4" name="Shape 2"/>
-          <p:cNvSpPr/>
-          <p:nvPr/>
-        </p:nvSpPr>
-        <p:spPr>
-          <a:xfrm>
-            <a:off x="548640" y="201168"/>
-            <a:ext cx="54864" cy="420624"/>
+            <a:ext cx="73152" cy="5148072"/>
           </a:xfrm>
           <a:prstGeom prst="rect">
             <a:avLst/>
@@ -1803,14 +1648,14 @@
       </p:sp>
       <p:sp>
         <p:nvSpPr>
-          <p:cNvPr id="5" name="Text 3"/>
+          <p:cNvPr id="3" name="Text 1"/>
           <p:cNvSpPr/>
           <p:nvPr/>
         </p:nvSpPr>
         <p:spPr>
           <a:xfrm>
-            <a:off x="777240" y="137160"/>
-            <a:ext cx="7772400" cy="548640"/>
+            <a:off x="548640" y="274320"/>
+            <a:ext cx="9144000" cy="640080"/>
           </a:xfrm>
           <a:prstGeom prst="rect">
             <a:avLst/>
@@ -1819,14 +1664,14 @@
           <a:ln/>
         </p:spPr>
         <p:txBody>
-          <a:bodyPr wrap="square" lIns="0" tIns="0" rIns="0" bIns="0" rtlCol="0" anchor="ctr"/>
+          <a:bodyPr wrap="square" rtlCol="0" anchor="ctr"/>
           <a:lstStyle/>
           <a:p>
             <a:pPr indent="0" marL="0">
               <a:buNone/>
             </a:pPr>
             <a:r>
-              <a:rPr lang="en-US" sz="2000" b="1" dirty="0">
+              <a:rPr lang="en-US" sz="2400" b="1" dirty="0">
                 <a:solidFill>
                   <a:srgbClr val="1B2A4A"/>
                 </a:solidFill>
@@ -1836,47 +1681,20 @@
               </a:rPr>
               <a:t>Key Vocabulary</a:t>
             </a:r>
-            <a:endParaRPr lang="en-US" sz="2000" dirty="0"/>
+            <a:endParaRPr lang="en-US" sz="2400" dirty="0"/>
           </a:p>
         </p:txBody>
       </p:sp>
       <p:sp>
         <p:nvSpPr>
-          <p:cNvPr id="6" name="Shape 4"/>
+          <p:cNvPr id="4" name="Shape 2"/>
           <p:cNvSpPr/>
           <p:nvPr/>
         </p:nvSpPr>
         <p:spPr>
           <a:xfrm>
-            <a:off x="731520" y="1051560"/>
-            <a:ext cx="3657600" cy="658368"/>
-          </a:xfrm>
-          <a:prstGeom prst="rect">
-            <a:avLst/>
-          </a:prstGeom>
-          <a:solidFill>
-            <a:srgbClr val="FFFFFF"/>
-          </a:solidFill>
-          <a:ln/>
-          <a:effectLst>
-            <a:outerShdw sx="100000" sy="100000" kx="0" ky="0" algn="bl" rotWithShape="0" blurRad="50800" dist="25400" dir="8100000">
-              <a:srgbClr val="000000">
-                <a:alpha val="10000"/>
-              </a:srgbClr>
-            </a:outerShdw>
-          </a:effectLst>
-        </p:spPr>
-      </p:sp>
-      <p:sp>
-        <p:nvSpPr>
-          <p:cNvPr id="7" name="Shape 5"/>
-          <p:cNvSpPr/>
-          <p:nvPr/>
-        </p:nvSpPr>
-        <p:spPr>
-          <a:xfrm>
-            <a:off x="731520" y="1051560"/>
-            <a:ext cx="54864" cy="658368"/>
+            <a:off x="548640" y="960120"/>
+            <a:ext cx="2286000" cy="36576"/>
           </a:xfrm>
           <a:prstGeom prst="rect">
             <a:avLst/>
@@ -1889,14 +1707,41 @@
       </p:sp>
       <p:sp>
         <p:nvSpPr>
-          <p:cNvPr id="8" name="Text 6"/>
+          <p:cNvPr id="5" name="Shape 3"/>
           <p:cNvSpPr/>
           <p:nvPr/>
         </p:nvSpPr>
         <p:spPr>
           <a:xfrm>
-            <a:off x="914400" y="1051560"/>
-            <a:ext cx="1463040" cy="658368"/>
+            <a:off x="548640" y="1234440"/>
+            <a:ext cx="3200400" cy="914400"/>
+          </a:xfrm>
+          <a:prstGeom prst="roundRect">
+            <a:avLst>
+              <a:gd name="adj" fmla="val 10000"/>
+            </a:avLst>
+          </a:prstGeom>
+          <a:solidFill>
+            <a:srgbClr val="FFFFFF"/>
+          </a:solidFill>
+          <a:ln w="9525">
+            <a:solidFill>
+              <a:srgbClr val="E5E2DC"/>
+            </a:solidFill>
+            <a:prstDash val="solid"/>
+          </a:ln>
+        </p:spPr>
+      </p:sp>
+      <p:sp>
+        <p:nvSpPr>
+          <p:cNvPr id="6" name="Text 4"/>
+          <p:cNvSpPr/>
+          <p:nvPr/>
+        </p:nvSpPr>
+        <p:spPr>
+          <a:xfrm>
+            <a:off x="685800" y="1307592"/>
+            <a:ext cx="2926080" cy="320040"/>
           </a:xfrm>
           <a:prstGeom prst="rect">
             <a:avLst/>
@@ -1905,16 +1750,16 @@
           <a:ln/>
         </p:spPr>
         <p:txBody>
-          <a:bodyPr wrap="square" lIns="0" tIns="0" rIns="0" bIns="0" rtlCol="0" anchor="ctr"/>
+          <a:bodyPr wrap="square" rtlCol="0" anchor="ctr"/>
           <a:lstStyle/>
           <a:p>
             <a:pPr indent="0" marL="0">
               <a:buNone/>
             </a:pPr>
             <a:r>
-              <a:rPr lang="en-US" sz="1300" b="1" dirty="0">
+              <a:rPr lang="en-US" sz="1400" b="1" dirty="0">
                 <a:solidFill>
-                  <a:srgbClr val="1B2A4A"/>
+                  <a:srgbClr val="2A9D8F"/>
                 </a:solidFill>
                 <a:latin typeface="Georgia" pitchFamily="34" charset="0"/>
                 <a:ea typeface="Georgia" pitchFamily="34" charset="-122"/>
@@ -1922,20 +1767,20 @@
               </a:rPr>
               <a:t>Filtration</a:t>
             </a:r>
-            <a:endParaRPr lang="en-US" sz="1300" dirty="0"/>
+            <a:endParaRPr lang="en-US" sz="1400" dirty="0"/>
           </a:p>
         </p:txBody>
       </p:sp>
       <p:sp>
         <p:nvSpPr>
-          <p:cNvPr id="9" name="Text 7"/>
+          <p:cNvPr id="7" name="Text 5"/>
           <p:cNvSpPr/>
           <p:nvPr/>
         </p:nvSpPr>
         <p:spPr>
           <a:xfrm>
-            <a:off x="2377440" y="1051560"/>
-            <a:ext cx="1920240" cy="658368"/>
+            <a:off x="685800" y="1645920"/>
+            <a:ext cx="2926080" cy="457200"/>
           </a:xfrm>
           <a:prstGeom prst="rect">
             <a:avLst/>
@@ -1944,10 +1789,13 @@
           <a:ln/>
         </p:spPr>
         <p:txBody>
-          <a:bodyPr wrap="square" lIns="0" tIns="0" rIns="0" bIns="0" rtlCol="0" anchor="ctr"/>
+          <a:bodyPr wrap="square" rtlCol="0" anchor="ctr"/>
           <a:lstStyle/>
           <a:p>
             <a:pPr indent="0" marL="0">
+              <a:lnSpc>
+                <a:spcPct val="130000"/>
+              </a:lnSpc>
               <a:buNone/>
             </a:pPr>
             <a:r>
@@ -1955,11 +1803,11 @@
                 <a:solidFill>
                   <a:srgbClr val="6B6660"/>
                 </a:solidFill>
-                <a:latin typeface="Calibri" pitchFamily="34" charset="0"/>
-                <a:ea typeface="Calibri" pitchFamily="34" charset="-122"/>
-                <a:cs typeface="Calibri" pitchFamily="34" charset="-120"/>
+                <a:latin typeface="Arial" pitchFamily="34" charset="0"/>
+                <a:ea typeface="Arial" pitchFamily="34" charset="-122"/>
+                <a:cs typeface="Arial" pitchFamily="34" charset="-120"/>
               </a:rPr>
-              <a:t>Separating an insoluble solid from a liquid</a:t>
+              <a:t>Separates an insoluble solid from a liquid using filter paper.</a:t>
             </a:r>
             <a:endParaRPr lang="en-US" sz="1100" dirty="0"/>
           </a:p>
@@ -1967,79 +1815,59 @@
       </p:sp>
       <p:sp>
         <p:nvSpPr>
-          <p:cNvPr id="10" name="Shape 8"/>
+          <p:cNvPr id="8" name="Shape 6"/>
           <p:cNvSpPr/>
           <p:nvPr/>
         </p:nvSpPr>
         <p:spPr>
           <a:xfrm>
-            <a:off x="4754880" y="1051560"/>
-            <a:ext cx="3657600" cy="658368"/>
-          </a:xfrm>
-          <a:prstGeom prst="rect">
-            <a:avLst/>
+            <a:off x="4023360" y="1234440"/>
+            <a:ext cx="3200400" cy="914400"/>
+          </a:xfrm>
+          <a:prstGeom prst="roundRect">
+            <a:avLst>
+              <a:gd name="adj" fmla="val 10000"/>
+            </a:avLst>
           </a:prstGeom>
           <a:solidFill>
             <a:srgbClr val="FFFFFF"/>
           </a:solidFill>
-          <a:ln/>
-          <a:effectLst>
-            <a:outerShdw sx="100000" sy="100000" kx="0" ky="0" algn="bl" rotWithShape="0" blurRad="50800" dist="25400" dir="8100000">
-              <a:srgbClr val="000000">
-                <a:alpha val="10000"/>
-              </a:srgbClr>
-            </a:outerShdw>
-          </a:effectLst>
-        </p:spPr>
-      </p:sp>
-      <p:sp>
-        <p:nvSpPr>
-          <p:cNvPr id="11" name="Shape 9"/>
+          <a:ln w="9525">
+            <a:solidFill>
+              <a:srgbClr val="E5E2DC"/>
+            </a:solidFill>
+            <a:prstDash val="solid"/>
+          </a:ln>
+        </p:spPr>
+      </p:sp>
+      <p:sp>
+        <p:nvSpPr>
+          <p:cNvPr id="9" name="Text 7"/>
           <p:cNvSpPr/>
           <p:nvPr/>
         </p:nvSpPr>
         <p:spPr>
           <a:xfrm>
-            <a:off x="4754880" y="1051560"/>
-            <a:ext cx="54864" cy="658368"/>
+            <a:off x="4160520" y="1307592"/>
+            <a:ext cx="2926080" cy="320040"/>
           </a:xfrm>
           <a:prstGeom prst="rect">
             <a:avLst/>
           </a:prstGeom>
-          <a:solidFill>
-            <a:srgbClr val="2A9D8F"/>
-          </a:solidFill>
-          <a:ln/>
-        </p:spPr>
-      </p:sp>
-      <p:sp>
-        <p:nvSpPr>
-          <p:cNvPr id="12" name="Text 10"/>
-          <p:cNvSpPr/>
-          <p:nvPr/>
-        </p:nvSpPr>
-        <p:spPr>
-          <a:xfrm>
-            <a:off x="4937760" y="1051560"/>
-            <a:ext cx="1463040" cy="658368"/>
-          </a:xfrm>
-          <a:prstGeom prst="rect">
-            <a:avLst/>
-          </a:prstGeom>
           <a:noFill/>
           <a:ln/>
         </p:spPr>
         <p:txBody>
-          <a:bodyPr wrap="square" lIns="0" tIns="0" rIns="0" bIns="0" rtlCol="0" anchor="ctr"/>
+          <a:bodyPr wrap="square" rtlCol="0" anchor="ctr"/>
           <a:lstStyle/>
           <a:p>
             <a:pPr indent="0" marL="0">
               <a:buNone/>
             </a:pPr>
             <a:r>
-              <a:rPr lang="en-US" sz="1300" b="1" dirty="0">
+              <a:rPr lang="en-US" sz="1400" b="1" dirty="0">
                 <a:solidFill>
-                  <a:srgbClr val="1B2A4A"/>
+                  <a:srgbClr val="2A9D8F"/>
                 </a:solidFill>
                 <a:latin typeface="Georgia" pitchFamily="34" charset="0"/>
                 <a:ea typeface="Georgia" pitchFamily="34" charset="-122"/>
@@ -2047,20 +1875,20 @@
               </a:rPr>
               <a:t>Evaporation</a:t>
             </a:r>
-            <a:endParaRPr lang="en-US" sz="1300" dirty="0"/>
+            <a:endParaRPr lang="en-US" sz="1400" dirty="0"/>
           </a:p>
         </p:txBody>
       </p:sp>
       <p:sp>
         <p:nvSpPr>
-          <p:cNvPr id="13" name="Text 11"/>
+          <p:cNvPr id="10" name="Text 8"/>
           <p:cNvSpPr/>
           <p:nvPr/>
         </p:nvSpPr>
         <p:spPr>
           <a:xfrm>
-            <a:off x="6400800" y="1051560"/>
-            <a:ext cx="1920240" cy="658368"/>
+            <a:off x="4160520" y="1645920"/>
+            <a:ext cx="2926080" cy="457200"/>
           </a:xfrm>
           <a:prstGeom prst="rect">
             <a:avLst/>
@@ -2069,10 +1897,13 @@
           <a:ln/>
         </p:spPr>
         <p:txBody>
-          <a:bodyPr wrap="square" lIns="0" tIns="0" rIns="0" bIns="0" rtlCol="0" anchor="ctr"/>
+          <a:bodyPr wrap="square" rtlCol="0" anchor="ctr"/>
           <a:lstStyle/>
           <a:p>
             <a:pPr indent="0" marL="0">
+              <a:lnSpc>
+                <a:spcPct val="130000"/>
+              </a:lnSpc>
               <a:buNone/>
             </a:pPr>
             <a:r>
@@ -2080,11 +1911,11 @@
                 <a:solidFill>
                   <a:srgbClr val="6B6660"/>
                 </a:solidFill>
-                <a:latin typeface="Calibri" pitchFamily="34" charset="0"/>
-                <a:ea typeface="Calibri" pitchFamily="34" charset="-122"/>
-                <a:cs typeface="Calibri" pitchFamily="34" charset="-120"/>
+                <a:latin typeface="Arial" pitchFamily="34" charset="0"/>
+                <a:ea typeface="Arial" pitchFamily="34" charset="-122"/>
+                <a:cs typeface="Arial" pitchFamily="34" charset="-120"/>
               </a:rPr>
-              <a:t>Removing liquid to leave dissolved solid</a:t>
+              <a:t>Removes water from a solution, leaving the dissolved solid behind.</a:t>
             </a:r>
             <a:endParaRPr lang="en-US" sz="1100" dirty="0"/>
           </a:p>
@@ -2092,79 +1923,59 @@
       </p:sp>
       <p:sp>
         <p:nvSpPr>
-          <p:cNvPr id="14" name="Shape 12"/>
+          <p:cNvPr id="11" name="Shape 9"/>
           <p:cNvSpPr/>
           <p:nvPr/>
         </p:nvSpPr>
         <p:spPr>
           <a:xfrm>
-            <a:off x="731520" y="1819656"/>
-            <a:ext cx="3657600" cy="658368"/>
-          </a:xfrm>
-          <a:prstGeom prst="rect">
-            <a:avLst/>
+            <a:off x="7498080" y="1234440"/>
+            <a:ext cx="3200400" cy="914400"/>
+          </a:xfrm>
+          <a:prstGeom prst="roundRect">
+            <a:avLst>
+              <a:gd name="adj" fmla="val 10000"/>
+            </a:avLst>
           </a:prstGeom>
           <a:solidFill>
             <a:srgbClr val="FFFFFF"/>
           </a:solidFill>
-          <a:ln/>
-          <a:effectLst>
-            <a:outerShdw sx="100000" sy="100000" kx="0" ky="0" algn="bl" rotWithShape="0" blurRad="50800" dist="25400" dir="8100000">
-              <a:srgbClr val="000000">
-                <a:alpha val="10000"/>
-              </a:srgbClr>
-            </a:outerShdw>
-          </a:effectLst>
-        </p:spPr>
-      </p:sp>
-      <p:sp>
-        <p:nvSpPr>
-          <p:cNvPr id="15" name="Shape 13"/>
+          <a:ln w="9525">
+            <a:solidFill>
+              <a:srgbClr val="E5E2DC"/>
+            </a:solidFill>
+            <a:prstDash val="solid"/>
+          </a:ln>
+        </p:spPr>
+      </p:sp>
+      <p:sp>
+        <p:nvSpPr>
+          <p:cNvPr id="12" name="Text 10"/>
           <p:cNvSpPr/>
           <p:nvPr/>
         </p:nvSpPr>
         <p:spPr>
           <a:xfrm>
-            <a:off x="731520" y="1819656"/>
-            <a:ext cx="54864" cy="658368"/>
+            <a:off x="7635240" y="1307592"/>
+            <a:ext cx="2926080" cy="320040"/>
           </a:xfrm>
           <a:prstGeom prst="rect">
             <a:avLst/>
           </a:prstGeom>
-          <a:solidFill>
-            <a:srgbClr val="2A9D8F"/>
-          </a:solidFill>
-          <a:ln/>
-        </p:spPr>
-      </p:sp>
-      <p:sp>
-        <p:nvSpPr>
-          <p:cNvPr id="16" name="Text 14"/>
-          <p:cNvSpPr/>
-          <p:nvPr/>
-        </p:nvSpPr>
-        <p:spPr>
-          <a:xfrm>
-            <a:off x="914400" y="1819656"/>
-            <a:ext cx="1463040" cy="658368"/>
-          </a:xfrm>
-          <a:prstGeom prst="rect">
-            <a:avLst/>
-          </a:prstGeom>
           <a:noFill/>
           <a:ln/>
         </p:spPr>
         <p:txBody>
-          <a:bodyPr wrap="square" lIns="0" tIns="0" rIns="0" bIns="0" rtlCol="0" anchor="ctr"/>
+          <a:bodyPr wrap="square" rtlCol="0" anchor="ctr"/>
           <a:lstStyle/>
           <a:p>
             <a:pPr indent="0" marL="0">
               <a:buNone/>
             </a:pPr>
             <a:r>
-              <a:rPr lang="en-US" sz="1300" b="1" dirty="0">
+              <a:rPr lang="en-US" sz="1400" b="1" dirty="0">
                 <a:solidFill>
-                  <a:srgbClr val="1B2A4A"/>
+                  <a:srgbClr val="2A9D8F"/>
                 </a:solidFill>
                 <a:latin typeface="Georgia" pitchFamily="34" charset="0"/>
                 <a:ea typeface="Georgia" pitchFamily="34" charset="-122"/>
@@ -2172,20 +1983,20 @@
               </a:rPr>
               <a:t>Distillation</a:t>
             </a:r>
-            <a:endParaRPr lang="en-US" sz="1300" dirty="0"/>
+            <a:endParaRPr lang="en-US" sz="1400" dirty="0"/>
           </a:p>
         </p:txBody>
       </p:sp>
       <p:sp>
         <p:nvSpPr>
-          <p:cNvPr id="17" name="Text 15"/>
+          <p:cNvPr id="13" name="Text 11"/>
           <p:cNvSpPr/>
           <p:nvPr/>
         </p:nvSpPr>
         <p:spPr>
           <a:xfrm>
-            <a:off x="2377440" y="1819656"/>
-            <a:ext cx="1920240" cy="658368"/>
+            <a:off x="7635240" y="1645920"/>
+            <a:ext cx="2926080" cy="457200"/>
           </a:xfrm>
           <a:prstGeom prst="rect">
             <a:avLst/>
@@ -2194,10 +2005,13 @@
           <a:ln/>
         </p:spPr>
         <p:txBody>
-          <a:bodyPr wrap="square" lIns="0" tIns="0" rIns="0" bIns="0" rtlCol="0" anchor="ctr"/>
+          <a:bodyPr wrap="square" rtlCol="0" anchor="ctr"/>
           <a:lstStyle/>
           <a:p>
             <a:pPr indent="0" marL="0">
+              <a:lnSpc>
+                <a:spcPct val="130000"/>
+              </a:lnSpc>
               <a:buNone/>
             </a:pPr>
             <a:r>
@@ -2205,11 +2019,11 @@
                 <a:solidFill>
                   <a:srgbClr val="6B6660"/>
                 </a:solidFill>
-                <a:latin typeface="Calibri" pitchFamily="34" charset="0"/>
-                <a:ea typeface="Calibri" pitchFamily="34" charset="-122"/>
-                <a:cs typeface="Calibri" pitchFamily="34" charset="-120"/>
+                <a:latin typeface="Arial" pitchFamily="34" charset="0"/>
+                <a:ea typeface="Arial" pitchFamily="34" charset="-122"/>
+                <a:cs typeface="Arial" pitchFamily="34" charset="-120"/>
               </a:rPr>
-              <a:t>Separating liquids by boiling point</a:t>
+              <a:t>Separates a liquid from a solution by boiling and condensing.</a:t>
             </a:r>
             <a:endParaRPr lang="en-US" sz="1100" dirty="0"/>
           </a:p>
@@ -2217,79 +2031,59 @@
       </p:sp>
       <p:sp>
         <p:nvSpPr>
-          <p:cNvPr id="18" name="Shape 16"/>
+          <p:cNvPr id="14" name="Shape 12"/>
           <p:cNvSpPr/>
           <p:nvPr/>
         </p:nvSpPr>
         <p:spPr>
           <a:xfrm>
-            <a:off x="4754880" y="1819656"/>
-            <a:ext cx="3657600" cy="658368"/>
-          </a:xfrm>
-          <a:prstGeom prst="rect">
-            <a:avLst/>
+            <a:off x="548640" y="2286000"/>
+            <a:ext cx="3200400" cy="914400"/>
+          </a:xfrm>
+          <a:prstGeom prst="roundRect">
+            <a:avLst>
+              <a:gd name="adj" fmla="val 10000"/>
+            </a:avLst>
           </a:prstGeom>
           <a:solidFill>
             <a:srgbClr val="FFFFFF"/>
           </a:solidFill>
-          <a:ln/>
-          <a:effectLst>
-            <a:outerShdw sx="100000" sy="100000" kx="0" ky="0" algn="bl" rotWithShape="0" blurRad="50800" dist="25400" dir="8100000">
-              <a:srgbClr val="000000">
-                <a:alpha val="10000"/>
-              </a:srgbClr>
-            </a:outerShdw>
-          </a:effectLst>
-        </p:spPr>
-      </p:sp>
-      <p:sp>
-        <p:nvSpPr>
-          <p:cNvPr id="19" name="Shape 17"/>
+          <a:ln w="9525">
+            <a:solidFill>
+              <a:srgbClr val="E5E2DC"/>
+            </a:solidFill>
+            <a:prstDash val="solid"/>
+          </a:ln>
+        </p:spPr>
+      </p:sp>
+      <p:sp>
+        <p:nvSpPr>
+          <p:cNvPr id="15" name="Text 13"/>
           <p:cNvSpPr/>
           <p:nvPr/>
         </p:nvSpPr>
         <p:spPr>
           <a:xfrm>
-            <a:off x="4754880" y="1819656"/>
-            <a:ext cx="54864" cy="658368"/>
+            <a:off x="685800" y="2359152"/>
+            <a:ext cx="2926080" cy="320040"/>
           </a:xfrm>
           <a:prstGeom prst="rect">
             <a:avLst/>
           </a:prstGeom>
-          <a:solidFill>
-            <a:srgbClr val="2A9D8F"/>
-          </a:solidFill>
-          <a:ln/>
-        </p:spPr>
-      </p:sp>
-      <p:sp>
-        <p:nvSpPr>
-          <p:cNvPr id="20" name="Text 18"/>
-          <p:cNvSpPr/>
-          <p:nvPr/>
-        </p:nvSpPr>
-        <p:spPr>
-          <a:xfrm>
-            <a:off x="4937760" y="1819656"/>
-            <a:ext cx="1463040" cy="658368"/>
-          </a:xfrm>
-          <a:prstGeom prst="rect">
-            <a:avLst/>
-          </a:prstGeom>
           <a:noFill/>
           <a:ln/>
         </p:spPr>
         <p:txBody>
-          <a:bodyPr wrap="square" lIns="0" tIns="0" rIns="0" bIns="0" rtlCol="0" anchor="ctr"/>
+          <a:bodyPr wrap="square" rtlCol="0" anchor="ctr"/>
           <a:lstStyle/>
           <a:p>
             <a:pPr indent="0" marL="0">
               <a:buNone/>
             </a:pPr>
             <a:r>
-              <a:rPr lang="en-US" sz="1300" b="1" dirty="0">
+              <a:rPr lang="en-US" sz="1400" b="1" dirty="0">
                 <a:solidFill>
-                  <a:srgbClr val="1B2A4A"/>
+                  <a:srgbClr val="2A9D8F"/>
                 </a:solidFill>
                 <a:latin typeface="Georgia" pitchFamily="34" charset="0"/>
                 <a:ea typeface="Georgia" pitchFamily="34" charset="-122"/>
@@ -2297,20 +2091,20 @@
               </a:rPr>
               <a:t>Chromatography</a:t>
             </a:r>
-            <a:endParaRPr lang="en-US" sz="1300" dirty="0"/>
+            <a:endParaRPr lang="en-US" sz="1400" dirty="0"/>
           </a:p>
         </p:txBody>
       </p:sp>
       <p:sp>
         <p:nvSpPr>
-          <p:cNvPr id="21" name="Text 19"/>
+          <p:cNvPr id="16" name="Text 14"/>
           <p:cNvSpPr/>
           <p:nvPr/>
         </p:nvSpPr>
         <p:spPr>
           <a:xfrm>
-            <a:off x="6400800" y="1819656"/>
-            <a:ext cx="1920240" cy="658368"/>
+            <a:off x="685800" y="2697480"/>
+            <a:ext cx="2926080" cy="457200"/>
           </a:xfrm>
           <a:prstGeom prst="rect">
             <a:avLst/>
@@ -2319,10 +2113,13 @@
           <a:ln/>
         </p:spPr>
         <p:txBody>
-          <a:bodyPr wrap="square" lIns="0" tIns="0" rIns="0" bIns="0" rtlCol="0" anchor="ctr"/>
+          <a:bodyPr wrap="square" rtlCol="0" anchor="ctr"/>
           <a:lstStyle/>
           <a:p>
             <a:pPr indent="0" marL="0">
+              <a:lnSpc>
+                <a:spcPct val="130000"/>
+              </a:lnSpc>
               <a:buNone/>
             </a:pPr>
             <a:r>
@@ -2330,11 +2127,11 @@
                 <a:solidFill>
                   <a:srgbClr val="6B6660"/>
                 </a:solidFill>
-                <a:latin typeface="Calibri" pitchFamily="34" charset="0"/>
-                <a:ea typeface="Calibri" pitchFamily="34" charset="-122"/>
-                <a:cs typeface="Calibri" pitchFamily="34" charset="-120"/>
+                <a:latin typeface="Arial" pitchFamily="34" charset="0"/>
+                <a:ea typeface="Arial" pitchFamily="34" charset="-122"/>
+                <a:cs typeface="Arial" pitchFamily="34" charset="-120"/>
               </a:rPr>
-              <a:t>Separating dissolved substances</a:t>
+              <a:t>Separates different coloured substances in a mixture.</a:t>
             </a:r>
             <a:endParaRPr lang="en-US" sz="1100" dirty="0"/>
           </a:p>
@@ -2342,79 +2139,59 @@
       </p:sp>
       <p:sp>
         <p:nvSpPr>
-          <p:cNvPr id="22" name="Shape 20"/>
+          <p:cNvPr id="17" name="Shape 15"/>
           <p:cNvSpPr/>
           <p:nvPr/>
         </p:nvSpPr>
         <p:spPr>
           <a:xfrm>
-            <a:off x="731520" y="2587752"/>
-            <a:ext cx="3657600" cy="658368"/>
-          </a:xfrm>
-          <a:prstGeom prst="rect">
-            <a:avLst/>
+            <a:off x="4023360" y="2286000"/>
+            <a:ext cx="3200400" cy="914400"/>
+          </a:xfrm>
+          <a:prstGeom prst="roundRect">
+            <a:avLst>
+              <a:gd name="adj" fmla="val 10000"/>
+            </a:avLst>
           </a:prstGeom>
           <a:solidFill>
             <a:srgbClr val="FFFFFF"/>
           </a:solidFill>
-          <a:ln/>
-          <a:effectLst>
-            <a:outerShdw sx="100000" sy="100000" kx="0" ky="0" algn="bl" rotWithShape="0" blurRad="50800" dist="25400" dir="8100000">
-              <a:srgbClr val="000000">
-                <a:alpha val="10000"/>
-              </a:srgbClr>
-            </a:outerShdw>
-          </a:effectLst>
-        </p:spPr>
-      </p:sp>
-      <p:sp>
-        <p:nvSpPr>
-          <p:cNvPr id="23" name="Shape 21"/>
+          <a:ln w="9525">
+            <a:solidFill>
+              <a:srgbClr val="E5E2DC"/>
+            </a:solidFill>
+            <a:prstDash val="solid"/>
+          </a:ln>
+        </p:spPr>
+      </p:sp>
+      <p:sp>
+        <p:nvSpPr>
+          <p:cNvPr id="18" name="Text 16"/>
           <p:cNvSpPr/>
           <p:nvPr/>
         </p:nvSpPr>
         <p:spPr>
           <a:xfrm>
-            <a:off x="731520" y="2587752"/>
-            <a:ext cx="54864" cy="658368"/>
+            <a:off x="4160520" y="2359152"/>
+            <a:ext cx="2926080" cy="320040"/>
           </a:xfrm>
           <a:prstGeom prst="rect">
             <a:avLst/>
           </a:prstGeom>
-          <a:solidFill>
-            <a:srgbClr val="2A9D8F"/>
-          </a:solidFill>
-          <a:ln/>
-        </p:spPr>
-      </p:sp>
-      <p:sp>
-        <p:nvSpPr>
-          <p:cNvPr id="24" name="Text 22"/>
-          <p:cNvSpPr/>
-          <p:nvPr/>
-        </p:nvSpPr>
-        <p:spPr>
-          <a:xfrm>
-            <a:off x="914400" y="2587752"/>
-            <a:ext cx="1463040" cy="658368"/>
-          </a:xfrm>
-          <a:prstGeom prst="rect">
-            <a:avLst/>
-          </a:prstGeom>
           <a:noFill/>
           <a:ln/>
         </p:spPr>
         <p:txBody>
-          <a:bodyPr wrap="square" lIns="0" tIns="0" rIns="0" bIns="0" rtlCol="0" anchor="ctr"/>
+          <a:bodyPr wrap="square" rtlCol="0" anchor="ctr"/>
           <a:lstStyle/>
           <a:p>
             <a:pPr indent="0" marL="0">
               <a:buNone/>
             </a:pPr>
             <a:r>
-              <a:rPr lang="en-US" sz="1300" b="1" dirty="0">
+              <a:rPr lang="en-US" sz="1400" b="1" dirty="0">
                 <a:solidFill>
-                  <a:srgbClr val="1B2A4A"/>
+                  <a:srgbClr val="2A9D8F"/>
                 </a:solidFill>
                 <a:latin typeface="Georgia" pitchFamily="34" charset="0"/>
                 <a:ea typeface="Georgia" pitchFamily="34" charset="-122"/>
@@ -2422,20 +2199,20 @@
               </a:rPr>
               <a:t>Residue</a:t>
             </a:r>
-            <a:endParaRPr lang="en-US" sz="1300" dirty="0"/>
+            <a:endParaRPr lang="en-US" sz="1400" dirty="0"/>
           </a:p>
         </p:txBody>
       </p:sp>
       <p:sp>
         <p:nvSpPr>
-          <p:cNvPr id="25" name="Text 23"/>
+          <p:cNvPr id="19" name="Text 17"/>
           <p:cNvSpPr/>
           <p:nvPr/>
         </p:nvSpPr>
         <p:spPr>
           <a:xfrm>
-            <a:off x="2377440" y="2587752"/>
-            <a:ext cx="1920240" cy="658368"/>
+            <a:off x="4160520" y="2697480"/>
+            <a:ext cx="2926080" cy="457200"/>
           </a:xfrm>
           <a:prstGeom prst="rect">
             <a:avLst/>
@@ -2444,10 +2221,13 @@
           <a:ln/>
         </p:spPr>
         <p:txBody>
-          <a:bodyPr wrap="square" lIns="0" tIns="0" rIns="0" bIns="0" rtlCol="0" anchor="ctr"/>
+          <a:bodyPr wrap="square" rtlCol="0" anchor="ctr"/>
           <a:lstStyle/>
           <a:p>
             <a:pPr indent="0" marL="0">
+              <a:lnSpc>
+                <a:spcPct val="130000"/>
+              </a:lnSpc>
               <a:buNone/>
             </a:pPr>
             <a:r>
@@ -2455,11 +2235,11 @@
                 <a:solidFill>
                   <a:srgbClr val="6B6660"/>
                 </a:solidFill>
-                <a:latin typeface="Calibri" pitchFamily="34" charset="0"/>
-                <a:ea typeface="Calibri" pitchFamily="34" charset="-122"/>
-                <a:cs typeface="Calibri" pitchFamily="34" charset="-120"/>
+                <a:latin typeface="Arial" pitchFamily="34" charset="0"/>
+                <a:ea typeface="Arial" pitchFamily="34" charset="-122"/>
+                <a:cs typeface="Arial" pitchFamily="34" charset="-120"/>
               </a:rPr>
-              <a:t>The solid left in the filter paper</a:t>
+              <a:t>The solid left behind in the filter paper.</a:t>
             </a:r>
             <a:endParaRPr lang="en-US" sz="1100" dirty="0"/>
           </a:p>
@@ -2467,79 +2247,59 @@
       </p:sp>
       <p:sp>
         <p:nvSpPr>
-          <p:cNvPr id="26" name="Shape 24"/>
+          <p:cNvPr id="20" name="Shape 18"/>
           <p:cNvSpPr/>
           <p:nvPr/>
         </p:nvSpPr>
         <p:spPr>
           <a:xfrm>
-            <a:off x="4754880" y="2587752"/>
-            <a:ext cx="3657600" cy="658368"/>
-          </a:xfrm>
-          <a:prstGeom prst="rect">
-            <a:avLst/>
+            <a:off x="7498080" y="2286000"/>
+            <a:ext cx="3200400" cy="914400"/>
+          </a:xfrm>
+          <a:prstGeom prst="roundRect">
+            <a:avLst>
+              <a:gd name="adj" fmla="val 10000"/>
+            </a:avLst>
           </a:prstGeom>
           <a:solidFill>
             <a:srgbClr val="FFFFFF"/>
           </a:solidFill>
-          <a:ln/>
-          <a:effectLst>
-            <a:outerShdw sx="100000" sy="100000" kx="0" ky="0" algn="bl" rotWithShape="0" blurRad="50800" dist="25400" dir="8100000">
-              <a:srgbClr val="000000">
-                <a:alpha val="10000"/>
-              </a:srgbClr>
-            </a:outerShdw>
-          </a:effectLst>
-        </p:spPr>
-      </p:sp>
-      <p:sp>
-        <p:nvSpPr>
-          <p:cNvPr id="27" name="Shape 25"/>
+          <a:ln w="9525">
+            <a:solidFill>
+              <a:srgbClr val="E5E2DC"/>
+            </a:solidFill>
+            <a:prstDash val="solid"/>
+          </a:ln>
+        </p:spPr>
+      </p:sp>
+      <p:sp>
+        <p:nvSpPr>
+          <p:cNvPr id="21" name="Text 19"/>
           <p:cNvSpPr/>
           <p:nvPr/>
         </p:nvSpPr>
         <p:spPr>
           <a:xfrm>
-            <a:off x="4754880" y="2587752"/>
-            <a:ext cx="54864" cy="658368"/>
+            <a:off x="7635240" y="2359152"/>
+            <a:ext cx="2926080" cy="320040"/>
           </a:xfrm>
           <a:prstGeom prst="rect">
             <a:avLst/>
           </a:prstGeom>
-          <a:solidFill>
-            <a:srgbClr val="2A9D8F"/>
-          </a:solidFill>
-          <a:ln/>
-        </p:spPr>
-      </p:sp>
-      <p:sp>
-        <p:nvSpPr>
-          <p:cNvPr id="28" name="Text 26"/>
-          <p:cNvSpPr/>
-          <p:nvPr/>
-        </p:nvSpPr>
-        <p:spPr>
-          <a:xfrm>
-            <a:off x="4937760" y="2587752"/>
-            <a:ext cx="1463040" cy="658368"/>
-          </a:xfrm>
-          <a:prstGeom prst="rect">
-            <a:avLst/>
-          </a:prstGeom>
           <a:noFill/>
           <a:ln/>
         </p:spPr>
         <p:txBody>
-          <a:bodyPr wrap="square" lIns="0" tIns="0" rIns="0" bIns="0" rtlCol="0" anchor="ctr"/>
+          <a:bodyPr wrap="square" rtlCol="0" anchor="ctr"/>
           <a:lstStyle/>
           <a:p>
             <a:pPr indent="0" marL="0">
               <a:buNone/>
             </a:pPr>
             <a:r>
-              <a:rPr lang="en-US" sz="1300" b="1" dirty="0">
+              <a:rPr lang="en-US" sz="1400" b="1" dirty="0">
                 <a:solidFill>
-                  <a:srgbClr val="1B2A4A"/>
+                  <a:srgbClr val="2A9D8F"/>
                 </a:solidFill>
                 <a:latin typeface="Georgia" pitchFamily="34" charset="0"/>
                 <a:ea typeface="Georgia" pitchFamily="34" charset="-122"/>
@@ -2547,20 +2307,20 @@
               </a:rPr>
               <a:t>Filtrate</a:t>
             </a:r>
-            <a:endParaRPr lang="en-US" sz="1300" dirty="0"/>
+            <a:endParaRPr lang="en-US" sz="1400" dirty="0"/>
           </a:p>
         </p:txBody>
       </p:sp>
       <p:sp>
         <p:nvSpPr>
-          <p:cNvPr id="29" name="Text 27"/>
+          <p:cNvPr id="22" name="Text 20"/>
           <p:cNvSpPr/>
           <p:nvPr/>
         </p:nvSpPr>
         <p:spPr>
           <a:xfrm>
-            <a:off x="6400800" y="2587752"/>
-            <a:ext cx="1920240" cy="658368"/>
+            <a:off x="7635240" y="2697480"/>
+            <a:ext cx="2926080" cy="457200"/>
           </a:xfrm>
           <a:prstGeom prst="rect">
             <a:avLst/>
@@ -2569,10 +2329,13 @@
           <a:ln/>
         </p:spPr>
         <p:txBody>
-          <a:bodyPr wrap="square" lIns="0" tIns="0" rIns="0" bIns="0" rtlCol="0" anchor="ctr"/>
+          <a:bodyPr wrap="square" rtlCol="0" anchor="ctr"/>
           <a:lstStyle/>
           <a:p>
             <a:pPr indent="0" marL="0">
+              <a:lnSpc>
+                <a:spcPct val="130000"/>
+              </a:lnSpc>
               <a:buNone/>
             </a:pPr>
             <a:r>
@@ -2580,11 +2343,11 @@
                 <a:solidFill>
                   <a:srgbClr val="6B6660"/>
                 </a:solidFill>
-                <a:latin typeface="Calibri" pitchFamily="34" charset="0"/>
-                <a:ea typeface="Calibri" pitchFamily="34" charset="-122"/>
-                <a:cs typeface="Calibri" pitchFamily="34" charset="-120"/>
+                <a:latin typeface="Arial" pitchFamily="34" charset="0"/>
+                <a:ea typeface="Arial" pitchFamily="34" charset="-122"/>
+                <a:cs typeface="Arial" pitchFamily="34" charset="-120"/>
               </a:rPr>
-              <a:t>The liquid that passes through the filter</a:t>
+              <a:t>The liquid that passes through the filter paper.</a:t>
             </a:r>
             <a:endParaRPr lang="en-US" sz="1100" dirty="0"/>
           </a:p>
@@ -2631,47 +2394,7 @@
         <p:spPr>
           <a:xfrm>
             <a:off x="0" y="0"/>
-            <a:ext cx="9144000" cy="822960"/>
-          </a:xfrm>
-          <a:prstGeom prst="rect">
-            <a:avLst/>
-          </a:prstGeom>
-          <a:solidFill>
-            <a:srgbClr val="FFFFFF"/>
-          </a:solidFill>
-          <a:ln/>
-        </p:spPr>
-      </p:sp>
-      <p:sp>
-        <p:nvSpPr>
-          <p:cNvPr id="3" name="Shape 1"/>
-          <p:cNvSpPr/>
-          <p:nvPr/>
-        </p:nvSpPr>
-        <p:spPr>
-          <a:xfrm>
-            <a:off x="0" y="804672"/>
-            <a:ext cx="9144000" cy="27432"/>
-          </a:xfrm>
-          <a:prstGeom prst="rect">
-            <a:avLst/>
-          </a:prstGeom>
-          <a:solidFill>
-            <a:srgbClr val="E5E2DC"/>
-          </a:solidFill>
-          <a:ln/>
-        </p:spPr>
-      </p:sp>
-      <p:sp>
-        <p:nvSpPr>
-          <p:cNvPr id="4" name="Shape 2"/>
-          <p:cNvSpPr/>
-          <p:nvPr/>
-        </p:nvSpPr>
-        <p:spPr>
-          <a:xfrm>
-            <a:off x="548640" y="201168"/>
-            <a:ext cx="54864" cy="420624"/>
+            <a:ext cx="73152" cy="5148072"/>
           </a:xfrm>
           <a:prstGeom prst="rect">
             <a:avLst/>
@@ -2684,14 +2407,14 @@
       </p:sp>
       <p:sp>
         <p:nvSpPr>
-          <p:cNvPr id="5" name="Text 3"/>
+          <p:cNvPr id="3" name="Text 1"/>
           <p:cNvSpPr/>
           <p:nvPr/>
         </p:nvSpPr>
         <p:spPr>
           <a:xfrm>
-            <a:off x="777240" y="137160"/>
-            <a:ext cx="7772400" cy="548640"/>
+            <a:off x="548640" y="274320"/>
+            <a:ext cx="9144000" cy="640080"/>
           </a:xfrm>
           <a:prstGeom prst="rect">
             <a:avLst/>
@@ -2700,14 +2423,14 @@
           <a:ln/>
         </p:spPr>
         <p:txBody>
-          <a:bodyPr wrap="square" lIns="0" tIns="0" rIns="0" bIns="0" rtlCol="0" anchor="ctr"/>
+          <a:bodyPr wrap="square" rtlCol="0" anchor="ctr"/>
           <a:lstStyle/>
           <a:p>
             <a:pPr indent="0" marL="0">
               <a:buNone/>
             </a:pPr>
             <a:r>
-              <a:rPr lang="en-US" sz="2000" b="1" dirty="0">
+              <a:rPr lang="en-US" sz="2400" b="1" dirty="0">
                 <a:solidFill>
                   <a:srgbClr val="1B2A4A"/>
                 </a:solidFill>
@@ -2715,9 +2438,9 @@
                 <a:ea typeface="Georgia" pitchFamily="34" charset="-122"/>
                 <a:cs typeface="Georgia" pitchFamily="34" charset="-120"/>
               </a:rPr>
-              <a:t>Choosing the Right Technique</a:t>
+              <a:t>Which Separation Method?</a:t>
             </a:r>
-            <a:endParaRPr lang="en-US" sz="2000" dirty="0"/>
+            <a:endParaRPr lang="en-US" sz="2400" dirty="0"/>
           </a:p>
         </p:txBody>
       </p:sp>
@@ -2736,25 +2459,26 @@
           </p:nvPr>
         </p:nvGraphicFramePr>
         <p:xfrm>
-          <a:off x="640080" y="1051560"/>
-          <a:ext cx="7863840" cy="914400"/>
+          <a:off x="548640" y="1097280"/>
+          <a:ext cx="9144000" cy="914400"/>
         </p:xfrm>
         <a:graphic>
           <a:graphicData uri="http://schemas.openxmlformats.org/drawingml/2006/table">
             <a:tbl>
               <a:tblPr/>
               <a:tblGrid>
-                <a:gridCol w="2621280"/>
-                <a:gridCol w="2621280"/>
-                <a:gridCol w="2621280"/>
+                <a:gridCol w="2286000"/>
+                <a:gridCol w="2286000"/>
+                <a:gridCol w="2286000"/>
+                <a:gridCol w="2286000"/>
               </a:tblGrid>
-              <a:tr h="502920">
+              <a:tr h="411480">
                 <a:tc>
                   <a:txBody>
                     <a:bodyPr/>
                     <a:lstStyle/>
                     <a:p>
-                      <a:pPr indent="0" marL="0">
+                      <a:pPr algn="ctr" indent="0" marL="0">
                         <a:buNone/>
                       </a:pPr>
                       <a:r>
@@ -2762,20 +2486,20 @@
                           <a:solidFill>
                             <a:srgbClr val="FFFFFF"/>
                           </a:solidFill>
-                          <a:latin typeface="Calibri" pitchFamily="34" charset="0"/>
-                          <a:ea typeface="Calibri" pitchFamily="34" charset="-122"/>
-                          <a:cs typeface="Calibri" pitchFamily="34" charset="-120"/>
+                          <a:latin typeface="Arial" pitchFamily="34" charset="0"/>
+                          <a:ea typeface="Arial" pitchFamily="34" charset="-122"/>
+                          <a:cs typeface="Arial" pitchFamily="34" charset="-120"/>
                         </a:rPr>
-                        <a:t>Technique</a:t>
+                        <a:t>Method</a:t>
                       </a:r>
                       <a:endParaRPr lang="en-US" sz="1200" dirty="0">
-                        <a:latin typeface="Calibri" charset="0"/>
-                        <a:ea typeface="Calibri" charset="0"/>
-                        <a:cs typeface="Calibri" charset="0"/>
+                        <a:latin typeface="Arial" charset="0"/>
+                        <a:ea typeface="Arial" charset="0"/>
+                        <a:cs typeface="Arial" charset="0"/>
                       </a:endParaRPr>
                     </a:p>
                   </a:txBody>
-                  <a:tcPr marL="91440" marR="91440" marT="45720" marB="45720">
+                  <a:tcPr marL="101600" marR="101600" marT="50800" marB="50800" anchor="ctr">
                     <a:lnL w="6350" cap="flat" cmpd="sng" algn="ctr">
                       <a:solidFill>
                         <a:srgbClr val="E5E2DC"/>
@@ -2822,7 +2546,7 @@
                     <a:bodyPr/>
                     <a:lstStyle/>
                     <a:p>
-                      <a:pPr indent="0" marL="0">
+                      <a:pPr algn="ctr" indent="0" marL="0">
                         <a:buNone/>
                       </a:pPr>
                       <a:r>
@@ -2830,20 +2554,20 @@
                           <a:solidFill>
                             <a:srgbClr val="FFFFFF"/>
                           </a:solidFill>
-                          <a:latin typeface="Calibri" pitchFamily="34" charset="0"/>
-                          <a:ea typeface="Calibri" pitchFamily="34" charset="-122"/>
-                          <a:cs typeface="Calibri" pitchFamily="34" charset="-120"/>
+                          <a:latin typeface="Arial" pitchFamily="34" charset="0"/>
+                          <a:ea typeface="Arial" pitchFamily="34" charset="-122"/>
+                          <a:cs typeface="Arial" pitchFamily="34" charset="-120"/>
                         </a:rPr>
-                        <a:t>What It Separates</a:t>
+                        <a:t>Separates</a:t>
                       </a:r>
                       <a:endParaRPr lang="en-US" sz="1200" dirty="0">
-                        <a:latin typeface="Calibri" charset="0"/>
-                        <a:ea typeface="Calibri" charset="0"/>
-                        <a:cs typeface="Calibri" charset="0"/>
+                        <a:latin typeface="Arial" charset="0"/>
+                        <a:ea typeface="Arial" charset="0"/>
+                        <a:cs typeface="Arial" charset="0"/>
                       </a:endParaRPr>
                     </a:p>
                   </a:txBody>
-                  <a:tcPr marL="91440" marR="91440" marT="45720" marB="45720">
+                  <a:tcPr marL="101600" marR="101600" marT="50800" marB="50800" anchor="ctr">
                     <a:lnL w="6350" cap="flat" cmpd="sng" algn="ctr">
                       <a:solidFill>
                         <a:srgbClr val="E5E2DC"/>
@@ -2890,7 +2614,7 @@
                     <a:bodyPr/>
                     <a:lstStyle/>
                     <a:p>
-                      <a:pPr indent="0" marL="0">
+                      <a:pPr algn="ctr" indent="0" marL="0">
                         <a:buNone/>
                       </a:pPr>
                       <a:r>
@@ -2898,20 +2622,88 @@
                           <a:solidFill>
                             <a:srgbClr val="FFFFFF"/>
                           </a:solidFill>
-                          <a:latin typeface="Calibri" pitchFamily="34" charset="0"/>
-                          <a:ea typeface="Calibri" pitchFamily="34" charset="-122"/>
-                          <a:cs typeface="Calibri" pitchFamily="34" charset="-120"/>
+                          <a:latin typeface="Arial" pitchFamily="34" charset="0"/>
+                          <a:ea typeface="Arial" pitchFamily="34" charset="-122"/>
+                          <a:cs typeface="Arial" pitchFamily="34" charset="-120"/>
                         </a:rPr>
                         <a:t>Example</a:t>
                       </a:r>
                       <a:endParaRPr lang="en-US" sz="1200" dirty="0">
-                        <a:latin typeface="Calibri" charset="0"/>
-                        <a:ea typeface="Calibri" charset="0"/>
-                        <a:cs typeface="Calibri" charset="0"/>
+                        <a:latin typeface="Arial" charset="0"/>
+                        <a:ea typeface="Arial" charset="0"/>
+                        <a:cs typeface="Arial" charset="0"/>
                       </a:endParaRPr>
                     </a:p>
                   </a:txBody>
-                  <a:tcPr marL="91440" marR="91440" marT="45720" marB="45720">
+                  <a:tcPr marL="101600" marR="101600" marT="50800" marB="50800" anchor="ctr">
+                    <a:lnL w="6350" cap="flat" cmpd="sng" algn="ctr">
+                      <a:solidFill>
+                        <a:srgbClr val="E5E2DC"/>
+                      </a:solidFill>
+                      <a:prstDash val="solid"/>
+                      <a:round/>
+                      <a:headEnd type="none" w="med" len="med"/>
+                      <a:tailEnd type="none" w="med" len="med"/>
+                    </a:lnL>
+                    <a:lnR w="6350" cap="flat" cmpd="sng" algn="ctr">
+                      <a:solidFill>
+                        <a:srgbClr val="E5E2DC"/>
+                      </a:solidFill>
+                      <a:prstDash val="solid"/>
+                      <a:round/>
+                      <a:headEnd type="none" w="med" len="med"/>
+                      <a:tailEnd type="none" w="med" len="med"/>
+                    </a:lnR>
+                    <a:lnT w="6350" cap="flat" cmpd="sng" algn="ctr">
+                      <a:solidFill>
+                        <a:srgbClr val="E5E2DC"/>
+                      </a:solidFill>
+                      <a:prstDash val="solid"/>
+                      <a:round/>
+                      <a:headEnd type="none" w="med" len="med"/>
+                      <a:tailEnd type="none" w="med" len="med"/>
+                    </a:lnT>
+                    <a:lnB w="6350" cap="flat" cmpd="sng" algn="ctr">
+                      <a:solidFill>
+                        <a:srgbClr val="E5E2DC"/>
+                      </a:solidFill>
+                      <a:prstDash val="solid"/>
+                      <a:round/>
+                      <a:headEnd type="none" w="med" len="med"/>
+                      <a:tailEnd type="none" w="med" len="med"/>
+                    </a:lnB>
+                    <a:solidFill>
+                      <a:srgbClr val="2A9D8F"/>
+                    </a:solidFill>
+                  </a:tcPr>
+                </a:tc>
+                <a:tc>
+                  <a:txBody>
+                    <a:bodyPr/>
+                    <a:lstStyle/>
+                    <a:p>
+                      <a:pPr algn="ctr" indent="0" marL="0">
+                        <a:buNone/>
+                      </a:pPr>
+                      <a:r>
+                        <a:rPr lang="en-US" sz="1200" b="1" dirty="0">
+                          <a:solidFill>
+                            <a:srgbClr val="FFFFFF"/>
+                          </a:solidFill>
+                          <a:latin typeface="Arial" pitchFamily="34" charset="0"/>
+                          <a:ea typeface="Arial" pitchFamily="34" charset="-122"/>
+                          <a:cs typeface="Arial" pitchFamily="34" charset="-120"/>
+                        </a:rPr>
+                        <a:t>Principle</a:t>
+                      </a:r>
+                      <a:endParaRPr lang="en-US" sz="1200" dirty="0">
+                        <a:latin typeface="Arial" charset="0"/>
+                        <a:ea typeface="Arial" charset="0"/>
+                        <a:cs typeface="Arial" charset="0"/>
+                      </a:endParaRPr>
+                    </a:p>
+                  </a:txBody>
+                  <a:tcPr marL="101600" marR="101600" marT="50800" marB="50800" anchor="ctr">
                     <a:lnL w="6350" cap="flat" cmpd="sng" algn="ctr">
                       <a:solidFill>
                         <a:srgbClr val="E5E2DC"/>
@@ -2954,7 +2746,7 @@
                   </a:tcPr>
                 </a:tc>
               </a:tr>
-              <a:tr h="502920">
+              <a:tr h="365760">
                 <a:tc>
                   <a:txBody>
                     <a:bodyPr/>
@@ -2968,20 +2760,20 @@
                           <a:solidFill>
                             <a:srgbClr val="3D3A36"/>
                           </a:solidFill>
-                          <a:latin typeface="Calibri" pitchFamily="34" charset="0"/>
-                          <a:ea typeface="Calibri" pitchFamily="34" charset="-122"/>
-                          <a:cs typeface="Calibri" pitchFamily="34" charset="-120"/>
+                          <a:latin typeface="Arial" pitchFamily="34" charset="0"/>
+                          <a:ea typeface="Arial" pitchFamily="34" charset="-122"/>
+                          <a:cs typeface="Arial" pitchFamily="34" charset="-120"/>
                         </a:rPr>
                         <a:t>Filtration</a:t>
                       </a:r>
                       <a:endParaRPr lang="en-US" sz="1200" dirty="0">
-                        <a:latin typeface="Calibri" charset="0"/>
-                        <a:ea typeface="Calibri" charset="0"/>
-                        <a:cs typeface="Calibri" charset="0"/>
+                        <a:latin typeface="Arial" charset="0"/>
+                        <a:ea typeface="Arial" charset="0"/>
+                        <a:cs typeface="Arial" charset="0"/>
                       </a:endParaRPr>
                     </a:p>
                   </a:txBody>
-                  <a:tcPr marL="91440" marR="91440" marT="45720" marB="45720">
+                  <a:tcPr marL="101600" marR="101600" marT="50800" marB="50800" anchor="ctr">
                     <a:lnL w="6350" cap="flat" cmpd="sng" algn="ctr">
                       <a:solidFill>
                         <a:srgbClr val="E5E2DC"/>
@@ -3036,20 +2828,20 @@
                           <a:solidFill>
                             <a:srgbClr val="3D3A36"/>
                           </a:solidFill>
-                          <a:latin typeface="Calibri" pitchFamily="34" charset="0"/>
-                          <a:ea typeface="Calibri" pitchFamily="34" charset="-122"/>
-                          <a:cs typeface="Calibri" pitchFamily="34" charset="-120"/>
+                          <a:latin typeface="Arial" pitchFamily="34" charset="0"/>
+                          <a:ea typeface="Arial" pitchFamily="34" charset="-122"/>
+                          <a:cs typeface="Arial" pitchFamily="34" charset="-120"/>
                         </a:rPr>
-                        <a:t>Insoluble solid from liquid</a:t>
+                        <a:t>Insoluble solid + liquid</a:t>
                       </a:r>
                       <a:endParaRPr lang="en-US" sz="1200" dirty="0">
-                        <a:latin typeface="Calibri" charset="0"/>
-                        <a:ea typeface="Calibri" charset="0"/>
-                        <a:cs typeface="Calibri" charset="0"/>
+                        <a:latin typeface="Arial" charset="0"/>
+                        <a:ea typeface="Arial" charset="0"/>
+                        <a:cs typeface="Arial" charset="0"/>
                       </a:endParaRPr>
                     </a:p>
                   </a:txBody>
-                  <a:tcPr marL="91440" marR="91440" marT="45720" marB="45720">
+                  <a:tcPr marL="101600" marR="101600" marT="50800" marB="50800" anchor="ctr">
                     <a:lnL w="6350" cap="flat" cmpd="sng" algn="ctr">
                       <a:solidFill>
                         <a:srgbClr val="E5E2DC"/>
@@ -3104,20 +2896,20 @@
                           <a:solidFill>
                             <a:srgbClr val="3D3A36"/>
                           </a:solidFill>
-                          <a:latin typeface="Calibri" pitchFamily="34" charset="0"/>
-                          <a:ea typeface="Calibri" pitchFamily="34" charset="-122"/>
-                          <a:cs typeface="Calibri" pitchFamily="34" charset="-120"/>
+                          <a:latin typeface="Arial" pitchFamily="34" charset="0"/>
+                          <a:ea typeface="Arial" pitchFamily="34" charset="-122"/>
+                          <a:cs typeface="Arial" pitchFamily="34" charset="-120"/>
                         </a:rPr>
                         <a:t>Sand from water</a:t>
                       </a:r>
                       <a:endParaRPr lang="en-US" sz="1200" dirty="0">
-                        <a:latin typeface="Calibri" charset="0"/>
-                        <a:ea typeface="Calibri" charset="0"/>
-                        <a:cs typeface="Calibri" charset="0"/>
+                        <a:latin typeface="Arial" charset="0"/>
+                        <a:ea typeface="Arial" charset="0"/>
+                        <a:cs typeface="Arial" charset="0"/>
                       </a:endParaRPr>
                     </a:p>
                   </a:txBody>
-                  <a:tcPr marL="91440" marR="91440" marT="45720" marB="45720">
+                  <a:tcPr marL="101600" marR="101600" marT="50800" marB="50800" anchor="ctr">
                     <a:lnL w="6350" cap="flat" cmpd="sng" algn="ctr">
                       <a:solidFill>
                         <a:srgbClr val="E5E2DC"/>
@@ -3159,8 +2951,6 @@
                     </a:solidFill>
                   </a:tcPr>
                 </a:tc>
-              </a:tr>
-              <a:tr h="502920">
                 <a:tc>
                   <a:txBody>
                     <a:bodyPr/>
@@ -3174,20 +2964,90 @@
                           <a:solidFill>
                             <a:srgbClr val="3D3A36"/>
                           </a:solidFill>
-                          <a:latin typeface="Calibri" pitchFamily="34" charset="0"/>
-                          <a:ea typeface="Calibri" pitchFamily="34" charset="-122"/>
-                          <a:cs typeface="Calibri" pitchFamily="34" charset="-120"/>
+                          <a:latin typeface="Arial" pitchFamily="34" charset="0"/>
+                          <a:ea typeface="Arial" pitchFamily="34" charset="-122"/>
+                          <a:cs typeface="Arial" pitchFamily="34" charset="-120"/>
+                        </a:rPr>
+                        <a:t>Size — solid too big for holes</a:t>
+                      </a:r>
+                      <a:endParaRPr lang="en-US" sz="1200" dirty="0">
+                        <a:latin typeface="Arial" charset="0"/>
+                        <a:ea typeface="Arial" charset="0"/>
+                        <a:cs typeface="Arial" charset="0"/>
+                      </a:endParaRPr>
+                    </a:p>
+                  </a:txBody>
+                  <a:tcPr marL="101600" marR="101600" marT="50800" marB="50800" anchor="ctr">
+                    <a:lnL w="6350" cap="flat" cmpd="sng" algn="ctr">
+                      <a:solidFill>
+                        <a:srgbClr val="E5E2DC"/>
+                      </a:solidFill>
+                      <a:prstDash val="solid"/>
+                      <a:round/>
+                      <a:headEnd type="none" w="med" len="med"/>
+                      <a:tailEnd type="none" w="med" len="med"/>
+                    </a:lnL>
+                    <a:lnR w="6350" cap="flat" cmpd="sng" algn="ctr">
+                      <a:solidFill>
+                        <a:srgbClr val="E5E2DC"/>
+                      </a:solidFill>
+                      <a:prstDash val="solid"/>
+                      <a:round/>
+                      <a:headEnd type="none" w="med" len="med"/>
+                      <a:tailEnd type="none" w="med" len="med"/>
+                    </a:lnR>
+                    <a:lnT w="6350" cap="flat" cmpd="sng" algn="ctr">
+                      <a:solidFill>
+                        <a:srgbClr val="E5E2DC"/>
+                      </a:solidFill>
+                      <a:prstDash val="solid"/>
+                      <a:round/>
+                      <a:headEnd type="none" w="med" len="med"/>
+                      <a:tailEnd type="none" w="med" len="med"/>
+                    </a:lnT>
+                    <a:lnB w="6350" cap="flat" cmpd="sng" algn="ctr">
+                      <a:solidFill>
+                        <a:srgbClr val="E5E2DC"/>
+                      </a:solidFill>
+                      <a:prstDash val="solid"/>
+                      <a:round/>
+                      <a:headEnd type="none" w="med" len="med"/>
+                      <a:tailEnd type="none" w="med" len="med"/>
+                    </a:lnB>
+                    <a:solidFill>
+                      <a:srgbClr val="FFFFFF"/>
+                    </a:solidFill>
+                  </a:tcPr>
+                </a:tc>
+              </a:tr>
+              <a:tr h="365760">
+                <a:tc>
+                  <a:txBody>
+                    <a:bodyPr/>
+                    <a:lstStyle/>
+                    <a:p>
+                      <a:pPr indent="0" marL="0">
+                        <a:buNone/>
+                      </a:pPr>
+                      <a:r>
+                        <a:rPr lang="en-US" sz="1200" dirty="0">
+                          <a:solidFill>
+                            <a:srgbClr val="3D3A36"/>
+                          </a:solidFill>
+                          <a:latin typeface="Arial" pitchFamily="34" charset="0"/>
+                          <a:ea typeface="Arial" pitchFamily="34" charset="-122"/>
+                          <a:cs typeface="Arial" pitchFamily="34" charset="-120"/>
                         </a:rPr>
                         <a:t>Evaporation</a:t>
                       </a:r>
                       <a:endParaRPr lang="en-US" sz="1200" dirty="0">
-                        <a:latin typeface="Calibri" charset="0"/>
-                        <a:ea typeface="Calibri" charset="0"/>
-                        <a:cs typeface="Calibri" charset="0"/>
+                        <a:latin typeface="Arial" charset="0"/>
+                        <a:ea typeface="Arial" charset="0"/>
+                        <a:cs typeface="Arial" charset="0"/>
                       </a:endParaRPr>
                     </a:p>
                   </a:txBody>
-                  <a:tcPr marL="91440" marR="91440" marT="45720" marB="45720">
+                  <a:tcPr marL="101600" marR="101600" marT="50800" marB="50800" anchor="ctr">
                     <a:lnL w="6350" cap="flat" cmpd="sng" algn="ctr">
                       <a:solidFill>
                         <a:srgbClr val="E5E2DC"/>
@@ -3242,20 +3102,20 @@
                           <a:solidFill>
                             <a:srgbClr val="3D3A36"/>
                           </a:solidFill>
-                          <a:latin typeface="Calibri" pitchFamily="34" charset="0"/>
-                          <a:ea typeface="Calibri" pitchFamily="34" charset="-122"/>
-                          <a:cs typeface="Calibri" pitchFamily="34" charset="-120"/>
+                          <a:latin typeface="Arial" pitchFamily="34" charset="0"/>
+                          <a:ea typeface="Arial" pitchFamily="34" charset="-122"/>
+                          <a:cs typeface="Arial" pitchFamily="34" charset="-120"/>
                         </a:rPr>
                         <a:t>Dissolved solid from liquid</a:t>
                       </a:r>
                       <a:endParaRPr lang="en-US" sz="1200" dirty="0">
-                        <a:latin typeface="Calibri" charset="0"/>
-                        <a:ea typeface="Calibri" charset="0"/>
-                        <a:cs typeface="Calibri" charset="0"/>
+                        <a:latin typeface="Arial" charset="0"/>
+                        <a:ea typeface="Arial" charset="0"/>
+                        <a:cs typeface="Arial" charset="0"/>
                       </a:endParaRPr>
                     </a:p>
                   </a:txBody>
-                  <a:tcPr marL="91440" marR="91440" marT="45720" marB="45720">
+                  <a:tcPr marL="101600" marR="101600" marT="50800" marB="50800" anchor="ctr">
                     <a:lnL w="6350" cap="flat" cmpd="sng" algn="ctr">
                       <a:solidFill>
                         <a:srgbClr val="E5E2DC"/>
@@ -3310,20 +3170,20 @@
                           <a:solidFill>
                             <a:srgbClr val="3D3A36"/>
                           </a:solidFill>
-                          <a:latin typeface="Calibri" pitchFamily="34" charset="0"/>
-                          <a:ea typeface="Calibri" pitchFamily="34" charset="-122"/>
-                          <a:cs typeface="Calibri" pitchFamily="34" charset="-120"/>
+                          <a:latin typeface="Arial" pitchFamily="34" charset="0"/>
+                          <a:ea typeface="Arial" pitchFamily="34" charset="-122"/>
+                          <a:cs typeface="Arial" pitchFamily="34" charset="-120"/>
                         </a:rPr>
                         <a:t>Salt from salt water</a:t>
                       </a:r>
                       <a:endParaRPr lang="en-US" sz="1200" dirty="0">
-                        <a:latin typeface="Calibri" charset="0"/>
-                        <a:ea typeface="Calibri" charset="0"/>
-                        <a:cs typeface="Calibri" charset="0"/>
+                        <a:latin typeface="Arial" charset="0"/>
+                        <a:ea typeface="Arial" charset="0"/>
+                        <a:cs typeface="Arial" charset="0"/>
                       </a:endParaRPr>
                     </a:p>
                   </a:txBody>
-                  <a:tcPr marL="91440" marR="91440" marT="45720" marB="45720">
+                  <a:tcPr marL="101600" marR="101600" marT="50800" marB="50800" anchor="ctr">
                     <a:lnL w="6350" cap="flat" cmpd="sng" algn="ctr">
                       <a:solidFill>
                         <a:srgbClr val="E5E2DC"/>
@@ -3365,8 +3225,6 @@
                     </a:solidFill>
                   </a:tcPr>
                 </a:tc>
-              </a:tr>
-              <a:tr h="502920">
                 <a:tc>
                   <a:txBody>
                     <a:bodyPr/>
@@ -3380,20 +3238,90 @@
                           <a:solidFill>
                             <a:srgbClr val="3D3A36"/>
                           </a:solidFill>
-                          <a:latin typeface="Calibri" pitchFamily="34" charset="0"/>
-                          <a:ea typeface="Calibri" pitchFamily="34" charset="-122"/>
-                          <a:cs typeface="Calibri" pitchFamily="34" charset="-120"/>
+                          <a:latin typeface="Arial" pitchFamily="34" charset="0"/>
+                          <a:ea typeface="Arial" pitchFamily="34" charset="-122"/>
+                          <a:cs typeface="Arial" pitchFamily="34" charset="-120"/>
+                        </a:rPr>
+                        <a:t>Water evaporates, solid remains</a:t>
+                      </a:r>
+                      <a:endParaRPr lang="en-US" sz="1200" dirty="0">
+                        <a:latin typeface="Arial" charset="0"/>
+                        <a:ea typeface="Arial" charset="0"/>
+                        <a:cs typeface="Arial" charset="0"/>
+                      </a:endParaRPr>
+                    </a:p>
+                  </a:txBody>
+                  <a:tcPr marL="101600" marR="101600" marT="50800" marB="50800" anchor="ctr">
+                    <a:lnL w="6350" cap="flat" cmpd="sng" algn="ctr">
+                      <a:solidFill>
+                        <a:srgbClr val="E5E2DC"/>
+                      </a:solidFill>
+                      <a:prstDash val="solid"/>
+                      <a:round/>
+                      <a:headEnd type="none" w="med" len="med"/>
+                      <a:tailEnd type="none" w="med" len="med"/>
+                    </a:lnL>
+                    <a:lnR w="6350" cap="flat" cmpd="sng" algn="ctr">
+                      <a:solidFill>
+                        <a:srgbClr val="E5E2DC"/>
+                      </a:solidFill>
+                      <a:prstDash val="solid"/>
+                      <a:round/>
+                      <a:headEnd type="none" w="med" len="med"/>
+                      <a:tailEnd type="none" w="med" len="med"/>
+                    </a:lnR>
+                    <a:lnT w="6350" cap="flat" cmpd="sng" algn="ctr">
+                      <a:solidFill>
+                        <a:srgbClr val="E5E2DC"/>
+                      </a:solidFill>
+                      <a:prstDash val="solid"/>
+                      <a:round/>
+                      <a:headEnd type="none" w="med" len="med"/>
+                      <a:tailEnd type="none" w="med" len="med"/>
+                    </a:lnT>
+                    <a:lnB w="6350" cap="flat" cmpd="sng" algn="ctr">
+                      <a:solidFill>
+                        <a:srgbClr val="E5E2DC"/>
+                      </a:solidFill>
+                      <a:prstDash val="solid"/>
+                      <a:round/>
+                      <a:headEnd type="none" w="med" len="med"/>
+                      <a:tailEnd type="none" w="med" len="med"/>
+                    </a:lnB>
+                    <a:solidFill>
+                      <a:srgbClr val="F8F6F3"/>
+                    </a:solidFill>
+                  </a:tcPr>
+                </a:tc>
+              </a:tr>
+              <a:tr h="365760">
+                <a:tc>
+                  <a:txBody>
+                    <a:bodyPr/>
+                    <a:lstStyle/>
+                    <a:p>
+                      <a:pPr indent="0" marL="0">
+                        <a:buNone/>
+                      </a:pPr>
+                      <a:r>
+                        <a:rPr lang="en-US" sz="1200" dirty="0">
+                          <a:solidFill>
+                            <a:srgbClr val="3D3A36"/>
+                          </a:solidFill>
+                          <a:latin typeface="Arial" pitchFamily="34" charset="0"/>
+                          <a:ea typeface="Arial" pitchFamily="34" charset="-122"/>
+                          <a:cs typeface="Arial" pitchFamily="34" charset="-120"/>
                         </a:rPr>
                         <a:t>Distillation</a:t>
                       </a:r>
                       <a:endParaRPr lang="en-US" sz="1200" dirty="0">
-                        <a:latin typeface="Calibri" charset="0"/>
-                        <a:ea typeface="Calibri" charset="0"/>
-                        <a:cs typeface="Calibri" charset="0"/>
+                        <a:latin typeface="Arial" charset="0"/>
+                        <a:ea typeface="Arial" charset="0"/>
+                        <a:cs typeface="Arial" charset="0"/>
                       </a:endParaRPr>
                     </a:p>
                   </a:txBody>
-                  <a:tcPr marL="91440" marR="91440" marT="45720" marB="45720">
+                  <a:tcPr marL="101600" marR="101600" marT="50800" marB="50800" anchor="ctr">
                     <a:lnL w="6350" cap="flat" cmpd="sng" algn="ctr">
                       <a:solidFill>
                         <a:srgbClr val="E5E2DC"/>
@@ -3448,20 +3376,20 @@
                           <a:solidFill>
                             <a:srgbClr val="3D3A36"/>
                           </a:solidFill>
-                          <a:latin typeface="Calibri" pitchFamily="34" charset="0"/>
-                          <a:ea typeface="Calibri" pitchFamily="34" charset="-122"/>
-                          <a:cs typeface="Calibri" pitchFamily="34" charset="-120"/>
+                          <a:latin typeface="Arial" pitchFamily="34" charset="0"/>
+                          <a:ea typeface="Arial" pitchFamily="34" charset="-122"/>
+                          <a:cs typeface="Arial" pitchFamily="34" charset="-120"/>
                         </a:rPr>
-                        <a:t>Two liquids / liquid from solution</a:t>
+                        <a:t>Liquid from a solution</a:t>
                       </a:r>
                       <a:endParaRPr lang="en-US" sz="1200" dirty="0">
-                        <a:latin typeface="Calibri" charset="0"/>
-                        <a:ea typeface="Calibri" charset="0"/>
-                        <a:cs typeface="Calibri" charset="0"/>
+                        <a:latin typeface="Arial" charset="0"/>
+                        <a:ea typeface="Arial" charset="0"/>
+                        <a:cs typeface="Arial" charset="0"/>
                       </a:endParaRPr>
                     </a:p>
                   </a:txBody>
-                  <a:tcPr marL="91440" marR="91440" marT="45720" marB="45720">
+                  <a:tcPr marL="101600" marR="101600" marT="50800" marB="50800" anchor="ctr">
                     <a:lnL w="6350" cap="flat" cmpd="sng" algn="ctr">
                       <a:solidFill>
                         <a:srgbClr val="E5E2DC"/>
@@ -3516,20 +3444,20 @@
                           <a:solidFill>
                             <a:srgbClr val="3D3A36"/>
                           </a:solidFill>
-                          <a:latin typeface="Calibri" pitchFamily="34" charset="0"/>
-                          <a:ea typeface="Calibri" pitchFamily="34" charset="-122"/>
-                          <a:cs typeface="Calibri" pitchFamily="34" charset="-120"/>
+                          <a:latin typeface="Arial" pitchFamily="34" charset="0"/>
+                          <a:ea typeface="Arial" pitchFamily="34" charset="-122"/>
+                          <a:cs typeface="Arial" pitchFamily="34" charset="-120"/>
                         </a:rPr>
-                        <a:t>Water from salt water</a:t>
+                        <a:t>Pure water from salt water</a:t>
                       </a:r>
                       <a:endParaRPr lang="en-US" sz="1200" dirty="0">
-                        <a:latin typeface="Calibri" charset="0"/>
-                        <a:ea typeface="Calibri" charset="0"/>
-                        <a:cs typeface="Calibri" charset="0"/>
+                        <a:latin typeface="Arial" charset="0"/>
+                        <a:ea typeface="Arial" charset="0"/>
+                        <a:cs typeface="Arial" charset="0"/>
                       </a:endParaRPr>
                     </a:p>
                   </a:txBody>
-                  <a:tcPr marL="91440" marR="91440" marT="45720" marB="45720">
+                  <a:tcPr marL="101600" marR="101600" marT="50800" marB="50800" anchor="ctr">
                     <a:lnL w="6350" cap="flat" cmpd="sng" algn="ctr">
                       <a:solidFill>
                         <a:srgbClr val="E5E2DC"/>
@@ -3571,8 +3499,6 @@
                     </a:solidFill>
                   </a:tcPr>
                 </a:tc>
-              </a:tr>
-              <a:tr h="502920">
                 <a:tc>
                   <a:txBody>
                     <a:bodyPr/>
@@ -3586,20 +3512,90 @@
                           <a:solidFill>
                             <a:srgbClr val="3D3A36"/>
                           </a:solidFill>
-                          <a:latin typeface="Calibri" pitchFamily="34" charset="0"/>
-                          <a:ea typeface="Calibri" pitchFamily="34" charset="-122"/>
-                          <a:cs typeface="Calibri" pitchFamily="34" charset="-120"/>
+                          <a:latin typeface="Arial" pitchFamily="34" charset="0"/>
+                          <a:ea typeface="Arial" pitchFamily="34" charset="-122"/>
+                          <a:cs typeface="Arial" pitchFamily="34" charset="-120"/>
+                        </a:rPr>
+                        <a:t>Different boiling points</a:t>
+                      </a:r>
+                      <a:endParaRPr lang="en-US" sz="1200" dirty="0">
+                        <a:latin typeface="Arial" charset="0"/>
+                        <a:ea typeface="Arial" charset="0"/>
+                        <a:cs typeface="Arial" charset="0"/>
+                      </a:endParaRPr>
+                    </a:p>
+                  </a:txBody>
+                  <a:tcPr marL="101600" marR="101600" marT="50800" marB="50800" anchor="ctr">
+                    <a:lnL w="6350" cap="flat" cmpd="sng" algn="ctr">
+                      <a:solidFill>
+                        <a:srgbClr val="E5E2DC"/>
+                      </a:solidFill>
+                      <a:prstDash val="solid"/>
+                      <a:round/>
+                      <a:headEnd type="none" w="med" len="med"/>
+                      <a:tailEnd type="none" w="med" len="med"/>
+                    </a:lnL>
+                    <a:lnR w="6350" cap="flat" cmpd="sng" algn="ctr">
+                      <a:solidFill>
+                        <a:srgbClr val="E5E2DC"/>
+                      </a:solidFill>
+                      <a:prstDash val="solid"/>
+                      <a:round/>
+                      <a:headEnd type="none" w="med" len="med"/>
+                      <a:tailEnd type="none" w="med" len="med"/>
+                    </a:lnR>
+                    <a:lnT w="6350" cap="flat" cmpd="sng" algn="ctr">
+                      <a:solidFill>
+                        <a:srgbClr val="E5E2DC"/>
+                      </a:solidFill>
+                      <a:prstDash val="solid"/>
+                      <a:round/>
+                      <a:headEnd type="none" w="med" len="med"/>
+                      <a:tailEnd type="none" w="med" len="med"/>
+                    </a:lnT>
+                    <a:lnB w="6350" cap="flat" cmpd="sng" algn="ctr">
+                      <a:solidFill>
+                        <a:srgbClr val="E5E2DC"/>
+                      </a:solidFill>
+                      <a:prstDash val="solid"/>
+                      <a:round/>
+                      <a:headEnd type="none" w="med" len="med"/>
+                      <a:tailEnd type="none" w="med" len="med"/>
+                    </a:lnB>
+                    <a:solidFill>
+                      <a:srgbClr val="FFFFFF"/>
+                    </a:solidFill>
+                  </a:tcPr>
+                </a:tc>
+              </a:tr>
+              <a:tr h="365760">
+                <a:tc>
+                  <a:txBody>
+                    <a:bodyPr/>
+                    <a:lstStyle/>
+                    <a:p>
+                      <a:pPr indent="0" marL="0">
+                        <a:buNone/>
+                      </a:pPr>
+                      <a:r>
+                        <a:rPr lang="en-US" sz="1200" dirty="0">
+                          <a:solidFill>
+                            <a:srgbClr val="3D3A36"/>
+                          </a:solidFill>
+                          <a:latin typeface="Arial" pitchFamily="34" charset="0"/>
+                          <a:ea typeface="Arial" pitchFamily="34" charset="-122"/>
+                          <a:cs typeface="Arial" pitchFamily="34" charset="-120"/>
                         </a:rPr>
                         <a:t>Chromatography</a:t>
                       </a:r>
                       <a:endParaRPr lang="en-US" sz="1200" dirty="0">
-                        <a:latin typeface="Calibri" charset="0"/>
-                        <a:ea typeface="Calibri" charset="0"/>
-                        <a:cs typeface="Calibri" charset="0"/>
+                        <a:latin typeface="Arial" charset="0"/>
+                        <a:ea typeface="Arial" charset="0"/>
+                        <a:cs typeface="Arial" charset="0"/>
                       </a:endParaRPr>
                     </a:p>
                   </a:txBody>
-                  <a:tcPr marL="91440" marR="91440" marT="45720" marB="45720">
+                  <a:tcPr marL="101600" marR="101600" marT="50800" marB="50800" anchor="ctr">
                     <a:lnL w="6350" cap="flat" cmpd="sng" algn="ctr">
                       <a:solidFill>
                         <a:srgbClr val="E5E2DC"/>
@@ -3654,20 +3650,20 @@
                           <a:solidFill>
                             <a:srgbClr val="3D3A36"/>
                           </a:solidFill>
-                          <a:latin typeface="Calibri" pitchFamily="34" charset="0"/>
-                          <a:ea typeface="Calibri" pitchFamily="34" charset="-122"/>
-                          <a:cs typeface="Calibri" pitchFamily="34" charset="-120"/>
+                          <a:latin typeface="Arial" pitchFamily="34" charset="0"/>
+                          <a:ea typeface="Arial" pitchFamily="34" charset="-122"/>
+                          <a:cs typeface="Arial" pitchFamily="34" charset="-120"/>
                         </a:rPr>
-                        <a:t>Dissolved coloured substances</a:t>
+                        <a:t>Coloured substances</a:t>
                       </a:r>
                       <a:endParaRPr lang="en-US" sz="1200" dirty="0">
-                        <a:latin typeface="Calibri" charset="0"/>
-                        <a:ea typeface="Calibri" charset="0"/>
-                        <a:cs typeface="Calibri" charset="0"/>
+                        <a:latin typeface="Arial" charset="0"/>
+                        <a:ea typeface="Arial" charset="0"/>
+                        <a:cs typeface="Arial" charset="0"/>
                       </a:endParaRPr>
                     </a:p>
                   </a:txBody>
-                  <a:tcPr marL="91440" marR="91440" marT="45720" marB="45720">
+                  <a:tcPr marL="101600" marR="101600" marT="50800" marB="50800" anchor="ctr">
                     <a:lnL w="6350" cap="flat" cmpd="sng" algn="ctr">
                       <a:solidFill>
                         <a:srgbClr val="E5E2DC"/>
@@ -3722,20 +3718,20 @@
                           <a:solidFill>
                             <a:srgbClr val="3D3A36"/>
                           </a:solidFill>
-                          <a:latin typeface="Calibri" pitchFamily="34" charset="0"/>
-                          <a:ea typeface="Calibri" pitchFamily="34" charset="-122"/>
-                          <a:cs typeface="Calibri" pitchFamily="34" charset="-120"/>
+                          <a:latin typeface="Arial" pitchFamily="34" charset="0"/>
+                          <a:ea typeface="Arial" pitchFamily="34" charset="-122"/>
+                          <a:cs typeface="Arial" pitchFamily="34" charset="-120"/>
                         </a:rPr>
                         <a:t>Dyes in ink</a:t>
                       </a:r>
                       <a:endParaRPr lang="en-US" sz="1200" dirty="0">
-                        <a:latin typeface="Calibri" charset="0"/>
-                        <a:ea typeface="Calibri" charset="0"/>
-                        <a:cs typeface="Calibri" charset="0"/>
+                        <a:latin typeface="Arial" charset="0"/>
+                        <a:ea typeface="Arial" charset="0"/>
+                        <a:cs typeface="Arial" charset="0"/>
                       </a:endParaRPr>
                     </a:p>
                   </a:txBody>
-                  <a:tcPr marL="91440" marR="91440" marT="45720" marB="45720">
+                  <a:tcPr marL="101600" marR="101600" marT="50800" marB="50800" anchor="ctr">
                     <a:lnL w="6350" cap="flat" cmpd="sng" algn="ctr">
                       <a:solidFill>
                         <a:srgbClr val="E5E2DC"/>
@@ -3777,8 +3773,6 @@
                     </a:solidFill>
                   </a:tcPr>
                 </a:tc>
-              </a:tr>
-              <a:tr h="502920">
                 <a:tc>
                   <a:txBody>
                     <a:bodyPr/>
@@ -3792,20 +3786,90 @@
                           <a:solidFill>
                             <a:srgbClr val="3D3A36"/>
                           </a:solidFill>
-                          <a:latin typeface="Calibri" pitchFamily="34" charset="0"/>
-                          <a:ea typeface="Calibri" pitchFamily="34" charset="-122"/>
-                          <a:cs typeface="Calibri" pitchFamily="34" charset="-120"/>
+                          <a:latin typeface="Arial" pitchFamily="34" charset="0"/>
+                          <a:ea typeface="Arial" pitchFamily="34" charset="-122"/>
+                          <a:cs typeface="Arial" pitchFamily="34" charset="-120"/>
                         </a:rPr>
-                        <a:t>Magnetic separation</a:t>
+                        <a:t>Different solubility in solvent</a:t>
                       </a:r>
                       <a:endParaRPr lang="en-US" sz="1200" dirty="0">
-                        <a:latin typeface="Calibri" charset="0"/>
-                        <a:ea typeface="Calibri" charset="0"/>
-                        <a:cs typeface="Calibri" charset="0"/>
+                        <a:latin typeface="Arial" charset="0"/>
+                        <a:ea typeface="Arial" charset="0"/>
+                        <a:cs typeface="Arial" charset="0"/>
                       </a:endParaRPr>
                     </a:p>
                   </a:txBody>
-                  <a:tcPr marL="91440" marR="91440" marT="45720" marB="45720">
+                  <a:tcPr marL="101600" marR="101600" marT="50800" marB="50800" anchor="ctr">
+                    <a:lnL w="6350" cap="flat" cmpd="sng" algn="ctr">
+                      <a:solidFill>
+                        <a:srgbClr val="E5E2DC"/>
+                      </a:solidFill>
+                      <a:prstDash val="solid"/>
+                      <a:round/>
+                      <a:headEnd type="none" w="med" len="med"/>
+                      <a:tailEnd type="none" w="med" len="med"/>
+                    </a:lnL>
+                    <a:lnR w="6350" cap="flat" cmpd="sng" algn="ctr">
+                      <a:solidFill>
+                        <a:srgbClr val="E5E2DC"/>
+                      </a:solidFill>
+                      <a:prstDash val="solid"/>
+                      <a:round/>
+                      <a:headEnd type="none" w="med" len="med"/>
+                      <a:tailEnd type="none" w="med" len="med"/>
+                    </a:lnR>
+                    <a:lnT w="6350" cap="flat" cmpd="sng" algn="ctr">
+                      <a:solidFill>
+                        <a:srgbClr val="E5E2DC"/>
+                      </a:solidFill>
+                      <a:prstDash val="solid"/>
+                      <a:round/>
+                      <a:headEnd type="none" w="med" len="med"/>
+                      <a:tailEnd type="none" w="med" len="med"/>
+                    </a:lnT>
+                    <a:lnB w="6350" cap="flat" cmpd="sng" algn="ctr">
+                      <a:solidFill>
+                        <a:srgbClr val="E5E2DC"/>
+                      </a:solidFill>
+                      <a:prstDash val="solid"/>
+                      <a:round/>
+                      <a:headEnd type="none" w="med" len="med"/>
+                      <a:tailEnd type="none" w="med" len="med"/>
+                    </a:lnB>
+                    <a:solidFill>
+                      <a:srgbClr val="F8F6F3"/>
+                    </a:solidFill>
+                  </a:tcPr>
+                </a:tc>
+              </a:tr>
+              <a:tr h="365760">
+                <a:tc>
+                  <a:txBody>
+                    <a:bodyPr/>
+                    <a:lstStyle/>
+                    <a:p>
+                      <a:pPr indent="0" marL="0">
+                        <a:buNone/>
+                      </a:pPr>
+                      <a:r>
+                        <a:rPr lang="en-US" sz="1200" dirty="0">
+                          <a:solidFill>
+                            <a:srgbClr val="3D3A36"/>
+                          </a:solidFill>
+                          <a:latin typeface="Arial" pitchFamily="34" charset="0"/>
+                          <a:ea typeface="Arial" pitchFamily="34" charset="-122"/>
+                          <a:cs typeface="Arial" pitchFamily="34" charset="-120"/>
+                        </a:rPr>
+                        <a:t>Magnetism</a:t>
+                      </a:r>
+                      <a:endParaRPr lang="en-US" sz="1200" dirty="0">
+                        <a:latin typeface="Arial" charset="0"/>
+                        <a:ea typeface="Arial" charset="0"/>
+                        <a:cs typeface="Arial" charset="0"/>
+                      </a:endParaRPr>
+                    </a:p>
+                  </a:txBody>
+                  <a:tcPr marL="101600" marR="101600" marT="50800" marB="50800" anchor="ctr">
                     <a:lnL w="6350" cap="flat" cmpd="sng" algn="ctr">
                       <a:solidFill>
                         <a:srgbClr val="E5E2DC"/>
@@ -3860,20 +3924,20 @@
                           <a:solidFill>
                             <a:srgbClr val="3D3A36"/>
                           </a:solidFill>
-                          <a:latin typeface="Calibri" pitchFamily="34" charset="0"/>
-                          <a:ea typeface="Calibri" pitchFamily="34" charset="-122"/>
-                          <a:cs typeface="Calibri" pitchFamily="34" charset="-120"/>
+                          <a:latin typeface="Arial" pitchFamily="34" charset="0"/>
+                          <a:ea typeface="Arial" pitchFamily="34" charset="-122"/>
+                          <a:cs typeface="Arial" pitchFamily="34" charset="-120"/>
                         </a:rPr>
                         <a:t>Magnetic from non-magnetic</a:t>
                       </a:r>
                       <a:endParaRPr lang="en-US" sz="1200" dirty="0">
-                        <a:latin typeface="Calibri" charset="0"/>
-                        <a:ea typeface="Calibri" charset="0"/>
-                        <a:cs typeface="Calibri" charset="0"/>
+                        <a:latin typeface="Arial" charset="0"/>
+                        <a:ea typeface="Arial" charset="0"/>
+                        <a:cs typeface="Arial" charset="0"/>
                       </a:endParaRPr>
                     </a:p>
                   </a:txBody>
-                  <a:tcPr marL="91440" marR="91440" marT="45720" marB="45720">
+                  <a:tcPr marL="101600" marR="101600" marT="50800" marB="50800" anchor="ctr">
                     <a:lnL w="6350" cap="flat" cmpd="sng" algn="ctr">
                       <a:solidFill>
                         <a:srgbClr val="E5E2DC"/>
@@ -3928,20 +3992,88 @@
                           <a:solidFill>
                             <a:srgbClr val="3D3A36"/>
                           </a:solidFill>
-                          <a:latin typeface="Calibri" pitchFamily="34" charset="0"/>
-                          <a:ea typeface="Calibri" pitchFamily="34" charset="-122"/>
-                          <a:cs typeface="Calibri" pitchFamily="34" charset="-120"/>
+                          <a:latin typeface="Arial" pitchFamily="34" charset="0"/>
+                          <a:ea typeface="Arial" pitchFamily="34" charset="-122"/>
+                          <a:cs typeface="Arial" pitchFamily="34" charset="-120"/>
                         </a:rPr>
                         <a:t>Iron filings from sand</a:t>
                       </a:r>
                       <a:endParaRPr lang="en-US" sz="1200" dirty="0">
-                        <a:latin typeface="Calibri" charset="0"/>
-                        <a:ea typeface="Calibri" charset="0"/>
-                        <a:cs typeface="Calibri" charset="0"/>
+                        <a:latin typeface="Arial" charset="0"/>
+                        <a:ea typeface="Arial" charset="0"/>
+                        <a:cs typeface="Arial" charset="0"/>
                       </a:endParaRPr>
                     </a:p>
                   </a:txBody>
-                  <a:tcPr marL="91440" marR="91440" marT="45720" marB="45720">
+                  <a:tcPr marL="101600" marR="101600" marT="50800" marB="50800" anchor="ctr">
+                    <a:lnL w="6350" cap="flat" cmpd="sng" algn="ctr">
+                      <a:solidFill>
+                        <a:srgbClr val="E5E2DC"/>
+                      </a:solidFill>
+                      <a:prstDash val="solid"/>
+                      <a:round/>
+                      <a:headEnd type="none" w="med" len="med"/>
+                      <a:tailEnd type="none" w="med" len="med"/>
+                    </a:lnL>
+                    <a:lnR w="6350" cap="flat" cmpd="sng" algn="ctr">
+                      <a:solidFill>
+                        <a:srgbClr val="E5E2DC"/>
+                      </a:solidFill>
+                      <a:prstDash val="solid"/>
+                      <a:round/>
+                      <a:headEnd type="none" w="med" len="med"/>
+                      <a:tailEnd type="none" w="med" len="med"/>
+                    </a:lnR>
+                    <a:lnT w="6350" cap="flat" cmpd="sng" algn="ctr">
+                      <a:solidFill>
+                        <a:srgbClr val="E5E2DC"/>
+                      </a:solidFill>
+                      <a:prstDash val="solid"/>
+                      <a:round/>
+                      <a:headEnd type="none" w="med" len="med"/>
+                      <a:tailEnd type="none" w="med" len="med"/>
+                    </a:lnT>
+                    <a:lnB w="6350" cap="flat" cmpd="sng" algn="ctr">
+                      <a:solidFill>
+                        <a:srgbClr val="E5E2DC"/>
+                      </a:solidFill>
+                      <a:prstDash val="solid"/>
+                      <a:round/>
+                      <a:headEnd type="none" w="med" len="med"/>
+                      <a:tailEnd type="none" w="med" len="med"/>
+                    </a:lnB>
+                    <a:solidFill>
+                      <a:srgbClr val="FFFFFF"/>
+                    </a:solidFill>
+                  </a:tcPr>
+                </a:tc>
+                <a:tc>
+                  <a:txBody>
+                    <a:bodyPr/>
+                    <a:lstStyle/>
+                    <a:p>
+                      <a:pPr indent="0" marL="0">
+                        <a:buNone/>
+                      </a:pPr>
+                      <a:r>
+                        <a:rPr lang="en-US" sz="1200" dirty="0">
+                          <a:solidFill>
+                            <a:srgbClr val="3D3A36"/>
+                          </a:solidFill>
+                          <a:latin typeface="Arial" pitchFamily="34" charset="0"/>
+                          <a:ea typeface="Arial" pitchFamily="34" charset="-122"/>
+                          <a:cs typeface="Arial" pitchFamily="34" charset="-120"/>
+                        </a:rPr>
+                        <a:t>Magnetic attraction</a:t>
+                      </a:r>
+                      <a:endParaRPr lang="en-US" sz="1200" dirty="0">
+                        <a:latin typeface="Arial" charset="0"/>
+                        <a:ea typeface="Arial" charset="0"/>
+                        <a:cs typeface="Arial" charset="0"/>
+                      </a:endParaRPr>
+                    </a:p>
+                  </a:txBody>
+                  <a:tcPr marL="101600" marR="101600" marT="50800" marB="50800" anchor="ctr">
                     <a:lnL w="6350" cap="flat" cmpd="sng" algn="ctr">
                       <a:solidFill>
                         <a:srgbClr val="E5E2DC"/>
@@ -4029,47 +4161,7 @@
         <p:spPr>
           <a:xfrm>
             <a:off x="0" y="0"/>
-            <a:ext cx="9144000" cy="822960"/>
-          </a:xfrm>
-          <a:prstGeom prst="rect">
-            <a:avLst/>
-          </a:prstGeom>
-          <a:solidFill>
-            <a:srgbClr val="FFFFFF"/>
-          </a:solidFill>
-          <a:ln/>
-        </p:spPr>
-      </p:sp>
-      <p:sp>
-        <p:nvSpPr>
-          <p:cNvPr id="3" name="Shape 1"/>
-          <p:cNvSpPr/>
-          <p:nvPr/>
-        </p:nvSpPr>
-        <p:spPr>
-          <a:xfrm>
-            <a:off x="0" y="804672"/>
-            <a:ext cx="9144000" cy="27432"/>
-          </a:xfrm>
-          <a:prstGeom prst="rect">
-            <a:avLst/>
-          </a:prstGeom>
-          <a:solidFill>
-            <a:srgbClr val="E5E2DC"/>
-          </a:solidFill>
-          <a:ln/>
-        </p:spPr>
-      </p:sp>
-      <p:sp>
-        <p:nvSpPr>
-          <p:cNvPr id="4" name="Shape 2"/>
-          <p:cNvSpPr/>
-          <p:nvPr/>
-        </p:nvSpPr>
-        <p:spPr>
-          <a:xfrm>
-            <a:off x="548640" y="201168"/>
-            <a:ext cx="54864" cy="420624"/>
+            <a:ext cx="73152" cy="5148072"/>
           </a:xfrm>
           <a:prstGeom prst="rect">
             <a:avLst/>
@@ -4082,14 +4174,14 @@
       </p:sp>
       <p:sp>
         <p:nvSpPr>
-          <p:cNvPr id="5" name="Text 3"/>
+          <p:cNvPr id="3" name="Text 1"/>
           <p:cNvSpPr/>
           <p:nvPr/>
         </p:nvSpPr>
         <p:spPr>
           <a:xfrm>
-            <a:off x="777240" y="137160"/>
-            <a:ext cx="7772400" cy="548640"/>
+            <a:off x="548640" y="274320"/>
+            <a:ext cx="9144000" cy="640080"/>
           </a:xfrm>
           <a:prstGeom prst="rect">
             <a:avLst/>
@@ -4098,14 +4190,14 @@
           <a:ln/>
         </p:spPr>
         <p:txBody>
-          <a:bodyPr wrap="square" lIns="0" tIns="0" rIns="0" bIns="0" rtlCol="0" anchor="ctr"/>
+          <a:bodyPr wrap="square" rtlCol="0" anchor="ctr"/>
           <a:lstStyle/>
           <a:p>
             <a:pPr indent="0" marL="0">
               <a:buNone/>
             </a:pPr>
             <a:r>
-              <a:rPr lang="en-US" sz="2000" b="1" dirty="0">
+              <a:rPr lang="en-US" sz="2400" b="1" dirty="0">
                 <a:solidFill>
                   <a:srgbClr val="1B2A4A"/>
                 </a:solidFill>
@@ -4115,20 +4207,40 @@
               </a:rPr>
               <a:t>Filtration — Step by Step</a:t>
             </a:r>
-            <a:endParaRPr lang="en-US" sz="2000" dirty="0"/>
+            <a:endParaRPr lang="en-US" sz="2400" dirty="0"/>
           </a:p>
         </p:txBody>
       </p:sp>
       <p:sp>
         <p:nvSpPr>
-          <p:cNvPr id="6" name="Text 4"/>
+          <p:cNvPr id="4" name="Shape 2"/>
           <p:cNvSpPr/>
           <p:nvPr/>
         </p:nvSpPr>
         <p:spPr>
           <a:xfrm>
-            <a:off x="731520" y="1051560"/>
-            <a:ext cx="7680960" cy="3108960"/>
+            <a:off x="548640" y="960120"/>
+            <a:ext cx="2286000" cy="36576"/>
+          </a:xfrm>
+          <a:prstGeom prst="rect">
+            <a:avLst/>
+          </a:prstGeom>
+          <a:solidFill>
+            <a:srgbClr val="2A9D8F"/>
+          </a:solidFill>
+          <a:ln/>
+        </p:spPr>
+      </p:sp>
+      <p:sp>
+        <p:nvSpPr>
+          <p:cNvPr id="5" name="Text 3"/>
+          <p:cNvSpPr/>
+          <p:nvPr/>
+        </p:nvSpPr>
+        <p:spPr>
+          <a:xfrm>
+            <a:off x="548640" y="1188720"/>
+            <a:ext cx="10058400" cy="3474720"/>
           </a:xfrm>
           <a:prstGeom prst="rect">
             <a:avLst/>
@@ -4140,210 +4252,114 @@
           <a:bodyPr wrap="square" rtlCol="0" anchor="t"/>
           <a:lstStyle/>
           <a:p>
-            <a:pPr marL="342900" indent="-342900">
+            <a:pPr>
+              <a:lnSpc>
+                <a:spcPct val="150000"/>
+              </a:lnSpc>
               <a:spcAft>
-                <a:spcPts val="800"/>
+                <a:spcPts val="600"/>
               </a:spcAft>
-              <a:buSzPct val="100000"/>
-              <a:buChar char="•"/>
             </a:pPr>
             <a:r>
               <a:rPr lang="en-US" sz="1500" dirty="0">
                 <a:solidFill>
                   <a:srgbClr val="3D3A36"/>
                 </a:solidFill>
-                <a:latin typeface="Calibri" pitchFamily="34" charset="0"/>
-                <a:ea typeface="Calibri" pitchFamily="34" charset="-122"/>
-                <a:cs typeface="Calibri" pitchFamily="34" charset="-120"/>
+                <a:latin typeface="Arial" pitchFamily="34" charset="0"/>
+                <a:ea typeface="Arial" pitchFamily="34" charset="-122"/>
+                <a:cs typeface="Arial" pitchFamily="34" charset="-120"/>
               </a:rPr>
-              <a:t>1. Fold filter paper into a cone shape.</a:t>
+              <a:t>1. Set up a funnel with filter paper in a conical flask.</a:t>
             </a:r>
             <a:endParaRPr lang="en-US" sz="1500" dirty="0"/>
           </a:p>
           <a:p>
-            <a:pPr marL="342900" indent="-342900">
+            <a:pPr>
+              <a:lnSpc>
+                <a:spcPct val="150000"/>
+              </a:lnSpc>
               <a:spcAft>
-                <a:spcPts val="800"/>
+                <a:spcPts val="600"/>
               </a:spcAft>
-              <a:buSzPct val="100000"/>
-              <a:buChar char="•"/>
             </a:pPr>
             <a:r>
               <a:rPr lang="en-US" sz="1500" dirty="0">
                 <a:solidFill>
                   <a:srgbClr val="3D3A36"/>
                 </a:solidFill>
-                <a:latin typeface="Calibri" pitchFamily="34" charset="0"/>
-                <a:ea typeface="Calibri" pitchFamily="34" charset="-122"/>
-                <a:cs typeface="Calibri" pitchFamily="34" charset="-120"/>
+                <a:latin typeface="Arial" pitchFamily="34" charset="0"/>
+                <a:ea typeface="Arial" pitchFamily="34" charset="-122"/>
+                <a:cs typeface="Arial" pitchFamily="34" charset="-120"/>
               </a:rPr>
-              <a:t>2. Place it in a funnel over a beaker.</a:t>
+              <a:t>2. Pour the mixture through the filter paper slowly.</a:t>
             </a:r>
             <a:endParaRPr lang="en-US" sz="1500" dirty="0"/>
           </a:p>
           <a:p>
-            <a:pPr marL="342900" indent="-342900">
+            <a:pPr>
+              <a:lnSpc>
+                <a:spcPct val="150000"/>
+              </a:lnSpc>
               <a:spcAft>
-                <a:spcPts val="800"/>
+                <a:spcPts val="600"/>
               </a:spcAft>
-              <a:buSzPct val="100000"/>
-              <a:buChar char="•"/>
             </a:pPr>
             <a:r>
               <a:rPr lang="en-US" sz="1500" dirty="0">
                 <a:solidFill>
                   <a:srgbClr val="3D3A36"/>
                 </a:solidFill>
-                <a:latin typeface="Calibri" pitchFamily="34" charset="0"/>
-                <a:ea typeface="Calibri" pitchFamily="34" charset="-122"/>
-                <a:cs typeface="Calibri" pitchFamily="34" charset="-120"/>
+                <a:latin typeface="Arial" pitchFamily="34" charset="0"/>
+                <a:ea typeface="Arial" pitchFamily="34" charset="-122"/>
+                <a:cs typeface="Arial" pitchFamily="34" charset="-120"/>
               </a:rPr>
-              <a:t>3. Pour the mixture through the filter paper.</a:t>
+              <a:t>3. The solid particles get trapped = RESIDUE.</a:t>
             </a:r>
             <a:endParaRPr lang="en-US" sz="1500" dirty="0"/>
           </a:p>
           <a:p>
-            <a:pPr marL="342900" indent="-342900">
+            <a:pPr>
+              <a:lnSpc>
+                <a:spcPct val="150000"/>
+              </a:lnSpc>
               <a:spcAft>
-                <a:spcPts val="800"/>
+                <a:spcPts val="600"/>
               </a:spcAft>
-              <a:buSzPct val="100000"/>
-              <a:buChar char="•"/>
             </a:pPr>
             <a:r>
               <a:rPr lang="en-US" sz="1500" dirty="0">
                 <a:solidFill>
                   <a:srgbClr val="3D3A36"/>
                 </a:solidFill>
-                <a:latin typeface="Calibri" pitchFamily="34" charset="0"/>
-                <a:ea typeface="Calibri" pitchFamily="34" charset="-122"/>
-                <a:cs typeface="Calibri" pitchFamily="34" charset="-120"/>
+                <a:latin typeface="Arial" pitchFamily="34" charset="0"/>
+                <a:ea typeface="Arial" pitchFamily="34" charset="-122"/>
+                <a:cs typeface="Arial" pitchFamily="34" charset="-120"/>
               </a:rPr>
-              <a:t>4. The RESIDUE (solid) stays in the filter paper.</a:t>
+              <a:t>4. The liquid passes through = FILTRATE.</a:t>
             </a:r>
             <a:endParaRPr lang="en-US" sz="1500" dirty="0"/>
           </a:p>
           <a:p>
-            <a:pPr marL="342900" indent="-342900">
+            <a:pPr>
+              <a:lnSpc>
+                <a:spcPct val="150000"/>
+              </a:lnSpc>
               <a:spcAft>
-                <a:spcPts val="800"/>
+                <a:spcPts val="600"/>
               </a:spcAft>
-              <a:buSzPct val="100000"/>
-              <a:buChar char="•"/>
             </a:pPr>
             <a:r>
               <a:rPr lang="en-US" sz="1500" dirty="0">
                 <a:solidFill>
                   <a:srgbClr val="3D3A36"/>
                 </a:solidFill>
-                <a:latin typeface="Calibri" pitchFamily="34" charset="0"/>
-                <a:ea typeface="Calibri" pitchFamily="34" charset="-122"/>
-                <a:cs typeface="Calibri" pitchFamily="34" charset="-120"/>
+                <a:latin typeface="Arial" pitchFamily="34" charset="0"/>
+                <a:ea typeface="Arial" pitchFamily="34" charset="-122"/>
+                <a:cs typeface="Arial" pitchFamily="34" charset="-120"/>
               </a:rPr>
-              <a:t>5. The FILTRATE (liquid) passes through into the beaker.</a:t>
+              <a:t>5. Example: separating sand from muddy water.</a:t>
             </a:r>
             <a:endParaRPr lang="en-US" sz="1500" dirty="0"/>
-          </a:p>
-          <a:p>
-            <a:pPr marL="342900" indent="-342900">
-              <a:spcAft>
-                <a:spcPts val="800"/>
-              </a:spcAft>
-              <a:buSzPct val="100000"/>
-              <a:buChar char="•"/>
-            </a:pPr>
-            <a:r>
-              <a:rPr lang="en-US" sz="1500" dirty="0">
-                <a:solidFill>
-                  <a:srgbClr val="3D3A36"/>
-                </a:solidFill>
-                <a:latin typeface="Calibri" pitchFamily="34" charset="0"/>
-                <a:ea typeface="Calibri" pitchFamily="34" charset="-122"/>
-                <a:cs typeface="Calibri" pitchFamily="34" charset="-120"/>
-              </a:rPr>
-              <a:t>This works because the solid particles are too big to pass through the paper.</a:t>
-            </a:r>
-            <a:endParaRPr lang="en-US" sz="1500" dirty="0"/>
-          </a:p>
-        </p:txBody>
-      </p:sp>
-      <p:sp>
-        <p:nvSpPr>
-          <p:cNvPr id="7" name="Shape 5"/>
-          <p:cNvSpPr/>
-          <p:nvPr/>
-        </p:nvSpPr>
-        <p:spPr>
-          <a:xfrm>
-            <a:off x="731520" y="4206240"/>
-            <a:ext cx="7680960" cy="640080"/>
-          </a:xfrm>
-          <a:prstGeom prst="rect">
-            <a:avLst/>
-          </a:prstGeom>
-          <a:solidFill>
-            <a:srgbClr val="E8F5F3"/>
-          </a:solidFill>
-          <a:ln/>
-          <a:effectLst>
-            <a:outerShdw sx="100000" sy="100000" kx="0" ky="0" algn="bl" rotWithShape="0" blurRad="50800" dist="25400" dir="8100000">
-              <a:srgbClr val="000000">
-                <a:alpha val="10000"/>
-              </a:srgbClr>
-            </a:outerShdw>
-          </a:effectLst>
-        </p:spPr>
-      </p:sp>
-      <p:sp>
-        <p:nvSpPr>
-          <p:cNvPr id="8" name="Text 6"/>
-          <p:cNvSpPr/>
-          <p:nvPr/>
-        </p:nvSpPr>
-        <p:spPr>
-          <a:xfrm>
-            <a:off x="914400" y="4251960"/>
-            <a:ext cx="7315200" cy="548640"/>
-          </a:xfrm>
-          <a:prstGeom prst="rect">
-            <a:avLst/>
-          </a:prstGeom>
-          <a:noFill/>
-          <a:ln/>
-        </p:spPr>
-        <p:txBody>
-          <a:bodyPr wrap="square" rtlCol="0" anchor="ctr"/>
-          <a:lstStyle/>
-          <a:p>
-            <a:pPr indent="0" marL="0">
-              <a:buNone/>
-            </a:pPr>
-            <a:r>
-              <a:rPr lang="en-US" sz="1200" b="1" dirty="0">
-                <a:solidFill>
-                  <a:srgbClr val="2A9D8F"/>
-                </a:solidFill>
-                <a:latin typeface="Calibri" pitchFamily="34" charset="0"/>
-                <a:ea typeface="Calibri" pitchFamily="34" charset="-122"/>
-                <a:cs typeface="Calibri" pitchFamily="34" charset="-120"/>
-              </a:rPr>
-              <a:t>Key Idea: </a:t>
-            </a:r>
-            <a:pPr indent="0" marL="0">
-              <a:buNone/>
-            </a:pPr>
-            <a:r>
-              <a:rPr lang="en-US" sz="1200" i="1" dirty="0">
-                <a:solidFill>
-                  <a:srgbClr val="3D3A36"/>
-                </a:solidFill>
-                <a:latin typeface="Calibri" pitchFamily="34" charset="0"/>
-                <a:ea typeface="Calibri" pitchFamily="34" charset="-122"/>
-                <a:cs typeface="Calibri" pitchFamily="34" charset="-120"/>
-              </a:rPr>
-              <a:t>Filtration only works for INSOLUBLE solids — dissolved substances pass straight through.</a:t>
-            </a:r>
-            <a:endParaRPr lang="en-US" sz="1200" dirty="0"/>
           </a:p>
         </p:txBody>
       </p:sp>
@@ -4388,47 +4404,7 @@
         <p:spPr>
           <a:xfrm>
             <a:off x="0" y="0"/>
-            <a:ext cx="9144000" cy="822960"/>
-          </a:xfrm>
-          <a:prstGeom prst="rect">
-            <a:avLst/>
-          </a:prstGeom>
-          <a:solidFill>
-            <a:srgbClr val="FFFFFF"/>
-          </a:solidFill>
-          <a:ln/>
-        </p:spPr>
-      </p:sp>
-      <p:sp>
-        <p:nvSpPr>
-          <p:cNvPr id="3" name="Shape 1"/>
-          <p:cNvSpPr/>
-          <p:nvPr/>
-        </p:nvSpPr>
-        <p:spPr>
-          <a:xfrm>
-            <a:off x="0" y="804672"/>
-            <a:ext cx="9144000" cy="27432"/>
-          </a:xfrm>
-          <a:prstGeom prst="rect">
-            <a:avLst/>
-          </a:prstGeom>
-          <a:solidFill>
-            <a:srgbClr val="E5E2DC"/>
-          </a:solidFill>
-          <a:ln/>
-        </p:spPr>
-      </p:sp>
-      <p:sp>
-        <p:nvSpPr>
-          <p:cNvPr id="4" name="Shape 2"/>
-          <p:cNvSpPr/>
-          <p:nvPr/>
-        </p:nvSpPr>
-        <p:spPr>
-          <a:xfrm>
-            <a:off x="548640" y="201168"/>
-            <a:ext cx="54864" cy="420624"/>
+            <a:ext cx="73152" cy="5148072"/>
           </a:xfrm>
           <a:prstGeom prst="rect">
             <a:avLst/>
@@ -4441,14 +4417,14 @@
       </p:sp>
       <p:sp>
         <p:nvSpPr>
-          <p:cNvPr id="5" name="Text 3"/>
+          <p:cNvPr id="3" name="Text 1"/>
           <p:cNvSpPr/>
           <p:nvPr/>
         </p:nvSpPr>
         <p:spPr>
           <a:xfrm>
-            <a:off x="777240" y="137160"/>
-            <a:ext cx="7772400" cy="548640"/>
+            <a:off x="548640" y="274320"/>
+            <a:ext cx="9144000" cy="640080"/>
           </a:xfrm>
           <a:prstGeom prst="rect">
             <a:avLst/>
@@ -4457,14 +4433,14 @@
           <a:ln/>
         </p:spPr>
         <p:txBody>
-          <a:bodyPr wrap="square" lIns="0" tIns="0" rIns="0" bIns="0" rtlCol="0" anchor="ctr"/>
+          <a:bodyPr wrap="square" rtlCol="0" anchor="ctr"/>
           <a:lstStyle/>
           <a:p>
             <a:pPr indent="0" marL="0">
               <a:buNone/>
             </a:pPr>
             <a:r>
-              <a:rPr lang="en-US" sz="2000" b="1" dirty="0">
+              <a:rPr lang="en-US" sz="2400" b="1" dirty="0">
                 <a:solidFill>
                   <a:srgbClr val="1B2A4A"/>
                 </a:solidFill>
@@ -4472,22 +4448,42 @@
                 <a:ea typeface="Georgia" pitchFamily="34" charset="-122"/>
                 <a:cs typeface="Georgia" pitchFamily="34" charset="-120"/>
               </a:rPr>
-              <a:t>Distillation — Separating Liquids</a:t>
+              <a:t>Evaporation &amp; Distillation</a:t>
             </a:r>
-            <a:endParaRPr lang="en-US" sz="2000" dirty="0"/>
+            <a:endParaRPr lang="en-US" sz="2400" dirty="0"/>
           </a:p>
         </p:txBody>
       </p:sp>
       <p:sp>
         <p:nvSpPr>
-          <p:cNvPr id="6" name="Text 4"/>
+          <p:cNvPr id="4" name="Shape 2"/>
           <p:cNvSpPr/>
           <p:nvPr/>
         </p:nvSpPr>
         <p:spPr>
           <a:xfrm>
-            <a:off x="731520" y="1051560"/>
-            <a:ext cx="7680960" cy="3108960"/>
+            <a:off x="548640" y="960120"/>
+            <a:ext cx="2286000" cy="36576"/>
+          </a:xfrm>
+          <a:prstGeom prst="rect">
+            <a:avLst/>
+          </a:prstGeom>
+          <a:solidFill>
+            <a:srgbClr val="2A9D8F"/>
+          </a:solidFill>
+          <a:ln/>
+        </p:spPr>
+      </p:sp>
+      <p:sp>
+        <p:nvSpPr>
+          <p:cNvPr id="5" name="Text 3"/>
+          <p:cNvSpPr/>
+          <p:nvPr/>
+        </p:nvSpPr>
+        <p:spPr>
+          <a:xfrm>
+            <a:off x="548640" y="1188720"/>
+            <a:ext cx="10058400" cy="3474720"/>
           </a:xfrm>
           <a:prstGeom prst="rect">
             <a:avLst/>
@@ -4499,189 +4495,114 @@
           <a:bodyPr wrap="square" rtlCol="0" anchor="t"/>
           <a:lstStyle/>
           <a:p>
-            <a:pPr marL="342900" indent="-342900">
+            <a:pPr>
+              <a:lnSpc>
+                <a:spcPct val="150000"/>
+              </a:lnSpc>
               <a:spcAft>
-                <a:spcPts val="800"/>
+                <a:spcPts val="600"/>
               </a:spcAft>
-              <a:buSzPct val="100000"/>
-              <a:buChar char="•"/>
             </a:pPr>
             <a:r>
               <a:rPr lang="en-US" sz="1500" dirty="0">
                 <a:solidFill>
                   <a:srgbClr val="3D3A36"/>
                 </a:solidFill>
-                <a:latin typeface="Calibri" pitchFamily="34" charset="0"/>
-                <a:ea typeface="Calibri" pitchFamily="34" charset="-122"/>
-                <a:cs typeface="Calibri" pitchFamily="34" charset="-120"/>
+                <a:latin typeface="Arial" pitchFamily="34" charset="0"/>
+                <a:ea typeface="Arial" pitchFamily="34" charset="-122"/>
+                <a:cs typeface="Arial" pitchFamily="34" charset="-120"/>
               </a:rPr>
-              <a:t>Used when you want to KEEP the liquid (evaporation loses it).</a:t>
+              <a:t>EVAPORATION: Heat the solution. Water turns to steam. Solid stays behind.</a:t>
             </a:r>
             <a:endParaRPr lang="en-US" sz="1500" dirty="0"/>
           </a:p>
           <a:p>
-            <a:pPr marL="342900" indent="-342900">
+            <a:pPr>
+              <a:lnSpc>
+                <a:spcPct val="150000"/>
+              </a:lnSpc>
               <a:spcAft>
-                <a:spcPts val="800"/>
+                <a:spcPts val="600"/>
               </a:spcAft>
-              <a:buSzPct val="100000"/>
-              <a:buChar char="•"/>
             </a:pPr>
             <a:r>
               <a:rPr lang="en-US" sz="1500" dirty="0">
                 <a:solidFill>
                   <a:srgbClr val="3D3A36"/>
                 </a:solidFill>
-                <a:latin typeface="Calibri" pitchFamily="34" charset="0"/>
-                <a:ea typeface="Calibri" pitchFamily="34" charset="-122"/>
-                <a:cs typeface="Calibri" pitchFamily="34" charset="-120"/>
+                <a:latin typeface="Arial" pitchFamily="34" charset="0"/>
+                <a:ea typeface="Arial" pitchFamily="34" charset="-122"/>
+                <a:cs typeface="Arial" pitchFamily="34" charset="-120"/>
               </a:rPr>
-              <a:t>Heat the solution — the liquid with the LOWEST boiling point evaporates first.</a:t>
+              <a:t>Used when you want the SOLID (e.g. making salt crystals).</a:t>
             </a:r>
             <a:endParaRPr lang="en-US" sz="1500" dirty="0"/>
           </a:p>
           <a:p>
-            <a:pPr marL="342900" indent="-342900">
+            <a:pPr>
+              <a:lnSpc>
+                <a:spcPct val="150000"/>
+              </a:lnSpc>
               <a:spcAft>
-                <a:spcPts val="800"/>
+                <a:spcPts val="600"/>
               </a:spcAft>
-              <a:buSzPct val="100000"/>
-              <a:buChar char="•"/>
             </a:pPr>
             <a:r>
               <a:rPr lang="en-US" sz="1500" dirty="0">
                 <a:solidFill>
                   <a:srgbClr val="3D3A36"/>
                 </a:solidFill>
-                <a:latin typeface="Calibri" pitchFamily="34" charset="0"/>
-                <a:ea typeface="Calibri" pitchFamily="34" charset="-122"/>
-                <a:cs typeface="Calibri" pitchFamily="34" charset="-120"/>
+                <a:latin typeface="Arial" pitchFamily="34" charset="0"/>
+                <a:ea typeface="Arial" pitchFamily="34" charset="-122"/>
+                <a:cs typeface="Arial" pitchFamily="34" charset="-120"/>
               </a:rPr>
-              <a:t>Steam travels into a condenser (cold tube) and turns back to liquid.</a:t>
+              <a:t>DISTILLATION: Heat the solution. Steam travels through a condenser.</a:t>
             </a:r>
             <a:endParaRPr lang="en-US" sz="1500" dirty="0"/>
           </a:p>
           <a:p>
-            <a:pPr marL="342900" indent="-342900">
+            <a:pPr>
+              <a:lnSpc>
+                <a:spcPct val="150000"/>
+              </a:lnSpc>
               <a:spcAft>
-                <a:spcPts val="800"/>
+                <a:spcPts val="600"/>
               </a:spcAft>
-              <a:buSzPct val="100000"/>
-              <a:buChar char="•"/>
             </a:pPr>
             <a:r>
               <a:rPr lang="en-US" sz="1500" dirty="0">
                 <a:solidFill>
                   <a:srgbClr val="3D3A36"/>
                 </a:solidFill>
-                <a:latin typeface="Calibri" pitchFamily="34" charset="0"/>
-                <a:ea typeface="Calibri" pitchFamily="34" charset="-122"/>
-                <a:cs typeface="Calibri" pitchFamily="34" charset="-120"/>
+                <a:latin typeface="Arial" pitchFamily="34" charset="0"/>
+                <a:ea typeface="Arial" pitchFamily="34" charset="-122"/>
+                <a:cs typeface="Arial" pitchFamily="34" charset="-120"/>
               </a:rPr>
-              <a:t>The collected liquid is called the DISTILLATE.</a:t>
+              <a:t>The condenser cools the steam back to liquid water.</a:t>
             </a:r>
             <a:endParaRPr lang="en-US" sz="1500" dirty="0"/>
           </a:p>
           <a:p>
-            <a:pPr marL="342900" indent="-342900">
+            <a:pPr>
+              <a:lnSpc>
+                <a:spcPct val="150000"/>
+              </a:lnSpc>
               <a:spcAft>
-                <a:spcPts val="800"/>
+                <a:spcPts val="600"/>
               </a:spcAft>
-              <a:buSzPct val="100000"/>
-              <a:buChar char="•"/>
             </a:pPr>
             <a:r>
               <a:rPr lang="en-US" sz="1500" dirty="0">
                 <a:solidFill>
                   <a:srgbClr val="3D3A36"/>
                 </a:solidFill>
-                <a:latin typeface="Calibri" pitchFamily="34" charset="0"/>
-                <a:ea typeface="Calibri" pitchFamily="34" charset="-122"/>
-                <a:cs typeface="Calibri" pitchFamily="34" charset="-120"/>
+                <a:latin typeface="Arial" pitchFamily="34" charset="0"/>
+                <a:ea typeface="Arial" pitchFamily="34" charset="-122"/>
+                <a:cs typeface="Arial" pitchFamily="34" charset="-120"/>
               </a:rPr>
-              <a:t>Example: getting pure water from salt water.</a:t>
+              <a:t>Used when you want the LIQUID (e.g. getting pure water).</a:t>
             </a:r>
             <a:endParaRPr lang="en-US" sz="1500" dirty="0"/>
-          </a:p>
-        </p:txBody>
-      </p:sp>
-      <p:sp>
-        <p:nvSpPr>
-          <p:cNvPr id="7" name="Shape 5"/>
-          <p:cNvSpPr/>
-          <p:nvPr/>
-        </p:nvSpPr>
-        <p:spPr>
-          <a:xfrm>
-            <a:off x="731520" y="4206240"/>
-            <a:ext cx="7680960" cy="640080"/>
-          </a:xfrm>
-          <a:prstGeom prst="rect">
-            <a:avLst/>
-          </a:prstGeom>
-          <a:solidFill>
-            <a:srgbClr val="E8F5F3"/>
-          </a:solidFill>
-          <a:ln/>
-          <a:effectLst>
-            <a:outerShdw sx="100000" sy="100000" kx="0" ky="0" algn="bl" rotWithShape="0" blurRad="50800" dist="25400" dir="8100000">
-              <a:srgbClr val="000000">
-                <a:alpha val="10000"/>
-              </a:srgbClr>
-            </a:outerShdw>
-          </a:effectLst>
-        </p:spPr>
-      </p:sp>
-      <p:sp>
-        <p:nvSpPr>
-          <p:cNvPr id="8" name="Text 6"/>
-          <p:cNvSpPr/>
-          <p:nvPr/>
-        </p:nvSpPr>
-        <p:spPr>
-          <a:xfrm>
-            <a:off x="914400" y="4251960"/>
-            <a:ext cx="7315200" cy="548640"/>
-          </a:xfrm>
-          <a:prstGeom prst="rect">
-            <a:avLst/>
-          </a:prstGeom>
-          <a:noFill/>
-          <a:ln/>
-        </p:spPr>
-        <p:txBody>
-          <a:bodyPr wrap="square" rtlCol="0" anchor="ctr"/>
-          <a:lstStyle/>
-          <a:p>
-            <a:pPr indent="0" marL="0">
-              <a:buNone/>
-            </a:pPr>
-            <a:r>
-              <a:rPr lang="en-US" sz="1200" b="1" dirty="0">
-                <a:solidFill>
-                  <a:srgbClr val="2A9D8F"/>
-                </a:solidFill>
-                <a:latin typeface="Calibri" pitchFamily="34" charset="0"/>
-                <a:ea typeface="Calibri" pitchFamily="34" charset="-122"/>
-                <a:cs typeface="Calibri" pitchFamily="34" charset="-120"/>
-              </a:rPr>
-              <a:t>Key Idea: </a:t>
-            </a:r>
-            <a:pPr indent="0" marL="0">
-              <a:buNone/>
-            </a:pPr>
-            <a:r>
-              <a:rPr lang="en-US" sz="1200" i="1" dirty="0">
-                <a:solidFill>
-                  <a:srgbClr val="3D3A36"/>
-                </a:solidFill>
-                <a:latin typeface="Calibri" pitchFamily="34" charset="0"/>
-                <a:ea typeface="Calibri" pitchFamily="34" charset="-122"/>
-                <a:cs typeface="Calibri" pitchFamily="34" charset="-120"/>
-              </a:rPr>
-              <a:t>Distillation uses differences in BOILING POINT to separate liquids.</a:t>
-            </a:r>
-            <a:endParaRPr lang="en-US" sz="1200" dirty="0"/>
           </a:p>
         </p:txBody>
       </p:sp>
@@ -4726,47 +4647,7 @@
         <p:spPr>
           <a:xfrm>
             <a:off x="0" y="0"/>
-            <a:ext cx="9144000" cy="822960"/>
-          </a:xfrm>
-          <a:prstGeom prst="rect">
-            <a:avLst/>
-          </a:prstGeom>
-          <a:solidFill>
-            <a:srgbClr val="FFFFFF"/>
-          </a:solidFill>
-          <a:ln/>
-        </p:spPr>
-      </p:sp>
-      <p:sp>
-        <p:nvSpPr>
-          <p:cNvPr id="3" name="Shape 1"/>
-          <p:cNvSpPr/>
-          <p:nvPr/>
-        </p:nvSpPr>
-        <p:spPr>
-          <a:xfrm>
-            <a:off x="0" y="804672"/>
-            <a:ext cx="9144000" cy="27432"/>
-          </a:xfrm>
-          <a:prstGeom prst="rect">
-            <a:avLst/>
-          </a:prstGeom>
-          <a:solidFill>
-            <a:srgbClr val="E5E2DC"/>
-          </a:solidFill>
-          <a:ln/>
-        </p:spPr>
-      </p:sp>
-      <p:sp>
-        <p:nvSpPr>
-          <p:cNvPr id="4" name="Shape 2"/>
-          <p:cNvSpPr/>
-          <p:nvPr/>
-        </p:nvSpPr>
-        <p:spPr>
-          <a:xfrm>
-            <a:off x="548640" y="201168"/>
-            <a:ext cx="54864" cy="420624"/>
+            <a:ext cx="73152" cy="5148072"/>
           </a:xfrm>
           <a:prstGeom prst="rect">
             <a:avLst/>
@@ -4779,14 +4660,14 @@
       </p:sp>
       <p:sp>
         <p:nvSpPr>
-          <p:cNvPr id="5" name="Text 3"/>
+          <p:cNvPr id="3" name="Text 1"/>
           <p:cNvSpPr/>
           <p:nvPr/>
         </p:nvSpPr>
         <p:spPr>
           <a:xfrm>
-            <a:off x="777240" y="137160"/>
-            <a:ext cx="7772400" cy="548640"/>
+            <a:off x="548640" y="274320"/>
+            <a:ext cx="9144000" cy="640080"/>
           </a:xfrm>
           <a:prstGeom prst="rect">
             <a:avLst/>
@@ -4795,14 +4676,14 @@
           <a:ln/>
         </p:spPr>
         <p:txBody>
-          <a:bodyPr wrap="square" lIns="0" tIns="0" rIns="0" bIns="0" rtlCol="0" anchor="ctr"/>
+          <a:bodyPr wrap="square" rtlCol="0" anchor="ctr"/>
           <a:lstStyle/>
           <a:p>
             <a:pPr indent="0" marL="0">
               <a:buNone/>
             </a:pPr>
             <a:r>
-              <a:rPr lang="en-US" sz="2000" b="1" dirty="0">
+              <a:rPr lang="en-US" sz="2400" b="1" dirty="0">
                 <a:solidFill>
                   <a:srgbClr val="1B2A4A"/>
                 </a:solidFill>
@@ -4810,176 +4691,42 @@
                 <a:ea typeface="Georgia" pitchFamily="34" charset="-122"/>
                 <a:cs typeface="Georgia" pitchFamily="34" charset="-120"/>
               </a:rPr>
-              <a:t>Chromatography</a:t>
+              <a:t>Check Your Understanding</a:t>
             </a:r>
-            <a:endParaRPr lang="en-US" sz="2000" dirty="0"/>
+            <a:endParaRPr lang="en-US" sz="2400" dirty="0"/>
           </a:p>
         </p:txBody>
       </p:sp>
       <p:sp>
         <p:nvSpPr>
-          <p:cNvPr id="6" name="Text 4"/>
+          <p:cNvPr id="4" name="Shape 2"/>
           <p:cNvSpPr/>
           <p:nvPr/>
         </p:nvSpPr>
         <p:spPr>
           <a:xfrm>
-            <a:off x="731520" y="1051560"/>
-            <a:ext cx="7680960" cy="3108960"/>
+            <a:off x="548640" y="960120"/>
+            <a:ext cx="2286000" cy="36576"/>
           </a:xfrm>
           <a:prstGeom prst="rect">
             <a:avLst/>
           </a:prstGeom>
-          <a:noFill/>
+          <a:solidFill>
+            <a:srgbClr val="2A9D8F"/>
+          </a:solidFill>
           <a:ln/>
         </p:spPr>
-        <p:txBody>
-          <a:bodyPr wrap="square" rtlCol="0" anchor="t"/>
-          <a:lstStyle/>
-          <a:p>
-            <a:pPr marL="342900" indent="-342900">
-              <a:spcAft>
-                <a:spcPts val="800"/>
-              </a:spcAft>
-              <a:buSzPct val="100000"/>
-              <a:buChar char="•"/>
-            </a:pPr>
-            <a:r>
-              <a:rPr lang="en-US" sz="1500" dirty="0">
-                <a:solidFill>
-                  <a:srgbClr val="3D3A36"/>
-                </a:solidFill>
-                <a:latin typeface="Calibri" pitchFamily="34" charset="0"/>
-                <a:ea typeface="Calibri" pitchFamily="34" charset="-122"/>
-                <a:cs typeface="Calibri" pitchFamily="34" charset="-120"/>
-              </a:rPr>
-              <a:t>Used to separate dissolved coloured substances (like ink dyes).</a:t>
-            </a:r>
-            <a:endParaRPr lang="en-US" sz="1500" dirty="0"/>
-          </a:p>
-          <a:p>
-            <a:pPr marL="342900" indent="-342900">
-              <a:spcAft>
-                <a:spcPts val="800"/>
-              </a:spcAft>
-              <a:buSzPct val="100000"/>
-              <a:buChar char="•"/>
-            </a:pPr>
-            <a:r>
-              <a:rPr lang="en-US" sz="1500" dirty="0">
-                <a:solidFill>
-                  <a:srgbClr val="3D3A36"/>
-                </a:solidFill>
-                <a:latin typeface="Calibri" pitchFamily="34" charset="0"/>
-                <a:ea typeface="Calibri" pitchFamily="34" charset="-122"/>
-                <a:cs typeface="Calibri" pitchFamily="34" charset="-120"/>
-              </a:rPr>
-              <a:t>A spot of ink is placed on paper, and solvent moves up through it.</a:t>
-            </a:r>
-            <a:endParaRPr lang="en-US" sz="1500" dirty="0"/>
-          </a:p>
-          <a:p>
-            <a:pPr marL="342900" indent="-342900">
-              <a:spcAft>
-                <a:spcPts val="800"/>
-              </a:spcAft>
-              <a:buSzPct val="100000"/>
-              <a:buChar char="•"/>
-            </a:pPr>
-            <a:r>
-              <a:rPr lang="en-US" sz="1500" dirty="0">
-                <a:solidFill>
-                  <a:srgbClr val="3D3A36"/>
-                </a:solidFill>
-                <a:latin typeface="Calibri" pitchFamily="34" charset="0"/>
-                <a:ea typeface="Calibri" pitchFamily="34" charset="-122"/>
-                <a:cs typeface="Calibri" pitchFamily="34" charset="-120"/>
-              </a:rPr>
-              <a:t>Different dyes travel different distances — they separate into bands.</a:t>
-            </a:r>
-            <a:endParaRPr lang="en-US" sz="1500" dirty="0"/>
-          </a:p>
-          <a:p>
-            <a:pPr marL="342900" indent="-342900">
-              <a:spcAft>
-                <a:spcPts val="800"/>
-              </a:spcAft>
-              <a:buSzPct val="100000"/>
-              <a:buChar char="•"/>
-            </a:pPr>
-            <a:r>
-              <a:rPr lang="en-US" sz="1500" dirty="0">
-                <a:solidFill>
-                  <a:srgbClr val="3D3A36"/>
-                </a:solidFill>
-                <a:latin typeface="Calibri" pitchFamily="34" charset="0"/>
-                <a:ea typeface="Calibri" pitchFamily="34" charset="-122"/>
-                <a:cs typeface="Calibri" pitchFamily="34" charset="-120"/>
-              </a:rPr>
-              <a:t>Each colour band is a different substance in the ink.</a:t>
-            </a:r>
-            <a:endParaRPr lang="en-US" sz="1500" dirty="0"/>
-          </a:p>
-          <a:p>
-            <a:pPr marL="342900" indent="-342900">
-              <a:spcAft>
-                <a:spcPts val="800"/>
-              </a:spcAft>
-              <a:buSzPct val="100000"/>
-              <a:buChar char="•"/>
-            </a:pPr>
-            <a:r>
-              <a:rPr lang="en-US" sz="1500" dirty="0">
-                <a:solidFill>
-                  <a:srgbClr val="3D3A36"/>
-                </a:solidFill>
-                <a:latin typeface="Calibri" pitchFamily="34" charset="0"/>
-                <a:ea typeface="Calibri" pitchFamily="34" charset="-122"/>
-                <a:cs typeface="Calibri" pitchFamily="34" charset="-120"/>
-              </a:rPr>
-              <a:t>This technique is used in forensic science to analyse evidence.</a:t>
-            </a:r>
-            <a:endParaRPr lang="en-US" sz="1500" dirty="0"/>
-          </a:p>
-        </p:txBody>
-      </p:sp>
-      <p:sp>
-        <p:nvSpPr>
-          <p:cNvPr id="7" name="Shape 5"/>
+      </p:sp>
+      <p:sp>
+        <p:nvSpPr>
+          <p:cNvPr id="5" name="Text 3"/>
           <p:cNvSpPr/>
           <p:nvPr/>
         </p:nvSpPr>
         <p:spPr>
           <a:xfrm>
-            <a:off x="731520" y="4206240"/>
-            <a:ext cx="7680960" cy="640080"/>
-          </a:xfrm>
-          <a:prstGeom prst="rect">
-            <a:avLst/>
-          </a:prstGeom>
-          <a:solidFill>
-            <a:srgbClr val="E8F5F3"/>
-          </a:solidFill>
-          <a:ln/>
-          <a:effectLst>
-            <a:outerShdw sx="100000" sy="100000" kx="0" ky="0" algn="bl" rotWithShape="0" blurRad="50800" dist="25400" dir="8100000">
-              <a:srgbClr val="000000">
-                <a:alpha val="10000"/>
-              </a:srgbClr>
-            </a:outerShdw>
-          </a:effectLst>
-        </p:spPr>
-      </p:sp>
-      <p:sp>
-        <p:nvSpPr>
-          <p:cNvPr id="8" name="Text 6"/>
-          <p:cNvSpPr/>
-          <p:nvPr/>
-        </p:nvSpPr>
-        <p:spPr>
-          <a:xfrm>
-            <a:off x="914400" y="4251960"/>
-            <a:ext cx="7315200" cy="548640"/>
+            <a:off x="548640" y="1188720"/>
+            <a:ext cx="365760" cy="457200"/>
           </a:xfrm>
           <a:prstGeom prst="rect">
             <a:avLst/>
@@ -4995,31 +4742,302 @@
               <a:buNone/>
             </a:pPr>
             <a:r>
-              <a:rPr lang="en-US" sz="1200" b="1" dirty="0">
+              <a:rPr lang="en-US" sz="1600" dirty="0">
                 <a:solidFill>
                   <a:srgbClr val="2A9D8F"/>
                 </a:solidFill>
-                <a:latin typeface="Calibri" pitchFamily="34" charset="0"/>
-                <a:ea typeface="Calibri" pitchFamily="34" charset="-122"/>
-                <a:cs typeface="Calibri" pitchFamily="34" charset="-120"/>
+                <a:latin typeface="Arial" pitchFamily="34" charset="0"/>
+                <a:ea typeface="Arial" pitchFamily="34" charset="-122"/>
+                <a:cs typeface="Arial" pitchFamily="34" charset="-120"/>
               </a:rPr>
-              <a:t>Key Idea: </a:t>
+              <a:t>☐</a:t>
             </a:r>
+            <a:endParaRPr lang="en-US" sz="1600" dirty="0"/>
+          </a:p>
+        </p:txBody>
+      </p:sp>
+      <p:sp>
+        <p:nvSpPr>
+          <p:cNvPr id="6" name="Text 4"/>
+          <p:cNvSpPr/>
+          <p:nvPr/>
+        </p:nvSpPr>
+        <p:spPr>
+          <a:xfrm>
+            <a:off x="1005840" y="1188720"/>
+            <a:ext cx="9601200" cy="457200"/>
+          </a:xfrm>
+          <a:prstGeom prst="rect">
+            <a:avLst/>
+          </a:prstGeom>
+          <a:noFill/>
+          <a:ln/>
+        </p:spPr>
+        <p:txBody>
+          <a:bodyPr wrap="square" rtlCol="0" anchor="ctr"/>
+          <a:lstStyle/>
+          <a:p>
+            <a:pPr indent="0" marL="0">
+              <a:lnSpc>
+                <a:spcPct val="130000"/>
+              </a:lnSpc>
+              <a:buNone/>
+            </a:pPr>
+            <a:r>
+              <a:rPr lang="en-US" sz="1400" dirty="0">
+                <a:solidFill>
+                  <a:srgbClr val="3D3A36"/>
+                </a:solidFill>
+                <a:latin typeface="Arial" pitchFamily="34" charset="0"/>
+                <a:ea typeface="Arial" pitchFamily="34" charset="-122"/>
+                <a:cs typeface="Arial" pitchFamily="34" charset="-120"/>
+              </a:rPr>
+              <a:t>I can choose the correct separation method for a given mixture.</a:t>
+            </a:r>
+            <a:endParaRPr lang="en-US" sz="1400" dirty="0"/>
+          </a:p>
+        </p:txBody>
+      </p:sp>
+      <p:sp>
+        <p:nvSpPr>
+          <p:cNvPr id="7" name="Text 5"/>
+          <p:cNvSpPr/>
+          <p:nvPr/>
+        </p:nvSpPr>
+        <p:spPr>
+          <a:xfrm>
+            <a:off x="548640" y="1783080"/>
+            <a:ext cx="365760" cy="457200"/>
+          </a:xfrm>
+          <a:prstGeom prst="rect">
+            <a:avLst/>
+          </a:prstGeom>
+          <a:noFill/>
+          <a:ln/>
+        </p:spPr>
+        <p:txBody>
+          <a:bodyPr wrap="square" rtlCol="0" anchor="ctr"/>
+          <a:lstStyle/>
+          <a:p>
             <a:pPr indent="0" marL="0">
               <a:buNone/>
             </a:pPr>
             <a:r>
-              <a:rPr lang="en-US" sz="1200" i="1" dirty="0">
+              <a:rPr lang="en-US" sz="1600" dirty="0">
+                <a:solidFill>
+                  <a:srgbClr val="2A9D8F"/>
+                </a:solidFill>
+                <a:latin typeface="Arial" pitchFamily="34" charset="0"/>
+                <a:ea typeface="Arial" pitchFamily="34" charset="-122"/>
+                <a:cs typeface="Arial" pitchFamily="34" charset="-120"/>
+              </a:rPr>
+              <a:t>☐</a:t>
+            </a:r>
+            <a:endParaRPr lang="en-US" sz="1600" dirty="0"/>
+          </a:p>
+        </p:txBody>
+      </p:sp>
+      <p:sp>
+        <p:nvSpPr>
+          <p:cNvPr id="8" name="Text 6"/>
+          <p:cNvSpPr/>
+          <p:nvPr/>
+        </p:nvSpPr>
+        <p:spPr>
+          <a:xfrm>
+            <a:off x="1005840" y="1783080"/>
+            <a:ext cx="9601200" cy="457200"/>
+          </a:xfrm>
+          <a:prstGeom prst="rect">
+            <a:avLst/>
+          </a:prstGeom>
+          <a:noFill/>
+          <a:ln/>
+        </p:spPr>
+        <p:txBody>
+          <a:bodyPr wrap="square" rtlCol="0" anchor="ctr"/>
+          <a:lstStyle/>
+          <a:p>
+            <a:pPr indent="0" marL="0">
+              <a:lnSpc>
+                <a:spcPct val="130000"/>
+              </a:lnSpc>
+              <a:buNone/>
+            </a:pPr>
+            <a:r>
+              <a:rPr lang="en-US" sz="1400" dirty="0">
                 <a:solidFill>
                   <a:srgbClr val="3D3A36"/>
                 </a:solidFill>
-                <a:latin typeface="Calibri" pitchFamily="34" charset="0"/>
-                <a:ea typeface="Calibri" pitchFamily="34" charset="-122"/>
-                <a:cs typeface="Calibri" pitchFamily="34" charset="-120"/>
+                <a:latin typeface="Arial" pitchFamily="34" charset="0"/>
+                <a:ea typeface="Arial" pitchFamily="34" charset="-122"/>
+                <a:cs typeface="Arial" pitchFamily="34" charset="-120"/>
               </a:rPr>
-              <a:t>The further a substance travels, the more soluble it is in the solvent.</a:t>
+              <a:t>I can explain how filtration works.</a:t>
             </a:r>
-            <a:endParaRPr lang="en-US" sz="1200" dirty="0"/>
+            <a:endParaRPr lang="en-US" sz="1400" dirty="0"/>
+          </a:p>
+        </p:txBody>
+      </p:sp>
+      <p:sp>
+        <p:nvSpPr>
+          <p:cNvPr id="9" name="Text 7"/>
+          <p:cNvSpPr/>
+          <p:nvPr/>
+        </p:nvSpPr>
+        <p:spPr>
+          <a:xfrm>
+            <a:off x="548640" y="2377440"/>
+            <a:ext cx="365760" cy="457200"/>
+          </a:xfrm>
+          <a:prstGeom prst="rect">
+            <a:avLst/>
+          </a:prstGeom>
+          <a:noFill/>
+          <a:ln/>
+        </p:spPr>
+        <p:txBody>
+          <a:bodyPr wrap="square" rtlCol="0" anchor="ctr"/>
+          <a:lstStyle/>
+          <a:p>
+            <a:pPr indent="0" marL="0">
+              <a:buNone/>
+            </a:pPr>
+            <a:r>
+              <a:rPr lang="en-US" sz="1600" dirty="0">
+                <a:solidFill>
+                  <a:srgbClr val="2A9D8F"/>
+                </a:solidFill>
+                <a:latin typeface="Arial" pitchFamily="34" charset="0"/>
+                <a:ea typeface="Arial" pitchFamily="34" charset="-122"/>
+                <a:cs typeface="Arial" pitchFamily="34" charset="-120"/>
+              </a:rPr>
+              <a:t>☐</a:t>
+            </a:r>
+            <a:endParaRPr lang="en-US" sz="1600" dirty="0"/>
+          </a:p>
+        </p:txBody>
+      </p:sp>
+      <p:sp>
+        <p:nvSpPr>
+          <p:cNvPr id="10" name="Text 8"/>
+          <p:cNvSpPr/>
+          <p:nvPr/>
+        </p:nvSpPr>
+        <p:spPr>
+          <a:xfrm>
+            <a:off x="1005840" y="2377440"/>
+            <a:ext cx="9601200" cy="457200"/>
+          </a:xfrm>
+          <a:prstGeom prst="rect">
+            <a:avLst/>
+          </a:prstGeom>
+          <a:noFill/>
+          <a:ln/>
+        </p:spPr>
+        <p:txBody>
+          <a:bodyPr wrap="square" rtlCol="0" anchor="ctr"/>
+          <a:lstStyle/>
+          <a:p>
+            <a:pPr indent="0" marL="0">
+              <a:lnSpc>
+                <a:spcPct val="130000"/>
+              </a:lnSpc>
+              <a:buNone/>
+            </a:pPr>
+            <a:r>
+              <a:rPr lang="en-US" sz="1400" dirty="0">
+                <a:solidFill>
+                  <a:srgbClr val="3D3A36"/>
+                </a:solidFill>
+                <a:latin typeface="Arial" pitchFamily="34" charset="0"/>
+                <a:ea typeface="Arial" pitchFamily="34" charset="-122"/>
+                <a:cs typeface="Arial" pitchFamily="34" charset="-120"/>
+              </a:rPr>
+              <a:t>I can describe the difference between evaporation and distillation.</a:t>
+            </a:r>
+            <a:endParaRPr lang="en-US" sz="1400" dirty="0"/>
+          </a:p>
+        </p:txBody>
+      </p:sp>
+      <p:sp>
+        <p:nvSpPr>
+          <p:cNvPr id="11" name="Text 9"/>
+          <p:cNvSpPr/>
+          <p:nvPr/>
+        </p:nvSpPr>
+        <p:spPr>
+          <a:xfrm>
+            <a:off x="548640" y="2971800"/>
+            <a:ext cx="365760" cy="457200"/>
+          </a:xfrm>
+          <a:prstGeom prst="rect">
+            <a:avLst/>
+          </a:prstGeom>
+          <a:noFill/>
+          <a:ln/>
+        </p:spPr>
+        <p:txBody>
+          <a:bodyPr wrap="square" rtlCol="0" anchor="ctr"/>
+          <a:lstStyle/>
+          <a:p>
+            <a:pPr indent="0" marL="0">
+              <a:buNone/>
+            </a:pPr>
+            <a:r>
+              <a:rPr lang="en-US" sz="1600" dirty="0">
+                <a:solidFill>
+                  <a:srgbClr val="2A9D8F"/>
+                </a:solidFill>
+                <a:latin typeface="Arial" pitchFamily="34" charset="0"/>
+                <a:ea typeface="Arial" pitchFamily="34" charset="-122"/>
+                <a:cs typeface="Arial" pitchFamily="34" charset="-120"/>
+              </a:rPr>
+              <a:t>☐</a:t>
+            </a:r>
+            <a:endParaRPr lang="en-US" sz="1600" dirty="0"/>
+          </a:p>
+        </p:txBody>
+      </p:sp>
+      <p:sp>
+        <p:nvSpPr>
+          <p:cNvPr id="12" name="Text 10"/>
+          <p:cNvSpPr/>
+          <p:nvPr/>
+        </p:nvSpPr>
+        <p:spPr>
+          <a:xfrm>
+            <a:off x="1005840" y="2971800"/>
+            <a:ext cx="9601200" cy="457200"/>
+          </a:xfrm>
+          <a:prstGeom prst="rect">
+            <a:avLst/>
+          </a:prstGeom>
+          <a:noFill/>
+          <a:ln/>
+        </p:spPr>
+        <p:txBody>
+          <a:bodyPr wrap="square" rtlCol="0" anchor="ctr"/>
+          <a:lstStyle/>
+          <a:p>
+            <a:pPr indent="0" marL="0">
+              <a:lnSpc>
+                <a:spcPct val="130000"/>
+              </a:lnSpc>
+              <a:buNone/>
+            </a:pPr>
+            <a:r>
+              <a:rPr lang="en-US" sz="1400" dirty="0">
+                <a:solidFill>
+                  <a:srgbClr val="3D3A36"/>
+                </a:solidFill>
+                <a:latin typeface="Arial" pitchFamily="34" charset="0"/>
+                <a:ea typeface="Arial" pitchFamily="34" charset="-122"/>
+                <a:cs typeface="Arial" pitchFamily="34" charset="-120"/>
+              </a:rPr>
+              <a:t>I can explain what the residue and filtrate are.</a:t>
+            </a:r>
+            <a:endParaRPr lang="en-US" sz="1400" dirty="0"/>
           </a:p>
         </p:txBody>
       </p:sp>
@@ -5037,7 +5055,7 @@
     <p:bg>
       <p:bgPr>
         <a:solidFill>
-          <a:srgbClr val="FAF8F5"/>
+          <a:srgbClr val="111D35"/>
         </a:solidFill>
       </p:bgPr>
     </p:bg>
@@ -5057,771 +5075,30 @@
       </p:grpSpPr>
       <p:sp>
         <p:nvSpPr>
-          <p:cNvPr id="2" name="Shape 0"/>
+          <p:cNvPr id="2" name="Text 0"/>
           <p:cNvSpPr/>
           <p:nvPr/>
         </p:nvSpPr>
         <p:spPr>
           <a:xfrm>
-            <a:off x="0" y="0"/>
-            <a:ext cx="9144000" cy="822960"/>
+            <a:off x="731520" y="1371600"/>
+            <a:ext cx="9144000" cy="914400"/>
           </a:xfrm>
           <a:prstGeom prst="rect">
             <a:avLst/>
           </a:prstGeom>
-          <a:solidFill>
-            <a:srgbClr val="FFFFFF"/>
-          </a:solidFill>
-          <a:ln/>
-        </p:spPr>
-      </p:sp>
-      <p:sp>
-        <p:nvSpPr>
-          <p:cNvPr id="3" name="Shape 1"/>
-          <p:cNvSpPr/>
-          <p:nvPr/>
-        </p:nvSpPr>
-        <p:spPr>
-          <a:xfrm>
-            <a:off x="0" y="804672"/>
-            <a:ext cx="9144000" cy="27432"/>
-          </a:xfrm>
-          <a:prstGeom prst="rect">
-            <a:avLst/>
-          </a:prstGeom>
-          <a:solidFill>
-            <a:srgbClr val="E5E2DC"/>
-          </a:solidFill>
-          <a:ln/>
-        </p:spPr>
-      </p:sp>
-      <p:sp>
-        <p:nvSpPr>
-          <p:cNvPr id="4" name="Shape 2"/>
-          <p:cNvSpPr/>
-          <p:nvPr/>
-        </p:nvSpPr>
-        <p:spPr>
-          <a:xfrm>
-            <a:off x="548640" y="201168"/>
-            <a:ext cx="54864" cy="420624"/>
-          </a:xfrm>
-          <a:prstGeom prst="rect">
-            <a:avLst/>
-          </a:prstGeom>
-          <a:solidFill>
-            <a:srgbClr val="2A9D8F"/>
-          </a:solidFill>
-          <a:ln/>
-        </p:spPr>
-      </p:sp>
-      <p:sp>
-        <p:nvSpPr>
-          <p:cNvPr id="5" name="Text 3"/>
-          <p:cNvSpPr/>
-          <p:nvPr/>
-        </p:nvSpPr>
-        <p:spPr>
-          <a:xfrm>
-            <a:off x="777240" y="137160"/>
-            <a:ext cx="7772400" cy="548640"/>
-          </a:xfrm>
-          <a:prstGeom prst="rect">
-            <a:avLst/>
-          </a:prstGeom>
           <a:noFill/>
           <a:ln/>
         </p:spPr>
         <p:txBody>
-          <a:bodyPr wrap="square" lIns="0" tIns="0" rIns="0" bIns="0" rtlCol="0" anchor="ctr"/>
+          <a:bodyPr wrap="square" rtlCol="0" anchor="ctr"/>
           <a:lstStyle/>
           <a:p>
             <a:pPr indent="0" marL="0">
               <a:buNone/>
             </a:pPr>
             <a:r>
-              <a:rPr lang="en-US" sz="2000" b="1" dirty="0">
-                <a:solidFill>
-                  <a:srgbClr val="1B2A4A"/>
-                </a:solidFill>
-                <a:latin typeface="Georgia" pitchFamily="34" charset="0"/>
-                <a:ea typeface="Georgia" pitchFamily="34" charset="-122"/>
-                <a:cs typeface="Georgia" pitchFamily="34" charset="-120"/>
-              </a:rPr>
-              <a:t>Check Your Understanding</a:t>
-            </a:r>
-            <a:endParaRPr lang="en-US" sz="2000" dirty="0"/>
-          </a:p>
-        </p:txBody>
-      </p:sp>
-      <p:sp>
-        <p:nvSpPr>
-          <p:cNvPr id="6" name="Shape 4"/>
-          <p:cNvSpPr/>
-          <p:nvPr/>
-        </p:nvSpPr>
-        <p:spPr>
-          <a:xfrm>
-            <a:off x="731520" y="1051560"/>
-            <a:ext cx="7680960" cy="438912"/>
-          </a:xfrm>
-          <a:prstGeom prst="rect">
-            <a:avLst/>
-          </a:prstGeom>
-          <a:solidFill>
-            <a:srgbClr val="FFFFFF"/>
-          </a:solidFill>
-          <a:ln/>
-        </p:spPr>
-      </p:sp>
-      <p:sp>
-        <p:nvSpPr>
-          <p:cNvPr id="7" name="Text 5"/>
-          <p:cNvSpPr/>
-          <p:nvPr/>
-        </p:nvSpPr>
-        <p:spPr>
-          <a:xfrm>
-            <a:off x="868680" y="1051560"/>
-            <a:ext cx="320040" cy="438912"/>
-          </a:xfrm>
-          <a:prstGeom prst="rect">
-            <a:avLst/>
-          </a:prstGeom>
-          <a:noFill/>
-          <a:ln/>
-        </p:spPr>
-        <p:txBody>
-          <a:bodyPr wrap="square" rtlCol="0" anchor="ctr"/>
-          <a:lstStyle/>
-          <a:p>
-            <a:pPr indent="0" marL="0">
-              <a:buNone/>
-            </a:pPr>
-            <a:r>
-              <a:rPr lang="en-US" sz="1400" dirty="0">
-                <a:solidFill>
-                  <a:srgbClr val="2A9D8F"/>
-                </a:solidFill>
-              </a:rPr>
-              <a:t>☐</a:t>
-            </a:r>
-            <a:endParaRPr lang="en-US" sz="1400" dirty="0"/>
-          </a:p>
-        </p:txBody>
-      </p:sp>
-      <p:sp>
-        <p:nvSpPr>
-          <p:cNvPr id="8" name="Text 6"/>
-          <p:cNvSpPr/>
-          <p:nvPr/>
-        </p:nvSpPr>
-        <p:spPr>
-          <a:xfrm>
-            <a:off x="1234440" y="1051560"/>
-            <a:ext cx="6949440" cy="438912"/>
-          </a:xfrm>
-          <a:prstGeom prst="rect">
-            <a:avLst/>
-          </a:prstGeom>
-          <a:noFill/>
-          <a:ln/>
-        </p:spPr>
-        <p:txBody>
-          <a:bodyPr wrap="square" rtlCol="0" anchor="ctr"/>
-          <a:lstStyle/>
-          <a:p>
-            <a:pPr indent="0" marL="0">
-              <a:buNone/>
-            </a:pPr>
-            <a:r>
-              <a:rPr lang="en-US" sz="1300" dirty="0">
-                <a:solidFill>
-                  <a:srgbClr val="3D3A36"/>
-                </a:solidFill>
-                <a:latin typeface="Calibri" pitchFamily="34" charset="0"/>
-                <a:ea typeface="Calibri" pitchFamily="34" charset="-122"/>
-                <a:cs typeface="Calibri" pitchFamily="34" charset="-120"/>
-              </a:rPr>
-              <a:t>I can choose the correct separation technique for a mixture</a:t>
-            </a:r>
-            <a:endParaRPr lang="en-US" sz="1300" dirty="0"/>
-          </a:p>
-        </p:txBody>
-      </p:sp>
-      <p:sp>
-        <p:nvSpPr>
-          <p:cNvPr id="9" name="Shape 7"/>
-          <p:cNvSpPr/>
-          <p:nvPr/>
-        </p:nvSpPr>
-        <p:spPr>
-          <a:xfrm>
-            <a:off x="731520" y="1554480"/>
-            <a:ext cx="7680960" cy="438912"/>
-          </a:xfrm>
-          <a:prstGeom prst="rect">
-            <a:avLst/>
-          </a:prstGeom>
-          <a:solidFill>
-            <a:srgbClr val="F8F6F3"/>
-          </a:solidFill>
-          <a:ln/>
-        </p:spPr>
-      </p:sp>
-      <p:sp>
-        <p:nvSpPr>
-          <p:cNvPr id="10" name="Text 8"/>
-          <p:cNvSpPr/>
-          <p:nvPr/>
-        </p:nvSpPr>
-        <p:spPr>
-          <a:xfrm>
-            <a:off x="868680" y="1554480"/>
-            <a:ext cx="320040" cy="438912"/>
-          </a:xfrm>
-          <a:prstGeom prst="rect">
-            <a:avLst/>
-          </a:prstGeom>
-          <a:noFill/>
-          <a:ln/>
-        </p:spPr>
-        <p:txBody>
-          <a:bodyPr wrap="square" rtlCol="0" anchor="ctr"/>
-          <a:lstStyle/>
-          <a:p>
-            <a:pPr indent="0" marL="0">
-              <a:buNone/>
-            </a:pPr>
-            <a:r>
-              <a:rPr lang="en-US" sz="1400" dirty="0">
-                <a:solidFill>
-                  <a:srgbClr val="2A9D8F"/>
-                </a:solidFill>
-              </a:rPr>
-              <a:t>☐</a:t>
-            </a:r>
-            <a:endParaRPr lang="en-US" sz="1400" dirty="0"/>
-          </a:p>
-        </p:txBody>
-      </p:sp>
-      <p:sp>
-        <p:nvSpPr>
-          <p:cNvPr id="11" name="Text 9"/>
-          <p:cNvSpPr/>
-          <p:nvPr/>
-        </p:nvSpPr>
-        <p:spPr>
-          <a:xfrm>
-            <a:off x="1234440" y="1554480"/>
-            <a:ext cx="6949440" cy="438912"/>
-          </a:xfrm>
-          <a:prstGeom prst="rect">
-            <a:avLst/>
-          </a:prstGeom>
-          <a:noFill/>
-          <a:ln/>
-        </p:spPr>
-        <p:txBody>
-          <a:bodyPr wrap="square" rtlCol="0" anchor="ctr"/>
-          <a:lstStyle/>
-          <a:p>
-            <a:pPr indent="0" marL="0">
-              <a:buNone/>
-            </a:pPr>
-            <a:r>
-              <a:rPr lang="en-US" sz="1300" dirty="0">
-                <a:solidFill>
-                  <a:srgbClr val="3D3A36"/>
-                </a:solidFill>
-                <a:latin typeface="Calibri" pitchFamily="34" charset="0"/>
-                <a:ea typeface="Calibri" pitchFamily="34" charset="-122"/>
-                <a:cs typeface="Calibri" pitchFamily="34" charset="-120"/>
-              </a:rPr>
-              <a:t>I can describe filtration, evaporation, distillation, and chromatography</a:t>
-            </a:r>
-            <a:endParaRPr lang="en-US" sz="1300" dirty="0"/>
-          </a:p>
-        </p:txBody>
-      </p:sp>
-      <p:sp>
-        <p:nvSpPr>
-          <p:cNvPr id="12" name="Shape 10"/>
-          <p:cNvSpPr/>
-          <p:nvPr/>
-        </p:nvSpPr>
-        <p:spPr>
-          <a:xfrm>
-            <a:off x="731520" y="2057400"/>
-            <a:ext cx="7680960" cy="438912"/>
-          </a:xfrm>
-          <a:prstGeom prst="rect">
-            <a:avLst/>
-          </a:prstGeom>
-          <a:solidFill>
-            <a:srgbClr val="FFFFFF"/>
-          </a:solidFill>
-          <a:ln/>
-        </p:spPr>
-      </p:sp>
-      <p:sp>
-        <p:nvSpPr>
-          <p:cNvPr id="13" name="Text 11"/>
-          <p:cNvSpPr/>
-          <p:nvPr/>
-        </p:nvSpPr>
-        <p:spPr>
-          <a:xfrm>
-            <a:off x="868680" y="2057400"/>
-            <a:ext cx="320040" cy="438912"/>
-          </a:xfrm>
-          <a:prstGeom prst="rect">
-            <a:avLst/>
-          </a:prstGeom>
-          <a:noFill/>
-          <a:ln/>
-        </p:spPr>
-        <p:txBody>
-          <a:bodyPr wrap="square" rtlCol="0" anchor="ctr"/>
-          <a:lstStyle/>
-          <a:p>
-            <a:pPr indent="0" marL="0">
-              <a:buNone/>
-            </a:pPr>
-            <a:r>
-              <a:rPr lang="en-US" sz="1400" dirty="0">
-                <a:solidFill>
-                  <a:srgbClr val="2A9D8F"/>
-                </a:solidFill>
-              </a:rPr>
-              <a:t>☐</a:t>
-            </a:r>
-            <a:endParaRPr lang="en-US" sz="1400" dirty="0"/>
-          </a:p>
-        </p:txBody>
-      </p:sp>
-      <p:sp>
-        <p:nvSpPr>
-          <p:cNvPr id="14" name="Text 12"/>
-          <p:cNvSpPr/>
-          <p:nvPr/>
-        </p:nvSpPr>
-        <p:spPr>
-          <a:xfrm>
-            <a:off x="1234440" y="2057400"/>
-            <a:ext cx="6949440" cy="438912"/>
-          </a:xfrm>
-          <a:prstGeom prst="rect">
-            <a:avLst/>
-          </a:prstGeom>
-          <a:noFill/>
-          <a:ln/>
-        </p:spPr>
-        <p:txBody>
-          <a:bodyPr wrap="square" rtlCol="0" anchor="ctr"/>
-          <a:lstStyle/>
-          <a:p>
-            <a:pPr indent="0" marL="0">
-              <a:buNone/>
-            </a:pPr>
-            <a:r>
-              <a:rPr lang="en-US" sz="1300" dirty="0">
-                <a:solidFill>
-                  <a:srgbClr val="3D3A36"/>
-                </a:solidFill>
-                <a:latin typeface="Calibri" pitchFamily="34" charset="0"/>
-                <a:ea typeface="Calibri" pitchFamily="34" charset="-122"/>
-                <a:cs typeface="Calibri" pitchFamily="34" charset="-120"/>
-              </a:rPr>
-              <a:t>I know the difference between residue and filtrate</a:t>
-            </a:r>
-            <a:endParaRPr lang="en-US" sz="1300" dirty="0"/>
-          </a:p>
-        </p:txBody>
-      </p:sp>
-      <p:sp>
-        <p:nvSpPr>
-          <p:cNvPr id="15" name="Shape 13"/>
-          <p:cNvSpPr/>
-          <p:nvPr/>
-        </p:nvSpPr>
-        <p:spPr>
-          <a:xfrm>
-            <a:off x="731520" y="2560320"/>
-            <a:ext cx="7680960" cy="438912"/>
-          </a:xfrm>
-          <a:prstGeom prst="rect">
-            <a:avLst/>
-          </a:prstGeom>
-          <a:solidFill>
-            <a:srgbClr val="F8F6F3"/>
-          </a:solidFill>
-          <a:ln/>
-        </p:spPr>
-      </p:sp>
-      <p:sp>
-        <p:nvSpPr>
-          <p:cNvPr id="16" name="Text 14"/>
-          <p:cNvSpPr/>
-          <p:nvPr/>
-        </p:nvSpPr>
-        <p:spPr>
-          <a:xfrm>
-            <a:off x="868680" y="2560320"/>
-            <a:ext cx="320040" cy="438912"/>
-          </a:xfrm>
-          <a:prstGeom prst="rect">
-            <a:avLst/>
-          </a:prstGeom>
-          <a:noFill/>
-          <a:ln/>
-        </p:spPr>
-        <p:txBody>
-          <a:bodyPr wrap="square" rtlCol="0" anchor="ctr"/>
-          <a:lstStyle/>
-          <a:p>
-            <a:pPr indent="0" marL="0">
-              <a:buNone/>
-            </a:pPr>
-            <a:r>
-              <a:rPr lang="en-US" sz="1400" dirty="0">
-                <a:solidFill>
-                  <a:srgbClr val="2A9D8F"/>
-                </a:solidFill>
-              </a:rPr>
-              <a:t>☐</a:t>
-            </a:r>
-            <a:endParaRPr lang="en-US" sz="1400" dirty="0"/>
-          </a:p>
-        </p:txBody>
-      </p:sp>
-      <p:sp>
-        <p:nvSpPr>
-          <p:cNvPr id="17" name="Text 15"/>
-          <p:cNvSpPr/>
-          <p:nvPr/>
-        </p:nvSpPr>
-        <p:spPr>
-          <a:xfrm>
-            <a:off x="1234440" y="2560320"/>
-            <a:ext cx="6949440" cy="438912"/>
-          </a:xfrm>
-          <a:prstGeom prst="rect">
-            <a:avLst/>
-          </a:prstGeom>
-          <a:noFill/>
-          <a:ln/>
-        </p:spPr>
-        <p:txBody>
-          <a:bodyPr wrap="square" rtlCol="0" anchor="ctr"/>
-          <a:lstStyle/>
-          <a:p>
-            <a:pPr indent="0" marL="0">
-              <a:buNone/>
-            </a:pPr>
-            <a:r>
-              <a:rPr lang="en-US" sz="1300" dirty="0">
-                <a:solidFill>
-                  <a:srgbClr val="3D3A36"/>
-                </a:solidFill>
-                <a:latin typeface="Calibri" pitchFamily="34" charset="0"/>
-                <a:ea typeface="Calibri" pitchFamily="34" charset="-122"/>
-                <a:cs typeface="Calibri" pitchFamily="34" charset="-120"/>
-              </a:rPr>
-              <a:t>I understand why each technique works (the science behind it)</a:t>
-            </a:r>
-            <a:endParaRPr lang="en-US" sz="1300" dirty="0"/>
-          </a:p>
-        </p:txBody>
-      </p:sp>
-      <p:sp>
-        <p:nvSpPr>
-          <p:cNvPr id="18" name="Shape 16"/>
-          <p:cNvSpPr/>
-          <p:nvPr/>
-        </p:nvSpPr>
-        <p:spPr>
-          <a:xfrm>
-            <a:off x="731520" y="3063240"/>
-            <a:ext cx="7680960" cy="438912"/>
-          </a:xfrm>
-          <a:prstGeom prst="rect">
-            <a:avLst/>
-          </a:prstGeom>
-          <a:solidFill>
-            <a:srgbClr val="FFFFFF"/>
-          </a:solidFill>
-          <a:ln/>
-        </p:spPr>
-      </p:sp>
-      <p:sp>
-        <p:nvSpPr>
-          <p:cNvPr id="19" name="Text 17"/>
-          <p:cNvSpPr/>
-          <p:nvPr/>
-        </p:nvSpPr>
-        <p:spPr>
-          <a:xfrm>
-            <a:off x="868680" y="3063240"/>
-            <a:ext cx="320040" cy="438912"/>
-          </a:xfrm>
-          <a:prstGeom prst="rect">
-            <a:avLst/>
-          </a:prstGeom>
-          <a:noFill/>
-          <a:ln/>
-        </p:spPr>
-        <p:txBody>
-          <a:bodyPr wrap="square" rtlCol="0" anchor="ctr"/>
-          <a:lstStyle/>
-          <a:p>
-            <a:pPr indent="0" marL="0">
-              <a:buNone/>
-            </a:pPr>
-            <a:r>
-              <a:rPr lang="en-US" sz="1400" dirty="0">
-                <a:solidFill>
-                  <a:srgbClr val="2A9D8F"/>
-                </a:solidFill>
-              </a:rPr>
-              <a:t>☐</a:t>
-            </a:r>
-            <a:endParaRPr lang="en-US" sz="1400" dirty="0"/>
-          </a:p>
-        </p:txBody>
-      </p:sp>
-      <p:sp>
-        <p:nvSpPr>
-          <p:cNvPr id="20" name="Text 18"/>
-          <p:cNvSpPr/>
-          <p:nvPr/>
-        </p:nvSpPr>
-        <p:spPr>
-          <a:xfrm>
-            <a:off x="1234440" y="3063240"/>
-            <a:ext cx="6949440" cy="438912"/>
-          </a:xfrm>
-          <a:prstGeom prst="rect">
-            <a:avLst/>
-          </a:prstGeom>
-          <a:noFill/>
-          <a:ln/>
-        </p:spPr>
-        <p:txBody>
-          <a:bodyPr wrap="square" rtlCol="0" anchor="ctr"/>
-          <a:lstStyle/>
-          <a:p>
-            <a:pPr indent="0" marL="0">
-              <a:buNone/>
-            </a:pPr>
-            <a:r>
-              <a:rPr lang="en-US" sz="1300" dirty="0">
-                <a:solidFill>
-                  <a:srgbClr val="3D3A36"/>
-                </a:solidFill>
-                <a:latin typeface="Calibri" pitchFamily="34" charset="0"/>
-                <a:ea typeface="Calibri" pitchFamily="34" charset="-122"/>
-                <a:cs typeface="Calibri" pitchFamily="34" charset="-120"/>
-              </a:rPr>
-              <a:t>I can explain when to use distillation instead of evaporation</a:t>
-            </a:r>
-            <a:endParaRPr lang="en-US" sz="1300" dirty="0"/>
-          </a:p>
-        </p:txBody>
-      </p:sp>
-      <p:sp>
-        <p:nvSpPr>
-          <p:cNvPr id="21" name="Shape 19"/>
-          <p:cNvSpPr/>
-          <p:nvPr/>
-        </p:nvSpPr>
-        <p:spPr>
-          <a:xfrm>
-            <a:off x="731520" y="3749040"/>
-            <a:ext cx="7680960" cy="594360"/>
-          </a:xfrm>
-          <a:prstGeom prst="rect">
-            <a:avLst/>
-          </a:prstGeom>
-          <a:solidFill>
-            <a:srgbClr val="E8F5F3"/>
-          </a:solidFill>
-          <a:ln/>
-          <a:effectLst>
-            <a:outerShdw sx="100000" sy="100000" kx="0" ky="0" algn="bl" rotWithShape="0" blurRad="50800" dist="25400" dir="8100000">
-              <a:srgbClr val="000000">
-                <a:alpha val="10000"/>
-              </a:srgbClr>
-            </a:outerShdw>
-          </a:effectLst>
-        </p:spPr>
-      </p:sp>
-      <p:sp>
-        <p:nvSpPr>
-          <p:cNvPr id="22" name="Text 20"/>
-          <p:cNvSpPr/>
-          <p:nvPr/>
-        </p:nvSpPr>
-        <p:spPr>
-          <a:xfrm>
-            <a:off x="914400" y="3749040"/>
-            <a:ext cx="7315200" cy="594360"/>
-          </a:xfrm>
-          <a:prstGeom prst="rect">
-            <a:avLst/>
-          </a:prstGeom>
-          <a:noFill/>
-          <a:ln/>
-        </p:spPr>
-        <p:txBody>
-          <a:bodyPr wrap="square" rtlCol="0" anchor="ctr"/>
-          <a:lstStyle/>
-          <a:p>
-            <a:pPr indent="0" marL="0">
-              <a:buNone/>
-            </a:pPr>
-            <a:r>
-              <a:rPr lang="en-US" sz="1200" b="1" dirty="0">
-                <a:solidFill>
-                  <a:srgbClr val="2A9D8F"/>
-                </a:solidFill>
-                <a:latin typeface="Calibri" pitchFamily="34" charset="0"/>
-                <a:ea typeface="Calibri" pitchFamily="34" charset="-122"/>
-                <a:cs typeface="Calibri" pitchFamily="34" charset="-120"/>
-              </a:rPr>
-              <a:t>Key Idea: </a:t>
-            </a:r>
-            <a:pPr indent="0" marL="0">
-              <a:buNone/>
-            </a:pPr>
-            <a:r>
-              <a:rPr lang="en-US" sz="1200" i="1" dirty="0">
-                <a:solidFill>
-                  <a:srgbClr val="3D3A36"/>
-                </a:solidFill>
-                <a:latin typeface="Calibri" pitchFamily="34" charset="0"/>
-                <a:ea typeface="Calibri" pitchFamily="34" charset="-122"/>
-                <a:cs typeface="Calibri" pitchFamily="34" charset="-120"/>
-              </a:rPr>
-              <a:t>The right technique depends on the PROPERTIES of the substances in the mixture.</a:t>
-            </a:r>
-            <a:endParaRPr lang="en-US" sz="1200" dirty="0"/>
-          </a:p>
-        </p:txBody>
-      </p:sp>
-    </p:spTree>
-  </p:cSld>
-  <p:clrMapOvr>
-    <a:masterClrMapping/>
-  </p:clrMapOvr>
-</p:sld>
-</file>
-
-<file path=ppt/slides/slide8.xml><?xml version="1.0" encoding="utf-8"?>
-<p:sld xmlns:a="http://schemas.openxmlformats.org/drawingml/2006/main" xmlns:r="http://schemas.openxmlformats.org/officeDocument/2006/relationships" xmlns:p="http://schemas.openxmlformats.org/presentationml/2006/main">
-  <p:cSld name="Slide 8">
-    <p:spTree>
-      <p:nvGrpSpPr>
-        <p:cNvPr id="1" name=""/>
-        <p:cNvGrpSpPr/>
-        <p:nvPr/>
-      </p:nvGrpSpPr>
-      <p:grpSpPr>
-        <a:xfrm>
-          <a:off x="0" y="0"/>
-          <a:ext cx="0" cy="0"/>
-          <a:chOff x="0" y="0"/>
-          <a:chExt cx="0" cy="0"/>
-        </a:xfrm>
-      </p:grpSpPr>
-      <p:sp>
-        <p:nvSpPr>
-          <p:cNvPr id="2" name="Shape 0"/>
-          <p:cNvSpPr/>
-          <p:nvPr/>
-        </p:nvSpPr>
-        <p:spPr>
-          <a:xfrm>
-            <a:off x="0" y="0"/>
-            <a:ext cx="9144000" cy="5143500"/>
-          </a:xfrm>
-          <a:prstGeom prst="rect">
-            <a:avLst/>
-          </a:prstGeom>
-          <a:solidFill>
-            <a:srgbClr val="1B2A4A"/>
-          </a:solidFill>
-          <a:ln/>
-        </p:spPr>
-      </p:sp>
-      <p:sp>
-        <p:nvSpPr>
-          <p:cNvPr id="3" name="Shape 1"/>
-          <p:cNvSpPr/>
-          <p:nvPr/>
-        </p:nvSpPr>
-        <p:spPr>
-          <a:xfrm>
-            <a:off x="0" y="4777740"/>
-            <a:ext cx="9144000" cy="365760"/>
-          </a:xfrm>
-          <a:prstGeom prst="rect">
-            <a:avLst/>
-          </a:prstGeom>
-          <a:solidFill>
-            <a:srgbClr val="2A9D8F"/>
-          </a:solidFill>
-          <a:ln/>
-        </p:spPr>
-      </p:sp>
-      <p:sp>
-        <p:nvSpPr>
-          <p:cNvPr id="4" name="Shape 2"/>
-          <p:cNvSpPr/>
-          <p:nvPr/>
-        </p:nvSpPr>
-        <p:spPr>
-          <a:xfrm>
-            <a:off x="-914400" y="-914400"/>
-            <a:ext cx="3657600" cy="3657600"/>
-          </a:xfrm>
-          <a:prstGeom prst="ellipse">
-            <a:avLst/>
-          </a:prstGeom>
-          <a:solidFill>
-            <a:srgbClr val="2A9D8F">
-              <a:alpha val="10000"/>
-            </a:srgbClr>
-          </a:solidFill>
-          <a:ln/>
-        </p:spPr>
-      </p:sp>
-      <p:sp>
-        <p:nvSpPr>
-          <p:cNvPr id="5" name="Text 3"/>
-          <p:cNvSpPr/>
-          <p:nvPr/>
-        </p:nvSpPr>
-        <p:spPr>
-          <a:xfrm>
-            <a:off x="731520" y="1463040"/>
-            <a:ext cx="7680960" cy="822960"/>
-          </a:xfrm>
-          <a:prstGeom prst="rect">
-            <a:avLst/>
-          </a:prstGeom>
-          <a:noFill/>
-          <a:ln/>
-        </p:spPr>
-        <p:txBody>
-          <a:bodyPr wrap="square" rtlCol="0" anchor="ctr"/>
-          <a:lstStyle/>
-          <a:p>
-            <a:pPr algn="ctr" indent="0" marL="0">
-              <a:buNone/>
-            </a:pPr>
-            <a:r>
-              <a:rPr lang="en-US" sz="3400" b="1" dirty="0">
+              <a:rPr lang="en-US" sz="3200" b="1" dirty="0">
                 <a:solidFill>
                   <a:srgbClr val="FFFFFF"/>
                 </a:solidFill>
@@ -5831,20 +5108,20 @@
               </a:rPr>
               <a:t>Review &amp; Practise</a:t>
             </a:r>
-            <a:endParaRPr lang="en-US" sz="3400" dirty="0"/>
+            <a:endParaRPr lang="en-US" sz="3200" dirty="0"/>
           </a:p>
         </p:txBody>
       </p:sp>
       <p:sp>
         <p:nvSpPr>
-          <p:cNvPr id="6" name="Text 4"/>
+          <p:cNvPr id="3" name="Text 1"/>
           <p:cNvSpPr/>
           <p:nvPr/>
         </p:nvSpPr>
         <p:spPr>
           <a:xfrm>
-            <a:off x="731520" y="2468880"/>
-            <a:ext cx="7680960" cy="457200"/>
+            <a:off x="731520" y="2377440"/>
+            <a:ext cx="7315200" cy="548640"/>
           </a:xfrm>
           <a:prstGeom prst="rect">
             <a:avLst/>
@@ -5856,60 +5133,62 @@
           <a:bodyPr wrap="square" rtlCol="0" anchor="ctr"/>
           <a:lstStyle/>
           <a:p>
-            <a:pPr algn="ctr" indent="0" marL="0">
+            <a:pPr indent="0" marL="0">
               <a:buNone/>
             </a:pPr>
             <a:r>
-              <a:rPr lang="en-US" sz="1800" dirty="0">
+              <a:rPr lang="en-US" sz="1500" dirty="0">
                 <a:solidFill>
-                  <a:srgbClr val="2A9D8F"/>
+                  <a:srgbClr val="FFFFFF">
+                    <a:alpha val="60000"/>
+                  </a:srgbClr>
                 </a:solidFill>
-                <a:latin typeface="Calibri" pitchFamily="34" charset="0"/>
-                <a:ea typeface="Calibri" pitchFamily="34" charset="-122"/>
-                <a:cs typeface="Calibri" pitchFamily="34" charset="-120"/>
+                <a:latin typeface="Arial" pitchFamily="34" charset="0"/>
+                <a:ea typeface="Arial" pitchFamily="34" charset="-122"/>
+                <a:cs typeface="Arial" pitchFamily="34" charset="-120"/>
+              </a:rPr>
+              <a:t>Use the Self-Quiz, Review Games, and Practice Builder to test yourself.</a:t>
+            </a:r>
+            <a:endParaRPr lang="en-US" sz="1500" dirty="0"/>
+          </a:p>
+        </p:txBody>
+      </p:sp>
+      <p:sp>
+        <p:nvSpPr>
+          <p:cNvPr id="4" name="Text 2"/>
+          <p:cNvSpPr/>
+          <p:nvPr/>
+        </p:nvSpPr>
+        <p:spPr>
+          <a:xfrm>
+            <a:off x="731520" y="3291840"/>
+            <a:ext cx="3657600" cy="457200"/>
+          </a:xfrm>
+          <a:prstGeom prst="rect">
+            <a:avLst/>
+          </a:prstGeom>
+          <a:noFill/>
+          <a:ln/>
+        </p:spPr>
+        <p:txBody>
+          <a:bodyPr wrap="square" rtlCol="0" anchor="ctr"/>
+          <a:lstStyle/>
+          <a:p>
+            <a:pPr indent="0" marL="0">
+              <a:buNone/>
+            </a:pPr>
+            <a:r>
+              <a:rPr lang="en-US" sz="1800" b="1" dirty="0">
+                <a:solidFill>
+                  <a:srgbClr val="E9C46A"/>
+                </a:solidFill>
+                <a:latin typeface="Georgia" pitchFamily="34" charset="0"/>
+                <a:ea typeface="Georgia" pitchFamily="34" charset="-122"/>
+                <a:cs typeface="Georgia" pitchFamily="34" charset="-120"/>
               </a:rPr>
               <a:t>mrzocchi.com</a:t>
             </a:r>
             <a:endParaRPr lang="en-US" sz="1800" dirty="0"/>
-          </a:p>
-        </p:txBody>
-      </p:sp>
-      <p:sp>
-        <p:nvSpPr>
-          <p:cNvPr id="7" name="Text 5"/>
-          <p:cNvSpPr/>
-          <p:nvPr/>
-        </p:nvSpPr>
-        <p:spPr>
-          <a:xfrm>
-            <a:off x="731520" y="3108960"/>
-            <a:ext cx="7680960" cy="457200"/>
-          </a:xfrm>
-          <a:prstGeom prst="rect">
-            <a:avLst/>
-          </a:prstGeom>
-          <a:noFill/>
-          <a:ln/>
-        </p:spPr>
-        <p:txBody>
-          <a:bodyPr wrap="square" rtlCol="0" anchor="ctr"/>
-          <a:lstStyle/>
-          <a:p>
-            <a:pPr algn="ctr" indent="0" marL="0">
-              <a:buNone/>
-            </a:pPr>
-            <a:r>
-              <a:rPr lang="en-US" sz="1300" dirty="0">
-                <a:solidFill>
-                  <a:srgbClr val="9B9690"/>
-                </a:solidFill>
-                <a:latin typeface="Calibri" pitchFamily="34" charset="0"/>
-                <a:ea typeface="Calibri" pitchFamily="34" charset="-122"/>
-                <a:cs typeface="Calibri" pitchFamily="34" charset="-120"/>
-              </a:rPr>
-              <a:t>Use the Self-Quiz, Review Games, and Practice Builder to test yourself.</a:t>
-            </a:r>
-            <a:endParaRPr lang="en-US" sz="1300" dirty="0"/>
           </a:p>
         </p:txBody>
       </p:sp>
